--- a/presentation/FinRadar.pptx
+++ b/presentation/FinRadar.pptx
@@ -18,9 +18,10 @@
     <p:sldId id="266" r:id="rId12"/>
     <p:sldId id="267" r:id="rId13"/>
     <p:sldId id="268" r:id="rId14"/>
+    <p:sldId id="269" r:id="rId15"/>
   </p:sldIdLst>
   <p:notesMasterIdLst>
-    <p:notesMasterId r:id="rId15"/>
+    <p:notesMasterId r:id="rId16"/>
   </p:notesMasterIdLst>
   <p:sldSz cx="12192000" cy="6858000"/>
   <p:notesSz cx="6858000" cy="12192000"/>
@@ -119,7 +120,7 @@
   <p:extLst>
     <p:ext uri="{521415D9-36F7-43E2-AB2F-B90AF26B5E84}">
       <p14:sectionLst xmlns:p14="http://schemas.microsoft.com/office/powerpoint/2010/main">
-        <p14:section name="Выступление: 5 минут" id="{32596a23-be44-fad4-a6ab-68a93bcc4b6f}">
+        <p14:section name="Выступление: 5 минут" id="{64fdd346-3286-d457-ab33-7cde511b991c}">
           <p14:sldIdLst>
             <p14:sldId id="256"/>
             <p14:sldId id="257"/>
@@ -129,15 +130,16 @@
             <p14:sldId id="261"/>
             <p14:sldId id="262"/>
             <p14:sldId id="263"/>
+            <p14:sldId id="264"/>
           </p14:sldIdLst>
         </p14:section>
-        <p14:section name="Приложение: для вопросов" id="{2d57c139-eb00-1522-da58-ac67f576db6b}">
+        <p14:section name="Приложение: для вопросов" id="{a3121a94-22fa-e946-8398-fcb31ad975a5}">
           <p14:sldIdLst>
-            <p14:sldId id="264"/>
             <p14:sldId id="265"/>
             <p14:sldId id="266"/>
             <p14:sldId id="267"/>
             <p14:sldId id="268"/>
+            <p14:sldId id="269"/>
           </p14:sldIdLst>
         </p14:section>
       </p14:sectionLst>
@@ -544,7 +546,7 @@
           <a:p>
             <a:r>
               <a:rPr lang="en-US" dirty="0"/>
-              <a:t>[0:00–0:20] Мы — команда FinRadar. По банковской выписке строим прогноз остатка на 30 дней и заранее предупреждаем о кассовом разрыве: когда, на сколько не хватит, с какой вероятностью и что делать. За пять минут покажем, как считаем, как загружаем контрольный датасет, где пошаговые логи и какие метрики получили.</a:t>
+              <a:t>[0:00–0:15] Мы — команда FinRadar. По банковской выписке строим прогноз остатка на 30 дней и заранее предупреждаем о кассовом разрыве: когда, на сколько не хватит, с какой вероятностью и что делать. За пять минут — данные, метод, контрольный датасет, пошаговые логи и метрики.</a:t>
             </a:r>
             <a:endParaRPr lang="en-US" dirty="0"/>
           </a:p>
@@ -632,7 +634,7 @@
           <a:p>
             <a:r>
               <a:rPr lang="en-US" dirty="0"/>
-              <a:t>ROC-AUC 0,773. Калибровка: в группе с вероятностью от 50% в среднем обещано 72%, разрыв случился в 5,1%. Отсюда Brier 0,0932 против 0,0130 у константы.</a:t>
+              <a:t>Слайды приложения не входят в пять минут — открываем их при вопросах.</a:t>
             </a:r>
             <a:endParaRPr lang="en-US" dirty="0"/>
           </a:p>
@@ -720,7 +722,7 @@
           <a:p>
             <a:r>
               <a:rPr lang="en-US" dirty="0"/>
-              <a:t>Порог 10% — статус «Повышенный риск», 50% — «Критический». Precision выше случайного угадывания на всех порогах, но остаётся низким: разрывы редкие.</a:t>
+              <a:t>ROC-AUC 0,773. Калибровка: в группе с вероятностью от 50% в среднем обещано 72%, разрыв случился в 5,1%. Отсюда Brier 0,0932 против 0,0130 у константы.</a:t>
             </a:r>
             <a:endParaRPr lang="en-US" dirty="0"/>
           </a:p>
@@ -808,7 +810,7 @@
           <a:p>
             <a:r>
               <a:rPr lang="en-US" dirty="0"/>
-              <a:t>MAE в первый день 0,18 млн ₽, на 30-й — 1,62 млн ₽.</a:t>
+              <a:t>Порог 10% — статус «Повышенный риск», 50% — «Критический». Precision выше случайного угадывания на всех порогах, но остаётся низким: разрывы редкие.</a:t>
             </a:r>
             <a:endParaRPr lang="en-US" dirty="0"/>
           </a:p>
@@ -896,7 +898,7 @@
           <a:p>
             <a:r>
               <a:rPr lang="en-US" dirty="0"/>
-              <a:t>Найденные статусом «Повышенный риск» разрывы: 1, 5, 15, 18, 25, 28, 28, 30 дней от прогноза. Коридор P10–P90 держится около 75–80% на всём горизонте.</a:t>
+              <a:t>MAE в первый день 0,18 млн ₽, на 30-й — 1,62 млн ₽.</a:t>
             </a:r>
             <a:endParaRPr lang="en-US" dirty="0"/>
           </a:p>
@@ -920,6 +922,94 @@
             <a:fld id="{F7021451-1387-4CA6-816F-3879F97B5CBC}" type="slidenum">
               <a:rPr lang="en-US"/>
               <a:t>13</a:t>
+            </a:fld>
+            <a:endParaRPr lang="en-US"/>
+          </a:p>
+        </p:txBody>
+      </p:sp>
+    </p:spTree>
+    <p:extLst>
+      <p:ext uri="{BB962C8B-B14F-4D97-AF65-F5344CB8AC3E}">
+        <p14:creationId xmlns:p14="http://schemas.microsoft.com/office/powerpoint/2010/main" val="1024086991"/>
+      </p:ext>
+    </p:extLst>
+  </p:cSld>
+  <p:clrMapOvr>
+    <a:masterClrMapping/>
+  </p:clrMapOvr>
+</p:notes>
+</file>
+
+<file path=ppt/notesSlides/notesSlide14.xml><?xml version="1.0" encoding="utf-8"?>
+<p:notes xmlns:a="http://schemas.openxmlformats.org/drawingml/2006/main" xmlns:r="http://schemas.openxmlformats.org/officeDocument/2006/relationships" xmlns:p="http://schemas.openxmlformats.org/presentationml/2006/main">
+  <p:cSld>
+    <p:spTree>
+      <p:nvGrpSpPr>
+        <p:cNvPr id="1" name=""/>
+        <p:cNvGrpSpPr/>
+        <p:nvPr/>
+      </p:nvGrpSpPr>
+      <p:grpSpPr>
+        <a:xfrm>
+          <a:off x="0" y="0"/>
+          <a:ext cx="0" cy="0"/>
+          <a:chOff x="0" y="0"/>
+          <a:chExt cx="0" cy="0"/>
+        </a:xfrm>
+      </p:grpSpPr>
+      <p:sp>
+        <p:nvSpPr>
+          <p:cNvPr id="2" name="Slide Image Placeholder 1"/>
+          <p:cNvSpPr>
+            <a:spLocks noGrp="1" noRot="1" noChangeAspect="1"/>
+          </p:cNvSpPr>
+          <p:nvPr>
+            <p:ph type="sldImg"/>
+          </p:nvPr>
+        </p:nvSpPr>
+        <p:spPr/>
+      </p:sp>
+      <p:sp>
+        <p:nvSpPr>
+          <p:cNvPr id="3" name="Notes Placeholder 2"/>
+          <p:cNvSpPr>
+            <a:spLocks noGrp="1"/>
+          </p:cNvSpPr>
+          <p:nvPr>
+            <p:ph type="body" idx="1"/>
+          </p:nvPr>
+        </p:nvSpPr>
+        <p:spPr/>
+        <p:txBody>
+          <a:bodyPr/>
+          <a:lstStyle/>
+          <a:p>
+            <a:r>
+              <a:rPr lang="en-US" dirty="0"/>
+              <a:t>Найденные статусом «Повышенный риск» разрывы: 1, 5, 15, 18, 25, 28, 28, 30 дней от прогноза. Коридор P10–P90 держится около 75–80% на всём горизонте.</a:t>
+            </a:r>
+            <a:endParaRPr lang="en-US" dirty="0"/>
+          </a:p>
+        </p:txBody>
+      </p:sp>
+      <p:sp>
+        <p:nvSpPr>
+          <p:cNvPr id="4" name="Slide Number Placeholder 3"/>
+          <p:cNvSpPr>
+            <a:spLocks noGrp="1"/>
+          </p:cNvSpPr>
+          <p:nvPr>
+            <p:ph type="sldNum" sz="quarter" idx="10"/>
+          </p:nvPr>
+        </p:nvSpPr>
+        <p:spPr/>
+        <p:txBody>
+          <a:bodyPr/>
+          <a:lstStyle/>
+          <a:p>
+            <a:fld id="{F7021451-1387-4CA6-816F-3879F97B5CBC}" type="slidenum">
+              <a:rPr lang="en-US"/>
+              <a:t>14</a:t>
             </a:fld>
             <a:endParaRPr lang="en-US"/>
           </a:p>
@@ -984,7 +1074,7 @@
           <a:p>
             <a:r>
               <a:rPr lang="en-US" dirty="0"/>
-              <a:t>[0:20–1:00] Как считаем. Читаем выписку любого формата кейса — с заголовком и без, сразу много компаний — убираем повторы и сверяем с остатком на конец дня. Раскладываем операции по статьям и находим регулярные платежи. Затем берём из истории 30-дневные отрезки, начинавшиеся в тот же день месяца, — обычно 72 штуки — и накладываем каждый на текущий остаток: получаем 72 сценария. По ним на каждый день — P10, медиана, P90, а вероятность разрыва — доля сценариев, где остаток хоть раз ушёл в минус. Статус — по простому правилу: от 10% — повышенный риск, от 50% — критический; если компания весь год не уходила в минус — от 60% и 80%, это втрое сократило ложные тревоги.</a:t>
+              <a:t>[0:15–0:40] Данные — все операции кейса: 222 420 операций 150 компаний за два года, EDA пересчитан скриптом run_eda по all_operations.csv. Основные потоки — выручка и оплата поставщикам. 16 компаний хотя бы раз уходили в минус, клиенты платят в среднем через 16 дней — отсюда и риск разрывов.</a:t>
             </a:r>
             <a:endParaRPr lang="en-US" dirty="0"/>
           </a:p>
@@ -1072,7 +1162,7 @@
           <a:p>
             <a:r>
               <a:rPr lang="en-US" dirty="0"/>
-              <a:t>[1:00–1:35] Контрольный датасет загружаем на сайте как есть. Пример — test.csv кейса: 72 тысячи строк без заголовка, 51 компания. Сервис сам распознаёт формат, строит прогноз по каждой компании, компанию выбираем в строке статуса. Из 51 компании 3 в критическом статусе, 6 — повышенный риск. На экране C124: 45 из 72 сценариев уводят остаток в минус, вероятность 62,5 процента.</a:t>
+              <a:t>[0:40–1:15] Как считаем. Читаем выписку любого формата кейса — с заголовком и без, сразу много компаний — убираем повторы и сверяем с остатком на конец дня. Раскладываем операции по статьям и находим регулярные платежи. Затем берём из истории 30-дневные отрезки, начинавшиеся в тот же день месяца, — обычно 72 штуки — и накладываем каждый на текущий остаток: получаем 72 сценария. По ним на каждый день — P10, медиана, P90, а вероятность разрыва — доля сценариев, где остаток хоть раз ушёл в минус. Статус — по простому правилу: от 10% — повышенный риск, от 50% — критический; если компания весь год не уходила в минус — от 60% и 80%, это втрое сократило ложные тревоги.</a:t>
             </a:r>
             <a:endParaRPr lang="en-US" dirty="0"/>
           </a:p>
@@ -1160,7 +1250,7 @@
           <a:p>
             <a:r>
               <a:rPr lang="en-US" dirty="0"/>
-              <a:t>[1:35–2:10] Пошаговые логи. На сайте вкладка «Журнал расчёта»: 12 шагов с реальными числами — сколько строк прочитано, что очищено, какие статьи и регулярные платежи найдены, какие периоды истории выбраны, как получились сценарии, P10–P90 и статус. Тот же текст для всех компаний файла пишется в отчёт и в calc_log.md, а каждая метрика качества — с формулой и подставленными числами — в backtest_log.md.</a:t>
+              <a:t>[1:15–1:45] Контрольный датасет загружаем на сайте как есть. Пример — компании test.csv кейса: 72 тысячи строк, 51 компания. Сервис сам распознаёт формат — с заголовком и без, строит прогноз по каждой компании, компанию выбираем в строке статуса. Из 51 компании 3 в критическом статусе, 6 — повышенный риск. На экране C124: 45 из 72 сценариев уводят остаток в минус, вероятность 62,5 процента.</a:t>
             </a:r>
             <a:endParaRPr lang="en-US" dirty="0"/>
           </a:p>
@@ -1248,7 +1338,7 @@
           <a:p>
             <a:r>
               <a:rPr lang="en-US" dirty="0"/>
-              <a:t>[2:10–3:00] Как проверяли. Бэктест: на шести концах месяца строим прогноз только по прошлым операциям и сравниваем с фактом следующих 30 дней — 793 прогнозов по 137 компаниям. Матрица ошибок: статус «Повышенный риск» поймал 8 из 10 новых разрывов, recall 0,8. Цена — ложные тревоги: precision 0,10, F1 0,17. Accuracy 0,90 и 0,95, но при доле разрывов 1,3% она мало что говорит: прогноз «всегда стабильно» дал бы 0,99, не найдя ни одного разрыва.</a:t>
+              <a:t>[1:45–2:15] Пошаговые логи строит команда evaluate. В отчёте у каждой компании карточка: график и 12 шагов с реальными числами — сколько строк прочитано, что очищено, какие статьи и регулярные платежи найдены, какие периоды истории выбраны, как получились сценарии, P10–P90 и статус. Тот же текст — в calc_log.md, а каждая метрика качества с формулой и числами — в backtest_log.md.</a:t>
             </a:r>
             <a:endParaRPr lang="en-US" dirty="0"/>
           </a:p>
@@ -1336,7 +1426,7 @@
           <a:p>
             <a:r>
               <a:rPr lang="en-US" dirty="0"/>
-              <a:t>[3:00–3:50] Точность остатка: MAE 1,17 млн ₽ против 1,23 млн ₽ у наивной модели — медиана с возвратом к обычному остатку немного точнее, RMSE 3,25 млн ₽, WAPE 25%. Сильная сторона — коридор: факт попадает между P10 и P90 в 77% случаев при ожидаемых 80. Вероятность: ROC-AUC 0,77 — рискованные компании модель ставит выше, разрыв видим в среднем за три недели. Но сама вероятность завышена: Brier 0,093 хуже постоянной 0,013 — это следующий шаг, калибровка. На наших и тестовых данных метрики близки: модель не подогнана под train.</a:t>
+              <a:t>[2:15–3:00] Как проверяли. Бэктест: на шести концах месяца строим прогноз только по прошлым операциям и сравниваем с фактом следующих 30 дней — 793 прогнозов по 137 компаниям. Матрица ошибок: статус «Повышенный риск» поймал 8 из 10 новых разрывов, recall 0,8. Цена — ложные тревоги: precision 0,10, F1 0,17. Accuracy 0,90 и 0,95, но при доле разрывов 1,3% она мало что говорит: прогноз «всегда стабильно» дал бы 0,99, не найдя ни одного разрыва.</a:t>
             </a:r>
             <a:endParaRPr lang="en-US" dirty="0"/>
           </a:p>
@@ -1424,7 +1514,7 @@
           <a:p>
             <a:r>
               <a:rPr lang="en-US" dirty="0"/>
-              <a:t>[3:50–4:25] Для контрольного датасета есть одна команда: npm run evaluate с путём к файлу. Четыре шага: прогноз по каждой компании, бэктест со всеми метриками, графики и HTML-отчёт, который сразу открывается в браузере, интернет не нужен. На test.csv — пять секунд. Так жюри увидит и прогноз, и журнал, и матрицу ошибок на своём датасете.</a:t>
+              <a:t>[3:00–3:45] Точность остатка: MAE 1,17 млн ₽ против 1,23 млн ₽ у наивной модели — медиана с возвратом к обычному остатку немного точнее, RMSE 3,25 млн ₽, WAPE 25%. Сильная сторона — коридор: факт попадает между P10 и P90 в 77% случаев при ожидаемых 80. Вероятность: ROC-AUC 0,77 — рискованные компании модель ставит выше, разрыв видим в среднем за три недели. Но сама вероятность завышена: Brier 0,093 хуже постоянной 0,013 — это следующий шаг, калибровка. На наших и тестовых данных метрики близки: модель не подогнана под train.</a:t>
             </a:r>
             <a:endParaRPr lang="en-US" dirty="0"/>
           </a:p>
@@ -1512,7 +1602,7 @@
           <a:p>
             <a:r>
               <a:rPr lang="en-US" dirty="0"/>
-              <a:t>[4:25–4:50] Итог: по одной выписке сервис строит прогноз на 30 дней, находит 8 из 10 разрывов в среднем за три недели и объясняет каждое число журналом. Контрольный датасет проверяется одной командой. Следующий шаг — калибровка вероятности, чтобы снизить ложные тревоги. Спасибо, готовы ответить на вопросы.</a:t>
+              <a:t>[3:45–4:20] Для контрольного датасета есть одна команда: npm run evaluate с путём к файлу. Четыре шага: прогноз по каждой компании, бэктест со всеми метриками, графики и HTML-отчёт, который сразу открывается в браузере, интернет не нужен. На test.csv — пять секунд. Так жюри увидит и прогноз, и журнал, и матрицу ошибок на своём датасете.</a:t>
             </a:r>
             <a:endParaRPr lang="en-US" dirty="0"/>
           </a:p>
@@ -1600,7 +1690,7 @@
           <a:p>
             <a:r>
               <a:rPr lang="en-US" dirty="0"/>
-              <a:t>Слайды приложения не входят в пять минут — открываем их при вопросах.</a:t>
+              <a:t>[4:20–4:45] Итог: по одной выписке сервис строит прогноз на 30 дней, находит 8 из 10 разрывов в среднем за три недели и объясняет каждое число журналом. Контрольный датасет проверяется одной командой. Следующий шаг — калибровка вероятности, чтобы снизить ложные тревоги. Спасибо, готовы ответить на вопросы.</a:t>
             </a:r>
             <a:endParaRPr lang="en-US" dirty="0"/>
           </a:p>
@@ -2711,8 +2801,8 @@
         </p:nvSpPr>
         <p:spPr>
           <a:xfrm>
-            <a:off x="548640" y="320040"/>
-            <a:ext cx="11094415" cy="640080"/>
+            <a:off x="548640" y="548640"/>
+            <a:ext cx="11094415" cy="822960"/>
           </a:xfrm>
           <a:prstGeom prst="rect">
             <a:avLst/>
@@ -2728,155 +2818,438 @@
               <a:buNone/>
             </a:pPr>
             <a:r>
-              <a:rPr lang="en-US" sz="3400" b="1" dirty="0">
-                <a:solidFill>
-                  <a:schemeClr val="tx1"/>
-                </a:solidFill>
-              </a:rPr>
-              <a:t>ROC-кривая и калибровка вероятности</a:t>
-            </a:r>
-            <a:endParaRPr lang="en-US" sz="3400" dirty="0"/>
-          </a:p>
-        </p:txBody>
-      </p:sp>
-      <p:sp>
-        <p:nvSpPr>
-          <p:cNvPr id="3" name="Text 0"/>
+              <a:rPr lang="en-US" sz="3800" b="1" dirty="0">
+                <a:solidFill>
+                  <a:schemeClr val="bg1"/>
+                </a:solidFill>
+              </a:rPr>
+              <a:t>Приложение: для вопросов жюри</a:t>
+            </a:r>
+            <a:endParaRPr lang="en-US" sz="3800" dirty="0"/>
+          </a:p>
+        </p:txBody>
+      </p:sp>
+      <p:sp>
+        <p:nvSpPr>
+          <p:cNvPr id="3" name="Text 1"/>
+          <p:cNvSpPr txBox="1"/>
+          <p:nvPr/>
+        </p:nvSpPr>
+        <p:spPr>
+          <a:xfrm>
+            <a:off x="548640" y="1508760"/>
+            <a:ext cx="11094415" cy="731520"/>
+          </a:xfrm>
+          <a:prstGeom prst="rect">
+            <a:avLst/>
+          </a:prstGeom>
+          <a:noFill/>
+          <a:ln/>
+        </p:spPr>
+        <p:txBody>
+          <a:bodyPr wrap="square" lIns="0" tIns="0" rIns="0" bIns="0" rtlCol="0" anchor="t"/>
+          <a:lstStyle/>
+          <a:p>
+            <a:pPr indent="0" marL="0">
+              <a:buNone/>
+            </a:pPr>
+            <a:r>
+              <a:rPr lang="en-US" sz="1800" dirty="0">
+                <a:solidFill>
+                  <a:schemeClr val="accent5"/>
+                </a:solidFill>
+              </a:rPr>
+              <a:t>Графики построены командой npm run evaluate (presentation_assets/metrics); каждое число с формулой — в reports/backtest_log.md</a:t>
+            </a:r>
+            <a:endParaRPr lang="en-US" sz="1800" dirty="0"/>
+          </a:p>
+        </p:txBody>
+      </p:sp>
+      <p:sp>
+        <p:nvSpPr>
+          <p:cNvPr id="4" name="appendix-n-0"/>
           <p:cNvSpPr/>
-          <p:nvPr>
-            <p:ph idx="101" type="body" hasCustomPrompt="1"/>
-          </p:nvPr>
-        </p:nvSpPr>
-        <p:spPr>
-          <a:xfrm>
-            <a:off x="548640" y="978408"/>
-            <a:ext cx="11094415" cy="411480"/>
-          </a:xfrm>
-          <a:prstGeom prst="rect">
-            <a:avLst/>
-          </a:prstGeom>
-          <a:noFill/>
-          <a:ln/>
-        </p:spPr>
-        <p:txBody>
-          <a:bodyPr wrap="square" lIns="0" tIns="0" rIns="0" bIns="0" rtlCol="0" anchor="t"/>
-          <a:lstStyle/>
-          <a:p>
-            <a:pPr indent="0" marL="0">
-              <a:buNone/>
-            </a:pPr>
-            <a:r>
-              <a:rPr lang="en-US" sz="1800" dirty="0">
-                <a:solidFill>
-                  <a:schemeClr val="tx2"/>
-                </a:solidFill>
-              </a:rPr>
-              <a:t>Риск упорядочен верно, но обещанная вероятность выше случившейся частоты</a:t>
-            </a:r>
-            <a:endParaRPr lang="en-US" sz="1800" dirty="0"/>
-          </a:p>
-        </p:txBody>
-      </p:sp>
-      <p:sp>
-        <p:nvSpPr>
-          <p:cNvPr id="4" name="Shape 2"/>
-          <p:cNvSpPr/>
-          <p:nvPr/>
-        </p:nvSpPr>
-        <p:spPr>
-          <a:xfrm>
-            <a:off x="1926184" y="1545336"/>
-            <a:ext cx="8339328" cy="4748230"/>
+          <p:nvPr/>
+        </p:nvSpPr>
+        <p:spPr>
+          <a:xfrm>
+            <a:off x="548640" y="2606040"/>
+            <a:ext cx="548640" cy="548640"/>
           </a:xfrm>
           <a:prstGeom prst="roundRect">
             <a:avLst>
-              <a:gd name="adj" fmla="val 1541"/>
+              <a:gd name="adj" fmla="val 16667"/>
             </a:avLst>
           </a:prstGeom>
           <a:solidFill>
-            <a:schemeClr val="bg1"/>
+            <a:schemeClr val="accent6"/>
           </a:solidFill>
-          <a:ln w="12700">
-            <a:solidFill>
-              <a:schemeClr val="bg2"/>
-            </a:solidFill>
-            <a:prstDash val="solid"/>
-          </a:ln>
-          <a:effectLst>
-            <a:outerShdw sx="100000" sy="100000" kx="0" ky="0" algn="bl" rotWithShape="0" blurRad="127000" dist="38100" dir="5400000">
-              <a:srgbClr val="0F172A">
-                <a:alpha val="16000"/>
-              </a:srgbClr>
-            </a:outerShdw>
-          </a:effectLst>
-        </p:spPr>
-      </p:sp>
-      <p:pic>
-        <p:nvPicPr>
-          <p:cNvPr id="5" name="Image 0" descr="ROC-кривая с порогами 10% и 50% и калибровка: обещано против случившегося">    </p:cNvPr>
-          <p:cNvPicPr>
-            <a:picLocks noChangeAspect="1"/>
-          </p:cNvPicPr>
-          <p:nvPr/>
-        </p:nvPicPr>
-        <p:blipFill>
-          <a:blip r:embed="rId1"/>
-          <a:stretch>
-            <a:fillRect/>
-          </a:stretch>
-        </p:blipFill>
-        <p:spPr>
-          <a:xfrm>
-            <a:off x="1981048" y="1600200"/>
-            <a:ext cx="8229600" cy="4638502"/>
-          </a:xfrm>
-          <a:prstGeom prst="rect">
-            <a:avLst/>
-          </a:prstGeom>
-        </p:spPr>
-      </p:pic>
-      <p:sp>
-        <p:nvSpPr>
-          <p:cNvPr id="25" name="Slide Number Placeholder 0"/>
-          <p:cNvSpPr>
-            <a:spLocks noGrp="1"/>
-          </p:cNvSpPr>
-          <p:nvPr>
-            <p:ph type="sldNum" sz="quarter" idx="4294967295"/>
-          </p:nvPr>
-        </p:nvSpPr>
-        <p:spPr>
-          <a:xfrm>
-            <a:off x="11094415" y="6419088"/>
-            <a:ext cx="548640" cy="256032"/>
-          </a:xfrm>
-          <a:prstGeom prst="rect">
-            <a:avLst/>
-          </a:prstGeom>
-          <a:extLst>
-            <a:ext uri="{C572A759-6A51-4108-AA02-DFA0A04FC94B}">
-              <ma14:wrappingTextBoxFlag xmlns:ma14="http://schemas.microsoft.com/office/mac/drawingml/2011/main" val="0"/>
-            </a:ext>
-          </a:extLst>
-        </p:spPr>
-        <p:txBody>
-          <a:bodyPr/>
-          <a:lstStyle>
-            <a:lvl1pPr>
-              <a:defRPr sz="1000">
-                <a:solidFill>
-                  <a:srgbClr val="475569"/>
-                </a:solidFill>
-              </a:defRPr>
-            </a:lvl1pPr>
-          </a:lstStyle>
-          <a:p>
-            <a:pPr algn="r"/>
-            <a:fld id="{F7021451-1387-4CA6-816F-3879F97B5CBC}" type="slidenum">
-              <a:rPr b="0" lang="en-US"/>
+          <a:ln/>
+        </p:spPr>
+      </p:sp>
+      <p:sp>
+        <p:nvSpPr>
+          <p:cNvPr id="5" name="Text 3"/>
+          <p:cNvSpPr txBox="1"/>
+          <p:nvPr/>
+        </p:nvSpPr>
+        <p:spPr>
+          <a:xfrm>
+            <a:off x="548640" y="2606040"/>
+            <a:ext cx="548640" cy="548640"/>
+          </a:xfrm>
+          <a:prstGeom prst="rect">
+            <a:avLst/>
+          </a:prstGeom>
+          <a:noFill/>
+          <a:ln/>
+        </p:spPr>
+        <p:txBody>
+          <a:bodyPr wrap="square" lIns="0" tIns="0" rIns="0" bIns="0" rtlCol="0" anchor="ctr"/>
+          <a:lstStyle/>
+          <a:p>
+            <a:pPr algn="ctr" indent="0" marL="0">
+              <a:buNone/>
+            </a:pPr>
+            <a:r>
+              <a:rPr lang="en-US" sz="1600" b="1" dirty="0">
+                <a:solidFill>
+                  <a:schemeClr val="accent5"/>
+                </a:solidFill>
+                <a:latin typeface="+mj-lt" pitchFamily="34" charset="0"/>
+                <a:ea typeface="+mj-lt" pitchFamily="34" charset="-122"/>
+                <a:cs typeface="+mj-lt" pitchFamily="34" charset="-120"/>
+              </a:rPr>
               <a:t>10</a:t>
-            </a:fld>
-            <a:endParaRPr lang="en-US"/>
+            </a:r>
+            <a:endParaRPr lang="en-US" sz="1600" dirty="0"/>
+          </a:p>
+        </p:txBody>
+      </p:sp>
+      <p:sp>
+        <p:nvSpPr>
+          <p:cNvPr id="6" name="Text 4"/>
+          <p:cNvSpPr txBox="1"/>
+          <p:nvPr/>
+        </p:nvSpPr>
+        <p:spPr>
+          <a:xfrm>
+            <a:off x="1325880" y="2606040"/>
+            <a:ext cx="10317175" cy="548640"/>
+          </a:xfrm>
+          <a:prstGeom prst="rect">
+            <a:avLst/>
+          </a:prstGeom>
+          <a:noFill/>
+          <a:ln/>
+        </p:spPr>
+        <p:txBody>
+          <a:bodyPr wrap="square" lIns="0" tIns="0" rIns="0" bIns="0" rtlCol="0" anchor="ctr"/>
+          <a:lstStyle/>
+          <a:p>
+            <a:pPr indent="0" marL="0">
+              <a:buNone/>
+            </a:pPr>
+            <a:r>
+              <a:rPr lang="en-US" sz="2000" dirty="0">
+                <a:solidFill>
+                  <a:schemeClr val="bg1"/>
+                </a:solidFill>
+              </a:rPr>
+              <a:t>ROC-кривая и калибровка вероятности</a:t>
+            </a:r>
+            <a:endParaRPr lang="en-US" sz="2000" dirty="0"/>
+          </a:p>
+        </p:txBody>
+      </p:sp>
+      <p:sp>
+        <p:nvSpPr>
+          <p:cNvPr id="7" name="appendix-n-1"/>
+          <p:cNvSpPr/>
+          <p:nvPr/>
+        </p:nvSpPr>
+        <p:spPr>
+          <a:xfrm>
+            <a:off x="548640" y="3383280"/>
+            <a:ext cx="548640" cy="548640"/>
+          </a:xfrm>
+          <a:prstGeom prst="roundRect">
+            <a:avLst>
+              <a:gd name="adj" fmla="val 16667"/>
+            </a:avLst>
+          </a:prstGeom>
+          <a:solidFill>
+            <a:schemeClr val="accent6"/>
+          </a:solidFill>
+          <a:ln/>
+        </p:spPr>
+      </p:sp>
+      <p:sp>
+        <p:nvSpPr>
+          <p:cNvPr id="8" name="Text 6"/>
+          <p:cNvSpPr txBox="1"/>
+          <p:nvPr/>
+        </p:nvSpPr>
+        <p:spPr>
+          <a:xfrm>
+            <a:off x="548640" y="3383280"/>
+            <a:ext cx="548640" cy="548640"/>
+          </a:xfrm>
+          <a:prstGeom prst="rect">
+            <a:avLst/>
+          </a:prstGeom>
+          <a:noFill/>
+          <a:ln/>
+        </p:spPr>
+        <p:txBody>
+          <a:bodyPr wrap="square" lIns="0" tIns="0" rIns="0" bIns="0" rtlCol="0" anchor="ctr"/>
+          <a:lstStyle/>
+          <a:p>
+            <a:pPr algn="ctr" indent="0" marL="0">
+              <a:buNone/>
+            </a:pPr>
+            <a:r>
+              <a:rPr lang="en-US" sz="1600" b="1" dirty="0">
+                <a:solidFill>
+                  <a:schemeClr val="accent5"/>
+                </a:solidFill>
+                <a:latin typeface="+mj-lt" pitchFamily="34" charset="0"/>
+                <a:ea typeface="+mj-lt" pitchFamily="34" charset="-122"/>
+                <a:cs typeface="+mj-lt" pitchFamily="34" charset="-120"/>
+              </a:rPr>
+              <a:t>11</a:t>
+            </a:r>
+            <a:endParaRPr lang="en-US" sz="1600" dirty="0"/>
+          </a:p>
+        </p:txBody>
+      </p:sp>
+      <p:sp>
+        <p:nvSpPr>
+          <p:cNvPr id="9" name="Text 7"/>
+          <p:cNvSpPr txBox="1"/>
+          <p:nvPr/>
+        </p:nvSpPr>
+        <p:spPr>
+          <a:xfrm>
+            <a:off x="1325880" y="3383280"/>
+            <a:ext cx="10317175" cy="548640"/>
+          </a:xfrm>
+          <a:prstGeom prst="rect">
+            <a:avLst/>
+          </a:prstGeom>
+          <a:noFill/>
+          <a:ln/>
+        </p:spPr>
+        <p:txBody>
+          <a:bodyPr wrap="square" lIns="0" tIns="0" rIns="0" bIns="0" rtlCol="0" anchor="ctr"/>
+          <a:lstStyle/>
+          <a:p>
+            <a:pPr indent="0" marL="0">
+              <a:buNone/>
+            </a:pPr>
+            <a:r>
+              <a:rPr lang="en-US" sz="2000" dirty="0">
+                <a:solidFill>
+                  <a:schemeClr val="bg1"/>
+                </a:solidFill>
+              </a:rPr>
+              <a:t>Precision и Recall по порогу вероятности</a:t>
+            </a:r>
+            <a:endParaRPr lang="en-US" sz="2000" dirty="0"/>
+          </a:p>
+        </p:txBody>
+      </p:sp>
+      <p:sp>
+        <p:nvSpPr>
+          <p:cNvPr id="10" name="appendix-n-2"/>
+          <p:cNvSpPr/>
+          <p:nvPr/>
+        </p:nvSpPr>
+        <p:spPr>
+          <a:xfrm>
+            <a:off x="548640" y="4160520"/>
+            <a:ext cx="548640" cy="548640"/>
+          </a:xfrm>
+          <a:prstGeom prst="roundRect">
+            <a:avLst>
+              <a:gd name="adj" fmla="val 16667"/>
+            </a:avLst>
+          </a:prstGeom>
+          <a:solidFill>
+            <a:schemeClr val="accent6"/>
+          </a:solidFill>
+          <a:ln/>
+        </p:spPr>
+      </p:sp>
+      <p:sp>
+        <p:nvSpPr>
+          <p:cNvPr id="11" name="Text 9"/>
+          <p:cNvSpPr txBox="1"/>
+          <p:nvPr/>
+        </p:nvSpPr>
+        <p:spPr>
+          <a:xfrm>
+            <a:off x="548640" y="4160520"/>
+            <a:ext cx="548640" cy="548640"/>
+          </a:xfrm>
+          <a:prstGeom prst="rect">
+            <a:avLst/>
+          </a:prstGeom>
+          <a:noFill/>
+          <a:ln/>
+        </p:spPr>
+        <p:txBody>
+          <a:bodyPr wrap="square" lIns="0" tIns="0" rIns="0" bIns="0" rtlCol="0" anchor="ctr"/>
+          <a:lstStyle/>
+          <a:p>
+            <a:pPr algn="ctr" indent="0" marL="0">
+              <a:buNone/>
+            </a:pPr>
+            <a:r>
+              <a:rPr lang="en-US" sz="1600" b="1" dirty="0">
+                <a:solidFill>
+                  <a:schemeClr val="accent5"/>
+                </a:solidFill>
+                <a:latin typeface="+mj-lt" pitchFamily="34" charset="0"/>
+                <a:ea typeface="+mj-lt" pitchFamily="34" charset="-122"/>
+                <a:cs typeface="+mj-lt" pitchFamily="34" charset="-120"/>
+              </a:rPr>
+              <a:t>12</a:t>
+            </a:r>
+            <a:endParaRPr lang="en-US" sz="1600" dirty="0"/>
+          </a:p>
+        </p:txBody>
+      </p:sp>
+      <p:sp>
+        <p:nvSpPr>
+          <p:cNvPr id="12" name="Text 10"/>
+          <p:cNvSpPr txBox="1"/>
+          <p:nvPr/>
+        </p:nvSpPr>
+        <p:spPr>
+          <a:xfrm>
+            <a:off x="1325880" y="4160520"/>
+            <a:ext cx="10317175" cy="548640"/>
+          </a:xfrm>
+          <a:prstGeom prst="rect">
+            <a:avLst/>
+          </a:prstGeom>
+          <a:noFill/>
+          <a:ln/>
+        </p:spPr>
+        <p:txBody>
+          <a:bodyPr wrap="square" lIns="0" tIns="0" rIns="0" bIns="0" rtlCol="0" anchor="ctr"/>
+          <a:lstStyle/>
+          <a:p>
+            <a:pPr indent="0" marL="0">
+              <a:buNone/>
+            </a:pPr>
+            <a:r>
+              <a:rPr lang="en-US" sz="2000" dirty="0">
+                <a:solidFill>
+                  <a:schemeClr val="bg1"/>
+                </a:solidFill>
+              </a:rPr>
+              <a:t>MAE и RMSE по горизонту прогноза</a:t>
+            </a:r>
+            <a:endParaRPr lang="en-US" sz="2000" dirty="0"/>
+          </a:p>
+        </p:txBody>
+      </p:sp>
+      <p:sp>
+        <p:nvSpPr>
+          <p:cNvPr id="13" name="appendix-n-3"/>
+          <p:cNvSpPr/>
+          <p:nvPr/>
+        </p:nvSpPr>
+        <p:spPr>
+          <a:xfrm>
+            <a:off x="548640" y="4937760"/>
+            <a:ext cx="548640" cy="548640"/>
+          </a:xfrm>
+          <a:prstGeom prst="roundRect">
+            <a:avLst>
+              <a:gd name="adj" fmla="val 16667"/>
+            </a:avLst>
+          </a:prstGeom>
+          <a:solidFill>
+            <a:schemeClr val="accent6"/>
+          </a:solidFill>
+          <a:ln/>
+        </p:spPr>
+      </p:sp>
+      <p:sp>
+        <p:nvSpPr>
+          <p:cNvPr id="14" name="Text 12"/>
+          <p:cNvSpPr txBox="1"/>
+          <p:nvPr/>
+        </p:nvSpPr>
+        <p:spPr>
+          <a:xfrm>
+            <a:off x="548640" y="4937760"/>
+            <a:ext cx="548640" cy="548640"/>
+          </a:xfrm>
+          <a:prstGeom prst="rect">
+            <a:avLst/>
+          </a:prstGeom>
+          <a:noFill/>
+          <a:ln/>
+        </p:spPr>
+        <p:txBody>
+          <a:bodyPr wrap="square" lIns="0" tIns="0" rIns="0" bIns="0" rtlCol="0" anchor="ctr"/>
+          <a:lstStyle/>
+          <a:p>
+            <a:pPr algn="ctr" indent="0" marL="0">
+              <a:buNone/>
+            </a:pPr>
+            <a:r>
+              <a:rPr lang="en-US" sz="1600" b="1" dirty="0">
+                <a:solidFill>
+                  <a:schemeClr val="accent5"/>
+                </a:solidFill>
+                <a:latin typeface="+mj-lt" pitchFamily="34" charset="0"/>
+                <a:ea typeface="+mj-lt" pitchFamily="34" charset="-122"/>
+                <a:cs typeface="+mj-lt" pitchFamily="34" charset="-120"/>
+              </a:rPr>
+              <a:t>13</a:t>
+            </a:r>
+            <a:endParaRPr lang="en-US" sz="1600" dirty="0"/>
+          </a:p>
+        </p:txBody>
+      </p:sp>
+      <p:sp>
+        <p:nvSpPr>
+          <p:cNvPr id="15" name="Text 13"/>
+          <p:cNvSpPr txBox="1"/>
+          <p:nvPr/>
+        </p:nvSpPr>
+        <p:spPr>
+          <a:xfrm>
+            <a:off x="1325880" y="4937760"/>
+            <a:ext cx="10317175" cy="548640"/>
+          </a:xfrm>
+          <a:prstGeom prst="rect">
+            <a:avLst/>
+          </a:prstGeom>
+          <a:noFill/>
+          <a:ln/>
+        </p:spPr>
+        <p:txBody>
+          <a:bodyPr wrap="square" lIns="0" tIns="0" rIns="0" bIns="0" rtlCol="0" anchor="ctr"/>
+          <a:lstStyle/>
+          <a:p>
+            <a:pPr indent="0" marL="0">
+              <a:buNone/>
+            </a:pPr>
+            <a:r>
+              <a:rPr lang="en-US" sz="2000" dirty="0">
+                <a:solidFill>
+                  <a:schemeClr val="bg1"/>
+                </a:solidFill>
+              </a:rPr>
+              <a:t>Заблаговременность и честность коридора P10–P90</a:t>
+            </a:r>
+            <a:endParaRPr lang="en-US" sz="2000" dirty="0"/>
           </a:p>
         </p:txBody>
       </p:sp>
@@ -2937,7 +3310,7 @@
                   <a:schemeClr val="tx1"/>
                 </a:solidFill>
               </a:rPr>
-              <a:t>Precision и Recall по порогу вероятности</a:t>
+              <a:t>ROC-кривая и калибровка вероятности</a:t>
             </a:r>
             <a:endParaRPr lang="en-US" sz="3400" dirty="0"/>
           </a:p>
@@ -2975,7 +3348,7 @@
                   <a:schemeClr val="tx2"/>
                 </a:solidFill>
               </a:rPr>
-              <a:t>Чем выше порог, тем меньше тревог, но и найденных разрывов</a:t>
+              <a:t>Риск упорядочен верно, но обещанная вероятность выше случившейся частоты</a:t>
             </a:r>
             <a:endParaRPr lang="en-US" sz="1800" dirty="0"/>
           </a:p>
@@ -3017,7 +3390,7 @@
       </p:sp>
       <p:pic>
         <p:nvPicPr>
-          <p:cNvPr id="5" name="Image 0" descr="Precision с 95% интервалом и recall по порогу вероятности от 5 до 95%">    </p:cNvPr>
+          <p:cNvPr id="5" name="Image 0" descr="ROC-кривая с порогами 10% и 50% и калибровка: обещано против случившегося">    </p:cNvPr>
           <p:cNvPicPr>
             <a:picLocks noChangeAspect="1"/>
           </p:cNvPicPr>
@@ -3141,7 +3514,7 @@
                   <a:schemeClr val="tx1"/>
                 </a:solidFill>
               </a:rPr>
-              <a:t>MAE и RMSE по горизонту прогноза</a:t>
+              <a:t>Precision и Recall по порогу вероятности</a:t>
             </a:r>
             <a:endParaRPr lang="en-US" sz="3400" dirty="0"/>
           </a:p>
@@ -3179,7 +3552,7 @@
                   <a:schemeClr val="tx2"/>
                 </a:solidFill>
               </a:rPr>
-              <a:t>Ошибка растёт с горизонтом; модель на уровне наивной и лучше линейного тренда</a:t>
+              <a:t>Чем выше порог, тем меньше тревог, но и найденных разрывов</a:t>
             </a:r>
             <a:endParaRPr lang="en-US" sz="1800" dirty="0"/>
           </a:p>
@@ -3221,7 +3594,7 @@
       </p:sp>
       <p:pic>
         <p:nvPicPr>
-          <p:cNvPr id="5" name="Image 0" descr="MAE по дням горизонта для трёх подходов">    </p:cNvPr>
+          <p:cNvPr id="5" name="Image 0" descr="Precision с 95% интервалом и recall по порогу вероятности от 5 до 95%">    </p:cNvPr>
           <p:cNvPicPr>
             <a:picLocks noChangeAspect="1"/>
           </p:cNvPicPr>
@@ -3345,7 +3718,7 @@
                   <a:schemeClr val="tx1"/>
                 </a:solidFill>
               </a:rPr>
-              <a:t>Заблаговременность и честность коридора</a:t>
+              <a:t>MAE и RMSE по горизонту прогноза</a:t>
             </a:r>
             <a:endParaRPr lang="en-US" sz="3400" dirty="0"/>
           </a:p>
@@ -3383,7 +3756,7 @@
                   <a:schemeClr val="tx2"/>
                 </a:solidFill>
               </a:rPr>
-              <a:t>Предупреждение в среднем за 21,5 дня; факт внутри P10–P90 в 76,9% точек</a:t>
+              <a:t>Ошибка растёт с горизонтом; модель на уровне наивной и лучше линейного тренда</a:t>
             </a:r>
             <a:endParaRPr lang="en-US" sz="1800" dirty="0"/>
           </a:p>
@@ -3397,12 +3770,12 @@
         </p:nvSpPr>
         <p:spPr>
           <a:xfrm>
-            <a:off x="493776" y="1865376"/>
-            <a:ext cx="5519776" cy="3159028"/>
+            <a:off x="1926184" y="1545336"/>
+            <a:ext cx="8339328" cy="4748230"/>
           </a:xfrm>
           <a:prstGeom prst="roundRect">
             <a:avLst>
-              <a:gd name="adj" fmla="val 2316"/>
+              <a:gd name="adj" fmla="val 1541"/>
             </a:avLst>
           </a:prstGeom>
           <a:solidFill>
@@ -3425,7 +3798,7 @@
       </p:sp>
       <p:pic>
         <p:nvPicPr>
-          <p:cNvPr id="5" name="Image 0" descr="Дни от прогноза до первого дня с минусом для найденных и пропущенных разрывов">    </p:cNvPr>
+          <p:cNvPr id="5" name="Image 0" descr="MAE по дням горизонта для трёх подходов">    </p:cNvPr>
           <p:cNvPicPr>
             <a:picLocks noChangeAspect="1"/>
           </p:cNvPicPr>
@@ -3439,8 +3812,8 @@
         </p:blipFill>
         <p:spPr>
           <a:xfrm>
-            <a:off x="548640" y="1920240"/>
-            <a:ext cx="5410048" cy="3049300"/>
+            <a:off x="1981048" y="1600200"/>
+            <a:ext cx="8229600" cy="4638502"/>
           </a:xfrm>
           <a:prstGeom prst="rect">
             <a:avLst/>
@@ -3449,13 +3822,159 @@
       </p:pic>
       <p:sp>
         <p:nvSpPr>
-          <p:cNvPr id="6" name="Shape 3"/>
+          <p:cNvPr id="25" name="Slide Number Placeholder 0"/>
+          <p:cNvSpPr>
+            <a:spLocks noGrp="1"/>
+          </p:cNvSpPr>
+          <p:nvPr>
+            <p:ph type="sldNum" sz="quarter" idx="4294967295"/>
+          </p:nvPr>
+        </p:nvSpPr>
+        <p:spPr>
+          <a:xfrm>
+            <a:off x="11094415" y="6419088"/>
+            <a:ext cx="548640" cy="256032"/>
+          </a:xfrm>
+          <a:prstGeom prst="rect">
+            <a:avLst/>
+          </a:prstGeom>
+          <a:extLst>
+            <a:ext uri="{C572A759-6A51-4108-AA02-DFA0A04FC94B}">
+              <ma14:wrappingTextBoxFlag xmlns:ma14="http://schemas.microsoft.com/office/mac/drawingml/2011/main" val="0"/>
+            </a:ext>
+          </a:extLst>
+        </p:spPr>
+        <p:txBody>
+          <a:bodyPr/>
+          <a:lstStyle>
+            <a:lvl1pPr>
+              <a:defRPr sz="1000">
+                <a:solidFill>
+                  <a:srgbClr val="475569"/>
+                </a:solidFill>
+              </a:defRPr>
+            </a:lvl1pPr>
+          </a:lstStyle>
+          <a:p>
+            <a:pPr algn="r"/>
+            <a:fld id="{F7021451-1387-4CA6-816F-3879F97B5CBC}" type="slidenum">
+              <a:rPr b="0" lang="en-US"/>
+              <a:t>13</a:t>
+            </a:fld>
+            <a:endParaRPr lang="en-US"/>
+          </a:p>
+        </p:txBody>
+      </p:sp>
+    </p:spTree>
+  </p:cSld>
+  <p:clrMapOvr>
+    <a:masterClrMapping/>
+  </p:clrMapOvr>
+</p:sld>
+</file>
+
+<file path=ppt/slides/slide14.xml><?xml version="1.0" encoding="utf-8"?>
+<p:sld xmlns:a="http://schemas.openxmlformats.org/drawingml/2006/main" xmlns:r="http://schemas.openxmlformats.org/officeDocument/2006/relationships" xmlns:p="http://schemas.openxmlformats.org/presentationml/2006/main">
+  <p:cSld name="Slide 14">
+    <p:spTree>
+      <p:nvGrpSpPr>
+        <p:cNvPr id="1" name=""/>
+        <p:cNvGrpSpPr/>
+        <p:nvPr/>
+      </p:nvGrpSpPr>
+      <p:grpSpPr>
+        <a:xfrm>
+          <a:off x="0" y="0"/>
+          <a:ext cx="0" cy="0"/>
+          <a:chOff x="0" y="0"/>
+          <a:chExt cx="0" cy="0"/>
+        </a:xfrm>
+      </p:grpSpPr>
+      <p:sp>
+        <p:nvSpPr>
+          <p:cNvPr id="2" name="Text 0"/>
           <p:cNvSpPr/>
-          <p:nvPr/>
-        </p:nvSpPr>
-        <p:spPr>
-          <a:xfrm>
-            <a:off x="6178144" y="1865376"/>
+          <p:nvPr>
+            <p:ph idx="100" type="title" hasCustomPrompt="1"/>
+          </p:nvPr>
+        </p:nvSpPr>
+        <p:spPr>
+          <a:xfrm>
+            <a:off x="548640" y="320040"/>
+            <a:ext cx="11094415" cy="640080"/>
+          </a:xfrm>
+          <a:prstGeom prst="rect">
+            <a:avLst/>
+          </a:prstGeom>
+          <a:noFill/>
+          <a:ln/>
+        </p:spPr>
+        <p:txBody>
+          <a:bodyPr wrap="square" lIns="0" tIns="0" rIns="0" bIns="0" rtlCol="0" anchor="ctr"/>
+          <a:lstStyle/>
+          <a:p>
+            <a:pPr algn="l" indent="0" marL="0">
+              <a:buNone/>
+            </a:pPr>
+            <a:r>
+              <a:rPr lang="en-US" sz="3400" b="1" dirty="0">
+                <a:solidFill>
+                  <a:schemeClr val="tx1"/>
+                </a:solidFill>
+              </a:rPr>
+              <a:t>Заблаговременность и честность коридора</a:t>
+            </a:r>
+            <a:endParaRPr lang="en-US" sz="3400" dirty="0"/>
+          </a:p>
+        </p:txBody>
+      </p:sp>
+      <p:sp>
+        <p:nvSpPr>
+          <p:cNvPr id="3" name="Text 0"/>
+          <p:cNvSpPr/>
+          <p:nvPr>
+            <p:ph idx="101" type="body" hasCustomPrompt="1"/>
+          </p:nvPr>
+        </p:nvSpPr>
+        <p:spPr>
+          <a:xfrm>
+            <a:off x="548640" y="978408"/>
+            <a:ext cx="11094415" cy="411480"/>
+          </a:xfrm>
+          <a:prstGeom prst="rect">
+            <a:avLst/>
+          </a:prstGeom>
+          <a:noFill/>
+          <a:ln/>
+        </p:spPr>
+        <p:txBody>
+          <a:bodyPr wrap="square" lIns="0" tIns="0" rIns="0" bIns="0" rtlCol="0" anchor="t"/>
+          <a:lstStyle/>
+          <a:p>
+            <a:pPr indent="0" marL="0">
+              <a:buNone/>
+            </a:pPr>
+            <a:r>
+              <a:rPr lang="en-US" sz="1800" dirty="0">
+                <a:solidFill>
+                  <a:schemeClr val="tx2"/>
+                </a:solidFill>
+              </a:rPr>
+              <a:t>Предупреждение в среднем за 21,5 дня; факт внутри P10–P90 в 76,9% точек</a:t>
+            </a:r>
+            <a:endParaRPr lang="en-US" sz="1800" dirty="0"/>
+          </a:p>
+        </p:txBody>
+      </p:sp>
+      <p:sp>
+        <p:nvSpPr>
+          <p:cNvPr id="4" name="Shape 2"/>
+          <p:cNvSpPr/>
+          <p:nvPr/>
+        </p:nvSpPr>
+        <p:spPr>
+          <a:xfrm>
+            <a:off x="493776" y="1865376"/>
             <a:ext cx="5519776" cy="3159028"/>
           </a:xfrm>
           <a:prstGeom prst="roundRect">
@@ -3483,6 +4002,64 @@
       </p:sp>
       <p:pic>
         <p:nvPicPr>
+          <p:cNvPr id="5" name="Image 0" descr="Дни от прогноза до первого дня с минусом для найденных и пропущенных разрывов">    </p:cNvPr>
+          <p:cNvPicPr>
+            <a:picLocks noChangeAspect="1"/>
+          </p:cNvPicPr>
+          <p:nvPr/>
+        </p:nvPicPr>
+        <p:blipFill>
+          <a:blip r:embed="rId1"/>
+          <a:stretch>
+            <a:fillRect/>
+          </a:stretch>
+        </p:blipFill>
+        <p:spPr>
+          <a:xfrm>
+            <a:off x="548640" y="1920240"/>
+            <a:ext cx="5410048" cy="3049300"/>
+          </a:xfrm>
+          <a:prstGeom prst="rect">
+            <a:avLst/>
+          </a:prstGeom>
+        </p:spPr>
+      </p:pic>
+      <p:sp>
+        <p:nvSpPr>
+          <p:cNvPr id="6" name="Shape 3"/>
+          <p:cNvSpPr/>
+          <p:nvPr/>
+        </p:nvSpPr>
+        <p:spPr>
+          <a:xfrm>
+            <a:off x="6178144" y="1865376"/>
+            <a:ext cx="5519776" cy="3159028"/>
+          </a:xfrm>
+          <a:prstGeom prst="roundRect">
+            <a:avLst>
+              <a:gd name="adj" fmla="val 2316"/>
+            </a:avLst>
+          </a:prstGeom>
+          <a:solidFill>
+            <a:schemeClr val="bg1"/>
+          </a:solidFill>
+          <a:ln w="12700">
+            <a:solidFill>
+              <a:schemeClr val="bg2"/>
+            </a:solidFill>
+            <a:prstDash val="solid"/>
+          </a:ln>
+          <a:effectLst>
+            <a:outerShdw sx="100000" sy="100000" kx="0" ky="0" algn="bl" rotWithShape="0" blurRad="127000" dist="38100" dir="5400000">
+              <a:srgbClr val="0F172A">
+                <a:alpha val="16000"/>
+              </a:srgbClr>
+            </a:outerShdw>
+          </a:effectLst>
+        </p:spPr>
+      </p:sp>
+      <p:pic>
+        <p:nvPicPr>
           <p:cNvPr id="7" name="Image 1" descr="Доля фактов внутри коридора P10–P90 по дням горизонта">    </p:cNvPr>
           <p:cNvPicPr>
             <a:picLocks noChangeAspect="1"/>
@@ -3544,7 +4121,7 @@
             <a:pPr algn="r"/>
             <a:fld id="{F7021451-1387-4CA6-816F-3879F97B5CBC}" type="slidenum">
               <a:rPr b="0" lang="en-US"/>
-              <a:t>13</a:t>
+              <a:t>14</a:t>
             </a:fld>
             <a:endParaRPr lang="en-US"/>
           </a:p>
@@ -3607,7 +4184,7 @@
                   <a:schemeClr val="tx1"/>
                 </a:solidFill>
               </a:rPr>
-              <a:t>Как строим прогноз</a:t>
+              <a:t>Данные: все операции кейса</a:t>
             </a:r>
             <a:endParaRPr lang="en-US" sz="3400" dirty="0"/>
           </a:p>
@@ -3645,7 +4222,7 @@
                   <a:schemeClr val="tx2"/>
                 </a:solidFill>
               </a:rPr>
-              <a:t>Без «чёрного ящика»: каждое число объясняется в журнале расчёта</a:t>
+              <a:t>all_operations.csv: 222 420 операций, 150 компаний с 01.10.2024 по 30.09.2026</a:t>
             </a:r>
             <a:endParaRPr lang="en-US" sz="1800" dirty="0"/>
           </a:p>
@@ -3653,22 +4230,22 @@
       </p:sp>
       <p:sp>
         <p:nvSpPr>
-          <p:cNvPr id="4" name="Shape 2"/>
+          <p:cNvPr id="4" name="eda-frame"/>
           <p:cNvSpPr/>
           <p:nvPr/>
         </p:nvSpPr>
         <p:spPr>
           <a:xfrm>
-            <a:off x="548640" y="1645920"/>
-            <a:ext cx="2514600" cy="2743200"/>
+            <a:off x="1048360" y="1536192"/>
+            <a:ext cx="10094976" cy="3440954"/>
           </a:xfrm>
           <a:prstGeom prst="roundRect">
             <a:avLst>
-              <a:gd name="adj" fmla="val 4364"/>
+              <a:gd name="adj" fmla="val 2657"/>
             </a:avLst>
           </a:prstGeom>
           <a:solidFill>
-            <a:schemeClr val="bg1"/>
+            <a:schemeClr val="tx1"/>
           </a:solidFill>
           <a:ln/>
           <a:effectLst>
@@ -3680,29 +4257,9 @@
           </a:effectLst>
         </p:spPr>
       </p:sp>
-      <p:sp>
-        <p:nvSpPr>
-          <p:cNvPr id="5" name="icon-bg-LuFileSpreadsheet"/>
-          <p:cNvSpPr/>
-          <p:nvPr/>
-        </p:nvSpPr>
-        <p:spPr>
-          <a:xfrm>
-            <a:off x="804672" y="1874520"/>
-            <a:ext cx="713232" cy="713232"/>
-          </a:xfrm>
-          <a:prstGeom prst="ellipse">
-            <a:avLst/>
-          </a:prstGeom>
-          <a:solidFill>
-            <a:schemeClr val="accent1"/>
-          </a:solidFill>
-          <a:ln/>
-        </p:spPr>
-      </p:sp>
       <p:pic>
         <p:nvPicPr>
-          <p:cNvPr id="6" name="Image 0" descr="LuFileSpreadsheet">    </p:cNvPr>
+          <p:cNvPr id="5" name="Image 0" descr="EDA: ключевые потоки, отсрочка оплат, компании с отрицательным остатком">    </p:cNvPr>
           <p:cNvPicPr>
             <a:picLocks noChangeAspect="1"/>
           </p:cNvPicPr>
@@ -3716,8 +4273,8 @@
         </p:blipFill>
         <p:spPr>
           <a:xfrm>
-            <a:off x="961583" y="2031431"/>
-            <a:ext cx="399410" cy="399410"/>
+            <a:off x="1112368" y="1600200"/>
+            <a:ext cx="9966960" cy="3312938"/>
           </a:xfrm>
           <a:prstGeom prst="rect">
             <a:avLst/>
@@ -3726,14 +4283,14 @@
       </p:pic>
       <p:sp>
         <p:nvSpPr>
-          <p:cNvPr id="7" name="Text 4"/>
+          <p:cNvPr id="6" name="Text 3"/>
           <p:cNvSpPr txBox="1"/>
           <p:nvPr/>
         </p:nvSpPr>
         <p:spPr>
           <a:xfrm>
-            <a:off x="2240280" y="1892808"/>
-            <a:ext cx="594360" cy="365760"/>
+            <a:off x="548640" y="5141738"/>
+            <a:ext cx="3515258" cy="502920"/>
           </a:xfrm>
           <a:prstGeom prst="rect">
             <a:avLst/>
@@ -3742,24 +4299,60 @@
           <a:ln/>
         </p:spPr>
         <p:txBody>
-          <a:bodyPr wrap="square" lIns="0" tIns="0" rIns="0" bIns="0" rtlCol="0" anchor="ctr"/>
-          <a:lstStyle/>
-          <a:p>
-            <a:pPr algn="r" indent="0" marL="0">
-              <a:buNone/>
-            </a:pPr>
-            <a:r>
-              <a:rPr lang="en-US" sz="1600" b="1" dirty="0">
-                <a:solidFill>
-                  <a:schemeClr val="accent5"/>
+          <a:bodyPr wrap="square" lIns="0" tIns="0" rIns="0" bIns="0" rtlCol="0" anchor="b"/>
+          <a:lstStyle/>
+          <a:p>
+            <a:pPr indent="0" marL="0">
+              <a:buNone/>
+            </a:pPr>
+            <a:r>
+              <a:rPr lang="en-US" sz="2600" b="1" dirty="0">
+                <a:solidFill>
+                  <a:schemeClr val="accent3"/>
                 </a:solidFill>
                 <a:latin typeface="+mj-lt" pitchFamily="34" charset="0"/>
                 <a:ea typeface="+mj-lt" pitchFamily="34" charset="-122"/>
                 <a:cs typeface="+mj-lt" pitchFamily="34" charset="-120"/>
               </a:rPr>
-              <a:t>01</a:t>
-            </a:r>
-            <a:endParaRPr lang="en-US" sz="1600" dirty="0"/>
+              <a:t>16 из 150</a:t>
+            </a:r>
+            <a:endParaRPr lang="en-US" sz="2600" dirty="0"/>
+          </a:p>
+        </p:txBody>
+      </p:sp>
+      <p:sp>
+        <p:nvSpPr>
+          <p:cNvPr id="7" name="Text 4"/>
+          <p:cNvSpPr txBox="1"/>
+          <p:nvPr/>
+        </p:nvSpPr>
+        <p:spPr>
+          <a:xfrm>
+            <a:off x="548640" y="5690378"/>
+            <a:ext cx="3515258" cy="548640"/>
+          </a:xfrm>
+          <a:prstGeom prst="rect">
+            <a:avLst/>
+          </a:prstGeom>
+          <a:noFill/>
+          <a:ln/>
+        </p:spPr>
+        <p:txBody>
+          <a:bodyPr wrap="square" lIns="0" tIns="0" rIns="0" bIns="0" rtlCol="0" anchor="t"/>
+          <a:lstStyle/>
+          <a:p>
+            <a:pPr indent="0" marL="0">
+              <a:buNone/>
+            </a:pPr>
+            <a:r>
+              <a:rPr lang="en-US" sz="1400" dirty="0">
+                <a:solidFill>
+                  <a:schemeClr val="tx2"/>
+                </a:solidFill>
+              </a:rPr>
+              <a:t>компаний хотя бы раз уходили в минус за два года</a:t>
+            </a:r>
+            <a:endParaRPr lang="en-US" sz="1400" dirty="0"/>
           </a:p>
         </p:txBody>
       </p:sp>
@@ -3771,8 +4364,8 @@
         </p:nvSpPr>
         <p:spPr>
           <a:xfrm>
-            <a:off x="804672" y="2788920"/>
-            <a:ext cx="2057400" cy="1508760"/>
+            <a:off x="4338218" y="5141738"/>
+            <a:ext cx="3515258" cy="502920"/>
           </a:xfrm>
           <a:prstGeom prst="rect">
             <a:avLst/>
@@ -3781,186 +4374,37 @@
           <a:ln/>
         </p:spPr>
         <p:txBody>
-          <a:bodyPr wrap="square" lIns="0" tIns="0" rIns="0" bIns="0" rtlCol="0" anchor="t"/>
+          <a:bodyPr wrap="square" lIns="0" tIns="0" rIns="0" bIns="0" rtlCol="0" anchor="b"/>
           <a:lstStyle/>
           <a:p>
             <a:pPr indent="0" marL="0">
-              <a:spcAft>
-                <a:spcPts val="400"/>
-              </a:spcAft>
-              <a:buNone/>
-            </a:pPr>
-            <a:r>
-              <a:rPr lang="en-US" sz="2000" b="1" dirty="0">
-                <a:solidFill>
-                  <a:schemeClr val="tx1"/>
-                </a:solidFill>
-              </a:rPr>
-              <a:t>Выписка</a:t>
-            </a:r>
-            <a:endParaRPr lang="en-US" sz="2000" dirty="0"/>
-          </a:p>
-          <a:p>
-            <a:pPr indent="0" marL="0">
-              <a:spcAft>
-                <a:spcPts val="400"/>
-              </a:spcAft>
-              <a:buNone/>
-            </a:pPr>
-            <a:r>
-              <a:rPr lang="en-US" sz="1400" dirty="0">
-                <a:solidFill>
-                  <a:schemeClr val="tx2"/>
-                </a:solidFill>
-              </a:rPr>
-              <a:t>Читаем CSV с заголовком и без, много компаний в файле; чистим повторы и сверяем с остатком</a:t>
-            </a:r>
-            <a:endParaRPr lang="en-US" sz="2000" dirty="0"/>
-          </a:p>
-        </p:txBody>
-      </p:sp>
-      <p:sp>
-        <p:nvSpPr>
-          <p:cNvPr id="9" name="step-arrow-0"/>
-          <p:cNvSpPr/>
-          <p:nvPr/>
-        </p:nvSpPr>
-        <p:spPr>
-          <a:xfrm>
-            <a:off x="3153613" y="2880360"/>
-            <a:ext cx="164592" cy="274320"/>
-          </a:xfrm>
-          <a:prstGeom prst="chevron">
-            <a:avLst/>
-          </a:prstGeom>
-          <a:solidFill>
-            <a:schemeClr val="accent5"/>
-          </a:solidFill>
-          <a:ln/>
-        </p:spPr>
-      </p:sp>
-      <p:sp>
-        <p:nvSpPr>
-          <p:cNvPr id="10" name="Shape 7"/>
-          <p:cNvSpPr/>
-          <p:nvPr/>
-        </p:nvSpPr>
-        <p:spPr>
-          <a:xfrm>
-            <a:off x="3408578" y="1645920"/>
-            <a:ext cx="2514600" cy="2743200"/>
-          </a:xfrm>
-          <a:prstGeom prst="roundRect">
-            <a:avLst>
-              <a:gd name="adj" fmla="val 4364"/>
-            </a:avLst>
-          </a:prstGeom>
-          <a:solidFill>
-            <a:schemeClr val="bg1"/>
-          </a:solidFill>
-          <a:ln/>
-          <a:effectLst>
-            <a:outerShdw sx="100000" sy="100000" kx="0" ky="0" algn="bl" rotWithShape="0" blurRad="127000" dist="38100" dir="5400000">
-              <a:srgbClr val="0F172A">
-                <a:alpha val="16000"/>
-              </a:srgbClr>
-            </a:outerShdw>
-          </a:effectLst>
-        </p:spPr>
-      </p:sp>
-      <p:sp>
-        <p:nvSpPr>
-          <p:cNvPr id="11" name="icon-bg-LuTags"/>
-          <p:cNvSpPr/>
-          <p:nvPr/>
-        </p:nvSpPr>
-        <p:spPr>
-          <a:xfrm>
-            <a:off x="3664610" y="1874520"/>
-            <a:ext cx="713232" cy="713232"/>
-          </a:xfrm>
-          <a:prstGeom prst="ellipse">
-            <a:avLst/>
-          </a:prstGeom>
-          <a:solidFill>
-            <a:schemeClr val="accent1"/>
-          </a:solidFill>
-          <a:ln/>
-        </p:spPr>
-      </p:sp>
-      <p:pic>
-        <p:nvPicPr>
-          <p:cNvPr id="12" name="Image 1" descr="LuTags">    </p:cNvPr>
-          <p:cNvPicPr>
-            <a:picLocks noChangeAspect="1"/>
-          </p:cNvPicPr>
-          <p:nvPr/>
-        </p:nvPicPr>
-        <p:blipFill>
-          <a:blip r:embed="rId2"/>
-          <a:stretch>
-            <a:fillRect/>
-          </a:stretch>
-        </p:blipFill>
-        <p:spPr>
-          <a:xfrm>
-            <a:off x="3821521" y="2031431"/>
-            <a:ext cx="399410" cy="399410"/>
-          </a:xfrm>
-          <a:prstGeom prst="rect">
-            <a:avLst/>
-          </a:prstGeom>
-        </p:spPr>
-      </p:pic>
-      <p:sp>
-        <p:nvSpPr>
-          <p:cNvPr id="13" name="Text 9"/>
-          <p:cNvSpPr txBox="1"/>
-          <p:nvPr/>
-        </p:nvSpPr>
-        <p:spPr>
-          <a:xfrm>
-            <a:off x="5100218" y="1892808"/>
-            <a:ext cx="594360" cy="365760"/>
-          </a:xfrm>
-          <a:prstGeom prst="rect">
-            <a:avLst/>
-          </a:prstGeom>
-          <a:noFill/>
-          <a:ln/>
-        </p:spPr>
-        <p:txBody>
-          <a:bodyPr wrap="square" lIns="0" tIns="0" rIns="0" bIns="0" rtlCol="0" anchor="ctr"/>
-          <a:lstStyle/>
-          <a:p>
-            <a:pPr algn="r" indent="0" marL="0">
-              <a:buNone/>
-            </a:pPr>
-            <a:r>
-              <a:rPr lang="en-US" sz="1600" b="1" dirty="0">
-                <a:solidFill>
-                  <a:schemeClr val="accent5"/>
+              <a:buNone/>
+            </a:pPr>
+            <a:r>
+              <a:rPr lang="en-US" sz="2600" b="1" dirty="0">
+                <a:solidFill>
+                  <a:schemeClr val="accent4"/>
                 </a:solidFill>
                 <a:latin typeface="+mj-lt" pitchFamily="34" charset="0"/>
                 <a:ea typeface="+mj-lt" pitchFamily="34" charset="-122"/>
                 <a:cs typeface="+mj-lt" pitchFamily="34" charset="-120"/>
               </a:rPr>
-              <a:t>02</a:t>
-            </a:r>
-            <a:endParaRPr lang="en-US" sz="1600" dirty="0"/>
-          </a:p>
-        </p:txBody>
-      </p:sp>
-      <p:sp>
-        <p:nvSpPr>
-          <p:cNvPr id="14" name="Text 10"/>
+              <a:t>15,7 дня</a:t>
+            </a:r>
+            <a:endParaRPr lang="en-US" sz="2600" dirty="0"/>
+          </a:p>
+        </p:txBody>
+      </p:sp>
+      <p:sp>
+        <p:nvSpPr>
+          <p:cNvPr id="9" name="Text 6"/>
           <p:cNvSpPr txBox="1"/>
           <p:nvPr/>
         </p:nvSpPr>
         <p:spPr>
           <a:xfrm>
-            <a:off x="3664610" y="2788920"/>
-            <a:ext cx="2057400" cy="1508760"/>
+            <a:off x="4338218" y="5690378"/>
+            <a:ext cx="3515258" cy="548640"/>
           </a:xfrm>
           <a:prstGeom prst="rect">
             <a:avLst/>
@@ -3973,182 +4417,69 @@
           <a:lstStyle/>
           <a:p>
             <a:pPr indent="0" marL="0">
-              <a:spcAft>
-                <a:spcPts val="400"/>
-              </a:spcAft>
-              <a:buNone/>
-            </a:pPr>
-            <a:r>
-              <a:rPr lang="en-US" sz="2000" b="1" dirty="0">
-                <a:solidFill>
-                  <a:schemeClr val="tx1"/>
-                </a:solidFill>
-              </a:rPr>
-              <a:t>Статьи и платежи</a:t>
-            </a:r>
-            <a:endParaRPr lang="en-US" sz="2000" dirty="0"/>
-          </a:p>
+              <a:buNone/>
+            </a:pPr>
+            <a:r>
+              <a:rPr lang="en-US" sz="1400" dirty="0">
+                <a:solidFill>
+                  <a:schemeClr val="tx2"/>
+                </a:solidFill>
+              </a:rPr>
+              <a:t>средняя отсрочка оплаты счёта; позже недели — 52% счетов</a:t>
+            </a:r>
+            <a:endParaRPr lang="en-US" sz="1400" dirty="0"/>
+          </a:p>
+        </p:txBody>
+      </p:sp>
+      <p:sp>
+        <p:nvSpPr>
+          <p:cNvPr id="10" name="Text 7"/>
+          <p:cNvSpPr txBox="1"/>
+          <p:nvPr/>
+        </p:nvSpPr>
+        <p:spPr>
+          <a:xfrm>
+            <a:off x="8127797" y="5141738"/>
+            <a:ext cx="3515258" cy="502920"/>
+          </a:xfrm>
+          <a:prstGeom prst="rect">
+            <a:avLst/>
+          </a:prstGeom>
+          <a:noFill/>
+          <a:ln/>
+        </p:spPr>
+        <p:txBody>
+          <a:bodyPr wrap="square" lIns="0" tIns="0" rIns="0" bIns="0" rtlCol="0" anchor="b"/>
+          <a:lstStyle/>
           <a:p>
             <a:pPr indent="0" marL="0">
-              <a:spcAft>
-                <a:spcPts val="400"/>
-              </a:spcAft>
-              <a:buNone/>
-            </a:pPr>
-            <a:r>
-              <a:rPr lang="en-US" sz="1400" dirty="0">
-                <a:solidFill>
-                  <a:schemeClr val="tx2"/>
-                </a:solidFill>
-              </a:rPr>
-              <a:t>Выручка, поставщики, зарплата, налоги, аренда; типичный день регулярных платежей</a:t>
-            </a:r>
-            <a:endParaRPr lang="en-US" sz="2000" dirty="0"/>
-          </a:p>
-        </p:txBody>
-      </p:sp>
-      <p:sp>
-        <p:nvSpPr>
-          <p:cNvPr id="15" name="step-arrow-1"/>
-          <p:cNvSpPr/>
-          <p:nvPr/>
-        </p:nvSpPr>
-        <p:spPr>
-          <a:xfrm>
-            <a:off x="6013552" y="2880360"/>
-            <a:ext cx="164592" cy="274320"/>
-          </a:xfrm>
-          <a:prstGeom prst="chevron">
-            <a:avLst/>
-          </a:prstGeom>
-          <a:solidFill>
-            <a:schemeClr val="accent5"/>
-          </a:solidFill>
-          <a:ln/>
-        </p:spPr>
-      </p:sp>
-      <p:sp>
-        <p:nvSpPr>
-          <p:cNvPr id="16" name="Shape 12"/>
-          <p:cNvSpPr/>
-          <p:nvPr/>
-        </p:nvSpPr>
-        <p:spPr>
-          <a:xfrm>
-            <a:off x="6268517" y="1645920"/>
-            <a:ext cx="2514600" cy="2743200"/>
-          </a:xfrm>
-          <a:prstGeom prst="roundRect">
-            <a:avLst>
-              <a:gd name="adj" fmla="val 4364"/>
-            </a:avLst>
-          </a:prstGeom>
-          <a:solidFill>
-            <a:schemeClr val="bg1"/>
-          </a:solidFill>
-          <a:ln/>
-          <a:effectLst>
-            <a:outerShdw sx="100000" sy="100000" kx="0" ky="0" algn="bl" rotWithShape="0" blurRad="127000" dist="38100" dir="5400000">
-              <a:srgbClr val="0F172A">
-                <a:alpha val="16000"/>
-              </a:srgbClr>
-            </a:outerShdw>
-          </a:effectLst>
-        </p:spPr>
-      </p:sp>
-      <p:sp>
-        <p:nvSpPr>
-          <p:cNvPr id="17" name="icon-bg-LuHistory"/>
-          <p:cNvSpPr/>
-          <p:nvPr/>
-        </p:nvSpPr>
-        <p:spPr>
-          <a:xfrm>
-            <a:off x="6524549" y="1874520"/>
-            <a:ext cx="713232" cy="713232"/>
-          </a:xfrm>
-          <a:prstGeom prst="ellipse">
-            <a:avLst/>
-          </a:prstGeom>
-          <a:solidFill>
-            <a:schemeClr val="accent1"/>
-          </a:solidFill>
-          <a:ln/>
-        </p:spPr>
-      </p:sp>
-      <p:pic>
-        <p:nvPicPr>
-          <p:cNvPr id="18" name="Image 2" descr="LuHistory">    </p:cNvPr>
-          <p:cNvPicPr>
-            <a:picLocks noChangeAspect="1"/>
-          </p:cNvPicPr>
-          <p:nvPr/>
-        </p:nvPicPr>
-        <p:blipFill>
-          <a:blip r:embed="rId3"/>
-          <a:stretch>
-            <a:fillRect/>
-          </a:stretch>
-        </p:blipFill>
-        <p:spPr>
-          <a:xfrm>
-            <a:off x="6681460" y="2031431"/>
-            <a:ext cx="399410" cy="399410"/>
-          </a:xfrm>
-          <a:prstGeom prst="rect">
-            <a:avLst/>
-          </a:prstGeom>
-        </p:spPr>
-      </p:pic>
-      <p:sp>
-        <p:nvSpPr>
-          <p:cNvPr id="19" name="Text 14"/>
-          <p:cNvSpPr txBox="1"/>
-          <p:nvPr/>
-        </p:nvSpPr>
-        <p:spPr>
-          <a:xfrm>
-            <a:off x="7960157" y="1892808"/>
-            <a:ext cx="594360" cy="365760"/>
-          </a:xfrm>
-          <a:prstGeom prst="rect">
-            <a:avLst/>
-          </a:prstGeom>
-          <a:noFill/>
-          <a:ln/>
-        </p:spPr>
-        <p:txBody>
-          <a:bodyPr wrap="square" lIns="0" tIns="0" rIns="0" bIns="0" rtlCol="0" anchor="ctr"/>
-          <a:lstStyle/>
-          <a:p>
-            <a:pPr algn="r" indent="0" marL="0">
-              <a:buNone/>
-            </a:pPr>
-            <a:r>
-              <a:rPr lang="en-US" sz="1600" b="1" dirty="0">
-                <a:solidFill>
-                  <a:schemeClr val="accent5"/>
+              <a:buNone/>
+            </a:pPr>
+            <a:r>
+              <a:rPr lang="en-US" sz="2600" b="1" dirty="0">
+                <a:solidFill>
+                  <a:schemeClr val="accent1"/>
                 </a:solidFill>
                 <a:latin typeface="+mj-lt" pitchFamily="34" charset="0"/>
                 <a:ea typeface="+mj-lt" pitchFamily="34" charset="-122"/>
                 <a:cs typeface="+mj-lt" pitchFamily="34" charset="-120"/>
               </a:rPr>
-              <a:t>03</a:t>
-            </a:r>
-            <a:endParaRPr lang="en-US" sz="1600" dirty="0"/>
-          </a:p>
-        </p:txBody>
-      </p:sp>
-      <p:sp>
-        <p:nvSpPr>
-          <p:cNvPr id="20" name="Text 15"/>
+              <a:t>36 400 ₽</a:t>
+            </a:r>
+            <a:endParaRPr lang="en-US" sz="2600" dirty="0"/>
+          </a:p>
+        </p:txBody>
+      </p:sp>
+      <p:sp>
+        <p:nvSpPr>
+          <p:cNvPr id="11" name="Text 8"/>
           <p:cNvSpPr txBox="1"/>
           <p:nvPr/>
         </p:nvSpPr>
         <p:spPr>
           <a:xfrm>
-            <a:off x="6524549" y="2788920"/>
-            <a:ext cx="2057400" cy="1508760"/>
+            <a:off x="8127797" y="5690378"/>
+            <a:ext cx="3515258" cy="548640"/>
           </a:xfrm>
           <a:prstGeom prst="rect">
             <a:avLst/>
@@ -4161,26 +4492,6 @@
           <a:lstStyle/>
           <a:p>
             <a:pPr indent="0" marL="0">
-              <a:spcAft>
-                <a:spcPts val="400"/>
-              </a:spcAft>
-              <a:buNone/>
-            </a:pPr>
-            <a:r>
-              <a:rPr lang="en-US" sz="2000" b="1" dirty="0">
-                <a:solidFill>
-                  <a:schemeClr val="tx1"/>
-                </a:solidFill>
-              </a:rPr>
-              <a:t>Похожие месяцы</a:t>
-            </a:r>
-            <a:endParaRPr lang="en-US" sz="2000" dirty="0"/>
-          </a:p>
-          <a:p>
-            <a:pPr indent="0" marL="0">
-              <a:spcAft>
-                <a:spcPts val="400"/>
-              </a:spcAft>
               <a:buNone/>
             </a:pPr>
             <a:r>
@@ -4189,533 +4500,9 @@
                   <a:schemeClr val="tx2"/>
                 </a:solidFill>
               </a:rPr>
-              <a:t>30-дневные отрезки истории, начинавшиеся в тот же день месяца: каждый — сценарий остатка</a:t>
-            </a:r>
-            <a:endParaRPr lang="en-US" sz="2000" dirty="0"/>
-          </a:p>
-        </p:txBody>
-      </p:sp>
-      <p:sp>
-        <p:nvSpPr>
-          <p:cNvPr id="21" name="step-arrow-2"/>
-          <p:cNvSpPr/>
-          <p:nvPr/>
-        </p:nvSpPr>
-        <p:spPr>
-          <a:xfrm>
-            <a:off x="8873490" y="2880360"/>
-            <a:ext cx="164592" cy="274320"/>
-          </a:xfrm>
-          <a:prstGeom prst="chevron">
-            <a:avLst/>
-          </a:prstGeom>
-          <a:solidFill>
-            <a:schemeClr val="accent5"/>
-          </a:solidFill>
-          <a:ln/>
-        </p:spPr>
-      </p:sp>
-      <p:sp>
-        <p:nvSpPr>
-          <p:cNvPr id="22" name="Shape 17"/>
-          <p:cNvSpPr/>
-          <p:nvPr/>
-        </p:nvSpPr>
-        <p:spPr>
-          <a:xfrm>
-            <a:off x="9128455" y="1645920"/>
-            <a:ext cx="2514600" cy="2743200"/>
-          </a:xfrm>
-          <a:prstGeom prst="roundRect">
-            <a:avLst>
-              <a:gd name="adj" fmla="val 4364"/>
-            </a:avLst>
-          </a:prstGeom>
-          <a:solidFill>
-            <a:schemeClr val="bg1"/>
-          </a:solidFill>
-          <a:ln/>
-          <a:effectLst>
-            <a:outerShdw sx="100000" sy="100000" kx="0" ky="0" algn="bl" rotWithShape="0" blurRad="127000" dist="38100" dir="5400000">
-              <a:srgbClr val="0F172A">
-                <a:alpha val="16000"/>
-              </a:srgbClr>
-            </a:outerShdw>
-          </a:effectLst>
-        </p:spPr>
-      </p:sp>
-      <p:sp>
-        <p:nvSpPr>
-          <p:cNvPr id="23" name="icon-bg-LuChartSpline"/>
-          <p:cNvSpPr/>
-          <p:nvPr/>
-        </p:nvSpPr>
-        <p:spPr>
-          <a:xfrm>
-            <a:off x="9384487" y="1874520"/>
-            <a:ext cx="713232" cy="713232"/>
-          </a:xfrm>
-          <a:prstGeom prst="ellipse">
-            <a:avLst/>
-          </a:prstGeom>
-          <a:solidFill>
-            <a:schemeClr val="accent1"/>
-          </a:solidFill>
-          <a:ln/>
-        </p:spPr>
-      </p:sp>
-      <p:pic>
-        <p:nvPicPr>
-          <p:cNvPr id="24" name="Image 3" descr="LuChartSpline">    </p:cNvPr>
-          <p:cNvPicPr>
-            <a:picLocks noChangeAspect="1"/>
-          </p:cNvPicPr>
-          <p:nvPr/>
-        </p:nvPicPr>
-        <p:blipFill>
-          <a:blip r:embed="rId4"/>
-          <a:stretch>
-            <a:fillRect/>
-          </a:stretch>
-        </p:blipFill>
-        <p:spPr>
-          <a:xfrm>
-            <a:off x="9541398" y="2031431"/>
-            <a:ext cx="399410" cy="399410"/>
-          </a:xfrm>
-          <a:prstGeom prst="rect">
-            <a:avLst/>
-          </a:prstGeom>
-        </p:spPr>
-      </p:pic>
-      <p:sp>
-        <p:nvSpPr>
-          <p:cNvPr id="25" name="Text 19"/>
-          <p:cNvSpPr txBox="1"/>
-          <p:nvPr/>
-        </p:nvSpPr>
-        <p:spPr>
-          <a:xfrm>
-            <a:off x="10820095" y="1892808"/>
-            <a:ext cx="594360" cy="365760"/>
-          </a:xfrm>
-          <a:prstGeom prst="rect">
-            <a:avLst/>
-          </a:prstGeom>
-          <a:noFill/>
-          <a:ln/>
-        </p:spPr>
-        <p:txBody>
-          <a:bodyPr wrap="square" lIns="0" tIns="0" rIns="0" bIns="0" rtlCol="0" anchor="ctr"/>
-          <a:lstStyle/>
-          <a:p>
-            <a:pPr algn="r" indent="0" marL="0">
-              <a:buNone/>
-            </a:pPr>
-            <a:r>
-              <a:rPr lang="en-US" sz="1600" b="1" dirty="0">
-                <a:solidFill>
-                  <a:schemeClr val="accent5"/>
-                </a:solidFill>
-                <a:latin typeface="+mj-lt" pitchFamily="34" charset="0"/>
-                <a:ea typeface="+mj-lt" pitchFamily="34" charset="-122"/>
-                <a:cs typeface="+mj-lt" pitchFamily="34" charset="-120"/>
-              </a:rPr>
-              <a:t>04</a:t>
-            </a:r>
-            <a:endParaRPr lang="en-US" sz="1600" dirty="0"/>
-          </a:p>
-        </p:txBody>
-      </p:sp>
-      <p:sp>
-        <p:nvSpPr>
-          <p:cNvPr id="26" name="Text 20"/>
-          <p:cNvSpPr txBox="1"/>
-          <p:nvPr/>
-        </p:nvSpPr>
-        <p:spPr>
-          <a:xfrm>
-            <a:off x="9384487" y="2788920"/>
-            <a:ext cx="2057400" cy="1508760"/>
-          </a:xfrm>
-          <a:prstGeom prst="rect">
-            <a:avLst/>
-          </a:prstGeom>
-          <a:noFill/>
-          <a:ln/>
-        </p:spPr>
-        <p:txBody>
-          <a:bodyPr wrap="square" lIns="0" tIns="0" rIns="0" bIns="0" rtlCol="0" anchor="t"/>
-          <a:lstStyle/>
-          <a:p>
-            <a:pPr indent="0" marL="0">
-              <a:spcAft>
-                <a:spcPts val="400"/>
-              </a:spcAft>
-              <a:buNone/>
-            </a:pPr>
-            <a:r>
-              <a:rPr lang="en-US" sz="2000" b="1" dirty="0">
-                <a:solidFill>
-                  <a:schemeClr val="tx1"/>
-                </a:solidFill>
-              </a:rPr>
-              <a:t>Прогноз и риск</a:t>
-            </a:r>
-            <a:endParaRPr lang="en-US" sz="2000" dirty="0"/>
-          </a:p>
-          <a:p>
-            <a:pPr indent="0" marL="0">
-              <a:spcAft>
-                <a:spcPts val="400"/>
-              </a:spcAft>
-              <a:buNone/>
-            </a:pPr>
-            <a:r>
-              <a:rPr lang="en-US" sz="1400" dirty="0">
-                <a:solidFill>
-                  <a:schemeClr val="tx2"/>
-                </a:solidFill>
-              </a:rPr>
-              <a:t>P10 / P50 / P90 на каждый день; вероятность разрыва — доля сценариев с минусом</a:t>
-            </a:r>
-            <a:endParaRPr lang="en-US" sz="2000" dirty="0"/>
-          </a:p>
-        </p:txBody>
-      </p:sp>
-      <p:sp>
-        <p:nvSpPr>
-          <p:cNvPr id="27" name="Text 21"/>
-          <p:cNvSpPr txBox="1"/>
-          <p:nvPr/>
-        </p:nvSpPr>
-        <p:spPr>
-          <a:xfrm>
-            <a:off x="548640" y="4663440"/>
-            <a:ext cx="2743200" cy="365760"/>
-          </a:xfrm>
-          <a:prstGeom prst="rect">
-            <a:avLst/>
-          </a:prstGeom>
-          <a:noFill/>
-          <a:ln/>
-        </p:spPr>
-        <p:txBody>
-          <a:bodyPr wrap="square" lIns="0" tIns="0" rIns="0" bIns="0" rtlCol="0" anchor="ctr"/>
-          <a:lstStyle/>
-          <a:p>
-            <a:pPr indent="0" marL="0">
-              <a:buNone/>
-            </a:pPr>
-            <a:r>
-              <a:rPr lang="en-US" sz="1600" b="1" dirty="0">
-                <a:solidFill>
-                  <a:schemeClr val="tx1"/>
-                </a:solidFill>
-              </a:rPr>
-              <a:t>Статус компании</a:t>
-            </a:r>
-            <a:endParaRPr lang="en-US" sz="1600" dirty="0"/>
-          </a:p>
-        </p:txBody>
-      </p:sp>
-      <p:sp>
-        <p:nvSpPr>
-          <p:cNvPr id="28" name="Shape 22"/>
-          <p:cNvSpPr/>
-          <p:nvPr/>
-        </p:nvSpPr>
-        <p:spPr>
-          <a:xfrm>
-            <a:off x="548640" y="5074920"/>
-            <a:ext cx="3576218" cy="1051560"/>
-          </a:xfrm>
-          <a:prstGeom prst="roundRect">
-            <a:avLst>
-              <a:gd name="adj" fmla="val 10435"/>
-            </a:avLst>
-          </a:prstGeom>
-          <a:solidFill>
-            <a:schemeClr val="bg2"/>
-          </a:solidFill>
-          <a:ln/>
-        </p:spPr>
-      </p:sp>
-      <p:sp>
-        <p:nvSpPr>
-          <p:cNvPr id="29" name="rule-mark-0"/>
-          <p:cNvSpPr/>
-          <p:nvPr/>
-        </p:nvSpPr>
-        <p:spPr>
-          <a:xfrm>
-            <a:off x="731520" y="5230368"/>
-            <a:ext cx="146304" cy="731520"/>
-          </a:xfrm>
-          <a:prstGeom prst="roundRect">
-            <a:avLst>
-              <a:gd name="adj" fmla="val 31250"/>
-            </a:avLst>
-          </a:prstGeom>
-          <a:solidFill>
-            <a:schemeClr val="accent3"/>
-          </a:solidFill>
-          <a:ln/>
-        </p:spPr>
-      </p:sp>
-      <p:sp>
-        <p:nvSpPr>
-          <p:cNvPr id="30" name="Text 24"/>
-          <p:cNvSpPr txBox="1"/>
-          <p:nvPr/>
-        </p:nvSpPr>
-        <p:spPr>
-          <a:xfrm>
-            <a:off x="1005840" y="5193792"/>
-            <a:ext cx="2936138" cy="868680"/>
-          </a:xfrm>
-          <a:prstGeom prst="rect">
-            <a:avLst/>
-          </a:prstGeom>
-          <a:noFill/>
-          <a:ln/>
-        </p:spPr>
-        <p:txBody>
-          <a:bodyPr wrap="square" lIns="0" tIns="0" rIns="0" bIns="0" rtlCol="0" anchor="t"/>
-          <a:lstStyle/>
-          <a:p>
-            <a:pPr indent="0" marL="0">
-              <a:spcAft>
-                <a:spcPts val="400"/>
-              </a:spcAft>
-              <a:buNone/>
-            </a:pPr>
-            <a:r>
-              <a:rPr lang="en-US" sz="1700" b="1" dirty="0">
-                <a:solidFill>
-                  <a:schemeClr val="accent3"/>
-                </a:solidFill>
-              </a:rPr>
-              <a:t>Критический</a:t>
-            </a:r>
-            <a:endParaRPr lang="en-US" sz="1700" dirty="0"/>
-          </a:p>
-          <a:p>
-            <a:pPr indent="0" marL="0">
-              <a:spcAft>
-                <a:spcPts val="400"/>
-              </a:spcAft>
-              <a:buNone/>
-            </a:pPr>
-            <a:r>
-              <a:rPr lang="en-US" sz="1400" dirty="0">
-                <a:solidFill>
-                  <a:schemeClr val="tx2"/>
-                </a:solidFill>
-              </a:rPr>
-              <a:t>вероятность ≥ 50% или P50 ниже нуля; без минуса за год — ≥ 80%</a:t>
-            </a:r>
-            <a:endParaRPr lang="en-US" sz="1700" dirty="0"/>
-          </a:p>
-        </p:txBody>
-      </p:sp>
-      <p:sp>
-        <p:nvSpPr>
-          <p:cNvPr id="31" name="Shape 25"/>
-          <p:cNvSpPr/>
-          <p:nvPr/>
-        </p:nvSpPr>
-        <p:spPr>
-          <a:xfrm>
-            <a:off x="4307738" y="5074920"/>
-            <a:ext cx="3576218" cy="1051560"/>
-          </a:xfrm>
-          <a:prstGeom prst="roundRect">
-            <a:avLst>
-              <a:gd name="adj" fmla="val 10435"/>
-            </a:avLst>
-          </a:prstGeom>
-          <a:solidFill>
-            <a:schemeClr val="bg2"/>
-          </a:solidFill>
-          <a:ln/>
-        </p:spPr>
-      </p:sp>
-      <p:sp>
-        <p:nvSpPr>
-          <p:cNvPr id="32" name="rule-mark-1"/>
-          <p:cNvSpPr/>
-          <p:nvPr/>
-        </p:nvSpPr>
-        <p:spPr>
-          <a:xfrm>
-            <a:off x="4490618" y="5230368"/>
-            <a:ext cx="146304" cy="731520"/>
-          </a:xfrm>
-          <a:prstGeom prst="roundRect">
-            <a:avLst>
-              <a:gd name="adj" fmla="val 31250"/>
-            </a:avLst>
-          </a:prstGeom>
-          <a:solidFill>
-            <a:schemeClr val="accent4"/>
-          </a:solidFill>
-          <a:ln/>
-        </p:spPr>
-      </p:sp>
-      <p:sp>
-        <p:nvSpPr>
-          <p:cNvPr id="33" name="Text 27"/>
-          <p:cNvSpPr txBox="1"/>
-          <p:nvPr/>
-        </p:nvSpPr>
-        <p:spPr>
-          <a:xfrm>
-            <a:off x="4764938" y="5193792"/>
-            <a:ext cx="2936138" cy="868680"/>
-          </a:xfrm>
-          <a:prstGeom prst="rect">
-            <a:avLst/>
-          </a:prstGeom>
-          <a:noFill/>
-          <a:ln/>
-        </p:spPr>
-        <p:txBody>
-          <a:bodyPr wrap="square" lIns="0" tIns="0" rIns="0" bIns="0" rtlCol="0" anchor="t"/>
-          <a:lstStyle/>
-          <a:p>
-            <a:pPr indent="0" marL="0">
-              <a:spcAft>
-                <a:spcPts val="400"/>
-              </a:spcAft>
-              <a:buNone/>
-            </a:pPr>
-            <a:r>
-              <a:rPr lang="en-US" sz="1700" b="1" dirty="0">
-                <a:solidFill>
-                  <a:schemeClr val="accent4"/>
-                </a:solidFill>
-              </a:rPr>
-              <a:t>Повышенный риск</a:t>
-            </a:r>
-            <a:endParaRPr lang="en-US" sz="1700" dirty="0"/>
-          </a:p>
-          <a:p>
-            <a:pPr indent="0" marL="0">
-              <a:spcAft>
-                <a:spcPts val="400"/>
-              </a:spcAft>
-              <a:buNone/>
-            </a:pPr>
-            <a:r>
-              <a:rPr lang="en-US" sz="1400" dirty="0">
-                <a:solidFill>
-                  <a:schemeClr val="tx2"/>
-                </a:solidFill>
-              </a:rPr>
-              <a:t>вероятность ≥ 10% или P10 ниже нуля; без минуса за год — ≥ 60%</a:t>
-            </a:r>
-            <a:endParaRPr lang="en-US" sz="1700" dirty="0"/>
-          </a:p>
-        </p:txBody>
-      </p:sp>
-      <p:sp>
-        <p:nvSpPr>
-          <p:cNvPr id="34" name="Shape 28"/>
-          <p:cNvSpPr/>
-          <p:nvPr/>
-        </p:nvSpPr>
-        <p:spPr>
-          <a:xfrm>
-            <a:off x="8066837" y="5074920"/>
-            <a:ext cx="3576218" cy="1051560"/>
-          </a:xfrm>
-          <a:prstGeom prst="roundRect">
-            <a:avLst>
-              <a:gd name="adj" fmla="val 10435"/>
-            </a:avLst>
-          </a:prstGeom>
-          <a:solidFill>
-            <a:schemeClr val="bg2"/>
-          </a:solidFill>
-          <a:ln/>
-        </p:spPr>
-      </p:sp>
-      <p:sp>
-        <p:nvSpPr>
-          <p:cNvPr id="35" name="rule-mark-2"/>
-          <p:cNvSpPr/>
-          <p:nvPr/>
-        </p:nvSpPr>
-        <p:spPr>
-          <a:xfrm>
-            <a:off x="8249717" y="5230368"/>
-            <a:ext cx="146304" cy="731520"/>
-          </a:xfrm>
-          <a:prstGeom prst="roundRect">
-            <a:avLst>
-              <a:gd name="adj" fmla="val 31250"/>
-            </a:avLst>
-          </a:prstGeom>
-          <a:solidFill>
-            <a:schemeClr val="accent2"/>
-          </a:solidFill>
-          <a:ln/>
-        </p:spPr>
-      </p:sp>
-      <p:sp>
-        <p:nvSpPr>
-          <p:cNvPr id="36" name="Text 30"/>
-          <p:cNvSpPr txBox="1"/>
-          <p:nvPr/>
-        </p:nvSpPr>
-        <p:spPr>
-          <a:xfrm>
-            <a:off x="8524037" y="5193792"/>
-            <a:ext cx="2936138" cy="868680"/>
-          </a:xfrm>
-          <a:prstGeom prst="rect">
-            <a:avLst/>
-          </a:prstGeom>
-          <a:noFill/>
-          <a:ln/>
-        </p:spPr>
-        <p:txBody>
-          <a:bodyPr wrap="square" lIns="0" tIns="0" rIns="0" bIns="0" rtlCol="0" anchor="t"/>
-          <a:lstStyle/>
-          <a:p>
-            <a:pPr indent="0" marL="0">
-              <a:spcAft>
-                <a:spcPts val="400"/>
-              </a:spcAft>
-              <a:buNone/>
-            </a:pPr>
-            <a:r>
-              <a:rPr lang="en-US" sz="1700" b="1" dirty="0">
-                <a:solidFill>
-                  <a:schemeClr val="accent2"/>
-                </a:solidFill>
-              </a:rPr>
-              <a:t>Стабильно</a:t>
-            </a:r>
-            <a:endParaRPr lang="en-US" sz="1700" dirty="0"/>
-          </a:p>
-          <a:p>
-            <a:pPr indent="0" marL="0">
-              <a:spcAft>
-                <a:spcPts val="400"/>
-              </a:spcAft>
-              <a:buNone/>
-            </a:pPr>
-            <a:r>
-              <a:rPr lang="en-US" sz="1400" dirty="0">
-                <a:solidFill>
-                  <a:schemeClr val="tx2"/>
-                </a:solidFill>
-              </a:rPr>
-              <a:t>во всех остальных случаях</a:t>
-            </a:r>
-            <a:endParaRPr lang="en-US" sz="1700" dirty="0"/>
+              <a:t>медианная операция; крупнейшая — 78,7 млн ₽</a:t>
+            </a:r>
+            <a:endParaRPr lang="en-US" sz="1400" dirty="0"/>
           </a:p>
         </p:txBody>
       </p:sp>
@@ -4821,7 +4608,7 @@
                   <a:schemeClr val="tx1"/>
                 </a:solidFill>
               </a:rPr>
-              <a:t>Загружаем контрольный датасет</a:t>
+              <a:t>Как строим прогноз</a:t>
             </a:r>
             <a:endParaRPr lang="en-US" sz="3400" dirty="0"/>
           </a:p>
@@ -4859,7 +4646,7 @@
                   <a:schemeClr val="tx2"/>
                 </a:solidFill>
               </a:rPr>
-              <a:t>Пример — test.csv кейса: 72 062 строки без заголовка, 51 компания в одном файле</a:t>
+              <a:t>Без «чёрного ящика»: каждое число объясняется в журнале расчёта</a:t>
             </a:r>
             <a:endParaRPr lang="en-US" sz="1800" dirty="0"/>
           </a:p>
@@ -4867,22 +4654,22 @@
       </p:sp>
       <p:sp>
         <p:nvSpPr>
-          <p:cNvPr id="4" name="frame-ui_8_control_dataset.png"/>
+          <p:cNvPr id="4" name="Shape 2"/>
           <p:cNvSpPr/>
           <p:nvPr/>
         </p:nvSpPr>
         <p:spPr>
           <a:xfrm>
-            <a:off x="484632" y="1581912"/>
-            <a:ext cx="7351776" cy="4642866"/>
+            <a:off x="548640" y="1645920"/>
+            <a:ext cx="2514600" cy="2743200"/>
           </a:xfrm>
           <a:prstGeom prst="roundRect">
             <a:avLst>
-              <a:gd name="adj" fmla="val 1969"/>
+              <a:gd name="adj" fmla="val 4364"/>
             </a:avLst>
           </a:prstGeom>
           <a:solidFill>
-            <a:schemeClr val="tx1"/>
+            <a:schemeClr val="bg1"/>
           </a:solidFill>
           <a:ln/>
           <a:effectLst>
@@ -4894,9 +4681,29 @@
           </a:effectLst>
         </p:spPr>
       </p:sp>
+      <p:sp>
+        <p:nvSpPr>
+          <p:cNvPr id="5" name="icon-bg-LuFileSpreadsheet"/>
+          <p:cNvSpPr/>
+          <p:nvPr/>
+        </p:nvSpPr>
+        <p:spPr>
+          <a:xfrm>
+            <a:off x="804672" y="1874520"/>
+            <a:ext cx="713232" cy="713232"/>
+          </a:xfrm>
+          <a:prstGeom prst="ellipse">
+            <a:avLst/>
+          </a:prstGeom>
+          <a:solidFill>
+            <a:schemeClr val="accent1"/>
+          </a:solidFill>
+          <a:ln/>
+        </p:spPr>
+      </p:sp>
       <p:pic>
         <p:nvPicPr>
-          <p:cNvPr id="5" name="Image 0" descr="Сайт после загрузки test.csv: выбрана компания C124, критический статус, прогнозный коридор">    </p:cNvPr>
+          <p:cNvPr id="6" name="Image 0" descr="LuFileSpreadsheet">    </p:cNvPr>
           <p:cNvPicPr>
             <a:picLocks noChangeAspect="1"/>
           </p:cNvPicPr>
@@ -4910,8 +4717,8 @@
         </p:blipFill>
         <p:spPr>
           <a:xfrm>
-            <a:off x="548640" y="1645920"/>
-            <a:ext cx="7223760" cy="4514850"/>
+            <a:off x="961583" y="2031431"/>
+            <a:ext cx="399410" cy="399410"/>
           </a:xfrm>
           <a:prstGeom prst="rect">
             <a:avLst/>
@@ -4920,14 +4727,14 @@
       </p:pic>
       <p:sp>
         <p:nvSpPr>
-          <p:cNvPr id="6" name="Text 3"/>
+          <p:cNvPr id="7" name="Text 4"/>
           <p:cNvSpPr txBox="1"/>
           <p:nvPr/>
         </p:nvSpPr>
         <p:spPr>
           <a:xfrm>
-            <a:off x="8229600" y="1600200"/>
-            <a:ext cx="3413455" cy="1325880"/>
+            <a:off x="2240280" y="1892808"/>
+            <a:ext cx="594360" cy="365760"/>
           </a:xfrm>
           <a:prstGeom prst="rect">
             <a:avLst/>
@@ -4936,55 +4743,719 @@
           <a:ln/>
         </p:spPr>
         <p:txBody>
-          <a:bodyPr wrap="square" lIns="0" tIns="0" rIns="0" bIns="0" rtlCol="0" anchor="t"/>
-          <a:lstStyle/>
-          <a:p>
-            <a:pPr indent="0" marL="0">
-              <a:buNone/>
-            </a:pPr>
-            <a:r>
-              <a:rPr lang="en-US" sz="4400" b="1" dirty="0">
-                <a:solidFill>
-                  <a:schemeClr val="accent1"/>
+          <a:bodyPr wrap="square" lIns="0" tIns="0" rIns="0" bIns="0" rtlCol="0" anchor="ctr"/>
+          <a:lstStyle/>
+          <a:p>
+            <a:pPr algn="r" indent="0" marL="0">
+              <a:buNone/>
+            </a:pPr>
+            <a:r>
+              <a:rPr lang="en-US" sz="1600" b="1" dirty="0">
+                <a:solidFill>
+                  <a:schemeClr val="accent5"/>
                 </a:solidFill>
                 <a:latin typeface="+mj-lt" pitchFamily="34" charset="0"/>
                 <a:ea typeface="+mj-lt" pitchFamily="34" charset="-122"/>
                 <a:cs typeface="+mj-lt" pitchFamily="34" charset="-120"/>
               </a:rPr>
-              <a:t>51</a:t>
-            </a:r>
-            <a:endParaRPr lang="en-US" sz="4400" dirty="0"/>
-          </a:p>
+              <a:t>01</a:t>
+            </a:r>
+            <a:endParaRPr lang="en-US" sz="1600" dirty="0"/>
+          </a:p>
+        </p:txBody>
+      </p:sp>
+      <p:sp>
+        <p:nvSpPr>
+          <p:cNvPr id="8" name="Text 5"/>
+          <p:cNvSpPr txBox="1"/>
+          <p:nvPr/>
+        </p:nvSpPr>
+        <p:spPr>
+          <a:xfrm>
+            <a:off x="804672" y="2788920"/>
+            <a:ext cx="2057400" cy="1508760"/>
+          </a:xfrm>
+          <a:prstGeom prst="rect">
+            <a:avLst/>
+          </a:prstGeom>
+          <a:noFill/>
+          <a:ln/>
+        </p:spPr>
+        <p:txBody>
+          <a:bodyPr wrap="square" lIns="0" tIns="0" rIns="0" bIns="0" rtlCol="0" anchor="t"/>
+          <a:lstStyle/>
           <a:p>
             <a:pPr indent="0" marL="0">
-              <a:buNone/>
-            </a:pPr>
-            <a:r>
-              <a:rPr lang="en-US" sz="1500" dirty="0">
+              <a:spcAft>
+                <a:spcPts val="400"/>
+              </a:spcAft>
+              <a:buNone/>
+            </a:pPr>
+            <a:r>
+              <a:rPr lang="en-US" sz="2000" b="1" dirty="0">
+                <a:solidFill>
+                  <a:schemeClr val="tx1"/>
+                </a:solidFill>
+              </a:rPr>
+              <a:t>Выписка</a:t>
+            </a:r>
+            <a:endParaRPr lang="en-US" sz="2000" dirty="0"/>
+          </a:p>
+          <a:p>
+            <a:pPr indent="0" marL="0">
+              <a:spcAft>
+                <a:spcPts val="400"/>
+              </a:spcAft>
+              <a:buNone/>
+            </a:pPr>
+            <a:r>
+              <a:rPr lang="en-US" sz="1400" dirty="0">
                 <a:solidFill>
                   <a:schemeClr val="tx2"/>
                 </a:solidFill>
               </a:rPr>
-              <a:t>компания — прогноз по каждой; компания выбирается в строке статуса</a:t>
-            </a:r>
-            <a:endParaRPr lang="en-US" sz="4400" dirty="0"/>
-          </a:p>
-        </p:txBody>
-      </p:sp>
-      <p:sp>
-        <p:nvSpPr>
-          <p:cNvPr id="7" name="count-chip-0"/>
+              <a:t>Читаем CSV с заголовком и без, много компаний в файле; чистим повторы и сверяем с остатком</a:t>
+            </a:r>
+            <a:endParaRPr lang="en-US" sz="2000" dirty="0"/>
+          </a:p>
+        </p:txBody>
+      </p:sp>
+      <p:sp>
+        <p:nvSpPr>
+          <p:cNvPr id="9" name="step-arrow-0"/>
           <p:cNvSpPr/>
           <p:nvPr/>
         </p:nvSpPr>
         <p:spPr>
           <a:xfrm>
-            <a:off x="8229600" y="3072384"/>
-            <a:ext cx="868680" cy="420624"/>
+            <a:off x="3153613" y="2880360"/>
+            <a:ext cx="164592" cy="274320"/>
+          </a:xfrm>
+          <a:prstGeom prst="chevron">
+            <a:avLst/>
+          </a:prstGeom>
+          <a:solidFill>
+            <a:schemeClr val="accent5"/>
+          </a:solidFill>
+          <a:ln/>
+        </p:spPr>
+      </p:sp>
+      <p:sp>
+        <p:nvSpPr>
+          <p:cNvPr id="10" name="Shape 7"/>
+          <p:cNvSpPr/>
+          <p:nvPr/>
+        </p:nvSpPr>
+        <p:spPr>
+          <a:xfrm>
+            <a:off x="3408578" y="1645920"/>
+            <a:ext cx="2514600" cy="2743200"/>
           </a:xfrm>
           <a:prstGeom prst="roundRect">
             <a:avLst>
-              <a:gd name="adj" fmla="val 50000"/>
+              <a:gd name="adj" fmla="val 4364"/>
+            </a:avLst>
+          </a:prstGeom>
+          <a:solidFill>
+            <a:schemeClr val="bg1"/>
+          </a:solidFill>
+          <a:ln/>
+          <a:effectLst>
+            <a:outerShdw sx="100000" sy="100000" kx="0" ky="0" algn="bl" rotWithShape="0" blurRad="127000" dist="38100" dir="5400000">
+              <a:srgbClr val="0F172A">
+                <a:alpha val="16000"/>
+              </a:srgbClr>
+            </a:outerShdw>
+          </a:effectLst>
+        </p:spPr>
+      </p:sp>
+      <p:sp>
+        <p:nvSpPr>
+          <p:cNvPr id="11" name="icon-bg-LuTags"/>
+          <p:cNvSpPr/>
+          <p:nvPr/>
+        </p:nvSpPr>
+        <p:spPr>
+          <a:xfrm>
+            <a:off x="3664610" y="1874520"/>
+            <a:ext cx="713232" cy="713232"/>
+          </a:xfrm>
+          <a:prstGeom prst="ellipse">
+            <a:avLst/>
+          </a:prstGeom>
+          <a:solidFill>
+            <a:schemeClr val="accent1"/>
+          </a:solidFill>
+          <a:ln/>
+        </p:spPr>
+      </p:sp>
+      <p:pic>
+        <p:nvPicPr>
+          <p:cNvPr id="12" name="Image 1" descr="LuTags">    </p:cNvPr>
+          <p:cNvPicPr>
+            <a:picLocks noChangeAspect="1"/>
+          </p:cNvPicPr>
+          <p:nvPr/>
+        </p:nvPicPr>
+        <p:blipFill>
+          <a:blip r:embed="rId2"/>
+          <a:stretch>
+            <a:fillRect/>
+          </a:stretch>
+        </p:blipFill>
+        <p:spPr>
+          <a:xfrm>
+            <a:off x="3821521" y="2031431"/>
+            <a:ext cx="399410" cy="399410"/>
+          </a:xfrm>
+          <a:prstGeom prst="rect">
+            <a:avLst/>
+          </a:prstGeom>
+        </p:spPr>
+      </p:pic>
+      <p:sp>
+        <p:nvSpPr>
+          <p:cNvPr id="13" name="Text 9"/>
+          <p:cNvSpPr txBox="1"/>
+          <p:nvPr/>
+        </p:nvSpPr>
+        <p:spPr>
+          <a:xfrm>
+            <a:off x="5100218" y="1892808"/>
+            <a:ext cx="594360" cy="365760"/>
+          </a:xfrm>
+          <a:prstGeom prst="rect">
+            <a:avLst/>
+          </a:prstGeom>
+          <a:noFill/>
+          <a:ln/>
+        </p:spPr>
+        <p:txBody>
+          <a:bodyPr wrap="square" lIns="0" tIns="0" rIns="0" bIns="0" rtlCol="0" anchor="ctr"/>
+          <a:lstStyle/>
+          <a:p>
+            <a:pPr algn="r" indent="0" marL="0">
+              <a:buNone/>
+            </a:pPr>
+            <a:r>
+              <a:rPr lang="en-US" sz="1600" b="1" dirty="0">
+                <a:solidFill>
+                  <a:schemeClr val="accent5"/>
+                </a:solidFill>
+                <a:latin typeface="+mj-lt" pitchFamily="34" charset="0"/>
+                <a:ea typeface="+mj-lt" pitchFamily="34" charset="-122"/>
+                <a:cs typeface="+mj-lt" pitchFamily="34" charset="-120"/>
+              </a:rPr>
+              <a:t>02</a:t>
+            </a:r>
+            <a:endParaRPr lang="en-US" sz="1600" dirty="0"/>
+          </a:p>
+        </p:txBody>
+      </p:sp>
+      <p:sp>
+        <p:nvSpPr>
+          <p:cNvPr id="14" name="Text 10"/>
+          <p:cNvSpPr txBox="1"/>
+          <p:nvPr/>
+        </p:nvSpPr>
+        <p:spPr>
+          <a:xfrm>
+            <a:off x="3664610" y="2788920"/>
+            <a:ext cx="2057400" cy="1508760"/>
+          </a:xfrm>
+          <a:prstGeom prst="rect">
+            <a:avLst/>
+          </a:prstGeom>
+          <a:noFill/>
+          <a:ln/>
+        </p:spPr>
+        <p:txBody>
+          <a:bodyPr wrap="square" lIns="0" tIns="0" rIns="0" bIns="0" rtlCol="0" anchor="t"/>
+          <a:lstStyle/>
+          <a:p>
+            <a:pPr indent="0" marL="0">
+              <a:spcAft>
+                <a:spcPts val="400"/>
+              </a:spcAft>
+              <a:buNone/>
+            </a:pPr>
+            <a:r>
+              <a:rPr lang="en-US" sz="2000" b="1" dirty="0">
+                <a:solidFill>
+                  <a:schemeClr val="tx1"/>
+                </a:solidFill>
+              </a:rPr>
+              <a:t>Статьи и платежи</a:t>
+            </a:r>
+            <a:endParaRPr lang="en-US" sz="2000" dirty="0"/>
+          </a:p>
+          <a:p>
+            <a:pPr indent="0" marL="0">
+              <a:spcAft>
+                <a:spcPts val="400"/>
+              </a:spcAft>
+              <a:buNone/>
+            </a:pPr>
+            <a:r>
+              <a:rPr lang="en-US" sz="1400" dirty="0">
+                <a:solidFill>
+                  <a:schemeClr val="tx2"/>
+                </a:solidFill>
+              </a:rPr>
+              <a:t>Выручка, поставщики, зарплата, налоги, аренда; типичный день регулярных платежей</a:t>
+            </a:r>
+            <a:endParaRPr lang="en-US" sz="2000" dirty="0"/>
+          </a:p>
+        </p:txBody>
+      </p:sp>
+      <p:sp>
+        <p:nvSpPr>
+          <p:cNvPr id="15" name="step-arrow-1"/>
+          <p:cNvSpPr/>
+          <p:nvPr/>
+        </p:nvSpPr>
+        <p:spPr>
+          <a:xfrm>
+            <a:off x="6013552" y="2880360"/>
+            <a:ext cx="164592" cy="274320"/>
+          </a:xfrm>
+          <a:prstGeom prst="chevron">
+            <a:avLst/>
+          </a:prstGeom>
+          <a:solidFill>
+            <a:schemeClr val="accent5"/>
+          </a:solidFill>
+          <a:ln/>
+        </p:spPr>
+      </p:sp>
+      <p:sp>
+        <p:nvSpPr>
+          <p:cNvPr id="16" name="Shape 12"/>
+          <p:cNvSpPr/>
+          <p:nvPr/>
+        </p:nvSpPr>
+        <p:spPr>
+          <a:xfrm>
+            <a:off x="6268517" y="1645920"/>
+            <a:ext cx="2514600" cy="2743200"/>
+          </a:xfrm>
+          <a:prstGeom prst="roundRect">
+            <a:avLst>
+              <a:gd name="adj" fmla="val 4364"/>
+            </a:avLst>
+          </a:prstGeom>
+          <a:solidFill>
+            <a:schemeClr val="bg1"/>
+          </a:solidFill>
+          <a:ln/>
+          <a:effectLst>
+            <a:outerShdw sx="100000" sy="100000" kx="0" ky="0" algn="bl" rotWithShape="0" blurRad="127000" dist="38100" dir="5400000">
+              <a:srgbClr val="0F172A">
+                <a:alpha val="16000"/>
+              </a:srgbClr>
+            </a:outerShdw>
+          </a:effectLst>
+        </p:spPr>
+      </p:sp>
+      <p:sp>
+        <p:nvSpPr>
+          <p:cNvPr id="17" name="icon-bg-LuHistory"/>
+          <p:cNvSpPr/>
+          <p:nvPr/>
+        </p:nvSpPr>
+        <p:spPr>
+          <a:xfrm>
+            <a:off x="6524549" y="1874520"/>
+            <a:ext cx="713232" cy="713232"/>
+          </a:xfrm>
+          <a:prstGeom prst="ellipse">
+            <a:avLst/>
+          </a:prstGeom>
+          <a:solidFill>
+            <a:schemeClr val="accent1"/>
+          </a:solidFill>
+          <a:ln/>
+        </p:spPr>
+      </p:sp>
+      <p:pic>
+        <p:nvPicPr>
+          <p:cNvPr id="18" name="Image 2" descr="LuHistory">    </p:cNvPr>
+          <p:cNvPicPr>
+            <a:picLocks noChangeAspect="1"/>
+          </p:cNvPicPr>
+          <p:nvPr/>
+        </p:nvPicPr>
+        <p:blipFill>
+          <a:blip r:embed="rId3"/>
+          <a:stretch>
+            <a:fillRect/>
+          </a:stretch>
+        </p:blipFill>
+        <p:spPr>
+          <a:xfrm>
+            <a:off x="6681460" y="2031431"/>
+            <a:ext cx="399410" cy="399410"/>
+          </a:xfrm>
+          <a:prstGeom prst="rect">
+            <a:avLst/>
+          </a:prstGeom>
+        </p:spPr>
+      </p:pic>
+      <p:sp>
+        <p:nvSpPr>
+          <p:cNvPr id="19" name="Text 14"/>
+          <p:cNvSpPr txBox="1"/>
+          <p:nvPr/>
+        </p:nvSpPr>
+        <p:spPr>
+          <a:xfrm>
+            <a:off x="7960157" y="1892808"/>
+            <a:ext cx="594360" cy="365760"/>
+          </a:xfrm>
+          <a:prstGeom prst="rect">
+            <a:avLst/>
+          </a:prstGeom>
+          <a:noFill/>
+          <a:ln/>
+        </p:spPr>
+        <p:txBody>
+          <a:bodyPr wrap="square" lIns="0" tIns="0" rIns="0" bIns="0" rtlCol="0" anchor="ctr"/>
+          <a:lstStyle/>
+          <a:p>
+            <a:pPr algn="r" indent="0" marL="0">
+              <a:buNone/>
+            </a:pPr>
+            <a:r>
+              <a:rPr lang="en-US" sz="1600" b="1" dirty="0">
+                <a:solidFill>
+                  <a:schemeClr val="accent5"/>
+                </a:solidFill>
+                <a:latin typeface="+mj-lt" pitchFamily="34" charset="0"/>
+                <a:ea typeface="+mj-lt" pitchFamily="34" charset="-122"/>
+                <a:cs typeface="+mj-lt" pitchFamily="34" charset="-120"/>
+              </a:rPr>
+              <a:t>03</a:t>
+            </a:r>
+            <a:endParaRPr lang="en-US" sz="1600" dirty="0"/>
+          </a:p>
+        </p:txBody>
+      </p:sp>
+      <p:sp>
+        <p:nvSpPr>
+          <p:cNvPr id="20" name="Text 15"/>
+          <p:cNvSpPr txBox="1"/>
+          <p:nvPr/>
+        </p:nvSpPr>
+        <p:spPr>
+          <a:xfrm>
+            <a:off x="6524549" y="2788920"/>
+            <a:ext cx="2057400" cy="1508760"/>
+          </a:xfrm>
+          <a:prstGeom prst="rect">
+            <a:avLst/>
+          </a:prstGeom>
+          <a:noFill/>
+          <a:ln/>
+        </p:spPr>
+        <p:txBody>
+          <a:bodyPr wrap="square" lIns="0" tIns="0" rIns="0" bIns="0" rtlCol="0" anchor="t"/>
+          <a:lstStyle/>
+          <a:p>
+            <a:pPr indent="0" marL="0">
+              <a:spcAft>
+                <a:spcPts val="400"/>
+              </a:spcAft>
+              <a:buNone/>
+            </a:pPr>
+            <a:r>
+              <a:rPr lang="en-US" sz="2000" b="1" dirty="0">
+                <a:solidFill>
+                  <a:schemeClr val="tx1"/>
+                </a:solidFill>
+              </a:rPr>
+              <a:t>Похожие месяцы</a:t>
+            </a:r>
+            <a:endParaRPr lang="en-US" sz="2000" dirty="0"/>
+          </a:p>
+          <a:p>
+            <a:pPr indent="0" marL="0">
+              <a:spcAft>
+                <a:spcPts val="400"/>
+              </a:spcAft>
+              <a:buNone/>
+            </a:pPr>
+            <a:r>
+              <a:rPr lang="en-US" sz="1400" dirty="0">
+                <a:solidFill>
+                  <a:schemeClr val="tx2"/>
+                </a:solidFill>
+              </a:rPr>
+              <a:t>30-дневные отрезки истории, начинавшиеся в тот же день месяца: каждый — сценарий остатка</a:t>
+            </a:r>
+            <a:endParaRPr lang="en-US" sz="2000" dirty="0"/>
+          </a:p>
+        </p:txBody>
+      </p:sp>
+      <p:sp>
+        <p:nvSpPr>
+          <p:cNvPr id="21" name="step-arrow-2"/>
+          <p:cNvSpPr/>
+          <p:nvPr/>
+        </p:nvSpPr>
+        <p:spPr>
+          <a:xfrm>
+            <a:off x="8873490" y="2880360"/>
+            <a:ext cx="164592" cy="274320"/>
+          </a:xfrm>
+          <a:prstGeom prst="chevron">
+            <a:avLst/>
+          </a:prstGeom>
+          <a:solidFill>
+            <a:schemeClr val="accent5"/>
+          </a:solidFill>
+          <a:ln/>
+        </p:spPr>
+      </p:sp>
+      <p:sp>
+        <p:nvSpPr>
+          <p:cNvPr id="22" name="Shape 17"/>
+          <p:cNvSpPr/>
+          <p:nvPr/>
+        </p:nvSpPr>
+        <p:spPr>
+          <a:xfrm>
+            <a:off x="9128455" y="1645920"/>
+            <a:ext cx="2514600" cy="2743200"/>
+          </a:xfrm>
+          <a:prstGeom prst="roundRect">
+            <a:avLst>
+              <a:gd name="adj" fmla="val 4364"/>
+            </a:avLst>
+          </a:prstGeom>
+          <a:solidFill>
+            <a:schemeClr val="bg1"/>
+          </a:solidFill>
+          <a:ln/>
+          <a:effectLst>
+            <a:outerShdw sx="100000" sy="100000" kx="0" ky="0" algn="bl" rotWithShape="0" blurRad="127000" dist="38100" dir="5400000">
+              <a:srgbClr val="0F172A">
+                <a:alpha val="16000"/>
+              </a:srgbClr>
+            </a:outerShdw>
+          </a:effectLst>
+        </p:spPr>
+      </p:sp>
+      <p:sp>
+        <p:nvSpPr>
+          <p:cNvPr id="23" name="icon-bg-LuChartSpline"/>
+          <p:cNvSpPr/>
+          <p:nvPr/>
+        </p:nvSpPr>
+        <p:spPr>
+          <a:xfrm>
+            <a:off x="9384487" y="1874520"/>
+            <a:ext cx="713232" cy="713232"/>
+          </a:xfrm>
+          <a:prstGeom prst="ellipse">
+            <a:avLst/>
+          </a:prstGeom>
+          <a:solidFill>
+            <a:schemeClr val="accent1"/>
+          </a:solidFill>
+          <a:ln/>
+        </p:spPr>
+      </p:sp>
+      <p:pic>
+        <p:nvPicPr>
+          <p:cNvPr id="24" name="Image 3" descr="LuChartSpline">    </p:cNvPr>
+          <p:cNvPicPr>
+            <a:picLocks noChangeAspect="1"/>
+          </p:cNvPicPr>
+          <p:nvPr/>
+        </p:nvPicPr>
+        <p:blipFill>
+          <a:blip r:embed="rId4"/>
+          <a:stretch>
+            <a:fillRect/>
+          </a:stretch>
+        </p:blipFill>
+        <p:spPr>
+          <a:xfrm>
+            <a:off x="9541398" y="2031431"/>
+            <a:ext cx="399410" cy="399410"/>
+          </a:xfrm>
+          <a:prstGeom prst="rect">
+            <a:avLst/>
+          </a:prstGeom>
+        </p:spPr>
+      </p:pic>
+      <p:sp>
+        <p:nvSpPr>
+          <p:cNvPr id="25" name="Text 19"/>
+          <p:cNvSpPr txBox="1"/>
+          <p:nvPr/>
+        </p:nvSpPr>
+        <p:spPr>
+          <a:xfrm>
+            <a:off x="10820095" y="1892808"/>
+            <a:ext cx="594360" cy="365760"/>
+          </a:xfrm>
+          <a:prstGeom prst="rect">
+            <a:avLst/>
+          </a:prstGeom>
+          <a:noFill/>
+          <a:ln/>
+        </p:spPr>
+        <p:txBody>
+          <a:bodyPr wrap="square" lIns="0" tIns="0" rIns="0" bIns="0" rtlCol="0" anchor="ctr"/>
+          <a:lstStyle/>
+          <a:p>
+            <a:pPr algn="r" indent="0" marL="0">
+              <a:buNone/>
+            </a:pPr>
+            <a:r>
+              <a:rPr lang="en-US" sz="1600" b="1" dirty="0">
+                <a:solidFill>
+                  <a:schemeClr val="accent5"/>
+                </a:solidFill>
+                <a:latin typeface="+mj-lt" pitchFamily="34" charset="0"/>
+                <a:ea typeface="+mj-lt" pitchFamily="34" charset="-122"/>
+                <a:cs typeface="+mj-lt" pitchFamily="34" charset="-120"/>
+              </a:rPr>
+              <a:t>04</a:t>
+            </a:r>
+            <a:endParaRPr lang="en-US" sz="1600" dirty="0"/>
+          </a:p>
+        </p:txBody>
+      </p:sp>
+      <p:sp>
+        <p:nvSpPr>
+          <p:cNvPr id="26" name="Text 20"/>
+          <p:cNvSpPr txBox="1"/>
+          <p:nvPr/>
+        </p:nvSpPr>
+        <p:spPr>
+          <a:xfrm>
+            <a:off x="9384487" y="2788920"/>
+            <a:ext cx="2057400" cy="1508760"/>
+          </a:xfrm>
+          <a:prstGeom prst="rect">
+            <a:avLst/>
+          </a:prstGeom>
+          <a:noFill/>
+          <a:ln/>
+        </p:spPr>
+        <p:txBody>
+          <a:bodyPr wrap="square" lIns="0" tIns="0" rIns="0" bIns="0" rtlCol="0" anchor="t"/>
+          <a:lstStyle/>
+          <a:p>
+            <a:pPr indent="0" marL="0">
+              <a:spcAft>
+                <a:spcPts val="400"/>
+              </a:spcAft>
+              <a:buNone/>
+            </a:pPr>
+            <a:r>
+              <a:rPr lang="en-US" sz="2000" b="1" dirty="0">
+                <a:solidFill>
+                  <a:schemeClr val="tx1"/>
+                </a:solidFill>
+              </a:rPr>
+              <a:t>Прогноз и риск</a:t>
+            </a:r>
+            <a:endParaRPr lang="en-US" sz="2000" dirty="0"/>
+          </a:p>
+          <a:p>
+            <a:pPr indent="0" marL="0">
+              <a:spcAft>
+                <a:spcPts val="400"/>
+              </a:spcAft>
+              <a:buNone/>
+            </a:pPr>
+            <a:r>
+              <a:rPr lang="en-US" sz="1400" dirty="0">
+                <a:solidFill>
+                  <a:schemeClr val="tx2"/>
+                </a:solidFill>
+              </a:rPr>
+              <a:t>P10 / P50 / P90 на каждый день; вероятность разрыва — доля сценариев с минусом</a:t>
+            </a:r>
+            <a:endParaRPr lang="en-US" sz="2000" dirty="0"/>
+          </a:p>
+        </p:txBody>
+      </p:sp>
+      <p:sp>
+        <p:nvSpPr>
+          <p:cNvPr id="27" name="Text 21"/>
+          <p:cNvSpPr txBox="1"/>
+          <p:nvPr/>
+        </p:nvSpPr>
+        <p:spPr>
+          <a:xfrm>
+            <a:off x="548640" y="4663440"/>
+            <a:ext cx="2743200" cy="365760"/>
+          </a:xfrm>
+          <a:prstGeom prst="rect">
+            <a:avLst/>
+          </a:prstGeom>
+          <a:noFill/>
+          <a:ln/>
+        </p:spPr>
+        <p:txBody>
+          <a:bodyPr wrap="square" lIns="0" tIns="0" rIns="0" bIns="0" rtlCol="0" anchor="ctr"/>
+          <a:lstStyle/>
+          <a:p>
+            <a:pPr indent="0" marL="0">
+              <a:buNone/>
+            </a:pPr>
+            <a:r>
+              <a:rPr lang="en-US" sz="1600" b="1" dirty="0">
+                <a:solidFill>
+                  <a:schemeClr val="tx1"/>
+                </a:solidFill>
+              </a:rPr>
+              <a:t>Статус компании</a:t>
+            </a:r>
+            <a:endParaRPr lang="en-US" sz="1600" dirty="0"/>
+          </a:p>
+        </p:txBody>
+      </p:sp>
+      <p:sp>
+        <p:nvSpPr>
+          <p:cNvPr id="28" name="Shape 22"/>
+          <p:cNvSpPr/>
+          <p:nvPr/>
+        </p:nvSpPr>
+        <p:spPr>
+          <a:xfrm>
+            <a:off x="548640" y="5074920"/>
+            <a:ext cx="3576218" cy="1051560"/>
+          </a:xfrm>
+          <a:prstGeom prst="roundRect">
+            <a:avLst>
+              <a:gd name="adj" fmla="val 10435"/>
+            </a:avLst>
+          </a:prstGeom>
+          <a:solidFill>
+            <a:schemeClr val="bg2"/>
+          </a:solidFill>
+          <a:ln/>
+        </p:spPr>
+      </p:sp>
+      <p:sp>
+        <p:nvSpPr>
+          <p:cNvPr id="29" name="rule-mark-0"/>
+          <p:cNvSpPr/>
+          <p:nvPr/>
+        </p:nvSpPr>
+        <p:spPr>
+          <a:xfrm>
+            <a:off x="731520" y="5230368"/>
+            <a:ext cx="146304" cy="731520"/>
+          </a:xfrm>
+          <a:prstGeom prst="roundRect">
+            <a:avLst>
+              <a:gd name="adj" fmla="val 31250"/>
             </a:avLst>
           </a:prstGeom>
           <a:solidFill>
@@ -4995,14 +5466,14 @@
       </p:sp>
       <p:sp>
         <p:nvSpPr>
-          <p:cNvPr id="8" name="Text 5"/>
+          <p:cNvPr id="30" name="Text 24"/>
           <p:cNvSpPr txBox="1"/>
           <p:nvPr/>
         </p:nvSpPr>
         <p:spPr>
           <a:xfrm>
-            <a:off x="8229600" y="3072384"/>
-            <a:ext cx="868680" cy="420624"/>
+            <a:off x="1005840" y="5193792"/>
+            <a:ext cx="2936138" cy="868680"/>
           </a:xfrm>
           <a:prstGeom prst="rect">
             <a:avLst/>
@@ -5011,77 +5482,80 @@
           <a:ln/>
         </p:spPr>
         <p:txBody>
-          <a:bodyPr wrap="square" lIns="0" tIns="0" rIns="0" bIns="0" rtlCol="0" anchor="ctr"/>
-          <a:lstStyle/>
-          <a:p>
-            <a:pPr algn="ctr" indent="0" marL="0">
-              <a:buNone/>
-            </a:pPr>
-            <a:r>
-              <a:rPr lang="en-US" sz="1800" b="1" dirty="0">
-                <a:solidFill>
-                  <a:schemeClr val="bg1"/>
-                </a:solidFill>
-                <a:latin typeface="+mj-lt" pitchFamily="34" charset="0"/>
-                <a:ea typeface="+mj-lt" pitchFamily="34" charset="-122"/>
-                <a:cs typeface="+mj-lt" pitchFamily="34" charset="-120"/>
-              </a:rPr>
-              <a:t>3</a:t>
-            </a:r>
-            <a:endParaRPr lang="en-US" sz="1800" dirty="0"/>
-          </a:p>
-        </p:txBody>
-      </p:sp>
-      <p:sp>
-        <p:nvSpPr>
-          <p:cNvPr id="9" name="Text 6"/>
-          <p:cNvSpPr txBox="1"/>
-          <p:nvPr/>
-        </p:nvSpPr>
-        <p:spPr>
-          <a:xfrm>
-            <a:off x="9281160" y="3017520"/>
-            <a:ext cx="2361895" cy="530352"/>
-          </a:xfrm>
-          <a:prstGeom prst="rect">
-            <a:avLst/>
-          </a:prstGeom>
-          <a:noFill/>
-          <a:ln/>
-        </p:spPr>
-        <p:txBody>
-          <a:bodyPr wrap="square" lIns="0" tIns="0" rIns="0" bIns="0" rtlCol="0" anchor="ctr"/>
+          <a:bodyPr wrap="square" lIns="0" tIns="0" rIns="0" bIns="0" rtlCol="0" anchor="t"/>
           <a:lstStyle/>
           <a:p>
             <a:pPr indent="0" marL="0">
-              <a:buNone/>
-            </a:pPr>
-            <a:r>
-              <a:rPr lang="en-US" sz="1600" dirty="0">
-                <a:solidFill>
-                  <a:schemeClr val="tx1"/>
-                </a:solidFill>
-              </a:rPr>
-              <a:t>критический статус</a:t>
-            </a:r>
-            <a:endParaRPr lang="en-US" sz="1600" dirty="0"/>
-          </a:p>
-        </p:txBody>
-      </p:sp>
-      <p:sp>
-        <p:nvSpPr>
-          <p:cNvPr id="10" name="count-chip-1"/>
+              <a:spcAft>
+                <a:spcPts val="400"/>
+              </a:spcAft>
+              <a:buNone/>
+            </a:pPr>
+            <a:r>
+              <a:rPr lang="en-US" sz="1700" b="1" dirty="0">
+                <a:solidFill>
+                  <a:schemeClr val="accent3"/>
+                </a:solidFill>
+              </a:rPr>
+              <a:t>Критический</a:t>
+            </a:r>
+            <a:endParaRPr lang="en-US" sz="1700" dirty="0"/>
+          </a:p>
+          <a:p>
+            <a:pPr indent="0" marL="0">
+              <a:spcAft>
+                <a:spcPts val="400"/>
+              </a:spcAft>
+              <a:buNone/>
+            </a:pPr>
+            <a:r>
+              <a:rPr lang="en-US" sz="1400" dirty="0">
+                <a:solidFill>
+                  <a:schemeClr val="tx2"/>
+                </a:solidFill>
+              </a:rPr>
+              <a:t>вероятность ≥ 50% или P50 ниже нуля; без минуса за год — ≥ 80%</a:t>
+            </a:r>
+            <a:endParaRPr lang="en-US" sz="1700" dirty="0"/>
+          </a:p>
+        </p:txBody>
+      </p:sp>
+      <p:sp>
+        <p:nvSpPr>
+          <p:cNvPr id="31" name="Shape 25"/>
           <p:cNvSpPr/>
           <p:nvPr/>
         </p:nvSpPr>
         <p:spPr>
           <a:xfrm>
-            <a:off x="8229600" y="3639312"/>
-            <a:ext cx="868680" cy="420624"/>
+            <a:off x="4307738" y="5074920"/>
+            <a:ext cx="3576218" cy="1051560"/>
           </a:xfrm>
           <a:prstGeom prst="roundRect">
             <a:avLst>
-              <a:gd name="adj" fmla="val 50000"/>
+              <a:gd name="adj" fmla="val 10435"/>
+            </a:avLst>
+          </a:prstGeom>
+          <a:solidFill>
+            <a:schemeClr val="bg2"/>
+          </a:solidFill>
+          <a:ln/>
+        </p:spPr>
+      </p:sp>
+      <p:sp>
+        <p:nvSpPr>
+          <p:cNvPr id="32" name="rule-mark-1"/>
+          <p:cNvSpPr/>
+          <p:nvPr/>
+        </p:nvSpPr>
+        <p:spPr>
+          <a:xfrm>
+            <a:off x="4490618" y="5230368"/>
+            <a:ext cx="146304" cy="731520"/>
+          </a:xfrm>
+          <a:prstGeom prst="roundRect">
+            <a:avLst>
+              <a:gd name="adj" fmla="val 31250"/>
             </a:avLst>
           </a:prstGeom>
           <a:solidFill>
@@ -5092,14 +5566,14 @@
       </p:sp>
       <p:sp>
         <p:nvSpPr>
-          <p:cNvPr id="11" name="Text 8"/>
+          <p:cNvPr id="33" name="Text 27"/>
           <p:cNvSpPr txBox="1"/>
           <p:nvPr/>
         </p:nvSpPr>
         <p:spPr>
           <a:xfrm>
-            <a:off x="8229600" y="3639312"/>
-            <a:ext cx="868680" cy="420624"/>
+            <a:off x="4764938" y="5193792"/>
+            <a:ext cx="2936138" cy="868680"/>
           </a:xfrm>
           <a:prstGeom prst="rect">
             <a:avLst/>
@@ -5108,77 +5582,80 @@
           <a:ln/>
         </p:spPr>
         <p:txBody>
-          <a:bodyPr wrap="square" lIns="0" tIns="0" rIns="0" bIns="0" rtlCol="0" anchor="ctr"/>
-          <a:lstStyle/>
-          <a:p>
-            <a:pPr algn="ctr" indent="0" marL="0">
-              <a:buNone/>
-            </a:pPr>
-            <a:r>
-              <a:rPr lang="en-US" sz="1800" b="1" dirty="0">
-                <a:solidFill>
-                  <a:schemeClr val="bg1"/>
-                </a:solidFill>
-                <a:latin typeface="+mj-lt" pitchFamily="34" charset="0"/>
-                <a:ea typeface="+mj-lt" pitchFamily="34" charset="-122"/>
-                <a:cs typeface="+mj-lt" pitchFamily="34" charset="-120"/>
-              </a:rPr>
-              <a:t>6</a:t>
-            </a:r>
-            <a:endParaRPr lang="en-US" sz="1800" dirty="0"/>
-          </a:p>
-        </p:txBody>
-      </p:sp>
-      <p:sp>
-        <p:nvSpPr>
-          <p:cNvPr id="12" name="Text 9"/>
-          <p:cNvSpPr txBox="1"/>
-          <p:nvPr/>
-        </p:nvSpPr>
-        <p:spPr>
-          <a:xfrm>
-            <a:off x="9281160" y="3584448"/>
-            <a:ext cx="2361895" cy="530352"/>
-          </a:xfrm>
-          <a:prstGeom prst="rect">
-            <a:avLst/>
-          </a:prstGeom>
-          <a:noFill/>
-          <a:ln/>
-        </p:spPr>
-        <p:txBody>
-          <a:bodyPr wrap="square" lIns="0" tIns="0" rIns="0" bIns="0" rtlCol="0" anchor="ctr"/>
+          <a:bodyPr wrap="square" lIns="0" tIns="0" rIns="0" bIns="0" rtlCol="0" anchor="t"/>
           <a:lstStyle/>
           <a:p>
             <a:pPr indent="0" marL="0">
-              <a:buNone/>
-            </a:pPr>
-            <a:r>
-              <a:rPr lang="en-US" sz="1600" dirty="0">
-                <a:solidFill>
-                  <a:schemeClr val="tx1"/>
-                </a:solidFill>
-              </a:rPr>
-              <a:t>повышенный риск</a:t>
-            </a:r>
-            <a:endParaRPr lang="en-US" sz="1600" dirty="0"/>
-          </a:p>
-        </p:txBody>
-      </p:sp>
-      <p:sp>
-        <p:nvSpPr>
-          <p:cNvPr id="13" name="count-chip-2"/>
+              <a:spcAft>
+                <a:spcPts val="400"/>
+              </a:spcAft>
+              <a:buNone/>
+            </a:pPr>
+            <a:r>
+              <a:rPr lang="en-US" sz="1700" b="1" dirty="0">
+                <a:solidFill>
+                  <a:schemeClr val="accent4"/>
+                </a:solidFill>
+              </a:rPr>
+              <a:t>Повышенный риск</a:t>
+            </a:r>
+            <a:endParaRPr lang="en-US" sz="1700" dirty="0"/>
+          </a:p>
+          <a:p>
+            <a:pPr indent="0" marL="0">
+              <a:spcAft>
+                <a:spcPts val="400"/>
+              </a:spcAft>
+              <a:buNone/>
+            </a:pPr>
+            <a:r>
+              <a:rPr lang="en-US" sz="1400" dirty="0">
+                <a:solidFill>
+                  <a:schemeClr val="tx2"/>
+                </a:solidFill>
+              </a:rPr>
+              <a:t>вероятность ≥ 10% или P10 ниже нуля; без минуса за год — ≥ 60%</a:t>
+            </a:r>
+            <a:endParaRPr lang="en-US" sz="1700" dirty="0"/>
+          </a:p>
+        </p:txBody>
+      </p:sp>
+      <p:sp>
+        <p:nvSpPr>
+          <p:cNvPr id="34" name="Shape 28"/>
           <p:cNvSpPr/>
           <p:nvPr/>
         </p:nvSpPr>
         <p:spPr>
           <a:xfrm>
-            <a:off x="8229600" y="4206240"/>
-            <a:ext cx="868680" cy="420624"/>
+            <a:off x="8066837" y="5074920"/>
+            <a:ext cx="3576218" cy="1051560"/>
           </a:xfrm>
           <a:prstGeom prst="roundRect">
             <a:avLst>
-              <a:gd name="adj" fmla="val 50000"/>
+              <a:gd name="adj" fmla="val 10435"/>
+            </a:avLst>
+          </a:prstGeom>
+          <a:solidFill>
+            <a:schemeClr val="bg2"/>
+          </a:solidFill>
+          <a:ln/>
+        </p:spPr>
+      </p:sp>
+      <p:sp>
+        <p:nvSpPr>
+          <p:cNvPr id="35" name="rule-mark-2"/>
+          <p:cNvSpPr/>
+          <p:nvPr/>
+        </p:nvSpPr>
+        <p:spPr>
+          <a:xfrm>
+            <a:off x="8249717" y="5230368"/>
+            <a:ext cx="146304" cy="731520"/>
+          </a:xfrm>
+          <a:prstGeom prst="roundRect">
+            <a:avLst>
+              <a:gd name="adj" fmla="val 31250"/>
             </a:avLst>
           </a:prstGeom>
           <a:solidFill>
@@ -5189,14 +5666,14 @@
       </p:sp>
       <p:sp>
         <p:nvSpPr>
-          <p:cNvPr id="14" name="Text 11"/>
+          <p:cNvPr id="36" name="Text 30"/>
           <p:cNvSpPr txBox="1"/>
           <p:nvPr/>
         </p:nvSpPr>
         <p:spPr>
           <a:xfrm>
-            <a:off x="8229600" y="4206240"/>
-            <a:ext cx="868680" cy="420624"/>
+            <a:off x="8524037" y="5193792"/>
+            <a:ext cx="2936138" cy="868680"/>
           </a:xfrm>
           <a:prstGeom prst="rect">
             <a:avLst/>
@@ -5205,132 +5682,41 @@
           <a:ln/>
         </p:spPr>
         <p:txBody>
-          <a:bodyPr wrap="square" lIns="0" tIns="0" rIns="0" bIns="0" rtlCol="0" anchor="ctr"/>
-          <a:lstStyle/>
-          <a:p>
-            <a:pPr algn="ctr" indent="0" marL="0">
-              <a:buNone/>
-            </a:pPr>
-            <a:r>
-              <a:rPr lang="en-US" sz="1800" b="1" dirty="0">
-                <a:solidFill>
-                  <a:schemeClr val="bg1"/>
-                </a:solidFill>
-                <a:latin typeface="+mj-lt" pitchFamily="34" charset="0"/>
-                <a:ea typeface="+mj-lt" pitchFamily="34" charset="-122"/>
-                <a:cs typeface="+mj-lt" pitchFamily="34" charset="-120"/>
-              </a:rPr>
-              <a:t>42</a:t>
-            </a:r>
-            <a:endParaRPr lang="en-US" sz="1800" dirty="0"/>
-          </a:p>
-        </p:txBody>
-      </p:sp>
-      <p:sp>
-        <p:nvSpPr>
-          <p:cNvPr id="15" name="Text 12"/>
-          <p:cNvSpPr txBox="1"/>
-          <p:nvPr/>
-        </p:nvSpPr>
-        <p:spPr>
-          <a:xfrm>
-            <a:off x="9281160" y="4151376"/>
-            <a:ext cx="2361895" cy="530352"/>
-          </a:xfrm>
-          <a:prstGeom prst="rect">
-            <a:avLst/>
-          </a:prstGeom>
-          <a:noFill/>
-          <a:ln/>
-        </p:spPr>
-        <p:txBody>
-          <a:bodyPr wrap="square" lIns="0" tIns="0" rIns="0" bIns="0" rtlCol="0" anchor="ctr"/>
+          <a:bodyPr wrap="square" lIns="0" tIns="0" rIns="0" bIns="0" rtlCol="0" anchor="t"/>
           <a:lstStyle/>
           <a:p>
             <a:pPr indent="0" marL="0">
-              <a:buNone/>
-            </a:pPr>
-            <a:r>
-              <a:rPr lang="en-US" sz="1600" dirty="0">
-                <a:solidFill>
-                  <a:schemeClr val="tx1"/>
-                </a:solidFill>
-              </a:rPr>
-              <a:t>стабильно</a:t>
-            </a:r>
-            <a:endParaRPr lang="en-US" sz="1600" dirty="0"/>
-          </a:p>
-        </p:txBody>
-      </p:sp>
-      <p:sp>
-        <p:nvSpPr>
-          <p:cNvPr id="16" name="Shape 13"/>
-          <p:cNvSpPr/>
-          <p:nvPr/>
-        </p:nvSpPr>
-        <p:spPr>
-          <a:xfrm>
-            <a:off x="8229600" y="4846320"/>
-            <a:ext cx="3413455" cy="1097280"/>
-          </a:xfrm>
-          <a:prstGeom prst="roundRect">
-            <a:avLst>
-              <a:gd name="adj" fmla="val 10000"/>
-            </a:avLst>
-          </a:prstGeom>
-          <a:solidFill>
-            <a:schemeClr val="bg2"/>
-          </a:solidFill>
-          <a:ln/>
-        </p:spPr>
-      </p:sp>
-      <p:sp>
-        <p:nvSpPr>
-          <p:cNvPr id="17" name="Text 14"/>
-          <p:cNvSpPr txBox="1"/>
-          <p:nvPr/>
-        </p:nvSpPr>
-        <p:spPr>
-          <a:xfrm>
-            <a:off x="8412480" y="4937760"/>
-            <a:ext cx="3047695" cy="914400"/>
-          </a:xfrm>
-          <a:prstGeom prst="rect">
-            <a:avLst/>
-          </a:prstGeom>
-          <a:noFill/>
-          <a:ln/>
-        </p:spPr>
-        <p:txBody>
-          <a:bodyPr wrap="square" lIns="0" tIns="0" rIns="0" bIns="0" rtlCol="0" anchor="ctr"/>
-          <a:lstStyle/>
+              <a:spcAft>
+                <a:spcPts val="400"/>
+              </a:spcAft>
+              <a:buNone/>
+            </a:pPr>
+            <a:r>
+              <a:rPr lang="en-US" sz="1700" b="1" dirty="0">
+                <a:solidFill>
+                  <a:schemeClr val="accent2"/>
+                </a:solidFill>
+              </a:rPr>
+              <a:t>Стабильно</a:t>
+            </a:r>
+            <a:endParaRPr lang="en-US" sz="1700" dirty="0"/>
+          </a:p>
           <a:p>
             <a:pPr indent="0" marL="0">
-              <a:buNone/>
-            </a:pPr>
-            <a:r>
-              <a:rPr lang="en-US" sz="1500" b="1" dirty="0">
-                <a:solidFill>
-                  <a:schemeClr val="accent3"/>
-                </a:solidFill>
-              </a:rPr>
-              <a:t>C124 на экране: вероятность 62,5%</a:t>
-            </a:r>
-            <a:endParaRPr lang="en-US" sz="1500" dirty="0"/>
-          </a:p>
-          <a:p>
-            <a:pPr indent="0" marL="0">
+              <a:spcAft>
+                <a:spcPts val="400"/>
+              </a:spcAft>
               <a:buNone/>
             </a:pPr>
             <a:r>
               <a:rPr lang="en-US" sz="1400" dirty="0">
                 <a:solidFill>
-                  <a:schemeClr val="tx1"/>
-                </a:solidFill>
-              </a:rPr>
-              <a:t>45 из 72 сценариев уходят в минус; худший P10 −4,1 млн ₽ к 30.10</a:t>
-            </a:r>
-            <a:endParaRPr lang="en-US" sz="1500" dirty="0"/>
+                  <a:schemeClr val="tx2"/>
+                </a:solidFill>
+              </a:rPr>
+              <a:t>во всех остальных случаях</a:t>
+            </a:r>
+            <a:endParaRPr lang="en-US" sz="1700" dirty="0"/>
           </a:p>
         </p:txBody>
       </p:sp>
@@ -5436,7 +5822,7 @@
                   <a:schemeClr val="tx1"/>
                 </a:solidFill>
               </a:rPr>
-              <a:t>Пошаговый журнал расчёта</a:t>
+              <a:t>Загружаем контрольный датасет</a:t>
             </a:r>
             <a:endParaRPr lang="en-US" sz="3400" dirty="0"/>
           </a:p>
@@ -5474,7 +5860,7 @@
                   <a:schemeClr val="tx2"/>
                 </a:solidFill>
               </a:rPr>
-              <a:t>Один и тот же текст — на сайте, в HTML-отчёте и в файле calc_log.md</a:t>
+              <a:t>Пример — компании test.csv кейса: 72 062 строки, 51 компания в одном файле</a:t>
             </a:r>
             <a:endParaRPr lang="en-US" sz="1800" dirty="0"/>
           </a:p>
@@ -5482,7 +5868,7 @@
       </p:sp>
       <p:sp>
         <p:nvSpPr>
-          <p:cNvPr id="4" name="frame-ui_9_control_calc_log.png"/>
+          <p:cNvPr id="4" name="frame-ui_8_control_dataset.png"/>
           <p:cNvSpPr/>
           <p:nvPr/>
         </p:nvSpPr>
@@ -5511,7 +5897,7 @@
       </p:sp>
       <p:pic>
         <p:nvPicPr>
-          <p:cNvPr id="5" name="Image 0" descr="Вкладка «4. Журнал расчёта» для компании C124">    </p:cNvPr>
+          <p:cNvPr id="5" name="Image 0" descr="Сайт после загрузки test.csv: выбрана компания C124, критический статус, прогнозный коридор">    </p:cNvPr>
           <p:cNvPicPr>
             <a:picLocks noChangeAspect="1"/>
           </p:cNvPicPr>
@@ -5535,34 +5921,14 @@
       </p:pic>
       <p:sp>
         <p:nvSpPr>
-          <p:cNvPr id="6" name="badge-1"/>
-          <p:cNvSpPr/>
-          <p:nvPr/>
-        </p:nvSpPr>
-        <p:spPr>
-          <a:xfrm>
-            <a:off x="8229600" y="1691640"/>
-            <a:ext cx="420624" cy="420624"/>
-          </a:xfrm>
-          <a:prstGeom prst="ellipse">
-            <a:avLst/>
-          </a:prstGeom>
-          <a:solidFill>
-            <a:schemeClr val="accent1"/>
-          </a:solidFill>
-          <a:ln/>
-        </p:spPr>
-      </p:sp>
-      <p:sp>
-        <p:nvSpPr>
-          <p:cNvPr id="7" name="Text 4"/>
+          <p:cNvPr id="6" name="Text 3"/>
           <p:cNvSpPr txBox="1"/>
           <p:nvPr/>
         </p:nvSpPr>
         <p:spPr>
           <a:xfrm>
-            <a:off x="8229600" y="1691640"/>
-            <a:ext cx="420624" cy="420624"/>
+            <a:off x="8229600" y="1600200"/>
+            <a:ext cx="3413455" cy="1325880"/>
           </a:xfrm>
           <a:prstGeom prst="rect">
             <a:avLst/>
@@ -5571,26 +5937,62 @@
           <a:ln/>
         </p:spPr>
         <p:txBody>
-          <a:bodyPr wrap="square" lIns="0" tIns="0" rIns="0" bIns="0" rtlCol="0" anchor="ctr"/>
-          <a:lstStyle/>
-          <a:p>
-            <a:pPr algn="ctr" indent="0" marL="0">
-              <a:buNone/>
-            </a:pPr>
-            <a:r>
-              <a:rPr lang="en-US" sz="1600" b="1" dirty="0">
-                <a:solidFill>
-                  <a:schemeClr val="bg1"/>
+          <a:bodyPr wrap="square" lIns="0" tIns="0" rIns="0" bIns="0" rtlCol="0" anchor="t"/>
+          <a:lstStyle/>
+          <a:p>
+            <a:pPr indent="0" marL="0">
+              <a:buNone/>
+            </a:pPr>
+            <a:r>
+              <a:rPr lang="en-US" sz="4400" b="1" dirty="0">
+                <a:solidFill>
+                  <a:schemeClr val="accent1"/>
                 </a:solidFill>
                 <a:latin typeface="+mj-lt" pitchFamily="34" charset="0"/>
                 <a:ea typeface="+mj-lt" pitchFamily="34" charset="-122"/>
                 <a:cs typeface="+mj-lt" pitchFamily="34" charset="-120"/>
               </a:rPr>
-              <a:t>1</a:t>
-            </a:r>
-            <a:endParaRPr lang="en-US" sz="1600" dirty="0"/>
-          </a:p>
-        </p:txBody>
+              <a:t>51</a:t>
+            </a:r>
+            <a:endParaRPr lang="en-US" sz="4400" dirty="0"/>
+          </a:p>
+          <a:p>
+            <a:pPr indent="0" marL="0">
+              <a:buNone/>
+            </a:pPr>
+            <a:r>
+              <a:rPr lang="en-US" sz="1500" dirty="0">
+                <a:solidFill>
+                  <a:schemeClr val="tx2"/>
+                </a:solidFill>
+              </a:rPr>
+              <a:t>компания — прогноз по каждой; компания выбирается в строке статуса</a:t>
+            </a:r>
+            <a:endParaRPr lang="en-US" sz="4400" dirty="0"/>
+          </a:p>
+        </p:txBody>
+      </p:sp>
+      <p:sp>
+        <p:nvSpPr>
+          <p:cNvPr id="7" name="count-chip-0"/>
+          <p:cNvSpPr/>
+          <p:nvPr/>
+        </p:nvSpPr>
+        <p:spPr>
+          <a:xfrm>
+            <a:off x="8229600" y="3072384"/>
+            <a:ext cx="868680" cy="420624"/>
+          </a:xfrm>
+          <a:prstGeom prst="roundRect">
+            <a:avLst>
+              <a:gd name="adj" fmla="val 50000"/>
+            </a:avLst>
+          </a:prstGeom>
+          <a:solidFill>
+            <a:schemeClr val="accent3"/>
+          </a:solidFill>
+          <a:ln/>
+        </p:spPr>
       </p:sp>
       <p:sp>
         <p:nvSpPr>
@@ -5600,8 +6002,8 @@
         </p:nvSpPr>
         <p:spPr>
           <a:xfrm>
-            <a:off x="8823960" y="1673352"/>
-            <a:ext cx="2819095" cy="1325880"/>
+            <a:off x="8229600" y="3072384"/>
+            <a:ext cx="868680" cy="420624"/>
           </a:xfrm>
           <a:prstGeom prst="rect">
             <a:avLst/>
@@ -5610,90 +6012,14 @@
           <a:ln/>
         </p:spPr>
         <p:txBody>
-          <a:bodyPr wrap="square" lIns="0" tIns="0" rIns="0" bIns="0" rtlCol="0" anchor="t"/>
-          <a:lstStyle/>
-          <a:p>
-            <a:pPr indent="0" marL="0">
-              <a:spcAft>
-                <a:spcPts val="400"/>
-              </a:spcAft>
+          <a:bodyPr wrap="square" lIns="0" tIns="0" rIns="0" bIns="0" rtlCol="0" anchor="ctr"/>
+          <a:lstStyle/>
+          <a:p>
+            <a:pPr algn="ctr" indent="0" marL="0">
               <a:buNone/>
             </a:pPr>
             <a:r>
               <a:rPr lang="en-US" sz="1800" b="1" dirty="0">
-                <a:solidFill>
-                  <a:schemeClr val="tx1"/>
-                </a:solidFill>
-              </a:rPr>
-              <a:t>На сайте</a:t>
-            </a:r>
-            <a:endParaRPr lang="en-US" sz="1800" dirty="0"/>
-          </a:p>
-          <a:p>
-            <a:pPr indent="0" marL="0">
-              <a:spcAft>
-                <a:spcPts val="400"/>
-              </a:spcAft>
-              <a:buNone/>
-            </a:pPr>
-            <a:r>
-              <a:rPr lang="en-US" sz="1500" dirty="0">
-                <a:solidFill>
-                  <a:schemeClr val="tx2"/>
-                </a:solidFill>
-              </a:rPr>
-              <a:t>Вкладка «4. Журнал расчёта»: 12 шагов с числами этой компании — от чтения файла до статуса</a:t>
-            </a:r>
-            <a:endParaRPr lang="en-US" sz="1800" dirty="0"/>
-          </a:p>
-        </p:txBody>
-      </p:sp>
-      <p:sp>
-        <p:nvSpPr>
-          <p:cNvPr id="9" name="badge-2"/>
-          <p:cNvSpPr/>
-          <p:nvPr/>
-        </p:nvSpPr>
-        <p:spPr>
-          <a:xfrm>
-            <a:off x="8229600" y="3172968"/>
-            <a:ext cx="420624" cy="420624"/>
-          </a:xfrm>
-          <a:prstGeom prst="ellipse">
-            <a:avLst/>
-          </a:prstGeom>
-          <a:solidFill>
-            <a:schemeClr val="accent1"/>
-          </a:solidFill>
-          <a:ln/>
-        </p:spPr>
-      </p:sp>
-      <p:sp>
-        <p:nvSpPr>
-          <p:cNvPr id="10" name="Text 7"/>
-          <p:cNvSpPr txBox="1"/>
-          <p:nvPr/>
-        </p:nvSpPr>
-        <p:spPr>
-          <a:xfrm>
-            <a:off x="8229600" y="3172968"/>
-            <a:ext cx="420624" cy="420624"/>
-          </a:xfrm>
-          <a:prstGeom prst="rect">
-            <a:avLst/>
-          </a:prstGeom>
-          <a:noFill/>
-          <a:ln/>
-        </p:spPr>
-        <p:txBody>
-          <a:bodyPr wrap="square" lIns="0" tIns="0" rIns="0" bIns="0" rtlCol="0" anchor="ctr"/>
-          <a:lstStyle/>
-          <a:p>
-            <a:pPr algn="ctr" indent="0" marL="0">
-              <a:buNone/>
-            </a:pPr>
-            <a:r>
-              <a:rPr lang="en-US" sz="1600" b="1" dirty="0">
                 <a:solidFill>
                   <a:schemeClr val="bg1"/>
                 </a:solidFill>
@@ -5701,11 +6027,69 @@
                 <a:ea typeface="+mj-lt" pitchFamily="34" charset="-122"/>
                 <a:cs typeface="+mj-lt" pitchFamily="34" charset="-120"/>
               </a:rPr>
-              <a:t>2</a:t>
+              <a:t>3</a:t>
+            </a:r>
+            <a:endParaRPr lang="en-US" sz="1800" dirty="0"/>
+          </a:p>
+        </p:txBody>
+      </p:sp>
+      <p:sp>
+        <p:nvSpPr>
+          <p:cNvPr id="9" name="Text 6"/>
+          <p:cNvSpPr txBox="1"/>
+          <p:nvPr/>
+        </p:nvSpPr>
+        <p:spPr>
+          <a:xfrm>
+            <a:off x="9281160" y="3017520"/>
+            <a:ext cx="2361895" cy="530352"/>
+          </a:xfrm>
+          <a:prstGeom prst="rect">
+            <a:avLst/>
+          </a:prstGeom>
+          <a:noFill/>
+          <a:ln/>
+        </p:spPr>
+        <p:txBody>
+          <a:bodyPr wrap="square" lIns="0" tIns="0" rIns="0" bIns="0" rtlCol="0" anchor="ctr"/>
+          <a:lstStyle/>
+          <a:p>
+            <a:pPr indent="0" marL="0">
+              <a:buNone/>
+            </a:pPr>
+            <a:r>
+              <a:rPr lang="en-US" sz="1600" dirty="0">
+                <a:solidFill>
+                  <a:schemeClr val="tx1"/>
+                </a:solidFill>
+              </a:rPr>
+              <a:t>критический статус</a:t>
             </a:r>
             <a:endParaRPr lang="en-US" sz="1600" dirty="0"/>
           </a:p>
         </p:txBody>
+      </p:sp>
+      <p:sp>
+        <p:nvSpPr>
+          <p:cNvPr id="10" name="count-chip-1"/>
+          <p:cNvSpPr/>
+          <p:nvPr/>
+        </p:nvSpPr>
+        <p:spPr>
+          <a:xfrm>
+            <a:off x="8229600" y="3639312"/>
+            <a:ext cx="868680" cy="420624"/>
+          </a:xfrm>
+          <a:prstGeom prst="roundRect">
+            <a:avLst>
+              <a:gd name="adj" fmla="val 50000"/>
+            </a:avLst>
+          </a:prstGeom>
+          <a:solidFill>
+            <a:schemeClr val="accent4"/>
+          </a:solidFill>
+          <a:ln/>
+        </p:spPr>
       </p:sp>
       <p:sp>
         <p:nvSpPr>
@@ -5715,8 +6099,8 @@
         </p:nvSpPr>
         <p:spPr>
           <a:xfrm>
-            <a:off x="8823960" y="3154680"/>
-            <a:ext cx="2819095" cy="1325880"/>
+            <a:off x="8229600" y="3639312"/>
+            <a:ext cx="868680" cy="420624"/>
           </a:xfrm>
           <a:prstGeom prst="rect">
             <a:avLst/>
@@ -5725,90 +6109,14 @@
           <a:ln/>
         </p:spPr>
         <p:txBody>
-          <a:bodyPr wrap="square" lIns="0" tIns="0" rIns="0" bIns="0" rtlCol="0" anchor="t"/>
-          <a:lstStyle/>
-          <a:p>
-            <a:pPr indent="0" marL="0">
-              <a:spcAft>
-                <a:spcPts val="400"/>
-              </a:spcAft>
+          <a:bodyPr wrap="square" lIns="0" tIns="0" rIns="0" bIns="0" rtlCol="0" anchor="ctr"/>
+          <a:lstStyle/>
+          <a:p>
+            <a:pPr algn="ctr" indent="0" marL="0">
               <a:buNone/>
             </a:pPr>
             <a:r>
               <a:rPr lang="en-US" sz="1800" b="1" dirty="0">
-                <a:solidFill>
-                  <a:schemeClr val="tx1"/>
-                </a:solidFill>
-              </a:rPr>
-              <a:t>По всему файлу</a:t>
-            </a:r>
-            <a:endParaRPr lang="en-US" sz="1800" dirty="0"/>
-          </a:p>
-          <a:p>
-            <a:pPr indent="0" marL="0">
-              <a:spcAft>
-                <a:spcPts val="400"/>
-              </a:spcAft>
-              <a:buNone/>
-            </a:pPr>
-            <a:r>
-              <a:rPr lang="en-US" sz="1500" dirty="0">
-                <a:solidFill>
-                  <a:schemeClr val="tx2"/>
-                </a:solidFill>
-              </a:rPr>
-              <a:t>report.html и calc_log.md: журнал и прогноз по дням для каждой компании файла</a:t>
-            </a:r>
-            <a:endParaRPr lang="en-US" sz="1800" dirty="0"/>
-          </a:p>
-        </p:txBody>
-      </p:sp>
-      <p:sp>
-        <p:nvSpPr>
-          <p:cNvPr id="12" name="badge-3"/>
-          <p:cNvSpPr/>
-          <p:nvPr/>
-        </p:nvSpPr>
-        <p:spPr>
-          <a:xfrm>
-            <a:off x="8229600" y="4654296"/>
-            <a:ext cx="420624" cy="420624"/>
-          </a:xfrm>
-          <a:prstGeom prst="ellipse">
-            <a:avLst/>
-          </a:prstGeom>
-          <a:solidFill>
-            <a:schemeClr val="accent1"/>
-          </a:solidFill>
-          <a:ln/>
-        </p:spPr>
-      </p:sp>
-      <p:sp>
-        <p:nvSpPr>
-          <p:cNvPr id="13" name="Text 10"/>
-          <p:cNvSpPr txBox="1"/>
-          <p:nvPr/>
-        </p:nvSpPr>
-        <p:spPr>
-          <a:xfrm>
-            <a:off x="8229600" y="4654296"/>
-            <a:ext cx="420624" cy="420624"/>
-          </a:xfrm>
-          <a:prstGeom prst="rect">
-            <a:avLst/>
-          </a:prstGeom>
-          <a:noFill/>
-          <a:ln/>
-        </p:spPr>
-        <p:txBody>
-          <a:bodyPr wrap="square" lIns="0" tIns="0" rIns="0" bIns="0" rtlCol="0" anchor="ctr"/>
-          <a:lstStyle/>
-          <a:p>
-            <a:pPr algn="ctr" indent="0" marL="0">
-              <a:buNone/>
-            </a:pPr>
-            <a:r>
-              <a:rPr lang="en-US" sz="1600" b="1" dirty="0">
                 <a:solidFill>
                   <a:schemeClr val="bg1"/>
                 </a:solidFill>
@@ -5816,11 +6124,69 @@
                 <a:ea typeface="+mj-lt" pitchFamily="34" charset="-122"/>
                 <a:cs typeface="+mj-lt" pitchFamily="34" charset="-120"/>
               </a:rPr>
-              <a:t>3</a:t>
+              <a:t>6</a:t>
+            </a:r>
+            <a:endParaRPr lang="en-US" sz="1800" dirty="0"/>
+          </a:p>
+        </p:txBody>
+      </p:sp>
+      <p:sp>
+        <p:nvSpPr>
+          <p:cNvPr id="12" name="Text 9"/>
+          <p:cNvSpPr txBox="1"/>
+          <p:nvPr/>
+        </p:nvSpPr>
+        <p:spPr>
+          <a:xfrm>
+            <a:off x="9281160" y="3584448"/>
+            <a:ext cx="2361895" cy="530352"/>
+          </a:xfrm>
+          <a:prstGeom prst="rect">
+            <a:avLst/>
+          </a:prstGeom>
+          <a:noFill/>
+          <a:ln/>
+        </p:spPr>
+        <p:txBody>
+          <a:bodyPr wrap="square" lIns="0" tIns="0" rIns="0" bIns="0" rtlCol="0" anchor="ctr"/>
+          <a:lstStyle/>
+          <a:p>
+            <a:pPr indent="0" marL="0">
+              <a:buNone/>
+            </a:pPr>
+            <a:r>
+              <a:rPr lang="en-US" sz="1600" dirty="0">
+                <a:solidFill>
+                  <a:schemeClr val="tx1"/>
+                </a:solidFill>
+              </a:rPr>
+              <a:t>повышенный риск</a:t>
             </a:r>
             <a:endParaRPr lang="en-US" sz="1600" dirty="0"/>
           </a:p>
         </p:txBody>
+      </p:sp>
+      <p:sp>
+        <p:nvSpPr>
+          <p:cNvPr id="13" name="count-chip-2"/>
+          <p:cNvSpPr/>
+          <p:nvPr/>
+        </p:nvSpPr>
+        <p:spPr>
+          <a:xfrm>
+            <a:off x="8229600" y="4206240"/>
+            <a:ext cx="868680" cy="420624"/>
+          </a:xfrm>
+          <a:prstGeom prst="roundRect">
+            <a:avLst>
+              <a:gd name="adj" fmla="val 50000"/>
+            </a:avLst>
+          </a:prstGeom>
+          <a:solidFill>
+            <a:schemeClr val="accent2"/>
+          </a:solidFill>
+          <a:ln/>
+        </p:spPr>
       </p:sp>
       <p:sp>
         <p:nvSpPr>
@@ -5830,8 +6196,8 @@
         </p:nvSpPr>
         <p:spPr>
           <a:xfrm>
-            <a:off x="8823960" y="4636008"/>
-            <a:ext cx="2819095" cy="1325880"/>
+            <a:off x="8229600" y="4206240"/>
+            <a:ext cx="868680" cy="420624"/>
           </a:xfrm>
           <a:prstGeom prst="rect">
             <a:avLst/>
@@ -5840,41 +6206,132 @@
           <a:ln/>
         </p:spPr>
         <p:txBody>
-          <a:bodyPr wrap="square" lIns="0" tIns="0" rIns="0" bIns="0" rtlCol="0" anchor="t"/>
+          <a:bodyPr wrap="square" lIns="0" tIns="0" rIns="0" bIns="0" rtlCol="0" anchor="ctr"/>
+          <a:lstStyle/>
+          <a:p>
+            <a:pPr algn="ctr" indent="0" marL="0">
+              <a:buNone/>
+            </a:pPr>
+            <a:r>
+              <a:rPr lang="en-US" sz="1800" b="1" dirty="0">
+                <a:solidFill>
+                  <a:schemeClr val="bg1"/>
+                </a:solidFill>
+                <a:latin typeface="+mj-lt" pitchFamily="34" charset="0"/>
+                <a:ea typeface="+mj-lt" pitchFamily="34" charset="-122"/>
+                <a:cs typeface="+mj-lt" pitchFamily="34" charset="-120"/>
+              </a:rPr>
+              <a:t>42</a:t>
+            </a:r>
+            <a:endParaRPr lang="en-US" sz="1800" dirty="0"/>
+          </a:p>
+        </p:txBody>
+      </p:sp>
+      <p:sp>
+        <p:nvSpPr>
+          <p:cNvPr id="15" name="Text 12"/>
+          <p:cNvSpPr txBox="1"/>
+          <p:nvPr/>
+        </p:nvSpPr>
+        <p:spPr>
+          <a:xfrm>
+            <a:off x="9281160" y="4151376"/>
+            <a:ext cx="2361895" cy="530352"/>
+          </a:xfrm>
+          <a:prstGeom prst="rect">
+            <a:avLst/>
+          </a:prstGeom>
+          <a:noFill/>
+          <a:ln/>
+        </p:spPr>
+        <p:txBody>
+          <a:bodyPr wrap="square" lIns="0" tIns="0" rIns="0" bIns="0" rtlCol="0" anchor="ctr"/>
           <a:lstStyle/>
           <a:p>
             <a:pPr indent="0" marL="0">
-              <a:spcAft>
-                <a:spcPts val="400"/>
-              </a:spcAft>
-              <a:buNone/>
-            </a:pPr>
-            <a:r>
-              <a:rPr lang="en-US" sz="1800" b="1" dirty="0">
+              <a:buNone/>
+            </a:pPr>
+            <a:r>
+              <a:rPr lang="en-US" sz="1600" dirty="0">
                 <a:solidFill>
                   <a:schemeClr val="tx1"/>
                 </a:solidFill>
               </a:rPr>
-              <a:t>Для метрик</a:t>
-            </a:r>
-            <a:endParaRPr lang="en-US" sz="1800" dirty="0"/>
-          </a:p>
+              <a:t>стабильно</a:t>
+            </a:r>
+            <a:endParaRPr lang="en-US" sz="1600" dirty="0"/>
+          </a:p>
+        </p:txBody>
+      </p:sp>
+      <p:sp>
+        <p:nvSpPr>
+          <p:cNvPr id="16" name="Shape 13"/>
+          <p:cNvSpPr/>
+          <p:nvPr/>
+        </p:nvSpPr>
+        <p:spPr>
+          <a:xfrm>
+            <a:off x="8229600" y="4846320"/>
+            <a:ext cx="3413455" cy="1097280"/>
+          </a:xfrm>
+          <a:prstGeom prst="roundRect">
+            <a:avLst>
+              <a:gd name="adj" fmla="val 10000"/>
+            </a:avLst>
+          </a:prstGeom>
+          <a:solidFill>
+            <a:schemeClr val="bg2"/>
+          </a:solidFill>
+          <a:ln/>
+        </p:spPr>
+      </p:sp>
+      <p:sp>
+        <p:nvSpPr>
+          <p:cNvPr id="17" name="Text 14"/>
+          <p:cNvSpPr txBox="1"/>
+          <p:nvPr/>
+        </p:nvSpPr>
+        <p:spPr>
+          <a:xfrm>
+            <a:off x="8412480" y="4937760"/>
+            <a:ext cx="3047695" cy="914400"/>
+          </a:xfrm>
+          <a:prstGeom prst="rect">
+            <a:avLst/>
+          </a:prstGeom>
+          <a:noFill/>
+          <a:ln/>
+        </p:spPr>
+        <p:txBody>
+          <a:bodyPr wrap="square" lIns="0" tIns="0" rIns="0" bIns="0" rtlCol="0" anchor="ctr"/>
+          <a:lstStyle/>
           <a:p>
             <a:pPr indent="0" marL="0">
-              <a:spcAft>
-                <a:spcPts val="400"/>
-              </a:spcAft>
-              <a:buNone/>
-            </a:pPr>
-            <a:r>
-              <a:rPr lang="en-US" sz="1500" dirty="0">
-                <a:solidFill>
-                  <a:schemeClr val="tx2"/>
-                </a:solidFill>
-              </a:rPr>
-              <a:t>backtest_log.md: каждая метрика — формула с подставленными числами</a:t>
-            </a:r>
-            <a:endParaRPr lang="en-US" sz="1800" dirty="0"/>
+              <a:buNone/>
+            </a:pPr>
+            <a:r>
+              <a:rPr lang="en-US" sz="1500" b="1" dirty="0">
+                <a:solidFill>
+                  <a:schemeClr val="accent3"/>
+                </a:solidFill>
+              </a:rPr>
+              <a:t>C124 на экране: вероятность 62,5%</a:t>
+            </a:r>
+            <a:endParaRPr lang="en-US" sz="1500" dirty="0"/>
+          </a:p>
+          <a:p>
+            <a:pPr indent="0" marL="0">
+              <a:buNone/>
+            </a:pPr>
+            <a:r>
+              <a:rPr lang="en-US" sz="1400" dirty="0">
+                <a:solidFill>
+                  <a:schemeClr val="tx1"/>
+                </a:solidFill>
+              </a:rPr>
+              <a:t>45 из 72 сценариев уходят в минус; худший P10 −4,1 млн ₽ к 30.10</a:t>
+            </a:r>
+            <a:endParaRPr lang="en-US" sz="1500" dirty="0"/>
           </a:p>
         </p:txBody>
       </p:sp>
@@ -5980,7 +6437,7 @@
                   <a:schemeClr val="tx1"/>
                 </a:solidFill>
               </a:rPr>
-              <a:t>Бэктест: матрица ошибок</a:t>
+              <a:t>Пошаговый журнал расчёта</a:t>
             </a:r>
             <a:endParaRPr lang="en-US" sz="3400" dirty="0"/>
           </a:p>
@@ -6018,7 +6475,7 @@
                   <a:schemeClr val="tx2"/>
                 </a:solidFill>
               </a:rPr>
-              <a:t>793 прогнозов «из прошлого» на 6 датах, 137 компаний; разрыв — остаток ниже 0 ₽ в ближайшие 30 дней</a:t>
+              <a:t>Строит команда npm run evaluate: для каждой компании файла и для каждой метрики</a:t>
             </a:r>
             <a:endParaRPr lang="en-US" sz="1800" dirty="0"/>
           </a:p>
@@ -6026,29 +6483,24 @@
       </p:sp>
       <p:sp>
         <p:nvSpPr>
-          <p:cNvPr id="4" name="Shape 2"/>
+          <p:cNvPr id="4" name="frame-report_3_company.png"/>
           <p:cNvSpPr/>
           <p:nvPr/>
         </p:nvSpPr>
         <p:spPr>
           <a:xfrm>
-            <a:off x="493776" y="1572768"/>
-            <a:ext cx="7287768" cy="4155532"/>
+            <a:off x="484632" y="1581912"/>
+            <a:ext cx="7351776" cy="4642866"/>
           </a:xfrm>
           <a:prstGeom prst="roundRect">
             <a:avLst>
-              <a:gd name="adj" fmla="val 1760"/>
+              <a:gd name="adj" fmla="val 1969"/>
             </a:avLst>
           </a:prstGeom>
           <a:solidFill>
-            <a:schemeClr val="bg1"/>
+            <a:schemeClr val="tx1"/>
           </a:solidFill>
-          <a:ln w="12700">
-            <a:solidFill>
-              <a:schemeClr val="bg2"/>
-            </a:solidFill>
-            <a:prstDash val="solid"/>
-          </a:ln>
+          <a:ln/>
           <a:effectLst>
             <a:outerShdw sx="100000" sy="100000" kx="0" ky="0" algn="bl" rotWithShape="0" blurRad="127000" dist="38100" dir="5400000">
               <a:srgbClr val="0F172A">
@@ -6060,7 +6512,7 @@
       </p:sp>
       <p:pic>
         <p:nvPicPr>
-          <p:cNvPr id="5" name="Image 0" descr="Матрицы ошибок статусов «Повышенный риск» и «Критический» против факта">    </p:cNvPr>
+          <p:cNvPr id="5" name="Image 0" descr="HTML-отчёт: карточка компании C124 с графиком, журналом расчёта и прогнозом по дням">    </p:cNvPr>
           <p:cNvPicPr>
             <a:picLocks noChangeAspect="1"/>
           </p:cNvPicPr>
@@ -6074,8 +6526,8 @@
         </p:blipFill>
         <p:spPr>
           <a:xfrm>
-            <a:off x="548640" y="1627632"/>
-            <a:ext cx="7178040" cy="4045804"/>
+            <a:off x="548640" y="1645920"/>
+            <a:ext cx="7223760" cy="4514850"/>
           </a:xfrm>
           <a:prstGeom prst="rect">
             <a:avLst/>
@@ -6084,14 +6536,34 @@
       </p:pic>
       <p:sp>
         <p:nvSpPr>
-          <p:cNvPr id="6" name="Text 3"/>
+          <p:cNvPr id="6" name="badge-1"/>
+          <p:cNvSpPr/>
+          <p:nvPr/>
+        </p:nvSpPr>
+        <p:spPr>
+          <a:xfrm>
+            <a:off x="8229600" y="1691640"/>
+            <a:ext cx="420624" cy="420624"/>
+          </a:xfrm>
+          <a:prstGeom prst="ellipse">
+            <a:avLst/>
+          </a:prstGeom>
+          <a:solidFill>
+            <a:schemeClr val="accent1"/>
+          </a:solidFill>
+          <a:ln/>
+        </p:spPr>
+      </p:sp>
+      <p:sp>
+        <p:nvSpPr>
+          <p:cNvPr id="7" name="Text 4"/>
           <p:cNvSpPr txBox="1"/>
           <p:nvPr/>
         </p:nvSpPr>
         <p:spPr>
           <a:xfrm>
-            <a:off x="8183880" y="1645920"/>
-            <a:ext cx="3459175" cy="548640"/>
+            <a:off x="8229600" y="1691640"/>
+            <a:ext cx="420624" cy="420624"/>
           </a:xfrm>
           <a:prstGeom prst="rect">
             <a:avLst/>
@@ -6100,60 +6572,24 @@
           <a:ln/>
         </p:spPr>
         <p:txBody>
-          <a:bodyPr wrap="square" lIns="0" tIns="0" rIns="0" bIns="0" rtlCol="0" anchor="b"/>
-          <a:lstStyle/>
-          <a:p>
-            <a:pPr indent="0" marL="0">
-              <a:buNone/>
-            </a:pPr>
-            <a:r>
-              <a:rPr lang="en-US" sz="3000" b="1" dirty="0">
-                <a:solidFill>
-                  <a:schemeClr val="accent2"/>
+          <a:bodyPr wrap="square" lIns="0" tIns="0" rIns="0" bIns="0" rtlCol="0" anchor="ctr"/>
+          <a:lstStyle/>
+          <a:p>
+            <a:pPr algn="ctr" indent="0" marL="0">
+              <a:buNone/>
+            </a:pPr>
+            <a:r>
+              <a:rPr lang="en-US" sz="1600" b="1" dirty="0">
+                <a:solidFill>
+                  <a:schemeClr val="bg1"/>
                 </a:solidFill>
                 <a:latin typeface="+mj-lt" pitchFamily="34" charset="0"/>
                 <a:ea typeface="+mj-lt" pitchFamily="34" charset="-122"/>
                 <a:cs typeface="+mj-lt" pitchFamily="34" charset="-120"/>
               </a:rPr>
-              <a:t>8 из 10</a:t>
-            </a:r>
-            <a:endParaRPr lang="en-US" sz="3000" dirty="0"/>
-          </a:p>
-        </p:txBody>
-      </p:sp>
-      <p:sp>
-        <p:nvSpPr>
-          <p:cNvPr id="7" name="Text 4"/>
-          <p:cNvSpPr txBox="1"/>
-          <p:nvPr/>
-        </p:nvSpPr>
-        <p:spPr>
-          <a:xfrm>
-            <a:off x="8183880" y="2231136"/>
-            <a:ext cx="3459175" cy="868680"/>
-          </a:xfrm>
-          <a:prstGeom prst="rect">
-            <a:avLst/>
-          </a:prstGeom>
-          <a:noFill/>
-          <a:ln/>
-        </p:spPr>
-        <p:txBody>
-          <a:bodyPr wrap="square" lIns="0" tIns="0" rIns="0" bIns="0" rtlCol="0" anchor="t"/>
-          <a:lstStyle/>
-          <a:p>
-            <a:pPr indent="0" marL="0">
-              <a:buNone/>
-            </a:pPr>
-            <a:r>
-              <a:rPr lang="en-US" sz="1400" dirty="0">
-                <a:solidFill>
-                  <a:schemeClr val="tx2"/>
-                </a:solidFill>
-              </a:rPr>
-              <a:t>новых разрывов поймал статус «Повышенный риск»: recall 0,80, balanced accuracy 0,85</a:t>
-            </a:r>
-            <a:endParaRPr lang="en-US" sz="1400" dirty="0"/>
+              <a:t>1</a:t>
+            </a:r>
+            <a:endParaRPr lang="en-US" sz="1600" dirty="0"/>
           </a:p>
         </p:txBody>
       </p:sp>
@@ -6165,8 +6601,8 @@
         </p:nvSpPr>
         <p:spPr>
           <a:xfrm>
-            <a:off x="8183880" y="3154680"/>
-            <a:ext cx="3459175" cy="548640"/>
+            <a:off x="8823960" y="1673352"/>
+            <a:ext cx="2819095" cy="1325880"/>
           </a:xfrm>
           <a:prstGeom prst="rect">
             <a:avLst/>
@@ -6175,37 +6611,113 @@
           <a:ln/>
         </p:spPr>
         <p:txBody>
-          <a:bodyPr wrap="square" lIns="0" tIns="0" rIns="0" bIns="0" rtlCol="0" anchor="b"/>
+          <a:bodyPr wrap="square" lIns="0" tIns="0" rIns="0" bIns="0" rtlCol="0" anchor="t"/>
           <a:lstStyle/>
           <a:p>
             <a:pPr indent="0" marL="0">
-              <a:buNone/>
-            </a:pPr>
-            <a:r>
-              <a:rPr lang="en-US" sz="3000" b="1" dirty="0">
-                <a:solidFill>
-                  <a:schemeClr val="accent3"/>
+              <a:spcAft>
+                <a:spcPts val="400"/>
+              </a:spcAft>
+              <a:buNone/>
+            </a:pPr>
+            <a:r>
+              <a:rPr lang="en-US" sz="1800" b="1" dirty="0">
+                <a:solidFill>
+                  <a:schemeClr val="tx1"/>
+                </a:solidFill>
+              </a:rPr>
+              <a:t>report.html</a:t>
+            </a:r>
+            <a:endParaRPr lang="en-US" sz="1800" dirty="0"/>
+          </a:p>
+          <a:p>
+            <a:pPr indent="0" marL="0">
+              <a:spcAft>
+                <a:spcPts val="400"/>
+              </a:spcAft>
+              <a:buNone/>
+            </a:pPr>
+            <a:r>
+              <a:rPr lang="en-US" sz="1500" dirty="0">
+                <a:solidFill>
+                  <a:schemeClr val="tx2"/>
+                </a:solidFill>
+              </a:rPr>
+              <a:t>Карточка каждой компании: график, 12 шагов расчёта с её числами — от чтения файла до статуса — и прогноз по дням</a:t>
+            </a:r>
+            <a:endParaRPr lang="en-US" sz="1800" dirty="0"/>
+          </a:p>
+        </p:txBody>
+      </p:sp>
+      <p:sp>
+        <p:nvSpPr>
+          <p:cNvPr id="9" name="badge-2"/>
+          <p:cNvSpPr/>
+          <p:nvPr/>
+        </p:nvSpPr>
+        <p:spPr>
+          <a:xfrm>
+            <a:off x="8229600" y="3172968"/>
+            <a:ext cx="420624" cy="420624"/>
+          </a:xfrm>
+          <a:prstGeom prst="ellipse">
+            <a:avLst/>
+          </a:prstGeom>
+          <a:solidFill>
+            <a:schemeClr val="accent1"/>
+          </a:solidFill>
+          <a:ln/>
+        </p:spPr>
+      </p:sp>
+      <p:sp>
+        <p:nvSpPr>
+          <p:cNvPr id="10" name="Text 7"/>
+          <p:cNvSpPr txBox="1"/>
+          <p:nvPr/>
+        </p:nvSpPr>
+        <p:spPr>
+          <a:xfrm>
+            <a:off x="8229600" y="3172968"/>
+            <a:ext cx="420624" cy="420624"/>
+          </a:xfrm>
+          <a:prstGeom prst="rect">
+            <a:avLst/>
+          </a:prstGeom>
+          <a:noFill/>
+          <a:ln/>
+        </p:spPr>
+        <p:txBody>
+          <a:bodyPr wrap="square" lIns="0" tIns="0" rIns="0" bIns="0" rtlCol="0" anchor="ctr"/>
+          <a:lstStyle/>
+          <a:p>
+            <a:pPr algn="ctr" indent="0" marL="0">
+              <a:buNone/>
+            </a:pPr>
+            <a:r>
+              <a:rPr lang="en-US" sz="1600" b="1" dirty="0">
+                <a:solidFill>
+                  <a:schemeClr val="bg1"/>
                 </a:solidFill>
                 <a:latin typeface="+mj-lt" pitchFamily="34" charset="0"/>
                 <a:ea typeface="+mj-lt" pitchFamily="34" charset="-122"/>
                 <a:cs typeface="+mj-lt" pitchFamily="34" charset="-120"/>
               </a:rPr>
-              <a:t>0,10</a:t>
-            </a:r>
-            <a:endParaRPr lang="en-US" sz="3000" dirty="0"/>
-          </a:p>
-        </p:txBody>
-      </p:sp>
-      <p:sp>
-        <p:nvSpPr>
-          <p:cNvPr id="9" name="Text 6"/>
+              <a:t>2</a:t>
+            </a:r>
+            <a:endParaRPr lang="en-US" sz="1600" dirty="0"/>
+          </a:p>
+        </p:txBody>
+      </p:sp>
+      <p:sp>
+        <p:nvSpPr>
+          <p:cNvPr id="11" name="Text 8"/>
           <p:cNvSpPr txBox="1"/>
           <p:nvPr/>
         </p:nvSpPr>
         <p:spPr>
           <a:xfrm>
-            <a:off x="8183880" y="3739896"/>
-            <a:ext cx="3459175" cy="868680"/>
+            <a:off x="8823960" y="3154680"/>
+            <a:ext cx="2819095" cy="1325880"/>
           </a:xfrm>
           <a:prstGeom prst="rect">
             <a:avLst/>
@@ -6218,30 +6730,70 @@
           <a:lstStyle/>
           <a:p>
             <a:pPr indent="0" marL="0">
-              <a:buNone/>
-            </a:pPr>
-            <a:r>
-              <a:rPr lang="en-US" sz="1400" dirty="0">
+              <a:spcAft>
+                <a:spcPts val="400"/>
+              </a:spcAft>
+              <a:buNone/>
+            </a:pPr>
+            <a:r>
+              <a:rPr lang="en-US" sz="1800" b="1" dirty="0">
+                <a:solidFill>
+                  <a:schemeClr val="tx1"/>
+                </a:solidFill>
+              </a:rPr>
+              <a:t>calc_log.md</a:t>
+            </a:r>
+            <a:endParaRPr lang="en-US" sz="1800" dirty="0"/>
+          </a:p>
+          <a:p>
+            <a:pPr indent="0" marL="0">
+              <a:spcAft>
+                <a:spcPts val="400"/>
+              </a:spcAft>
+              <a:buNone/>
+            </a:pPr>
+            <a:r>
+              <a:rPr lang="en-US" sz="1500" dirty="0">
                 <a:solidFill>
                   <a:schemeClr val="tx2"/>
                 </a:solidFill>
               </a:rPr>
-              <a:t>precision: ≈9 ложных тревог на один верный сигнал (у угадывания 0,013); F1 0,17</a:t>
-            </a:r>
-            <a:endParaRPr lang="en-US" sz="1400" dirty="0"/>
-          </a:p>
-        </p:txBody>
-      </p:sp>
-      <p:sp>
-        <p:nvSpPr>
-          <p:cNvPr id="10" name="Text 7"/>
+              <a:t>Тот же журнал текстом для всех компаний файла</a:t>
+            </a:r>
+            <a:endParaRPr lang="en-US" sz="1800" dirty="0"/>
+          </a:p>
+        </p:txBody>
+      </p:sp>
+      <p:sp>
+        <p:nvSpPr>
+          <p:cNvPr id="12" name="badge-3"/>
+          <p:cNvSpPr/>
+          <p:nvPr/>
+        </p:nvSpPr>
+        <p:spPr>
+          <a:xfrm>
+            <a:off x="8229600" y="4654296"/>
+            <a:ext cx="420624" cy="420624"/>
+          </a:xfrm>
+          <a:prstGeom prst="ellipse">
+            <a:avLst/>
+          </a:prstGeom>
+          <a:solidFill>
+            <a:schemeClr val="accent1"/>
+          </a:solidFill>
+          <a:ln/>
+        </p:spPr>
+      </p:sp>
+      <p:sp>
+        <p:nvSpPr>
+          <p:cNvPr id="13" name="Text 10"/>
           <p:cNvSpPr txBox="1"/>
           <p:nvPr/>
         </p:nvSpPr>
         <p:spPr>
           <a:xfrm>
-            <a:off x="8183880" y="4663440"/>
-            <a:ext cx="3459175" cy="548640"/>
+            <a:off x="8229600" y="4654296"/>
+            <a:ext cx="420624" cy="420624"/>
           </a:xfrm>
           <a:prstGeom prst="rect">
             <a:avLst/>
@@ -6250,37 +6802,37 @@
           <a:ln/>
         </p:spPr>
         <p:txBody>
-          <a:bodyPr wrap="square" lIns="0" tIns="0" rIns="0" bIns="0" rtlCol="0" anchor="b"/>
-          <a:lstStyle/>
-          <a:p>
-            <a:pPr indent="0" marL="0">
-              <a:buNone/>
-            </a:pPr>
-            <a:r>
-              <a:rPr lang="en-US" sz="3000" b="1" dirty="0">
-                <a:solidFill>
-                  <a:schemeClr val="accent1"/>
+          <a:bodyPr wrap="square" lIns="0" tIns="0" rIns="0" bIns="0" rtlCol="0" anchor="ctr"/>
+          <a:lstStyle/>
+          <a:p>
+            <a:pPr algn="ctr" indent="0" marL="0">
+              <a:buNone/>
+            </a:pPr>
+            <a:r>
+              <a:rPr lang="en-US" sz="1600" b="1" dirty="0">
+                <a:solidFill>
+                  <a:schemeClr val="bg1"/>
                 </a:solidFill>
                 <a:latin typeface="+mj-lt" pitchFamily="34" charset="0"/>
                 <a:ea typeface="+mj-lt" pitchFamily="34" charset="-122"/>
                 <a:cs typeface="+mj-lt" pitchFamily="34" charset="-120"/>
               </a:rPr>
-              <a:t>0,90 / 0,95</a:t>
-            </a:r>
-            <a:endParaRPr lang="en-US" sz="3000" dirty="0"/>
-          </a:p>
-        </p:txBody>
-      </p:sp>
-      <p:sp>
-        <p:nvSpPr>
-          <p:cNvPr id="11" name="Text 8"/>
+              <a:t>3</a:t>
+            </a:r>
+            <a:endParaRPr lang="en-US" sz="1600" dirty="0"/>
+          </a:p>
+        </p:txBody>
+      </p:sp>
+      <p:sp>
+        <p:nvSpPr>
+          <p:cNvPr id="14" name="Text 11"/>
           <p:cNvSpPr txBox="1"/>
           <p:nvPr/>
         </p:nvSpPr>
         <p:spPr>
           <a:xfrm>
-            <a:off x="8183880" y="5248656"/>
-            <a:ext cx="3459175" cy="868680"/>
+            <a:off x="8823960" y="4636008"/>
+            <a:ext cx="2819095" cy="1325880"/>
           </a:xfrm>
           <a:prstGeom prst="rect">
             <a:avLst/>
@@ -6293,17 +6845,37 @@
           <a:lstStyle/>
           <a:p>
             <a:pPr indent="0" marL="0">
-              <a:buNone/>
-            </a:pPr>
-            <a:r>
-              <a:rPr lang="en-US" sz="1400" dirty="0">
+              <a:spcAft>
+                <a:spcPts val="400"/>
+              </a:spcAft>
+              <a:buNone/>
+            </a:pPr>
+            <a:r>
+              <a:rPr lang="en-US" sz="1800" b="1" dirty="0">
+                <a:solidFill>
+                  <a:schemeClr val="tx1"/>
+                </a:solidFill>
+              </a:rPr>
+              <a:t>backtest_log.md</a:t>
+            </a:r>
+            <a:endParaRPr lang="en-US" sz="1800" dirty="0"/>
+          </a:p>
+          <a:p>
+            <a:pPr indent="0" marL="0">
+              <a:spcAft>
+                <a:spcPts val="400"/>
+              </a:spcAft>
+              <a:buNone/>
+            </a:pPr>
+            <a:r>
+              <a:rPr lang="en-US" sz="1500" dirty="0">
                 <a:solidFill>
                   <a:schemeClr val="tx2"/>
                 </a:solidFill>
               </a:rPr>
-              <a:t>accuracy при 10% / 50%: разрывов всего 1,3%, «всегда стабильно» дало бы 0,99 и ноль находок</a:t>
-            </a:r>
-            <a:endParaRPr lang="en-US" sz="1400" dirty="0"/>
+              <a:t>Каждая метрика — формула с подставленными числами</a:t>
+            </a:r>
+            <a:endParaRPr lang="en-US" sz="1800" dirty="0"/>
           </a:p>
         </p:txBody>
       </p:sp>
@@ -6409,7 +6981,7 @@
                   <a:schemeClr val="tx1"/>
                 </a:solidFill>
               </a:rPr>
-              <a:t>Точность остатка и вероятности</a:t>
+              <a:t>Бэктест: матрица ошибок</a:t>
             </a:r>
             <a:endParaRPr lang="en-US" sz="3400" dirty="0"/>
           </a:p>
@@ -6447,6 +7019,435 @@
                   <a:schemeClr val="tx2"/>
                 </a:solidFill>
               </a:rPr>
+              <a:t>793 прогнозов «из прошлого» на 6 датах, 137 компаний; разрыв — остаток ниже 0 ₽ в ближайшие 30 дней</a:t>
+            </a:r>
+            <a:endParaRPr lang="en-US" sz="1800" dirty="0"/>
+          </a:p>
+        </p:txBody>
+      </p:sp>
+      <p:sp>
+        <p:nvSpPr>
+          <p:cNvPr id="4" name="Shape 2"/>
+          <p:cNvSpPr/>
+          <p:nvPr/>
+        </p:nvSpPr>
+        <p:spPr>
+          <a:xfrm>
+            <a:off x="493776" y="1572768"/>
+            <a:ext cx="7287768" cy="4155532"/>
+          </a:xfrm>
+          <a:prstGeom prst="roundRect">
+            <a:avLst>
+              <a:gd name="adj" fmla="val 1760"/>
+            </a:avLst>
+          </a:prstGeom>
+          <a:solidFill>
+            <a:schemeClr val="bg1"/>
+          </a:solidFill>
+          <a:ln w="12700">
+            <a:solidFill>
+              <a:schemeClr val="bg2"/>
+            </a:solidFill>
+            <a:prstDash val="solid"/>
+          </a:ln>
+          <a:effectLst>
+            <a:outerShdw sx="100000" sy="100000" kx="0" ky="0" algn="bl" rotWithShape="0" blurRad="127000" dist="38100" dir="5400000">
+              <a:srgbClr val="0F172A">
+                <a:alpha val="16000"/>
+              </a:srgbClr>
+            </a:outerShdw>
+          </a:effectLst>
+        </p:spPr>
+      </p:sp>
+      <p:pic>
+        <p:nvPicPr>
+          <p:cNvPr id="5" name="Image 0" descr="Матрицы ошибок статусов «Повышенный риск» и «Критический» против факта">    </p:cNvPr>
+          <p:cNvPicPr>
+            <a:picLocks noChangeAspect="1"/>
+          </p:cNvPicPr>
+          <p:nvPr/>
+        </p:nvPicPr>
+        <p:blipFill>
+          <a:blip r:embed="rId1"/>
+          <a:stretch>
+            <a:fillRect/>
+          </a:stretch>
+        </p:blipFill>
+        <p:spPr>
+          <a:xfrm>
+            <a:off x="548640" y="1627632"/>
+            <a:ext cx="7178040" cy="4045804"/>
+          </a:xfrm>
+          <a:prstGeom prst="rect">
+            <a:avLst/>
+          </a:prstGeom>
+        </p:spPr>
+      </p:pic>
+      <p:sp>
+        <p:nvSpPr>
+          <p:cNvPr id="6" name="Text 3"/>
+          <p:cNvSpPr txBox="1"/>
+          <p:nvPr/>
+        </p:nvSpPr>
+        <p:spPr>
+          <a:xfrm>
+            <a:off x="8183880" y="1645920"/>
+            <a:ext cx="3459175" cy="548640"/>
+          </a:xfrm>
+          <a:prstGeom prst="rect">
+            <a:avLst/>
+          </a:prstGeom>
+          <a:noFill/>
+          <a:ln/>
+        </p:spPr>
+        <p:txBody>
+          <a:bodyPr wrap="square" lIns="0" tIns="0" rIns="0" bIns="0" rtlCol="0" anchor="b"/>
+          <a:lstStyle/>
+          <a:p>
+            <a:pPr indent="0" marL="0">
+              <a:buNone/>
+            </a:pPr>
+            <a:r>
+              <a:rPr lang="en-US" sz="3000" b="1" dirty="0">
+                <a:solidFill>
+                  <a:schemeClr val="accent2"/>
+                </a:solidFill>
+                <a:latin typeface="+mj-lt" pitchFamily="34" charset="0"/>
+                <a:ea typeface="+mj-lt" pitchFamily="34" charset="-122"/>
+                <a:cs typeface="+mj-lt" pitchFamily="34" charset="-120"/>
+              </a:rPr>
+              <a:t>8 из 10</a:t>
+            </a:r>
+            <a:endParaRPr lang="en-US" sz="3000" dirty="0"/>
+          </a:p>
+        </p:txBody>
+      </p:sp>
+      <p:sp>
+        <p:nvSpPr>
+          <p:cNvPr id="7" name="Text 4"/>
+          <p:cNvSpPr txBox="1"/>
+          <p:nvPr/>
+        </p:nvSpPr>
+        <p:spPr>
+          <a:xfrm>
+            <a:off x="8183880" y="2231136"/>
+            <a:ext cx="3459175" cy="868680"/>
+          </a:xfrm>
+          <a:prstGeom prst="rect">
+            <a:avLst/>
+          </a:prstGeom>
+          <a:noFill/>
+          <a:ln/>
+        </p:spPr>
+        <p:txBody>
+          <a:bodyPr wrap="square" lIns="0" tIns="0" rIns="0" bIns="0" rtlCol="0" anchor="t"/>
+          <a:lstStyle/>
+          <a:p>
+            <a:pPr indent="0" marL="0">
+              <a:buNone/>
+            </a:pPr>
+            <a:r>
+              <a:rPr lang="en-US" sz="1400" dirty="0">
+                <a:solidFill>
+                  <a:schemeClr val="tx2"/>
+                </a:solidFill>
+              </a:rPr>
+              <a:t>новых разрывов поймал статус «Повышенный риск»: recall 0,80, balanced accuracy 0,85</a:t>
+            </a:r>
+            <a:endParaRPr lang="en-US" sz="1400" dirty="0"/>
+          </a:p>
+        </p:txBody>
+      </p:sp>
+      <p:sp>
+        <p:nvSpPr>
+          <p:cNvPr id="8" name="Text 5"/>
+          <p:cNvSpPr txBox="1"/>
+          <p:nvPr/>
+        </p:nvSpPr>
+        <p:spPr>
+          <a:xfrm>
+            <a:off x="8183880" y="3154680"/>
+            <a:ext cx="3459175" cy="548640"/>
+          </a:xfrm>
+          <a:prstGeom prst="rect">
+            <a:avLst/>
+          </a:prstGeom>
+          <a:noFill/>
+          <a:ln/>
+        </p:spPr>
+        <p:txBody>
+          <a:bodyPr wrap="square" lIns="0" tIns="0" rIns="0" bIns="0" rtlCol="0" anchor="b"/>
+          <a:lstStyle/>
+          <a:p>
+            <a:pPr indent="0" marL="0">
+              <a:buNone/>
+            </a:pPr>
+            <a:r>
+              <a:rPr lang="en-US" sz="3000" b="1" dirty="0">
+                <a:solidFill>
+                  <a:schemeClr val="accent3"/>
+                </a:solidFill>
+                <a:latin typeface="+mj-lt" pitchFamily="34" charset="0"/>
+                <a:ea typeface="+mj-lt" pitchFamily="34" charset="-122"/>
+                <a:cs typeface="+mj-lt" pitchFamily="34" charset="-120"/>
+              </a:rPr>
+              <a:t>0,10</a:t>
+            </a:r>
+            <a:endParaRPr lang="en-US" sz="3000" dirty="0"/>
+          </a:p>
+        </p:txBody>
+      </p:sp>
+      <p:sp>
+        <p:nvSpPr>
+          <p:cNvPr id="9" name="Text 6"/>
+          <p:cNvSpPr txBox="1"/>
+          <p:nvPr/>
+        </p:nvSpPr>
+        <p:spPr>
+          <a:xfrm>
+            <a:off x="8183880" y="3739896"/>
+            <a:ext cx="3459175" cy="868680"/>
+          </a:xfrm>
+          <a:prstGeom prst="rect">
+            <a:avLst/>
+          </a:prstGeom>
+          <a:noFill/>
+          <a:ln/>
+        </p:spPr>
+        <p:txBody>
+          <a:bodyPr wrap="square" lIns="0" tIns="0" rIns="0" bIns="0" rtlCol="0" anchor="t"/>
+          <a:lstStyle/>
+          <a:p>
+            <a:pPr indent="0" marL="0">
+              <a:buNone/>
+            </a:pPr>
+            <a:r>
+              <a:rPr lang="en-US" sz="1400" dirty="0">
+                <a:solidFill>
+                  <a:schemeClr val="tx2"/>
+                </a:solidFill>
+              </a:rPr>
+              <a:t>precision: ≈9 ложных тревог на один верный сигнал (у угадывания 0,013); F1 0,17</a:t>
+            </a:r>
+            <a:endParaRPr lang="en-US" sz="1400" dirty="0"/>
+          </a:p>
+        </p:txBody>
+      </p:sp>
+      <p:sp>
+        <p:nvSpPr>
+          <p:cNvPr id="10" name="Text 7"/>
+          <p:cNvSpPr txBox="1"/>
+          <p:nvPr/>
+        </p:nvSpPr>
+        <p:spPr>
+          <a:xfrm>
+            <a:off x="8183880" y="4663440"/>
+            <a:ext cx="3459175" cy="548640"/>
+          </a:xfrm>
+          <a:prstGeom prst="rect">
+            <a:avLst/>
+          </a:prstGeom>
+          <a:noFill/>
+          <a:ln/>
+        </p:spPr>
+        <p:txBody>
+          <a:bodyPr wrap="square" lIns="0" tIns="0" rIns="0" bIns="0" rtlCol="0" anchor="b"/>
+          <a:lstStyle/>
+          <a:p>
+            <a:pPr indent="0" marL="0">
+              <a:buNone/>
+            </a:pPr>
+            <a:r>
+              <a:rPr lang="en-US" sz="3000" b="1" dirty="0">
+                <a:solidFill>
+                  <a:schemeClr val="accent1"/>
+                </a:solidFill>
+                <a:latin typeface="+mj-lt" pitchFamily="34" charset="0"/>
+                <a:ea typeface="+mj-lt" pitchFamily="34" charset="-122"/>
+                <a:cs typeface="+mj-lt" pitchFamily="34" charset="-120"/>
+              </a:rPr>
+              <a:t>0,90 / 0,95</a:t>
+            </a:r>
+            <a:endParaRPr lang="en-US" sz="3000" dirty="0"/>
+          </a:p>
+        </p:txBody>
+      </p:sp>
+      <p:sp>
+        <p:nvSpPr>
+          <p:cNvPr id="11" name="Text 8"/>
+          <p:cNvSpPr txBox="1"/>
+          <p:nvPr/>
+        </p:nvSpPr>
+        <p:spPr>
+          <a:xfrm>
+            <a:off x="8183880" y="5248656"/>
+            <a:ext cx="3459175" cy="868680"/>
+          </a:xfrm>
+          <a:prstGeom prst="rect">
+            <a:avLst/>
+          </a:prstGeom>
+          <a:noFill/>
+          <a:ln/>
+        </p:spPr>
+        <p:txBody>
+          <a:bodyPr wrap="square" lIns="0" tIns="0" rIns="0" bIns="0" rtlCol="0" anchor="t"/>
+          <a:lstStyle/>
+          <a:p>
+            <a:pPr indent="0" marL="0">
+              <a:buNone/>
+            </a:pPr>
+            <a:r>
+              <a:rPr lang="en-US" sz="1400" dirty="0">
+                <a:solidFill>
+                  <a:schemeClr val="tx2"/>
+                </a:solidFill>
+              </a:rPr>
+              <a:t>accuracy при 10% / 50%: разрывов всего 1,3%, «всегда стабильно» дало бы 0,99 и ноль находок</a:t>
+            </a:r>
+            <a:endParaRPr lang="en-US" sz="1400" dirty="0"/>
+          </a:p>
+        </p:txBody>
+      </p:sp>
+      <p:sp>
+        <p:nvSpPr>
+          <p:cNvPr id="25" name="Slide Number Placeholder 0"/>
+          <p:cNvSpPr>
+            <a:spLocks noGrp="1"/>
+          </p:cNvSpPr>
+          <p:nvPr>
+            <p:ph type="sldNum" sz="quarter" idx="4294967295"/>
+          </p:nvPr>
+        </p:nvSpPr>
+        <p:spPr>
+          <a:xfrm>
+            <a:off x="11094415" y="6419088"/>
+            <a:ext cx="548640" cy="256032"/>
+          </a:xfrm>
+          <a:prstGeom prst="rect">
+            <a:avLst/>
+          </a:prstGeom>
+          <a:extLst>
+            <a:ext uri="{C572A759-6A51-4108-AA02-DFA0A04FC94B}">
+              <ma14:wrappingTextBoxFlag xmlns:ma14="http://schemas.microsoft.com/office/mac/drawingml/2011/main" val="0"/>
+            </a:ext>
+          </a:extLst>
+        </p:spPr>
+        <p:txBody>
+          <a:bodyPr/>
+          <a:lstStyle>
+            <a:lvl1pPr>
+              <a:defRPr sz="1000">
+                <a:solidFill>
+                  <a:srgbClr val="475569"/>
+                </a:solidFill>
+              </a:defRPr>
+            </a:lvl1pPr>
+          </a:lstStyle>
+          <a:p>
+            <a:pPr algn="r"/>
+            <a:fld id="{F7021451-1387-4CA6-816F-3879F97B5CBC}" type="slidenum">
+              <a:rPr b="0" lang="en-US"/>
+              <a:t>6</a:t>
+            </a:fld>
+            <a:endParaRPr lang="en-US"/>
+          </a:p>
+        </p:txBody>
+      </p:sp>
+    </p:spTree>
+  </p:cSld>
+  <p:clrMapOvr>
+    <a:masterClrMapping/>
+  </p:clrMapOvr>
+</p:sld>
+</file>
+
+<file path=ppt/slides/slide7.xml><?xml version="1.0" encoding="utf-8"?>
+<p:sld xmlns:a="http://schemas.openxmlformats.org/drawingml/2006/main" xmlns:r="http://schemas.openxmlformats.org/officeDocument/2006/relationships" xmlns:p="http://schemas.openxmlformats.org/presentationml/2006/main">
+  <p:cSld name="Slide 7">
+    <p:spTree>
+      <p:nvGrpSpPr>
+        <p:cNvPr id="1" name=""/>
+        <p:cNvGrpSpPr/>
+        <p:nvPr/>
+      </p:nvGrpSpPr>
+      <p:grpSpPr>
+        <a:xfrm>
+          <a:off x="0" y="0"/>
+          <a:ext cx="0" cy="0"/>
+          <a:chOff x="0" y="0"/>
+          <a:chExt cx="0" cy="0"/>
+        </a:xfrm>
+      </p:grpSpPr>
+      <p:sp>
+        <p:nvSpPr>
+          <p:cNvPr id="2" name="Text 0"/>
+          <p:cNvSpPr/>
+          <p:nvPr>
+            <p:ph idx="100" type="title" hasCustomPrompt="1"/>
+          </p:nvPr>
+        </p:nvSpPr>
+        <p:spPr>
+          <a:xfrm>
+            <a:off x="548640" y="320040"/>
+            <a:ext cx="11094415" cy="640080"/>
+          </a:xfrm>
+          <a:prstGeom prst="rect">
+            <a:avLst/>
+          </a:prstGeom>
+          <a:noFill/>
+          <a:ln/>
+        </p:spPr>
+        <p:txBody>
+          <a:bodyPr wrap="square" lIns="0" tIns="0" rIns="0" bIns="0" rtlCol="0" anchor="ctr"/>
+          <a:lstStyle/>
+          <a:p>
+            <a:pPr algn="l" indent="0" marL="0">
+              <a:buNone/>
+            </a:pPr>
+            <a:r>
+              <a:rPr lang="en-US" sz="3400" b="1" dirty="0">
+                <a:solidFill>
+                  <a:schemeClr val="tx1"/>
+                </a:solidFill>
+              </a:rPr>
+              <a:t>Точность остатка и вероятности</a:t>
+            </a:r>
+            <a:endParaRPr lang="en-US" sz="3400" dirty="0"/>
+          </a:p>
+        </p:txBody>
+      </p:sp>
+      <p:sp>
+        <p:nvSpPr>
+          <p:cNvPr id="3" name="Text 0"/>
+          <p:cNvSpPr/>
+          <p:nvPr>
+            <p:ph idx="101" type="body" hasCustomPrompt="1"/>
+          </p:nvPr>
+        </p:nvSpPr>
+        <p:spPr>
+          <a:xfrm>
+            <a:off x="548640" y="978408"/>
+            <a:ext cx="11094415" cy="411480"/>
+          </a:xfrm>
+          <a:prstGeom prst="rect">
+            <a:avLst/>
+          </a:prstGeom>
+          <a:noFill/>
+          <a:ln/>
+        </p:spPr>
+        <p:txBody>
+          <a:bodyPr wrap="square" lIns="0" tIns="0" rIns="0" bIns="0" rtlCol="0" anchor="t"/>
+          <a:lstStyle/>
+          <a:p>
+            <a:pPr indent="0" marL="0">
+              <a:buNone/>
+            </a:pPr>
+            <a:r>
+              <a:rPr lang="en-US" sz="1800" dirty="0">
+                <a:solidFill>
+                  <a:schemeClr val="tx2"/>
+                </a:solidFill>
+              </a:rPr>
               <a:t>Наши (train) и тестовые (test) данные — разные компании, а метрики близки</a:t>
             </a:r>
             <a:endParaRPr lang="en-US" sz="1800" dirty="0"/>
@@ -7192,7 +8193,7 @@
       </p:sp>
       <p:graphicFrame>
         <p:nvGraphicFramePr>
-          <p:cNvPr id="7" name="Table 0"/>
+          <p:cNvPr id="8" name="Table 0"/>
           <p:cNvGraphicFramePr>
             <a:graphicFrameLocks noGrp="1"/>
           </p:cNvGraphicFramePr>
@@ -9897,702 +10898,6 @@
             <a:pPr algn="r"/>
             <a:fld id="{F7021451-1387-4CA6-816F-3879F97B5CBC}" type="slidenum">
               <a:rPr b="0" lang="en-US"/>
-              <a:t>6</a:t>
-            </a:fld>
-            <a:endParaRPr lang="en-US"/>
-          </a:p>
-        </p:txBody>
-      </p:sp>
-    </p:spTree>
-  </p:cSld>
-  <p:clrMapOvr>
-    <a:masterClrMapping/>
-  </p:clrMapOvr>
-</p:sld>
-</file>
-
-<file path=ppt/slides/slide7.xml><?xml version="1.0" encoding="utf-8"?>
-<p:sld xmlns:a="http://schemas.openxmlformats.org/drawingml/2006/main" xmlns:r="http://schemas.openxmlformats.org/officeDocument/2006/relationships" xmlns:p="http://schemas.openxmlformats.org/presentationml/2006/main">
-  <p:cSld name="Slide 7">
-    <p:spTree>
-      <p:nvGrpSpPr>
-        <p:cNvPr id="1" name=""/>
-        <p:cNvGrpSpPr/>
-        <p:nvPr/>
-      </p:nvGrpSpPr>
-      <p:grpSpPr>
-        <a:xfrm>
-          <a:off x="0" y="0"/>
-          <a:ext cx="0" cy="0"/>
-          <a:chOff x="0" y="0"/>
-          <a:chExt cx="0" cy="0"/>
-        </a:xfrm>
-      </p:grpSpPr>
-      <p:sp>
-        <p:nvSpPr>
-          <p:cNvPr id="2" name="Text 0"/>
-          <p:cNvSpPr/>
-          <p:nvPr>
-            <p:ph idx="100" type="title" hasCustomPrompt="1"/>
-          </p:nvPr>
-        </p:nvSpPr>
-        <p:spPr>
-          <a:xfrm>
-            <a:off x="548640" y="320040"/>
-            <a:ext cx="11094415" cy="640080"/>
-          </a:xfrm>
-          <a:prstGeom prst="rect">
-            <a:avLst/>
-          </a:prstGeom>
-          <a:noFill/>
-          <a:ln/>
-        </p:spPr>
-        <p:txBody>
-          <a:bodyPr wrap="square" lIns="0" tIns="0" rIns="0" bIns="0" rtlCol="0" anchor="ctr"/>
-          <a:lstStyle/>
-          <a:p>
-            <a:pPr algn="l" indent="0" marL="0">
-              <a:buNone/>
-            </a:pPr>
-            <a:r>
-              <a:rPr lang="en-US" sz="3400" b="1" dirty="0">
-                <a:solidFill>
-                  <a:schemeClr val="tx1"/>
-                </a:solidFill>
-              </a:rPr>
-              <a:t>Контрольный датасет — одной командой</a:t>
-            </a:r>
-            <a:endParaRPr lang="en-US" sz="3400" dirty="0"/>
-          </a:p>
-        </p:txBody>
-      </p:sp>
-      <p:sp>
-        <p:nvSpPr>
-          <p:cNvPr id="3" name="Text 0"/>
-          <p:cNvSpPr/>
-          <p:nvPr>
-            <p:ph idx="101" type="body" hasCustomPrompt="1"/>
-          </p:nvPr>
-        </p:nvSpPr>
-        <p:spPr>
-          <a:xfrm>
-            <a:off x="548640" y="978408"/>
-            <a:ext cx="11094415" cy="411480"/>
-          </a:xfrm>
-          <a:prstGeom prst="rect">
-            <a:avLst/>
-          </a:prstGeom>
-          <a:noFill/>
-          <a:ln/>
-        </p:spPr>
-        <p:txBody>
-          <a:bodyPr wrap="square" lIns="0" tIns="0" rIns="0" bIns="0" rtlCol="0" anchor="t"/>
-          <a:lstStyle/>
-          <a:p>
-            <a:pPr indent="0" marL="0">
-              <a:buNone/>
-            </a:pPr>
-            <a:r>
-              <a:rPr lang="en-US" sz="1800" dirty="0">
-                <a:solidFill>
-                  <a:schemeClr val="tx2"/>
-                </a:solidFill>
-              </a:rPr>
-              <a:t>Прогноз, журналы, метрики, матрицы ошибок и графики — несколько секунд на файл</a:t>
-            </a:r>
-            <a:endParaRPr lang="en-US" sz="1800" dirty="0"/>
-          </a:p>
-        </p:txBody>
-      </p:sp>
-      <p:sp>
-        <p:nvSpPr>
-          <p:cNvPr id="4" name="Shape 2"/>
-          <p:cNvSpPr/>
-          <p:nvPr/>
-        </p:nvSpPr>
-        <p:spPr>
-          <a:xfrm>
-            <a:off x="548640" y="1645920"/>
-            <a:ext cx="5120640" cy="914400"/>
-          </a:xfrm>
-          <a:prstGeom prst="roundRect">
-            <a:avLst>
-              <a:gd name="adj" fmla="val 10000"/>
-            </a:avLst>
-          </a:prstGeom>
-          <a:solidFill>
-            <a:schemeClr val="tx1"/>
-          </a:solidFill>
-          <a:ln/>
-        </p:spPr>
-      </p:sp>
-      <p:sp>
-        <p:nvSpPr>
-          <p:cNvPr id="5" name="Text 3"/>
-          <p:cNvSpPr txBox="1"/>
-          <p:nvPr/>
-        </p:nvSpPr>
-        <p:spPr>
-          <a:xfrm>
-            <a:off x="822960" y="1645920"/>
-            <a:ext cx="4663440" cy="914400"/>
-          </a:xfrm>
-          <a:prstGeom prst="rect">
-            <a:avLst/>
-          </a:prstGeom>
-          <a:noFill/>
-          <a:ln/>
-        </p:spPr>
-        <p:txBody>
-          <a:bodyPr wrap="square" lIns="0" tIns="0" rIns="0" bIns="0" rtlCol="0" anchor="ctr"/>
-          <a:lstStyle/>
-          <a:p>
-            <a:pPr indent="0" marL="0">
-              <a:buNone/>
-            </a:pPr>
-            <a:r>
-              <a:rPr lang="en-US" sz="1600" b="1" dirty="0">
-                <a:solidFill>
-                  <a:schemeClr val="bg1"/>
-                </a:solidFill>
-                <a:latin typeface="Consolas" pitchFamily="34" charset="0"/>
-                <a:ea typeface="Consolas" pitchFamily="34" charset="-122"/>
-                <a:cs typeface="Consolas" pitchFamily="34" charset="-120"/>
-              </a:rPr>
-              <a:t>npm run evaluate -- control.csv --open</a:t>
-            </a:r>
-            <a:endParaRPr lang="en-US" sz="1600" dirty="0"/>
-          </a:p>
-        </p:txBody>
-      </p:sp>
-      <p:sp>
-        <p:nvSpPr>
-          <p:cNvPr id="6" name="icon-bg-LuUsers"/>
-          <p:cNvSpPr/>
-          <p:nvPr/>
-        </p:nvSpPr>
-        <p:spPr>
-          <a:xfrm>
-            <a:off x="548640" y="2834640"/>
-            <a:ext cx="548640" cy="548640"/>
-          </a:xfrm>
-          <a:prstGeom prst="ellipse">
-            <a:avLst/>
-          </a:prstGeom>
-          <a:solidFill>
-            <a:schemeClr val="accent1"/>
-          </a:solidFill>
-          <a:ln/>
-        </p:spPr>
-      </p:sp>
-      <p:pic>
-        <p:nvPicPr>
-          <p:cNvPr id="7" name="Image 0" descr="LuUsers">    </p:cNvPr>
-          <p:cNvPicPr>
-            <a:picLocks noChangeAspect="1"/>
-          </p:cNvPicPr>
-          <p:nvPr/>
-        </p:nvPicPr>
-        <p:blipFill>
-          <a:blip r:embed="rId1"/>
-          <a:stretch>
-            <a:fillRect/>
-          </a:stretch>
-        </p:blipFill>
-        <p:spPr>
-          <a:xfrm>
-            <a:off x="669341" y="2955341"/>
-            <a:ext cx="307238" cy="307238"/>
-          </a:xfrm>
-          <a:prstGeom prst="rect">
-            <a:avLst/>
-          </a:prstGeom>
-        </p:spPr>
-      </p:pic>
-      <p:sp>
-        <p:nvSpPr>
-          <p:cNvPr id="8" name="Text 5"/>
-          <p:cNvSpPr txBox="1"/>
-          <p:nvPr/>
-        </p:nvSpPr>
-        <p:spPr>
-          <a:xfrm>
-            <a:off x="1280160" y="2788920"/>
-            <a:ext cx="4389120" cy="822960"/>
-          </a:xfrm>
-          <a:prstGeom prst="rect">
-            <a:avLst/>
-          </a:prstGeom>
-          <a:noFill/>
-          <a:ln/>
-        </p:spPr>
-        <p:txBody>
-          <a:bodyPr wrap="square" lIns="0" tIns="0" rIns="0" bIns="0" rtlCol="0" anchor="t"/>
-          <a:lstStyle/>
-          <a:p>
-            <a:pPr indent="0" marL="0">
-              <a:spcAft>
-                <a:spcPts val="400"/>
-              </a:spcAft>
-              <a:buNone/>
-            </a:pPr>
-            <a:r>
-              <a:rPr lang="en-US" sz="1600" b="1" dirty="0">
-                <a:solidFill>
-                  <a:schemeClr val="tx1"/>
-                </a:solidFill>
-              </a:rPr>
-              <a:t>Шаг 1/4 · Прогноз</a:t>
-            </a:r>
-            <a:endParaRPr lang="en-US" sz="1600" dirty="0"/>
-          </a:p>
-          <a:p>
-            <a:pPr indent="0" marL="0">
-              <a:spcAft>
-                <a:spcPts val="400"/>
-              </a:spcAft>
-              <a:buNone/>
-            </a:pPr>
-            <a:r>
-              <a:rPr lang="en-US" sz="1350" dirty="0">
-                <a:solidFill>
-                  <a:schemeClr val="tx2"/>
-                </a:solidFill>
-              </a:rPr>
-              <a:t>каждой компании — как на сайте, с журналом расчёта</a:t>
-            </a:r>
-            <a:endParaRPr lang="en-US" sz="1600" dirty="0"/>
-          </a:p>
-        </p:txBody>
-      </p:sp>
-      <p:sp>
-        <p:nvSpPr>
-          <p:cNvPr id="9" name="icon-bg-LuHistory"/>
-          <p:cNvSpPr/>
-          <p:nvPr/>
-        </p:nvSpPr>
-        <p:spPr>
-          <a:xfrm>
-            <a:off x="548640" y="3703320"/>
-            <a:ext cx="548640" cy="548640"/>
-          </a:xfrm>
-          <a:prstGeom prst="ellipse">
-            <a:avLst/>
-          </a:prstGeom>
-          <a:solidFill>
-            <a:schemeClr val="accent1"/>
-          </a:solidFill>
-          <a:ln/>
-        </p:spPr>
-      </p:sp>
-      <p:pic>
-        <p:nvPicPr>
-          <p:cNvPr id="10" name="Image 1" descr="LuHistory">    </p:cNvPr>
-          <p:cNvPicPr>
-            <a:picLocks noChangeAspect="1"/>
-          </p:cNvPicPr>
-          <p:nvPr/>
-        </p:nvPicPr>
-        <p:blipFill>
-          <a:blip r:embed="rId2"/>
-          <a:stretch>
-            <a:fillRect/>
-          </a:stretch>
-        </p:blipFill>
-        <p:spPr>
-          <a:xfrm>
-            <a:off x="669341" y="3824021"/>
-            <a:ext cx="307238" cy="307238"/>
-          </a:xfrm>
-          <a:prstGeom prst="rect">
-            <a:avLst/>
-          </a:prstGeom>
-        </p:spPr>
-      </p:pic>
-      <p:sp>
-        <p:nvSpPr>
-          <p:cNvPr id="11" name="Text 7"/>
-          <p:cNvSpPr txBox="1"/>
-          <p:nvPr/>
-        </p:nvSpPr>
-        <p:spPr>
-          <a:xfrm>
-            <a:off x="1280160" y="3657600"/>
-            <a:ext cx="4389120" cy="822960"/>
-          </a:xfrm>
-          <a:prstGeom prst="rect">
-            <a:avLst/>
-          </a:prstGeom>
-          <a:noFill/>
-          <a:ln/>
-        </p:spPr>
-        <p:txBody>
-          <a:bodyPr wrap="square" lIns="0" tIns="0" rIns="0" bIns="0" rtlCol="0" anchor="t"/>
-          <a:lstStyle/>
-          <a:p>
-            <a:pPr indent="0" marL="0">
-              <a:spcAft>
-                <a:spcPts val="400"/>
-              </a:spcAft>
-              <a:buNone/>
-            </a:pPr>
-            <a:r>
-              <a:rPr lang="en-US" sz="1600" b="1" dirty="0">
-                <a:solidFill>
-                  <a:schemeClr val="tx1"/>
-                </a:solidFill>
-              </a:rPr>
-              <a:t>Шаг 2/4 · Бэктест</a:t>
-            </a:r>
-            <a:endParaRPr lang="en-US" sz="1600" dirty="0"/>
-          </a:p>
-          <a:p>
-            <a:pPr indent="0" marL="0">
-              <a:spcAft>
-                <a:spcPts val="400"/>
-              </a:spcAft>
-              <a:buNone/>
-            </a:pPr>
-            <a:r>
-              <a:rPr lang="en-US" sz="1350" dirty="0">
-                <a:solidFill>
-                  <a:schemeClr val="tx2"/>
-                </a:solidFill>
-              </a:rPr>
-              <a:t>Accuracy, Precision, Recall, F1, MAE, MSE, RMSE, ROC-AUC, Brier</a:t>
-            </a:r>
-            <a:endParaRPr lang="en-US" sz="1600" dirty="0"/>
-          </a:p>
-        </p:txBody>
-      </p:sp>
-      <p:sp>
-        <p:nvSpPr>
-          <p:cNvPr id="12" name="icon-bg-LuChartColumn"/>
-          <p:cNvSpPr/>
-          <p:nvPr/>
-        </p:nvSpPr>
-        <p:spPr>
-          <a:xfrm>
-            <a:off x="548640" y="4572000"/>
-            <a:ext cx="548640" cy="548640"/>
-          </a:xfrm>
-          <a:prstGeom prst="ellipse">
-            <a:avLst/>
-          </a:prstGeom>
-          <a:solidFill>
-            <a:schemeClr val="accent1"/>
-          </a:solidFill>
-          <a:ln/>
-        </p:spPr>
-      </p:sp>
-      <p:pic>
-        <p:nvPicPr>
-          <p:cNvPr id="13" name="Image 2" descr="LuChartColumn">    </p:cNvPr>
-          <p:cNvPicPr>
-            <a:picLocks noChangeAspect="1"/>
-          </p:cNvPicPr>
-          <p:nvPr/>
-        </p:nvPicPr>
-        <p:blipFill>
-          <a:blip r:embed="rId3"/>
-          <a:stretch>
-            <a:fillRect/>
-          </a:stretch>
-        </p:blipFill>
-        <p:spPr>
-          <a:xfrm>
-            <a:off x="669341" y="4692701"/>
-            <a:ext cx="307238" cy="307238"/>
-          </a:xfrm>
-          <a:prstGeom prst="rect">
-            <a:avLst/>
-          </a:prstGeom>
-        </p:spPr>
-      </p:pic>
-      <p:sp>
-        <p:nvSpPr>
-          <p:cNvPr id="14" name="Text 9"/>
-          <p:cNvSpPr txBox="1"/>
-          <p:nvPr/>
-        </p:nvSpPr>
-        <p:spPr>
-          <a:xfrm>
-            <a:off x="1280160" y="4526280"/>
-            <a:ext cx="4389120" cy="822960"/>
-          </a:xfrm>
-          <a:prstGeom prst="rect">
-            <a:avLst/>
-          </a:prstGeom>
-          <a:noFill/>
-          <a:ln/>
-        </p:spPr>
-        <p:txBody>
-          <a:bodyPr wrap="square" lIns="0" tIns="0" rIns="0" bIns="0" rtlCol="0" anchor="t"/>
-          <a:lstStyle/>
-          <a:p>
-            <a:pPr indent="0" marL="0">
-              <a:spcAft>
-                <a:spcPts val="400"/>
-              </a:spcAft>
-              <a:buNone/>
-            </a:pPr>
-            <a:r>
-              <a:rPr lang="en-US" sz="1600" b="1" dirty="0">
-                <a:solidFill>
-                  <a:schemeClr val="tx1"/>
-                </a:solidFill>
-              </a:rPr>
-              <a:t>Шаг 3/4 · Графики</a:t>
-            </a:r>
-            <a:endParaRPr lang="en-US" sz="1600" dirty="0"/>
-          </a:p>
-          <a:p>
-            <a:pPr indent="0" marL="0">
-              <a:spcAft>
-                <a:spcPts val="400"/>
-              </a:spcAft>
-              <a:buNone/>
-            </a:pPr>
-            <a:r>
-              <a:rPr lang="en-US" sz="1350" dirty="0">
-                <a:solidFill>
-                  <a:schemeClr val="tx2"/>
-                </a:solidFill>
-              </a:rPr>
-              <a:t>матрицы ошибок, ROC, калибровка, ошибки по горизонту</a:t>
-            </a:r>
-            <a:endParaRPr lang="en-US" sz="1600" dirty="0"/>
-          </a:p>
-        </p:txBody>
-      </p:sp>
-      <p:sp>
-        <p:nvSpPr>
-          <p:cNvPr id="15" name="icon-bg-LuFileText"/>
-          <p:cNvSpPr/>
-          <p:nvPr/>
-        </p:nvSpPr>
-        <p:spPr>
-          <a:xfrm>
-            <a:off x="548640" y="5440680"/>
-            <a:ext cx="548640" cy="548640"/>
-          </a:xfrm>
-          <a:prstGeom prst="ellipse">
-            <a:avLst/>
-          </a:prstGeom>
-          <a:solidFill>
-            <a:schemeClr val="accent1"/>
-          </a:solidFill>
-          <a:ln/>
-        </p:spPr>
-      </p:sp>
-      <p:pic>
-        <p:nvPicPr>
-          <p:cNvPr id="16" name="Image 3" descr="LuFileText">    </p:cNvPr>
-          <p:cNvPicPr>
-            <a:picLocks noChangeAspect="1"/>
-          </p:cNvPicPr>
-          <p:nvPr/>
-        </p:nvPicPr>
-        <p:blipFill>
-          <a:blip r:embed="rId4"/>
-          <a:stretch>
-            <a:fillRect/>
-          </a:stretch>
-        </p:blipFill>
-        <p:spPr>
-          <a:xfrm>
-            <a:off x="669341" y="5561381"/>
-            <a:ext cx="307238" cy="307238"/>
-          </a:xfrm>
-          <a:prstGeom prst="rect">
-            <a:avLst/>
-          </a:prstGeom>
-        </p:spPr>
-      </p:pic>
-      <p:sp>
-        <p:nvSpPr>
-          <p:cNvPr id="17" name="Text 11"/>
-          <p:cNvSpPr txBox="1"/>
-          <p:nvPr/>
-        </p:nvSpPr>
-        <p:spPr>
-          <a:xfrm>
-            <a:off x="1280160" y="5394960"/>
-            <a:ext cx="4389120" cy="822960"/>
-          </a:xfrm>
-          <a:prstGeom prst="rect">
-            <a:avLst/>
-          </a:prstGeom>
-          <a:noFill/>
-          <a:ln/>
-        </p:spPr>
-        <p:txBody>
-          <a:bodyPr wrap="square" lIns="0" tIns="0" rIns="0" bIns="0" rtlCol="0" anchor="t"/>
-          <a:lstStyle/>
-          <a:p>
-            <a:pPr indent="0" marL="0">
-              <a:spcAft>
-                <a:spcPts val="400"/>
-              </a:spcAft>
-              <a:buNone/>
-            </a:pPr>
-            <a:r>
-              <a:rPr lang="en-US" sz="1600" b="1" dirty="0">
-                <a:solidFill>
-                  <a:schemeClr val="tx1"/>
-                </a:solidFill>
-              </a:rPr>
-              <a:t>Шаг 4/4 · Отчёт</a:t>
-            </a:r>
-            <a:endParaRPr lang="en-US" sz="1600" dirty="0"/>
-          </a:p>
-          <a:p>
-            <a:pPr indent="0" marL="0">
-              <a:spcAft>
-                <a:spcPts val="400"/>
-              </a:spcAft>
-              <a:buNone/>
-            </a:pPr>
-            <a:r>
-              <a:rPr lang="en-US" sz="1350" dirty="0">
-                <a:solidFill>
-                  <a:schemeClr val="tx2"/>
-                </a:solidFill>
-              </a:rPr>
-              <a:t>report.html открывается без интернета</a:t>
-            </a:r>
-            <a:endParaRPr lang="en-US" sz="1600" dirty="0"/>
-          </a:p>
-        </p:txBody>
-      </p:sp>
-      <p:sp>
-        <p:nvSpPr>
-          <p:cNvPr id="18" name="frame-report_1_summary.png"/>
-          <p:cNvSpPr/>
-          <p:nvPr/>
-        </p:nvSpPr>
-        <p:spPr>
-          <a:xfrm>
-            <a:off x="6108192" y="1581912"/>
-            <a:ext cx="5568696" cy="3528441"/>
-          </a:xfrm>
-          <a:prstGeom prst="roundRect">
-            <a:avLst>
-              <a:gd name="adj" fmla="val 2592"/>
-            </a:avLst>
-          </a:prstGeom>
-          <a:solidFill>
-            <a:schemeClr val="tx1"/>
-          </a:solidFill>
-          <a:ln/>
-          <a:effectLst>
-            <a:outerShdw sx="100000" sy="100000" kx="0" ky="0" algn="bl" rotWithShape="0" blurRad="127000" dist="38100" dir="5400000">
-              <a:srgbClr val="0F172A">
-                <a:alpha val="16000"/>
-              </a:srgbClr>
-            </a:outerShdw>
-          </a:effectLst>
-        </p:spPr>
-      </p:sp>
-      <p:pic>
-        <p:nvPicPr>
-          <p:cNvPr id="19" name="Image 4" descr="HTML-отчёт npm run evaluate: итог по компаниям и метрики">    </p:cNvPr>
-          <p:cNvPicPr>
-            <a:picLocks noChangeAspect="1"/>
-          </p:cNvPicPr>
-          <p:nvPr/>
-        </p:nvPicPr>
-        <p:blipFill>
-          <a:blip r:embed="rId5"/>
-          <a:stretch>
-            <a:fillRect/>
-          </a:stretch>
-        </p:blipFill>
-        <p:spPr>
-          <a:xfrm>
-            <a:off x="6172200" y="1645920"/>
-            <a:ext cx="5440680" cy="3400425"/>
-          </a:xfrm>
-          <a:prstGeom prst="rect">
-            <a:avLst/>
-          </a:prstGeom>
-        </p:spPr>
-      </p:pic>
-      <p:sp>
-        <p:nvSpPr>
-          <p:cNvPr id="20" name="Text 13"/>
-          <p:cNvSpPr txBox="1"/>
-          <p:nvPr/>
-        </p:nvSpPr>
-        <p:spPr>
-          <a:xfrm>
-            <a:off x="6172200" y="5210937"/>
-            <a:ext cx="5440680" cy="320040"/>
-          </a:xfrm>
-          <a:prstGeom prst="rect">
-            <a:avLst/>
-          </a:prstGeom>
-          <a:noFill/>
-          <a:ln/>
-        </p:spPr>
-        <p:txBody>
-          <a:bodyPr wrap="square" lIns="0" tIns="0" rIns="0" bIns="0" rtlCol="0" anchor="ctr"/>
-          <a:lstStyle/>
-          <a:p>
-            <a:pPr indent="0" marL="0">
-              <a:buNone/>
-            </a:pPr>
-            <a:r>
-              <a:rPr lang="en-US" sz="1300" dirty="0">
-                <a:solidFill>
-                  <a:schemeClr val="tx2"/>
-                </a:solidFill>
-              </a:rPr>
-              <a:t>Отчёт по test.csv: 51 компания, около 5 секунд</a:t>
-            </a:r>
-            <a:endParaRPr lang="en-US" sz="1300" dirty="0"/>
-          </a:p>
-        </p:txBody>
-      </p:sp>
-      <p:sp>
-        <p:nvSpPr>
-          <p:cNvPr id="25" name="Slide Number Placeholder 0"/>
-          <p:cNvSpPr>
-            <a:spLocks noGrp="1"/>
-          </p:cNvSpPr>
-          <p:nvPr>
-            <p:ph type="sldNum" sz="quarter" idx="4294967295"/>
-          </p:nvPr>
-        </p:nvSpPr>
-        <p:spPr>
-          <a:xfrm>
-            <a:off x="11094415" y="6419088"/>
-            <a:ext cx="548640" cy="256032"/>
-          </a:xfrm>
-          <a:prstGeom prst="rect">
-            <a:avLst/>
-          </a:prstGeom>
-          <a:extLst>
-            <a:ext uri="{C572A759-6A51-4108-AA02-DFA0A04FC94B}">
-              <ma14:wrappingTextBoxFlag xmlns:ma14="http://schemas.microsoft.com/office/mac/drawingml/2011/main" val="0"/>
-            </a:ext>
-          </a:extLst>
-        </p:spPr>
-        <p:txBody>
-          <a:bodyPr/>
-          <a:lstStyle>
-            <a:lvl1pPr>
-              <a:defRPr sz="1000">
-                <a:solidFill>
-                  <a:srgbClr val="475569"/>
-                </a:solidFill>
-              </a:defRPr>
-            </a:lvl1pPr>
-          </a:lstStyle>
-          <a:p>
-            <a:pPr algn="r"/>
-            <a:fld id="{F7021451-1387-4CA6-816F-3879F97B5CBC}" type="slidenum">
-              <a:rPr b="0" lang="en-US"/>
               <a:t>7</a:t>
             </a:fld>
             <a:endParaRPr lang="en-US"/>
@@ -10634,8 +10939,8 @@
         </p:nvSpPr>
         <p:spPr>
           <a:xfrm>
-            <a:off x="548640" y="548640"/>
-            <a:ext cx="11094415" cy="822960"/>
+            <a:off x="548640" y="320040"/>
+            <a:ext cx="11094415" cy="640080"/>
           </a:xfrm>
           <a:prstGeom prst="rect">
             <a:avLst/>
@@ -10651,77 +10956,76 @@
               <a:buNone/>
             </a:pPr>
             <a:r>
-              <a:rPr lang="en-US" sz="3800" b="1" dirty="0">
-                <a:solidFill>
-                  <a:schemeClr val="bg1"/>
-                </a:solidFill>
-              </a:rPr>
-              <a:t>FinRadar предупреждает заранее и объясняет каждое число</a:t>
-            </a:r>
-            <a:endParaRPr lang="en-US" sz="3800" dirty="0"/>
-          </a:p>
-        </p:txBody>
-      </p:sp>
-      <p:sp>
-        <p:nvSpPr>
-          <p:cNvPr id="3" name="closing-stat-0"/>
+              <a:rPr lang="en-US" sz="3400" b="1" dirty="0">
+                <a:solidFill>
+                  <a:schemeClr val="tx1"/>
+                </a:solidFill>
+              </a:rPr>
+              <a:t>Контрольный датасет — одной командой</a:t>
+            </a:r>
+            <a:endParaRPr lang="en-US" sz="3400" dirty="0"/>
+          </a:p>
+        </p:txBody>
+      </p:sp>
+      <p:sp>
+        <p:nvSpPr>
+          <p:cNvPr id="3" name="Text 0"/>
           <p:cNvSpPr/>
-          <p:nvPr/>
-        </p:nvSpPr>
-        <p:spPr>
-          <a:xfrm>
-            <a:off x="548640" y="1783080"/>
-            <a:ext cx="2567864" cy="1691640"/>
+          <p:nvPr>
+            <p:ph idx="101" type="body" hasCustomPrompt="1"/>
+          </p:nvPr>
+        </p:nvSpPr>
+        <p:spPr>
+          <a:xfrm>
+            <a:off x="548640" y="978408"/>
+            <a:ext cx="11094415" cy="411480"/>
+          </a:xfrm>
+          <a:prstGeom prst="rect">
+            <a:avLst/>
+          </a:prstGeom>
+          <a:noFill/>
+          <a:ln/>
+        </p:spPr>
+        <p:txBody>
+          <a:bodyPr wrap="square" lIns="0" tIns="0" rIns="0" bIns="0" rtlCol="0" anchor="t"/>
+          <a:lstStyle/>
+          <a:p>
+            <a:pPr indent="0" marL="0">
+              <a:buNone/>
+            </a:pPr>
+            <a:r>
+              <a:rPr lang="en-US" sz="1800" dirty="0">
+                <a:solidFill>
+                  <a:schemeClr val="tx2"/>
+                </a:solidFill>
+              </a:rPr>
+              <a:t>Прогноз, журналы, метрики, матрицы ошибок и графики — несколько секунд на файл</a:t>
+            </a:r>
+            <a:endParaRPr lang="en-US" sz="1800" dirty="0"/>
+          </a:p>
+        </p:txBody>
+      </p:sp>
+      <p:sp>
+        <p:nvSpPr>
+          <p:cNvPr id="4" name="Shape 2"/>
+          <p:cNvSpPr/>
+          <p:nvPr/>
+        </p:nvSpPr>
+        <p:spPr>
+          <a:xfrm>
+            <a:off x="548640" y="1645920"/>
+            <a:ext cx="5120640" cy="914400"/>
           </a:xfrm>
           <a:prstGeom prst="roundRect">
             <a:avLst>
-              <a:gd name="adj" fmla="val 7568"/>
+              <a:gd name="adj" fmla="val 10000"/>
             </a:avLst>
           </a:prstGeom>
           <a:solidFill>
-            <a:schemeClr val="accent6"/>
+            <a:schemeClr val="tx1"/>
           </a:solidFill>
           <a:ln/>
         </p:spPr>
-      </p:sp>
-      <p:sp>
-        <p:nvSpPr>
-          <p:cNvPr id="4" name="Text 2"/>
-          <p:cNvSpPr txBox="1"/>
-          <p:nvPr/>
-        </p:nvSpPr>
-        <p:spPr>
-          <a:xfrm>
-            <a:off x="777240" y="1920240"/>
-            <a:ext cx="2110664" cy="685800"/>
-          </a:xfrm>
-          <a:prstGeom prst="rect">
-            <a:avLst/>
-          </a:prstGeom>
-          <a:noFill/>
-          <a:ln/>
-        </p:spPr>
-        <p:txBody>
-          <a:bodyPr wrap="square" lIns="0" tIns="0" rIns="0" bIns="0" rtlCol="0" anchor="b"/>
-          <a:lstStyle/>
-          <a:p>
-            <a:pPr indent="0" marL="0">
-              <a:buNone/>
-            </a:pPr>
-            <a:r>
-              <a:rPr lang="en-US" sz="3200" b="1" dirty="0">
-                <a:solidFill>
-                  <a:schemeClr val="bg1"/>
-                </a:solidFill>
-                <a:latin typeface="+mj-lt" pitchFamily="34" charset="0"/>
-                <a:ea typeface="+mj-lt" pitchFamily="34" charset="-122"/>
-                <a:cs typeface="+mj-lt" pitchFamily="34" charset="-120"/>
-              </a:rPr>
-              <a:t>8 из 10</a:t>
-            </a:r>
-            <a:endParaRPr lang="en-US" sz="3200" dirty="0"/>
-          </a:p>
-        </p:txBody>
       </p:sp>
       <p:sp>
         <p:nvSpPr>
@@ -10731,8 +11035,8 @@
         </p:nvSpPr>
         <p:spPr>
           <a:xfrm>
-            <a:off x="777240" y="2670048"/>
-            <a:ext cx="2110664" cy="731520"/>
+            <a:off x="822960" y="1645920"/>
+            <a:ext cx="4663440" cy="914400"/>
           </a:xfrm>
           <a:prstGeom prst="rect">
             <a:avLst/>
@@ -10741,56 +11045,490 @@
           <a:ln/>
         </p:spPr>
         <p:txBody>
+          <a:bodyPr wrap="square" lIns="0" tIns="0" rIns="0" bIns="0" rtlCol="0" anchor="ctr"/>
+          <a:lstStyle/>
+          <a:p>
+            <a:pPr indent="0" marL="0">
+              <a:buNone/>
+            </a:pPr>
+            <a:r>
+              <a:rPr lang="en-US" sz="1600" b="1" dirty="0">
+                <a:solidFill>
+                  <a:schemeClr val="bg1"/>
+                </a:solidFill>
+                <a:latin typeface="Consolas" pitchFamily="34" charset="0"/>
+                <a:ea typeface="Consolas" pitchFamily="34" charset="-122"/>
+                <a:cs typeface="Consolas" pitchFamily="34" charset="-120"/>
+              </a:rPr>
+              <a:t>npm run evaluate -- control.csv --open</a:t>
+            </a:r>
+            <a:endParaRPr lang="en-US" sz="1600" dirty="0"/>
+          </a:p>
+        </p:txBody>
+      </p:sp>
+      <p:sp>
+        <p:nvSpPr>
+          <p:cNvPr id="6" name="icon-bg-LuUsers"/>
+          <p:cNvSpPr/>
+          <p:nvPr/>
+        </p:nvSpPr>
+        <p:spPr>
+          <a:xfrm>
+            <a:off x="548640" y="2834640"/>
+            <a:ext cx="548640" cy="548640"/>
+          </a:xfrm>
+          <a:prstGeom prst="ellipse">
+            <a:avLst/>
+          </a:prstGeom>
+          <a:solidFill>
+            <a:schemeClr val="accent1"/>
+          </a:solidFill>
+          <a:ln/>
+        </p:spPr>
+      </p:sp>
+      <p:pic>
+        <p:nvPicPr>
+          <p:cNvPr id="7" name="Image 0" descr="LuUsers">    </p:cNvPr>
+          <p:cNvPicPr>
+            <a:picLocks noChangeAspect="1"/>
+          </p:cNvPicPr>
+          <p:nvPr/>
+        </p:nvPicPr>
+        <p:blipFill>
+          <a:blip r:embed="rId1"/>
+          <a:stretch>
+            <a:fillRect/>
+          </a:stretch>
+        </p:blipFill>
+        <p:spPr>
+          <a:xfrm>
+            <a:off x="669341" y="2955341"/>
+            <a:ext cx="307238" cy="307238"/>
+          </a:xfrm>
+          <a:prstGeom prst="rect">
+            <a:avLst/>
+          </a:prstGeom>
+        </p:spPr>
+      </p:pic>
+      <p:sp>
+        <p:nvSpPr>
+          <p:cNvPr id="8" name="Text 5"/>
+          <p:cNvSpPr txBox="1"/>
+          <p:nvPr/>
+        </p:nvSpPr>
+        <p:spPr>
+          <a:xfrm>
+            <a:off x="1280160" y="2788920"/>
+            <a:ext cx="4389120" cy="822960"/>
+          </a:xfrm>
+          <a:prstGeom prst="rect">
+            <a:avLst/>
+          </a:prstGeom>
+          <a:noFill/>
+          <a:ln/>
+        </p:spPr>
+        <p:txBody>
           <a:bodyPr wrap="square" lIns="0" tIns="0" rIns="0" bIns="0" rtlCol="0" anchor="t"/>
           <a:lstStyle/>
           <a:p>
             <a:pPr indent="0" marL="0">
-              <a:buNone/>
-            </a:pPr>
-            <a:r>
-              <a:rPr lang="en-US" sz="1500" dirty="0">
-                <a:solidFill>
-                  <a:schemeClr val="accent5"/>
-                </a:solidFill>
-              </a:rPr>
-              <a:t>новых разрывов найдено заранее</a:t>
-            </a:r>
-            <a:endParaRPr lang="en-US" sz="1500" dirty="0"/>
-          </a:p>
-        </p:txBody>
-      </p:sp>
-      <p:sp>
-        <p:nvSpPr>
-          <p:cNvPr id="6" name="closing-stat-1"/>
+              <a:spcAft>
+                <a:spcPts val="400"/>
+              </a:spcAft>
+              <a:buNone/>
+            </a:pPr>
+            <a:r>
+              <a:rPr lang="en-US" sz="1600" b="1" dirty="0">
+                <a:solidFill>
+                  <a:schemeClr val="tx1"/>
+                </a:solidFill>
+              </a:rPr>
+              <a:t>Шаг 1/4 · Прогноз</a:t>
+            </a:r>
+            <a:endParaRPr lang="en-US" sz="1600" dirty="0"/>
+          </a:p>
+          <a:p>
+            <a:pPr indent="0" marL="0">
+              <a:spcAft>
+                <a:spcPts val="400"/>
+              </a:spcAft>
+              <a:buNone/>
+            </a:pPr>
+            <a:r>
+              <a:rPr lang="en-US" sz="1350" dirty="0">
+                <a:solidFill>
+                  <a:schemeClr val="tx2"/>
+                </a:solidFill>
+              </a:rPr>
+              <a:t>каждой компании — как на сайте, с журналом расчёта</a:t>
+            </a:r>
+            <a:endParaRPr lang="en-US" sz="1600" dirty="0"/>
+          </a:p>
+        </p:txBody>
+      </p:sp>
+      <p:sp>
+        <p:nvSpPr>
+          <p:cNvPr id="9" name="icon-bg-LuHistory"/>
           <p:cNvSpPr/>
           <p:nvPr/>
         </p:nvSpPr>
         <p:spPr>
           <a:xfrm>
-            <a:off x="3390824" y="1783080"/>
-            <a:ext cx="2567864" cy="1691640"/>
+            <a:off x="548640" y="3703320"/>
+            <a:ext cx="548640" cy="548640"/>
+          </a:xfrm>
+          <a:prstGeom prst="ellipse">
+            <a:avLst/>
+          </a:prstGeom>
+          <a:solidFill>
+            <a:schemeClr val="accent1"/>
+          </a:solidFill>
+          <a:ln/>
+        </p:spPr>
+      </p:sp>
+      <p:pic>
+        <p:nvPicPr>
+          <p:cNvPr id="10" name="Image 1" descr="LuHistory">    </p:cNvPr>
+          <p:cNvPicPr>
+            <a:picLocks noChangeAspect="1"/>
+          </p:cNvPicPr>
+          <p:nvPr/>
+        </p:nvPicPr>
+        <p:blipFill>
+          <a:blip r:embed="rId2"/>
+          <a:stretch>
+            <a:fillRect/>
+          </a:stretch>
+        </p:blipFill>
+        <p:spPr>
+          <a:xfrm>
+            <a:off x="669341" y="3824021"/>
+            <a:ext cx="307238" cy="307238"/>
+          </a:xfrm>
+          <a:prstGeom prst="rect">
+            <a:avLst/>
+          </a:prstGeom>
+        </p:spPr>
+      </p:pic>
+      <p:sp>
+        <p:nvSpPr>
+          <p:cNvPr id="11" name="Text 7"/>
+          <p:cNvSpPr txBox="1"/>
+          <p:nvPr/>
+        </p:nvSpPr>
+        <p:spPr>
+          <a:xfrm>
+            <a:off x="1280160" y="3657600"/>
+            <a:ext cx="4389120" cy="822960"/>
+          </a:xfrm>
+          <a:prstGeom prst="rect">
+            <a:avLst/>
+          </a:prstGeom>
+          <a:noFill/>
+          <a:ln/>
+        </p:spPr>
+        <p:txBody>
+          <a:bodyPr wrap="square" lIns="0" tIns="0" rIns="0" bIns="0" rtlCol="0" anchor="t"/>
+          <a:lstStyle/>
+          <a:p>
+            <a:pPr indent="0" marL="0">
+              <a:spcAft>
+                <a:spcPts val="400"/>
+              </a:spcAft>
+              <a:buNone/>
+            </a:pPr>
+            <a:r>
+              <a:rPr lang="en-US" sz="1600" b="1" dirty="0">
+                <a:solidFill>
+                  <a:schemeClr val="tx1"/>
+                </a:solidFill>
+              </a:rPr>
+              <a:t>Шаг 2/4 · Бэктест</a:t>
+            </a:r>
+            <a:endParaRPr lang="en-US" sz="1600" dirty="0"/>
+          </a:p>
+          <a:p>
+            <a:pPr indent="0" marL="0">
+              <a:spcAft>
+                <a:spcPts val="400"/>
+              </a:spcAft>
+              <a:buNone/>
+            </a:pPr>
+            <a:r>
+              <a:rPr lang="en-US" sz="1350" dirty="0">
+                <a:solidFill>
+                  <a:schemeClr val="tx2"/>
+                </a:solidFill>
+              </a:rPr>
+              <a:t>Accuracy, Precision, Recall, F1, MAE, MSE, RMSE, ROC-AUC, Brier</a:t>
+            </a:r>
+            <a:endParaRPr lang="en-US" sz="1600" dirty="0"/>
+          </a:p>
+        </p:txBody>
+      </p:sp>
+      <p:sp>
+        <p:nvSpPr>
+          <p:cNvPr id="12" name="icon-bg-LuChartColumn"/>
+          <p:cNvSpPr/>
+          <p:nvPr/>
+        </p:nvSpPr>
+        <p:spPr>
+          <a:xfrm>
+            <a:off x="548640" y="4572000"/>
+            <a:ext cx="548640" cy="548640"/>
+          </a:xfrm>
+          <a:prstGeom prst="ellipse">
+            <a:avLst/>
+          </a:prstGeom>
+          <a:solidFill>
+            <a:schemeClr val="accent1"/>
+          </a:solidFill>
+          <a:ln/>
+        </p:spPr>
+      </p:sp>
+      <p:pic>
+        <p:nvPicPr>
+          <p:cNvPr id="13" name="Image 2" descr="LuChartColumn">    </p:cNvPr>
+          <p:cNvPicPr>
+            <a:picLocks noChangeAspect="1"/>
+          </p:cNvPicPr>
+          <p:nvPr/>
+        </p:nvPicPr>
+        <p:blipFill>
+          <a:blip r:embed="rId3"/>
+          <a:stretch>
+            <a:fillRect/>
+          </a:stretch>
+        </p:blipFill>
+        <p:spPr>
+          <a:xfrm>
+            <a:off x="669341" y="4692701"/>
+            <a:ext cx="307238" cy="307238"/>
+          </a:xfrm>
+          <a:prstGeom prst="rect">
+            <a:avLst/>
+          </a:prstGeom>
+        </p:spPr>
+      </p:pic>
+      <p:sp>
+        <p:nvSpPr>
+          <p:cNvPr id="14" name="Text 9"/>
+          <p:cNvSpPr txBox="1"/>
+          <p:nvPr/>
+        </p:nvSpPr>
+        <p:spPr>
+          <a:xfrm>
+            <a:off x="1280160" y="4526280"/>
+            <a:ext cx="4389120" cy="822960"/>
+          </a:xfrm>
+          <a:prstGeom prst="rect">
+            <a:avLst/>
+          </a:prstGeom>
+          <a:noFill/>
+          <a:ln/>
+        </p:spPr>
+        <p:txBody>
+          <a:bodyPr wrap="square" lIns="0" tIns="0" rIns="0" bIns="0" rtlCol="0" anchor="t"/>
+          <a:lstStyle/>
+          <a:p>
+            <a:pPr indent="0" marL="0">
+              <a:spcAft>
+                <a:spcPts val="400"/>
+              </a:spcAft>
+              <a:buNone/>
+            </a:pPr>
+            <a:r>
+              <a:rPr lang="en-US" sz="1600" b="1" dirty="0">
+                <a:solidFill>
+                  <a:schemeClr val="tx1"/>
+                </a:solidFill>
+              </a:rPr>
+              <a:t>Шаг 3/4 · Графики</a:t>
+            </a:r>
+            <a:endParaRPr lang="en-US" sz="1600" dirty="0"/>
+          </a:p>
+          <a:p>
+            <a:pPr indent="0" marL="0">
+              <a:spcAft>
+                <a:spcPts val="400"/>
+              </a:spcAft>
+              <a:buNone/>
+            </a:pPr>
+            <a:r>
+              <a:rPr lang="en-US" sz="1350" dirty="0">
+                <a:solidFill>
+                  <a:schemeClr val="tx2"/>
+                </a:solidFill>
+              </a:rPr>
+              <a:t>матрицы ошибок, ROC, калибровка, ошибки по горизонту</a:t>
+            </a:r>
+            <a:endParaRPr lang="en-US" sz="1600" dirty="0"/>
+          </a:p>
+        </p:txBody>
+      </p:sp>
+      <p:sp>
+        <p:nvSpPr>
+          <p:cNvPr id="15" name="icon-bg-LuFileText"/>
+          <p:cNvSpPr/>
+          <p:nvPr/>
+        </p:nvSpPr>
+        <p:spPr>
+          <a:xfrm>
+            <a:off x="548640" y="5440680"/>
+            <a:ext cx="548640" cy="548640"/>
+          </a:xfrm>
+          <a:prstGeom prst="ellipse">
+            <a:avLst/>
+          </a:prstGeom>
+          <a:solidFill>
+            <a:schemeClr val="accent1"/>
+          </a:solidFill>
+          <a:ln/>
+        </p:spPr>
+      </p:sp>
+      <p:pic>
+        <p:nvPicPr>
+          <p:cNvPr id="16" name="Image 3" descr="LuFileText">    </p:cNvPr>
+          <p:cNvPicPr>
+            <a:picLocks noChangeAspect="1"/>
+          </p:cNvPicPr>
+          <p:nvPr/>
+        </p:nvPicPr>
+        <p:blipFill>
+          <a:blip r:embed="rId4"/>
+          <a:stretch>
+            <a:fillRect/>
+          </a:stretch>
+        </p:blipFill>
+        <p:spPr>
+          <a:xfrm>
+            <a:off x="669341" y="5561381"/>
+            <a:ext cx="307238" cy="307238"/>
+          </a:xfrm>
+          <a:prstGeom prst="rect">
+            <a:avLst/>
+          </a:prstGeom>
+        </p:spPr>
+      </p:pic>
+      <p:sp>
+        <p:nvSpPr>
+          <p:cNvPr id="17" name="Text 11"/>
+          <p:cNvSpPr txBox="1"/>
+          <p:nvPr/>
+        </p:nvSpPr>
+        <p:spPr>
+          <a:xfrm>
+            <a:off x="1280160" y="5394960"/>
+            <a:ext cx="4389120" cy="822960"/>
+          </a:xfrm>
+          <a:prstGeom prst="rect">
+            <a:avLst/>
+          </a:prstGeom>
+          <a:noFill/>
+          <a:ln/>
+        </p:spPr>
+        <p:txBody>
+          <a:bodyPr wrap="square" lIns="0" tIns="0" rIns="0" bIns="0" rtlCol="0" anchor="t"/>
+          <a:lstStyle/>
+          <a:p>
+            <a:pPr indent="0" marL="0">
+              <a:spcAft>
+                <a:spcPts val="400"/>
+              </a:spcAft>
+              <a:buNone/>
+            </a:pPr>
+            <a:r>
+              <a:rPr lang="en-US" sz="1600" b="1" dirty="0">
+                <a:solidFill>
+                  <a:schemeClr val="tx1"/>
+                </a:solidFill>
+              </a:rPr>
+              <a:t>Шаг 4/4 · Отчёт</a:t>
+            </a:r>
+            <a:endParaRPr lang="en-US" sz="1600" dirty="0"/>
+          </a:p>
+          <a:p>
+            <a:pPr indent="0" marL="0">
+              <a:spcAft>
+                <a:spcPts val="400"/>
+              </a:spcAft>
+              <a:buNone/>
+            </a:pPr>
+            <a:r>
+              <a:rPr lang="en-US" sz="1350" dirty="0">
+                <a:solidFill>
+                  <a:schemeClr val="tx2"/>
+                </a:solidFill>
+              </a:rPr>
+              <a:t>report.html открывается без интернета</a:t>
+            </a:r>
+            <a:endParaRPr lang="en-US" sz="1600" dirty="0"/>
+          </a:p>
+        </p:txBody>
+      </p:sp>
+      <p:sp>
+        <p:nvSpPr>
+          <p:cNvPr id="18" name="frame-report_1_summary.png"/>
+          <p:cNvSpPr/>
+          <p:nvPr/>
+        </p:nvSpPr>
+        <p:spPr>
+          <a:xfrm>
+            <a:off x="6108192" y="1581912"/>
+            <a:ext cx="5568696" cy="3528441"/>
           </a:xfrm>
           <a:prstGeom prst="roundRect">
             <a:avLst>
-              <a:gd name="adj" fmla="val 7568"/>
+              <a:gd name="adj" fmla="val 2592"/>
             </a:avLst>
           </a:prstGeom>
           <a:solidFill>
-            <a:schemeClr val="accent6"/>
+            <a:schemeClr val="tx1"/>
           </a:solidFill>
           <a:ln/>
-        </p:spPr>
-      </p:sp>
-      <p:sp>
-        <p:nvSpPr>
-          <p:cNvPr id="7" name="Text 5"/>
+          <a:effectLst>
+            <a:outerShdw sx="100000" sy="100000" kx="0" ky="0" algn="bl" rotWithShape="0" blurRad="127000" dist="38100" dir="5400000">
+              <a:srgbClr val="0F172A">
+                <a:alpha val="16000"/>
+              </a:srgbClr>
+            </a:outerShdw>
+          </a:effectLst>
+        </p:spPr>
+      </p:sp>
+      <p:pic>
+        <p:nvPicPr>
+          <p:cNvPr id="19" name="Image 4" descr="HTML-отчёт npm run evaluate: итог по компаниям и метрики">    </p:cNvPr>
+          <p:cNvPicPr>
+            <a:picLocks noChangeAspect="1"/>
+          </p:cNvPicPr>
+          <p:nvPr/>
+        </p:nvPicPr>
+        <p:blipFill>
+          <a:blip r:embed="rId5"/>
+          <a:stretch>
+            <a:fillRect/>
+          </a:stretch>
+        </p:blipFill>
+        <p:spPr>
+          <a:xfrm>
+            <a:off x="6172200" y="1645920"/>
+            <a:ext cx="5440680" cy="3400425"/>
+          </a:xfrm>
+          <a:prstGeom prst="rect">
+            <a:avLst/>
+          </a:prstGeom>
+        </p:spPr>
+      </p:pic>
+      <p:sp>
+        <p:nvSpPr>
+          <p:cNvPr id="20" name="Text 13"/>
           <p:cNvSpPr txBox="1"/>
           <p:nvPr/>
         </p:nvSpPr>
         <p:spPr>
           <a:xfrm>
-            <a:off x="3619424" y="1920240"/>
-            <a:ext cx="2110664" cy="685800"/>
+            <a:off x="6172200" y="5210937"/>
+            <a:ext cx="5440680" cy="320040"/>
           </a:xfrm>
           <a:prstGeom prst="rect">
             <a:avLst/>
@@ -10799,373 +11537,66 @@
           <a:ln/>
         </p:spPr>
         <p:txBody>
-          <a:bodyPr wrap="square" lIns="0" tIns="0" rIns="0" bIns="0" rtlCol="0" anchor="b"/>
+          <a:bodyPr wrap="square" lIns="0" tIns="0" rIns="0" bIns="0" rtlCol="0" anchor="ctr"/>
           <a:lstStyle/>
           <a:p>
             <a:pPr indent="0" marL="0">
               <a:buNone/>
             </a:pPr>
             <a:r>
-              <a:rPr lang="en-US" sz="3200" b="1" dirty="0">
-                <a:solidFill>
-                  <a:schemeClr val="bg1"/>
-                </a:solidFill>
-                <a:latin typeface="+mj-lt" pitchFamily="34" charset="0"/>
-                <a:ea typeface="+mj-lt" pitchFamily="34" charset="-122"/>
-                <a:cs typeface="+mj-lt" pitchFamily="34" charset="-120"/>
-              </a:rPr>
-              <a:t>21,5 дня</a:t>
-            </a:r>
-            <a:endParaRPr lang="en-US" sz="3200" dirty="0"/>
-          </a:p>
-        </p:txBody>
-      </p:sp>
-      <p:sp>
-        <p:nvSpPr>
-          <p:cNvPr id="8" name="Text 6"/>
-          <p:cNvSpPr txBox="1"/>
-          <p:nvPr/>
-        </p:nvSpPr>
-        <p:spPr>
-          <a:xfrm>
-            <a:off x="3619424" y="2670048"/>
-            <a:ext cx="2110664" cy="731520"/>
-          </a:xfrm>
-          <a:prstGeom prst="rect">
-            <a:avLst/>
-          </a:prstGeom>
-          <a:noFill/>
-          <a:ln/>
-        </p:spPr>
-        <p:txBody>
-          <a:bodyPr wrap="square" lIns="0" tIns="0" rIns="0" bIns="0" rtlCol="0" anchor="t"/>
-          <a:lstStyle/>
-          <a:p>
-            <a:pPr indent="0" marL="0">
-              <a:buNone/>
-            </a:pPr>
-            <a:r>
-              <a:rPr lang="en-US" sz="1500" dirty="0">
-                <a:solidFill>
-                  <a:schemeClr val="accent5"/>
-                </a:solidFill>
-              </a:rPr>
-              <a:t>медианный запас времени до разрыва</a:t>
-            </a:r>
-            <a:endParaRPr lang="en-US" sz="1500" dirty="0"/>
-          </a:p>
-        </p:txBody>
-      </p:sp>
-      <p:sp>
-        <p:nvSpPr>
-          <p:cNvPr id="9" name="closing-stat-2"/>
-          <p:cNvSpPr/>
-          <p:nvPr/>
-        </p:nvSpPr>
-        <p:spPr>
-          <a:xfrm>
-            <a:off x="6233008" y="1783080"/>
-            <a:ext cx="2567864" cy="1691640"/>
-          </a:xfrm>
-          <a:prstGeom prst="roundRect">
-            <a:avLst>
-              <a:gd name="adj" fmla="val 7568"/>
-            </a:avLst>
-          </a:prstGeom>
-          <a:solidFill>
-            <a:schemeClr val="accent6"/>
-          </a:solidFill>
-          <a:ln/>
-        </p:spPr>
-      </p:sp>
-      <p:sp>
-        <p:nvSpPr>
-          <p:cNvPr id="10" name="Text 8"/>
-          <p:cNvSpPr txBox="1"/>
-          <p:nvPr/>
-        </p:nvSpPr>
-        <p:spPr>
-          <a:xfrm>
-            <a:off x="6461608" y="1920240"/>
-            <a:ext cx="2110664" cy="685800"/>
-          </a:xfrm>
-          <a:prstGeom prst="rect">
-            <a:avLst/>
-          </a:prstGeom>
-          <a:noFill/>
-          <a:ln/>
-        </p:spPr>
-        <p:txBody>
-          <a:bodyPr wrap="square" lIns="0" tIns="0" rIns="0" bIns="0" rtlCol="0" anchor="b"/>
-          <a:lstStyle/>
-          <a:p>
-            <a:pPr indent="0" marL="0">
-              <a:buNone/>
-            </a:pPr>
-            <a:r>
-              <a:rPr lang="en-US" sz="3200" b="1" dirty="0">
-                <a:solidFill>
-                  <a:schemeClr val="bg1"/>
-                </a:solidFill>
-                <a:latin typeface="+mj-lt" pitchFamily="34" charset="0"/>
-                <a:ea typeface="+mj-lt" pitchFamily="34" charset="-122"/>
-                <a:cs typeface="+mj-lt" pitchFamily="34" charset="-120"/>
-              </a:rPr>
-              <a:t>51</a:t>
-            </a:r>
-            <a:endParaRPr lang="en-US" sz="3200" dirty="0"/>
-          </a:p>
-        </p:txBody>
-      </p:sp>
-      <p:sp>
-        <p:nvSpPr>
-          <p:cNvPr id="11" name="Text 9"/>
-          <p:cNvSpPr txBox="1"/>
-          <p:nvPr/>
-        </p:nvSpPr>
-        <p:spPr>
-          <a:xfrm>
-            <a:off x="6461608" y="2670048"/>
-            <a:ext cx="2110664" cy="731520"/>
-          </a:xfrm>
-          <a:prstGeom prst="rect">
-            <a:avLst/>
-          </a:prstGeom>
-          <a:noFill/>
-          <a:ln/>
-        </p:spPr>
-        <p:txBody>
-          <a:bodyPr wrap="square" lIns="0" tIns="0" rIns="0" bIns="0" rtlCol="0" anchor="t"/>
-          <a:lstStyle/>
-          <a:p>
-            <a:pPr indent="0" marL="0">
-              <a:buNone/>
-            </a:pPr>
-            <a:r>
-              <a:rPr lang="en-US" sz="1500" dirty="0">
-                <a:solidFill>
-                  <a:schemeClr val="accent5"/>
-                </a:solidFill>
-              </a:rPr>
-              <a:t>компания: прогноз и журнал из одного файла за ~5 секунд</a:t>
-            </a:r>
-            <a:endParaRPr lang="en-US" sz="1500" dirty="0"/>
-          </a:p>
-        </p:txBody>
-      </p:sp>
-      <p:sp>
-        <p:nvSpPr>
-          <p:cNvPr id="12" name="closing-stat-3"/>
-          <p:cNvSpPr/>
-          <p:nvPr/>
-        </p:nvSpPr>
-        <p:spPr>
-          <a:xfrm>
-            <a:off x="9075191" y="1783080"/>
-            <a:ext cx="2567864" cy="1691640"/>
-          </a:xfrm>
-          <a:prstGeom prst="roundRect">
-            <a:avLst>
-              <a:gd name="adj" fmla="val 7568"/>
-            </a:avLst>
-          </a:prstGeom>
-          <a:solidFill>
-            <a:schemeClr val="accent6"/>
-          </a:solidFill>
-          <a:ln/>
-        </p:spPr>
-      </p:sp>
-      <p:sp>
-        <p:nvSpPr>
-          <p:cNvPr id="13" name="Text 11"/>
-          <p:cNvSpPr txBox="1"/>
-          <p:nvPr/>
-        </p:nvSpPr>
-        <p:spPr>
-          <a:xfrm>
-            <a:off x="9303791" y="1920240"/>
-            <a:ext cx="2110664" cy="685800"/>
-          </a:xfrm>
-          <a:prstGeom prst="rect">
-            <a:avLst/>
-          </a:prstGeom>
-          <a:noFill/>
-          <a:ln/>
-        </p:spPr>
-        <p:txBody>
-          <a:bodyPr wrap="square" lIns="0" tIns="0" rIns="0" bIns="0" rtlCol="0" anchor="b"/>
-          <a:lstStyle/>
-          <a:p>
-            <a:pPr indent="0" marL="0">
-              <a:buNone/>
-            </a:pPr>
-            <a:r>
-              <a:rPr lang="en-US" sz="3200" b="1" dirty="0">
-                <a:solidFill>
-                  <a:schemeClr val="bg1"/>
-                </a:solidFill>
-                <a:latin typeface="+mj-lt" pitchFamily="34" charset="0"/>
-                <a:ea typeface="+mj-lt" pitchFamily="34" charset="-122"/>
-                <a:cs typeface="+mj-lt" pitchFamily="34" charset="-120"/>
-              </a:rPr>
-              <a:t>0,77</a:t>
-            </a:r>
-            <a:endParaRPr lang="en-US" sz="3200" dirty="0"/>
-          </a:p>
-        </p:txBody>
-      </p:sp>
-      <p:sp>
-        <p:nvSpPr>
-          <p:cNvPr id="14" name="Text 12"/>
-          <p:cNvSpPr txBox="1"/>
-          <p:nvPr/>
-        </p:nvSpPr>
-        <p:spPr>
-          <a:xfrm>
-            <a:off x="9303791" y="2670048"/>
-            <a:ext cx="2110664" cy="731520"/>
-          </a:xfrm>
-          <a:prstGeom prst="rect">
-            <a:avLst/>
-          </a:prstGeom>
-          <a:noFill/>
-          <a:ln/>
-        </p:spPr>
-        <p:txBody>
-          <a:bodyPr wrap="square" lIns="0" tIns="0" rIns="0" bIns="0" rtlCol="0" anchor="t"/>
-          <a:lstStyle/>
-          <a:p>
-            <a:pPr indent="0" marL="0">
-              <a:buNone/>
-            </a:pPr>
-            <a:r>
-              <a:rPr lang="en-US" sz="1500" dirty="0">
-                <a:solidFill>
-                  <a:schemeClr val="accent5"/>
-                </a:solidFill>
-              </a:rPr>
-              <a:t>ROC-AUC на 761 прогнозах</a:t>
-            </a:r>
-            <a:endParaRPr lang="en-US" sz="1500" dirty="0"/>
-          </a:p>
-        </p:txBody>
-      </p:sp>
-      <p:sp>
-        <p:nvSpPr>
-          <p:cNvPr id="15" name="Text 13"/>
-          <p:cNvSpPr txBox="1"/>
-          <p:nvPr/>
-        </p:nvSpPr>
-        <p:spPr>
-          <a:xfrm>
-            <a:off x="548640" y="3840480"/>
-            <a:ext cx="11094415" cy="548640"/>
-          </a:xfrm>
-          <a:prstGeom prst="rect">
-            <a:avLst/>
-          </a:prstGeom>
-          <a:noFill/>
-          <a:ln/>
-        </p:spPr>
-        <p:txBody>
-          <a:bodyPr wrap="square" lIns="0" tIns="0" rIns="0" bIns="0" rtlCol="0" anchor="ctr"/>
-          <a:lstStyle/>
-          <a:p>
-            <a:pPr indent="0" marL="0">
-              <a:buNone/>
-            </a:pPr>
-            <a:r>
-              <a:rPr lang="en-US" sz="1800" b="1" dirty="0">
-                <a:solidFill>
-                  <a:schemeClr val="bg1"/>
-                </a:solidFill>
-              </a:rPr>
-              <a:t>Следующий шаг: </a:t>
-            </a:r>
-            <a:pPr indent="0" marL="0">
-              <a:buNone/>
-            </a:pPr>
-            <a:r>
-              <a:rPr lang="en-US" sz="1800" dirty="0">
-                <a:solidFill>
-                  <a:schemeClr val="accent5"/>
-                </a:solidFill>
-              </a:rPr>
-              <a:t>калибровка вероятности; счета, договоры и налоговый календарь в прогнозе</a:t>
-            </a:r>
-            <a:endParaRPr lang="en-US" sz="1800" dirty="0"/>
-          </a:p>
-        </p:txBody>
-      </p:sp>
-      <p:sp>
-        <p:nvSpPr>
-          <p:cNvPr id="16" name="Text 14"/>
-          <p:cNvSpPr txBox="1"/>
-          <p:nvPr/>
-        </p:nvSpPr>
-        <p:spPr>
-          <a:xfrm>
-            <a:off x="548640" y="4709160"/>
-            <a:ext cx="11094415" cy="640080"/>
-          </a:xfrm>
-          <a:prstGeom prst="rect">
-            <a:avLst/>
-          </a:prstGeom>
-          <a:noFill/>
-          <a:ln/>
-        </p:spPr>
-        <p:txBody>
-          <a:bodyPr wrap="square" lIns="0" tIns="0" rIns="0" bIns="0" rtlCol="0" anchor="ctr"/>
-          <a:lstStyle/>
-          <a:p>
-            <a:pPr indent="0" marL="0">
-              <a:buNone/>
-            </a:pPr>
-            <a:r>
-              <a:rPr lang="en-US" sz="2800" b="1" dirty="0">
-                <a:solidFill>
-                  <a:schemeClr val="bg1"/>
-                </a:solidFill>
-              </a:rPr>
-              <a:t>Спасибо! Готовы ответить на вопросы</a:t>
-            </a:r>
-            <a:endParaRPr lang="en-US" sz="2800" dirty="0"/>
-          </a:p>
-        </p:txBody>
-      </p:sp>
-      <p:sp>
-        <p:nvSpPr>
-          <p:cNvPr id="17" name="Text 15"/>
-          <p:cNvSpPr txBox="1"/>
-          <p:nvPr/>
-        </p:nvSpPr>
-        <p:spPr>
-          <a:xfrm>
-            <a:off x="548640" y="5394960"/>
-            <a:ext cx="11094415" cy="411480"/>
-          </a:xfrm>
-          <a:prstGeom prst="rect">
-            <a:avLst/>
-          </a:prstGeom>
-          <a:noFill/>
-          <a:ln/>
-        </p:spPr>
-        <p:txBody>
-          <a:bodyPr wrap="square" lIns="0" tIns="0" rIns="0" bIns="0" rtlCol="0" anchor="ctr"/>
-          <a:lstStyle/>
-          <a:p>
-            <a:pPr indent="0" marL="0">
-              <a:buNone/>
-            </a:pPr>
-            <a:r>
-              <a:rPr lang="en-US" sz="1800" dirty="0">
-                <a:solidFill>
-                  <a:schemeClr val="accent5"/>
-                </a:solidFill>
-              </a:rPr>
-              <a:t>github.com/egor-lap/finprognoz</a:t>
-            </a:r>
-            <a:endParaRPr lang="en-US" sz="1800" dirty="0"/>
+              <a:rPr lang="en-US" sz="1300" dirty="0">
+                <a:solidFill>
+                  <a:schemeClr val="tx2"/>
+                </a:solidFill>
+              </a:rPr>
+              <a:t>Отчёт по test.csv: 51 компания, около 5 секунд</a:t>
+            </a:r>
+            <a:endParaRPr lang="en-US" sz="1300" dirty="0"/>
+          </a:p>
+        </p:txBody>
+      </p:sp>
+      <p:sp>
+        <p:nvSpPr>
+          <p:cNvPr id="25" name="Slide Number Placeholder 0"/>
+          <p:cNvSpPr>
+            <a:spLocks noGrp="1"/>
+          </p:cNvSpPr>
+          <p:nvPr>
+            <p:ph type="sldNum" sz="quarter" idx="4294967295"/>
+          </p:nvPr>
+        </p:nvSpPr>
+        <p:spPr>
+          <a:xfrm>
+            <a:off x="11094415" y="6419088"/>
+            <a:ext cx="548640" cy="256032"/>
+          </a:xfrm>
+          <a:prstGeom prst="rect">
+            <a:avLst/>
+          </a:prstGeom>
+          <a:extLst>
+            <a:ext uri="{C572A759-6A51-4108-AA02-DFA0A04FC94B}">
+              <ma14:wrappingTextBoxFlag xmlns:ma14="http://schemas.microsoft.com/office/mac/drawingml/2011/main" val="0"/>
+            </a:ext>
+          </a:extLst>
+        </p:spPr>
+        <p:txBody>
+          <a:bodyPr/>
+          <a:lstStyle>
+            <a:lvl1pPr>
+              <a:defRPr sz="1000">
+                <a:solidFill>
+                  <a:srgbClr val="475569"/>
+                </a:solidFill>
+              </a:defRPr>
+            </a:lvl1pPr>
+          </a:lstStyle>
+          <a:p>
+            <a:pPr algn="r"/>
+            <a:fld id="{F7021451-1387-4CA6-816F-3879F97B5CBC}" type="slidenum">
+              <a:rPr b="0" lang="en-US"/>
+              <a:t>8</a:t>
+            </a:fld>
+            <a:endParaRPr lang="en-US"/>
           </a:p>
         </p:txBody>
       </p:sp>
@@ -11226,7 +11657,7 @@
                   <a:schemeClr val="bg1"/>
                 </a:solidFill>
               </a:rPr>
-              <a:t>Приложение: для вопросов жюри</a:t>
+              <a:t>FinRadar предупреждает заранее и объясняет каждое число</a:t>
             </a:r>
             <a:endParaRPr lang="en-US" sz="3800" dirty="0"/>
           </a:p>
@@ -11234,54 +11665,18 @@
       </p:sp>
       <p:sp>
         <p:nvSpPr>
-          <p:cNvPr id="3" name="Text 1"/>
-          <p:cNvSpPr txBox="1"/>
-          <p:nvPr/>
-        </p:nvSpPr>
-        <p:spPr>
-          <a:xfrm>
-            <a:off x="548640" y="1508760"/>
-            <a:ext cx="11094415" cy="731520"/>
-          </a:xfrm>
-          <a:prstGeom prst="rect">
-            <a:avLst/>
-          </a:prstGeom>
-          <a:noFill/>
-          <a:ln/>
-        </p:spPr>
-        <p:txBody>
-          <a:bodyPr wrap="square" lIns="0" tIns="0" rIns="0" bIns="0" rtlCol="0" anchor="t"/>
-          <a:lstStyle/>
-          <a:p>
-            <a:pPr indent="0" marL="0">
-              <a:buNone/>
-            </a:pPr>
-            <a:r>
-              <a:rPr lang="en-US" sz="1800" dirty="0">
-                <a:solidFill>
-                  <a:schemeClr val="accent5"/>
-                </a:solidFill>
-              </a:rPr>
-              <a:t>Графики построены командой npm run evaluate (presentation_assets/metrics); каждое число с формулой — в reports/backtest_log.md</a:t>
-            </a:r>
-            <a:endParaRPr lang="en-US" sz="1800" dirty="0"/>
-          </a:p>
-        </p:txBody>
-      </p:sp>
-      <p:sp>
-        <p:nvSpPr>
-          <p:cNvPr id="4" name="appendix-n-0"/>
+          <p:cNvPr id="3" name="closing-stat-0"/>
           <p:cNvSpPr/>
           <p:nvPr/>
         </p:nvSpPr>
         <p:spPr>
           <a:xfrm>
-            <a:off x="548640" y="2606040"/>
-            <a:ext cx="548640" cy="548640"/>
+            <a:off x="548640" y="1783080"/>
+            <a:ext cx="2567864" cy="1691640"/>
           </a:xfrm>
           <a:prstGeom prst="roundRect">
             <a:avLst>
-              <a:gd name="adj" fmla="val 16667"/>
+              <a:gd name="adj" fmla="val 7568"/>
             </a:avLst>
           </a:prstGeom>
           <a:solidFill>
@@ -11292,14 +11687,14 @@
       </p:sp>
       <p:sp>
         <p:nvSpPr>
-          <p:cNvPr id="5" name="Text 3"/>
+          <p:cNvPr id="4" name="Text 2"/>
           <p:cNvSpPr txBox="1"/>
           <p:nvPr/>
         </p:nvSpPr>
         <p:spPr>
           <a:xfrm>
-            <a:off x="548640" y="2606040"/>
-            <a:ext cx="548640" cy="548640"/>
+            <a:off x="777240" y="1920240"/>
+            <a:ext cx="2110664" cy="685800"/>
           </a:xfrm>
           <a:prstGeom prst="rect">
             <a:avLst/>
@@ -11308,37 +11703,37 @@
           <a:ln/>
         </p:spPr>
         <p:txBody>
-          <a:bodyPr wrap="square" lIns="0" tIns="0" rIns="0" bIns="0" rtlCol="0" anchor="ctr"/>
-          <a:lstStyle/>
-          <a:p>
-            <a:pPr algn="ctr" indent="0" marL="0">
-              <a:buNone/>
-            </a:pPr>
-            <a:r>
-              <a:rPr lang="en-US" sz="1600" b="1" dirty="0">
-                <a:solidFill>
-                  <a:schemeClr val="accent5"/>
+          <a:bodyPr wrap="square" lIns="0" tIns="0" rIns="0" bIns="0" rtlCol="0" anchor="b"/>
+          <a:lstStyle/>
+          <a:p>
+            <a:pPr indent="0" marL="0">
+              <a:buNone/>
+            </a:pPr>
+            <a:r>
+              <a:rPr lang="en-US" sz="3200" b="1" dirty="0">
+                <a:solidFill>
+                  <a:schemeClr val="bg1"/>
                 </a:solidFill>
                 <a:latin typeface="+mj-lt" pitchFamily="34" charset="0"/>
                 <a:ea typeface="+mj-lt" pitchFamily="34" charset="-122"/>
                 <a:cs typeface="+mj-lt" pitchFamily="34" charset="-120"/>
               </a:rPr>
-              <a:t>10</a:t>
-            </a:r>
-            <a:endParaRPr lang="en-US" sz="1600" dirty="0"/>
-          </a:p>
-        </p:txBody>
-      </p:sp>
-      <p:sp>
-        <p:nvSpPr>
-          <p:cNvPr id="6" name="Text 4"/>
+              <a:t>8 из 10</a:t>
+            </a:r>
+            <a:endParaRPr lang="en-US" sz="3200" dirty="0"/>
+          </a:p>
+        </p:txBody>
+      </p:sp>
+      <p:sp>
+        <p:nvSpPr>
+          <p:cNvPr id="5" name="Text 3"/>
           <p:cNvSpPr txBox="1"/>
           <p:nvPr/>
         </p:nvSpPr>
         <p:spPr>
           <a:xfrm>
-            <a:off x="1325880" y="2606040"/>
-            <a:ext cx="10317175" cy="548640"/>
+            <a:off x="777240" y="2670048"/>
+            <a:ext cx="2110664" cy="731520"/>
           </a:xfrm>
           <a:prstGeom prst="rect">
             <a:avLst/>
@@ -11347,38 +11742,38 @@
           <a:ln/>
         </p:spPr>
         <p:txBody>
-          <a:bodyPr wrap="square" lIns="0" tIns="0" rIns="0" bIns="0" rtlCol="0" anchor="ctr"/>
+          <a:bodyPr wrap="square" lIns="0" tIns="0" rIns="0" bIns="0" rtlCol="0" anchor="t"/>
           <a:lstStyle/>
           <a:p>
             <a:pPr indent="0" marL="0">
               <a:buNone/>
             </a:pPr>
             <a:r>
-              <a:rPr lang="en-US" sz="2000" dirty="0">
-                <a:solidFill>
-                  <a:schemeClr val="bg1"/>
-                </a:solidFill>
-              </a:rPr>
-              <a:t>ROC-кривая и калибровка вероятности</a:t>
-            </a:r>
-            <a:endParaRPr lang="en-US" sz="2000" dirty="0"/>
-          </a:p>
-        </p:txBody>
-      </p:sp>
-      <p:sp>
-        <p:nvSpPr>
-          <p:cNvPr id="7" name="appendix-n-1"/>
+              <a:rPr lang="en-US" sz="1500" dirty="0">
+                <a:solidFill>
+                  <a:schemeClr val="accent5"/>
+                </a:solidFill>
+              </a:rPr>
+              <a:t>новых разрывов найдено заранее</a:t>
+            </a:r>
+            <a:endParaRPr lang="en-US" sz="1500" dirty="0"/>
+          </a:p>
+        </p:txBody>
+      </p:sp>
+      <p:sp>
+        <p:nvSpPr>
+          <p:cNvPr id="6" name="closing-stat-1"/>
           <p:cNvSpPr/>
           <p:nvPr/>
         </p:nvSpPr>
         <p:spPr>
           <a:xfrm>
-            <a:off x="548640" y="3383280"/>
-            <a:ext cx="548640" cy="548640"/>
+            <a:off x="3390824" y="1783080"/>
+            <a:ext cx="2567864" cy="1691640"/>
           </a:xfrm>
           <a:prstGeom prst="roundRect">
             <a:avLst>
-              <a:gd name="adj" fmla="val 16667"/>
+              <a:gd name="adj" fmla="val 7568"/>
             </a:avLst>
           </a:prstGeom>
           <a:solidFill>
@@ -11389,14 +11784,14 @@
       </p:sp>
       <p:sp>
         <p:nvSpPr>
-          <p:cNvPr id="8" name="Text 6"/>
+          <p:cNvPr id="7" name="Text 5"/>
           <p:cNvSpPr txBox="1"/>
           <p:nvPr/>
         </p:nvSpPr>
         <p:spPr>
           <a:xfrm>
-            <a:off x="548640" y="3383280"/>
-            <a:ext cx="548640" cy="548640"/>
+            <a:off x="3619424" y="1920240"/>
+            <a:ext cx="2110664" cy="685800"/>
           </a:xfrm>
           <a:prstGeom prst="rect">
             <a:avLst/>
@@ -11405,37 +11800,37 @@
           <a:ln/>
         </p:spPr>
         <p:txBody>
-          <a:bodyPr wrap="square" lIns="0" tIns="0" rIns="0" bIns="0" rtlCol="0" anchor="ctr"/>
-          <a:lstStyle/>
-          <a:p>
-            <a:pPr algn="ctr" indent="0" marL="0">
-              <a:buNone/>
-            </a:pPr>
-            <a:r>
-              <a:rPr lang="en-US" sz="1600" b="1" dirty="0">
-                <a:solidFill>
-                  <a:schemeClr val="accent5"/>
+          <a:bodyPr wrap="square" lIns="0" tIns="0" rIns="0" bIns="0" rtlCol="0" anchor="b"/>
+          <a:lstStyle/>
+          <a:p>
+            <a:pPr indent="0" marL="0">
+              <a:buNone/>
+            </a:pPr>
+            <a:r>
+              <a:rPr lang="en-US" sz="3200" b="1" dirty="0">
+                <a:solidFill>
+                  <a:schemeClr val="bg1"/>
                 </a:solidFill>
                 <a:latin typeface="+mj-lt" pitchFamily="34" charset="0"/>
                 <a:ea typeface="+mj-lt" pitchFamily="34" charset="-122"/>
                 <a:cs typeface="+mj-lt" pitchFamily="34" charset="-120"/>
               </a:rPr>
-              <a:t>11</a:t>
-            </a:r>
-            <a:endParaRPr lang="en-US" sz="1600" dirty="0"/>
-          </a:p>
-        </p:txBody>
-      </p:sp>
-      <p:sp>
-        <p:nvSpPr>
-          <p:cNvPr id="9" name="Text 7"/>
+              <a:t>21,5 дня</a:t>
+            </a:r>
+            <a:endParaRPr lang="en-US" sz="3200" dirty="0"/>
+          </a:p>
+        </p:txBody>
+      </p:sp>
+      <p:sp>
+        <p:nvSpPr>
+          <p:cNvPr id="8" name="Text 6"/>
           <p:cNvSpPr txBox="1"/>
           <p:nvPr/>
         </p:nvSpPr>
         <p:spPr>
           <a:xfrm>
-            <a:off x="1325880" y="3383280"/>
-            <a:ext cx="10317175" cy="548640"/>
+            <a:off x="3619424" y="2670048"/>
+            <a:ext cx="2110664" cy="731520"/>
           </a:xfrm>
           <a:prstGeom prst="rect">
             <a:avLst/>
@@ -11444,38 +11839,38 @@
           <a:ln/>
         </p:spPr>
         <p:txBody>
-          <a:bodyPr wrap="square" lIns="0" tIns="0" rIns="0" bIns="0" rtlCol="0" anchor="ctr"/>
+          <a:bodyPr wrap="square" lIns="0" tIns="0" rIns="0" bIns="0" rtlCol="0" anchor="t"/>
           <a:lstStyle/>
           <a:p>
             <a:pPr indent="0" marL="0">
               <a:buNone/>
             </a:pPr>
             <a:r>
-              <a:rPr lang="en-US" sz="2000" dirty="0">
-                <a:solidFill>
-                  <a:schemeClr val="bg1"/>
-                </a:solidFill>
-              </a:rPr>
-              <a:t>Precision и Recall по порогу вероятности</a:t>
-            </a:r>
-            <a:endParaRPr lang="en-US" sz="2000" dirty="0"/>
-          </a:p>
-        </p:txBody>
-      </p:sp>
-      <p:sp>
-        <p:nvSpPr>
-          <p:cNvPr id="10" name="appendix-n-2"/>
+              <a:rPr lang="en-US" sz="1500" dirty="0">
+                <a:solidFill>
+                  <a:schemeClr val="accent5"/>
+                </a:solidFill>
+              </a:rPr>
+              <a:t>медианный запас времени до разрыва</a:t>
+            </a:r>
+            <a:endParaRPr lang="en-US" sz="1500" dirty="0"/>
+          </a:p>
+        </p:txBody>
+      </p:sp>
+      <p:sp>
+        <p:nvSpPr>
+          <p:cNvPr id="9" name="closing-stat-2"/>
           <p:cNvSpPr/>
           <p:nvPr/>
         </p:nvSpPr>
         <p:spPr>
           <a:xfrm>
-            <a:off x="548640" y="4160520"/>
-            <a:ext cx="548640" cy="548640"/>
+            <a:off x="6233008" y="1783080"/>
+            <a:ext cx="2567864" cy="1691640"/>
           </a:xfrm>
           <a:prstGeom prst="roundRect">
             <a:avLst>
-              <a:gd name="adj" fmla="val 16667"/>
+              <a:gd name="adj" fmla="val 7568"/>
             </a:avLst>
           </a:prstGeom>
           <a:solidFill>
@@ -11486,14 +11881,14 @@
       </p:sp>
       <p:sp>
         <p:nvSpPr>
-          <p:cNvPr id="11" name="Text 9"/>
+          <p:cNvPr id="10" name="Text 8"/>
           <p:cNvSpPr txBox="1"/>
           <p:nvPr/>
         </p:nvSpPr>
         <p:spPr>
           <a:xfrm>
-            <a:off x="548640" y="4160520"/>
-            <a:ext cx="548640" cy="548640"/>
+            <a:off x="6461608" y="1920240"/>
+            <a:ext cx="2110664" cy="685800"/>
           </a:xfrm>
           <a:prstGeom prst="rect">
             <a:avLst/>
@@ -11502,37 +11897,37 @@
           <a:ln/>
         </p:spPr>
         <p:txBody>
-          <a:bodyPr wrap="square" lIns="0" tIns="0" rIns="0" bIns="0" rtlCol="0" anchor="ctr"/>
-          <a:lstStyle/>
-          <a:p>
-            <a:pPr algn="ctr" indent="0" marL="0">
-              <a:buNone/>
-            </a:pPr>
-            <a:r>
-              <a:rPr lang="en-US" sz="1600" b="1" dirty="0">
-                <a:solidFill>
-                  <a:schemeClr val="accent5"/>
+          <a:bodyPr wrap="square" lIns="0" tIns="0" rIns="0" bIns="0" rtlCol="0" anchor="b"/>
+          <a:lstStyle/>
+          <a:p>
+            <a:pPr indent="0" marL="0">
+              <a:buNone/>
+            </a:pPr>
+            <a:r>
+              <a:rPr lang="en-US" sz="3200" b="1" dirty="0">
+                <a:solidFill>
+                  <a:schemeClr val="bg1"/>
                 </a:solidFill>
                 <a:latin typeface="+mj-lt" pitchFamily="34" charset="0"/>
                 <a:ea typeface="+mj-lt" pitchFamily="34" charset="-122"/>
                 <a:cs typeface="+mj-lt" pitchFamily="34" charset="-120"/>
               </a:rPr>
-              <a:t>12</a:t>
-            </a:r>
-            <a:endParaRPr lang="en-US" sz="1600" dirty="0"/>
-          </a:p>
-        </p:txBody>
-      </p:sp>
-      <p:sp>
-        <p:nvSpPr>
-          <p:cNvPr id="12" name="Text 10"/>
+              <a:t>51</a:t>
+            </a:r>
+            <a:endParaRPr lang="en-US" sz="3200" dirty="0"/>
+          </a:p>
+        </p:txBody>
+      </p:sp>
+      <p:sp>
+        <p:nvSpPr>
+          <p:cNvPr id="11" name="Text 9"/>
           <p:cNvSpPr txBox="1"/>
           <p:nvPr/>
         </p:nvSpPr>
         <p:spPr>
           <a:xfrm>
-            <a:off x="1325880" y="4160520"/>
-            <a:ext cx="10317175" cy="548640"/>
+            <a:off x="6461608" y="2670048"/>
+            <a:ext cx="2110664" cy="731520"/>
           </a:xfrm>
           <a:prstGeom prst="rect">
             <a:avLst/>
@@ -11541,38 +11936,38 @@
           <a:ln/>
         </p:spPr>
         <p:txBody>
-          <a:bodyPr wrap="square" lIns="0" tIns="0" rIns="0" bIns="0" rtlCol="0" anchor="ctr"/>
+          <a:bodyPr wrap="square" lIns="0" tIns="0" rIns="0" bIns="0" rtlCol="0" anchor="t"/>
           <a:lstStyle/>
           <a:p>
             <a:pPr indent="0" marL="0">
               <a:buNone/>
             </a:pPr>
             <a:r>
-              <a:rPr lang="en-US" sz="2000" dirty="0">
-                <a:solidFill>
-                  <a:schemeClr val="bg1"/>
-                </a:solidFill>
-              </a:rPr>
-              <a:t>MAE и RMSE по горизонту прогноза</a:t>
-            </a:r>
-            <a:endParaRPr lang="en-US" sz="2000" dirty="0"/>
-          </a:p>
-        </p:txBody>
-      </p:sp>
-      <p:sp>
-        <p:nvSpPr>
-          <p:cNvPr id="13" name="appendix-n-3"/>
+              <a:rPr lang="en-US" sz="1500" dirty="0">
+                <a:solidFill>
+                  <a:schemeClr val="accent5"/>
+                </a:solidFill>
+              </a:rPr>
+              <a:t>компания: прогноз и журнал из одного файла за ~5 секунд</a:t>
+            </a:r>
+            <a:endParaRPr lang="en-US" sz="1500" dirty="0"/>
+          </a:p>
+        </p:txBody>
+      </p:sp>
+      <p:sp>
+        <p:nvSpPr>
+          <p:cNvPr id="12" name="closing-stat-3"/>
           <p:cNvSpPr/>
           <p:nvPr/>
         </p:nvSpPr>
         <p:spPr>
           <a:xfrm>
-            <a:off x="548640" y="4937760"/>
-            <a:ext cx="548640" cy="548640"/>
+            <a:off x="9075191" y="1783080"/>
+            <a:ext cx="2567864" cy="1691640"/>
           </a:xfrm>
           <a:prstGeom prst="roundRect">
             <a:avLst>
-              <a:gd name="adj" fmla="val 16667"/>
+              <a:gd name="adj" fmla="val 7568"/>
             </a:avLst>
           </a:prstGeom>
           <a:solidFill>
@@ -11583,14 +11978,14 @@
       </p:sp>
       <p:sp>
         <p:nvSpPr>
-          <p:cNvPr id="14" name="Text 12"/>
+          <p:cNvPr id="13" name="Text 11"/>
           <p:cNvSpPr txBox="1"/>
           <p:nvPr/>
         </p:nvSpPr>
         <p:spPr>
           <a:xfrm>
-            <a:off x="548640" y="4937760"/>
-            <a:ext cx="548640" cy="548640"/>
+            <a:off x="9303791" y="1920240"/>
+            <a:ext cx="2110664" cy="685800"/>
           </a:xfrm>
           <a:prstGeom prst="rect">
             <a:avLst/>
@@ -11599,24 +11994,60 @@
           <a:ln/>
         </p:spPr>
         <p:txBody>
-          <a:bodyPr wrap="square" lIns="0" tIns="0" rIns="0" bIns="0" rtlCol="0" anchor="ctr"/>
-          <a:lstStyle/>
-          <a:p>
-            <a:pPr algn="ctr" indent="0" marL="0">
-              <a:buNone/>
-            </a:pPr>
-            <a:r>
-              <a:rPr lang="en-US" sz="1600" b="1" dirty="0">
-                <a:solidFill>
-                  <a:schemeClr val="accent5"/>
+          <a:bodyPr wrap="square" lIns="0" tIns="0" rIns="0" bIns="0" rtlCol="0" anchor="b"/>
+          <a:lstStyle/>
+          <a:p>
+            <a:pPr indent="0" marL="0">
+              <a:buNone/>
+            </a:pPr>
+            <a:r>
+              <a:rPr lang="en-US" sz="3200" b="1" dirty="0">
+                <a:solidFill>
+                  <a:schemeClr val="bg1"/>
                 </a:solidFill>
                 <a:latin typeface="+mj-lt" pitchFamily="34" charset="0"/>
                 <a:ea typeface="+mj-lt" pitchFamily="34" charset="-122"/>
                 <a:cs typeface="+mj-lt" pitchFamily="34" charset="-120"/>
               </a:rPr>
-              <a:t>13</a:t>
-            </a:r>
-            <a:endParaRPr lang="en-US" sz="1600" dirty="0"/>
+              <a:t>0,77</a:t>
+            </a:r>
+            <a:endParaRPr lang="en-US" sz="3200" dirty="0"/>
+          </a:p>
+        </p:txBody>
+      </p:sp>
+      <p:sp>
+        <p:nvSpPr>
+          <p:cNvPr id="14" name="Text 12"/>
+          <p:cNvSpPr txBox="1"/>
+          <p:nvPr/>
+        </p:nvSpPr>
+        <p:spPr>
+          <a:xfrm>
+            <a:off x="9303791" y="2670048"/>
+            <a:ext cx="2110664" cy="731520"/>
+          </a:xfrm>
+          <a:prstGeom prst="rect">
+            <a:avLst/>
+          </a:prstGeom>
+          <a:noFill/>
+          <a:ln/>
+        </p:spPr>
+        <p:txBody>
+          <a:bodyPr wrap="square" lIns="0" tIns="0" rIns="0" bIns="0" rtlCol="0" anchor="t"/>
+          <a:lstStyle/>
+          <a:p>
+            <a:pPr indent="0" marL="0">
+              <a:buNone/>
+            </a:pPr>
+            <a:r>
+              <a:rPr lang="en-US" sz="1500" dirty="0">
+                <a:solidFill>
+                  <a:schemeClr val="accent5"/>
+                </a:solidFill>
+              </a:rPr>
+              <a:t>ROC-AUC на 761 прогнозах</a:t>
+            </a:r>
+            <a:endParaRPr lang="en-US" sz="1500" dirty="0"/>
           </a:p>
         </p:txBody>
       </p:sp>
@@ -11628,8 +12059,8 @@
         </p:nvSpPr>
         <p:spPr>
           <a:xfrm>
-            <a:off x="1325880" y="4937760"/>
-            <a:ext cx="10317175" cy="548640"/>
+            <a:off x="548640" y="3840480"/>
+            <a:ext cx="11094415" cy="548640"/>
           </a:xfrm>
           <a:prstGeom prst="rect">
             <a:avLst/>
@@ -11645,14 +12076,97 @@
               <a:buNone/>
             </a:pPr>
             <a:r>
-              <a:rPr lang="en-US" sz="2000" dirty="0">
+              <a:rPr lang="en-US" sz="1800" b="1" dirty="0">
                 <a:solidFill>
                   <a:schemeClr val="bg1"/>
                 </a:solidFill>
               </a:rPr>
-              <a:t>Заблаговременность и честность коридора P10–P90</a:t>
-            </a:r>
-            <a:endParaRPr lang="en-US" sz="2000" dirty="0"/>
+              <a:t>Следующий шаг: </a:t>
+            </a:r>
+            <a:pPr indent="0" marL="0">
+              <a:buNone/>
+            </a:pPr>
+            <a:r>
+              <a:rPr lang="en-US" sz="1800" dirty="0">
+                <a:solidFill>
+                  <a:schemeClr val="accent5"/>
+                </a:solidFill>
+              </a:rPr>
+              <a:t>калибровка вероятности; счета, договоры и налоговый календарь в прогнозе</a:t>
+            </a:r>
+            <a:endParaRPr lang="en-US" sz="1800" dirty="0"/>
+          </a:p>
+        </p:txBody>
+      </p:sp>
+      <p:sp>
+        <p:nvSpPr>
+          <p:cNvPr id="16" name="Text 14"/>
+          <p:cNvSpPr txBox="1"/>
+          <p:nvPr/>
+        </p:nvSpPr>
+        <p:spPr>
+          <a:xfrm>
+            <a:off x="548640" y="4709160"/>
+            <a:ext cx="11094415" cy="640080"/>
+          </a:xfrm>
+          <a:prstGeom prst="rect">
+            <a:avLst/>
+          </a:prstGeom>
+          <a:noFill/>
+          <a:ln/>
+        </p:spPr>
+        <p:txBody>
+          <a:bodyPr wrap="square" lIns="0" tIns="0" rIns="0" bIns="0" rtlCol="0" anchor="ctr"/>
+          <a:lstStyle/>
+          <a:p>
+            <a:pPr indent="0" marL="0">
+              <a:buNone/>
+            </a:pPr>
+            <a:r>
+              <a:rPr lang="en-US" sz="2800" b="1" dirty="0">
+                <a:solidFill>
+                  <a:schemeClr val="bg1"/>
+                </a:solidFill>
+              </a:rPr>
+              <a:t>Спасибо! Готовы ответить на вопросы</a:t>
+            </a:r>
+            <a:endParaRPr lang="en-US" sz="2800" dirty="0"/>
+          </a:p>
+        </p:txBody>
+      </p:sp>
+      <p:sp>
+        <p:nvSpPr>
+          <p:cNvPr id="17" name="Text 15"/>
+          <p:cNvSpPr txBox="1"/>
+          <p:nvPr/>
+        </p:nvSpPr>
+        <p:spPr>
+          <a:xfrm>
+            <a:off x="548640" y="5394960"/>
+            <a:ext cx="11094415" cy="411480"/>
+          </a:xfrm>
+          <a:prstGeom prst="rect">
+            <a:avLst/>
+          </a:prstGeom>
+          <a:noFill/>
+          <a:ln/>
+        </p:spPr>
+        <p:txBody>
+          <a:bodyPr wrap="square" lIns="0" tIns="0" rIns="0" bIns="0" rtlCol="0" anchor="ctr"/>
+          <a:lstStyle/>
+          <a:p>
+            <a:pPr indent="0" marL="0">
+              <a:buNone/>
+            </a:pPr>
+            <a:r>
+              <a:rPr lang="en-US" sz="1800" dirty="0">
+                <a:solidFill>
+                  <a:schemeClr val="accent5"/>
+                </a:solidFill>
+              </a:rPr>
+              <a:t>github.com/egor-lap/finprognoz</a:t>
+            </a:r>
+            <a:endParaRPr lang="en-US" sz="1800" dirty="0"/>
           </a:p>
         </p:txBody>
       </p:sp>

--- a/presentation/FinRadar.pptx
+++ b/presentation/FinRadar.pptx
@@ -120,7 +120,7 @@
   <p:extLst>
     <p:ext uri="{521415D9-36F7-43E2-AB2F-B90AF26B5E84}">
       <p14:sectionLst xmlns:p14="http://schemas.microsoft.com/office/powerpoint/2010/main">
-        <p14:section name="Выступление: 5 минут" id="{64fdd346-3286-d457-ab33-7cde511b991c}">
+        <p14:section name="Выступление: 5 минут" id="{2d5893b3-0f6d-189b-5c36-e4ca0bf89d15}">
           <p14:sldIdLst>
             <p14:sldId id="256"/>
             <p14:sldId id="257"/>
@@ -133,7 +133,7 @@
             <p14:sldId id="264"/>
           </p14:sldIdLst>
         </p14:section>
-        <p14:section name="Приложение: для вопросов" id="{a3121a94-22fa-e946-8398-fcb31ad975a5}">
+        <p14:section name="Приложение: для вопросов" id="{066a2c18-c759-71ac-6a43-c77bd12a7c45}">
           <p14:sldIdLst>
             <p14:sldId id="265"/>
             <p14:sldId id="266"/>
@@ -1250,7 +1250,7 @@
           <a:p>
             <a:r>
               <a:rPr lang="en-US" dirty="0"/>
-              <a:t>[1:15–1:45] Контрольный датасет загружаем на сайте как есть. Пример — компании test.csv кейса: 72 тысячи строк, 51 компания. Сервис сам распознаёт формат — с заголовком и без, строит прогноз по каждой компании, компанию выбираем в строке статуса. Из 51 компании 3 в критическом статусе, 6 — повышенный риск. На экране C124: 45 из 72 сценариев уводят остаток в минус, вероятность 62,5 процента.</a:t>
+              <a:t>[1:15–1:45] Контрольный датасет загружаем на сайте как есть. Пример — all_operations.csv: 222 тысячи строк, 150 компаний. Сервис сам распознаёт формат — с заголовком и без, строит прогноз по каждой компании, компанию выбираем в строке статуса. Из 150 компаний 17 в критическом статусе, 13 — повышенный риск. На экране C124: 45 из 72 сценариев уводят остаток в минус, вероятность 62,5 процента.</a:t>
             </a:r>
             <a:endParaRPr lang="en-US" dirty="0"/>
           </a:p>
@@ -1514,7 +1514,7 @@
           <a:p>
             <a:r>
               <a:rPr lang="en-US" dirty="0"/>
-              <a:t>[3:00–3:45] Точность остатка: MAE 1,17 млн ₽ против 1,23 млн ₽ у наивной модели — медиана с возвратом к обычному остатку немного точнее, RMSE 3,25 млн ₽, WAPE 25%. Сильная сторона — коридор: факт попадает между P10 и P90 в 77% случаев при ожидаемых 80. Вероятность: ROC-AUC 0,77 — рискованные компании модель ставит выше, разрыв видим в среднем за три недели. Но сама вероятность завышена: Brier 0,093 хуже постоянной 0,013 — это следующий шаг, калибровка. На наших и тестовых данных метрики близки: модель не подогнана под train.</a:t>
+              <a:t>[3:00–3:45] Точность остатка: MAE 1,17 млн ₽ против 1,23 млн ₽ у наивной модели — медиана с возвратом к обычному остатку немного точнее, RMSE 3,25 млн ₽, WAPE 25%. Сильная сторона — коридор: факт попадает между P10 и P90 в 77% случаев при ожидаемых 80. Вероятность: ROC-AUC 0,77 — рискованные компании модель ставит выше, разрыв видим в среднем за три недели. Но сама вероятность завышена: Brier 0,093 хуже постоянной 0,013 — это следующий шаг, калибровка. По всем шести датам среза картина одинаковая.</a:t>
             </a:r>
             <a:endParaRPr lang="en-US" dirty="0"/>
           </a:p>
@@ -1602,7 +1602,7 @@
           <a:p>
             <a:r>
               <a:rPr lang="en-US" dirty="0"/>
-              <a:t>[3:45–4:20] Для контрольного датасета есть одна команда: npm run evaluate с путём к файлу. Четыре шага: прогноз по каждой компании, бэктест со всеми метриками, графики и HTML-отчёт, который сразу открывается в браузере, интернет не нужен. На test.csv — пять секунд. Так жюри увидит и прогноз, и журнал, и матрицу ошибок на своём датасете.</a:t>
+              <a:t>[3:45–4:20] Для контрольного датасета есть одна команда: npm run evaluate с путём к файлу. Четыре шага: прогноз по каждой компании, бэктест со всеми метриками, графики и HTML-отчёт, который сразу открывается в браузере, интернет не нужен. На всех 150 компаниях — около десяти секунд. Так жюри увидит и прогноз, и журнал, и матрицу ошибок на своём датасете.</a:t>
             </a:r>
             <a:endParaRPr lang="en-US" dirty="0"/>
           </a:p>
@@ -5860,7 +5860,7 @@
                   <a:schemeClr val="tx2"/>
                 </a:solidFill>
               </a:rPr>
-              <a:t>Пример — компании test.csv кейса: 72 062 строки, 51 компания в одном файле</a:t>
+              <a:t>Пример — all_operations.csv: 222 420 строк, 150 компаний в одном файле</a:t>
             </a:r>
             <a:endParaRPr lang="en-US" sz="1800" dirty="0"/>
           </a:p>
@@ -5897,7 +5897,7 @@
       </p:sp>
       <p:pic>
         <p:nvPicPr>
-          <p:cNvPr id="5" name="Image 0" descr="Сайт после загрузки test.csv: выбрана компания C124, критический статус, прогнозный коридор">    </p:cNvPr>
+          <p:cNvPr id="5" name="Image 0" descr="Сайт после загрузки all_operations.csv: выбрана компания C124, критический статус, прогнозный коридор">    </p:cNvPr>
           <p:cNvPicPr>
             <a:picLocks noChangeAspect="1"/>
           </p:cNvPicPr>
@@ -5952,7 +5952,7 @@
                 <a:ea typeface="+mj-lt" pitchFamily="34" charset="-122"/>
                 <a:cs typeface="+mj-lt" pitchFamily="34" charset="-120"/>
               </a:rPr>
-              <a:t>51</a:t>
+              <a:t>150</a:t>
             </a:r>
             <a:endParaRPr lang="en-US" sz="4400" dirty="0"/>
           </a:p>
@@ -5966,7 +5966,7 @@
                   <a:schemeClr val="tx2"/>
                 </a:solidFill>
               </a:rPr>
-              <a:t>компания — прогноз по каждой; компания выбирается в строке статуса</a:t>
+              <a:t>компаний — прогноз по каждой; компания выбирается в строке статуса</a:t>
             </a:r>
             <a:endParaRPr lang="en-US" sz="4400" dirty="0"/>
           </a:p>
@@ -6027,7 +6027,7 @@
                 <a:ea typeface="+mj-lt" pitchFamily="34" charset="-122"/>
                 <a:cs typeface="+mj-lt" pitchFamily="34" charset="-120"/>
               </a:rPr>
-              <a:t>3</a:t>
+              <a:t>17</a:t>
             </a:r>
             <a:endParaRPr lang="en-US" sz="1800" dirty="0"/>
           </a:p>
@@ -6124,7 +6124,7 @@
                 <a:ea typeface="+mj-lt" pitchFamily="34" charset="-122"/>
                 <a:cs typeface="+mj-lt" pitchFamily="34" charset="-120"/>
               </a:rPr>
-              <a:t>6</a:t>
+              <a:t>13</a:t>
             </a:r>
             <a:endParaRPr lang="en-US" sz="1800" dirty="0"/>
           </a:p>
@@ -6221,7 +6221,7 @@
                 <a:ea typeface="+mj-lt" pitchFamily="34" charset="-122"/>
                 <a:cs typeface="+mj-lt" pitchFamily="34" charset="-120"/>
               </a:rPr>
-              <a:t>42</a:t>
+              <a:t>120</a:t>
             </a:r>
             <a:endParaRPr lang="en-US" sz="1800" dirty="0"/>
           </a:p>
@@ -7448,7 +7448,7 @@
                   <a:schemeClr val="tx2"/>
                 </a:solidFill>
               </a:rPr>
-              <a:t>Наши (train) и тестовые (test) данные — разные компании, а метрики близки</a:t>
+              <a:t>Бэктест на всех 150 компаниях: картина одинаковая на всех шести датах среза</a:t>
             </a:r>
             <a:endParaRPr lang="en-US" sz="1800" dirty="0"/>
           </a:p>
@@ -8214,19 +8214,15 @@
             <a:tbl>
               <a:tblPr/>
               <a:tblGrid>
-                <a:gridCol w="2011680"/>
-                <a:gridCol w="914400"/>
-                <a:gridCol w="868680"/>
-                <a:gridCol w="777240"/>
-                <a:gridCol w="914400"/>
-                <a:gridCol w="777240"/>
-                <a:gridCol w="914400"/>
-                <a:gridCol w="777240"/>
-                <a:gridCol w="1234440"/>
-                <a:gridCol w="868680"/>
-                <a:gridCol w="1033272"/>
+                <a:gridCol w="1463040"/>
+                <a:gridCol w="1280160"/>
+                <a:gridCol w="1463040"/>
+                <a:gridCol w="1554480"/>
+                <a:gridCol w="2377440"/>
+                <a:gridCol w="1463040"/>
+                <a:gridCol w="1490472"/>
               </a:tblGrid>
-              <a:tr h="384048">
+              <a:tr h="224028">
                 <a:tc>
                   <a:txBody>
                     <a:bodyPr/>
@@ -8236,17 +8232,17 @@
                         <a:buNone/>
                       </a:pPr>
                       <a:r>
-                        <a:rPr lang="en-US" sz="1300" b="1" dirty="0">
+                        <a:rPr lang="en-US" sz="1200" b="1" dirty="0">
                           <a:solidFill>
                             <a:schemeClr val="bg1"/>
                           </a:solidFill>
                         </a:rPr>
-                        <a:t>Данные</a:t>
+                        <a:t>Дата среза</a:t>
                       </a:r>
-                      <a:endParaRPr lang="en-US" sz="1300" dirty="0"/>
+                      <a:endParaRPr lang="en-US" sz="1200" dirty="0"/>
                     </a:p>
                   </a:txBody>
-                  <a:tcPr marL="50800" marR="50800" marT="25400" marB="25400" anchor="ctr">
+                  <a:tcPr marL="50800" marR="50800" marT="12700" marB="12700" anchor="ctr">
                     <a:lnL w="12700" cap="flat" cmpd="sng" algn="ctr">
                       <a:solidFill>
                         <a:schemeClr val="accent5"/>
@@ -8297,17 +8293,17 @@
                         <a:buNone/>
                       </a:pPr>
                       <a:r>
-                        <a:rPr lang="en-US" sz="1300" b="1" dirty="0">
+                        <a:rPr lang="en-US" sz="1200" b="1" dirty="0">
                           <a:solidFill>
                             <a:schemeClr val="bg1"/>
                           </a:solidFill>
                         </a:rPr>
                         <a:t>Прогнозов</a:t>
                       </a:r>
-                      <a:endParaRPr lang="en-US" sz="1300" dirty="0"/>
+                      <a:endParaRPr lang="en-US" sz="1200" dirty="0"/>
                     </a:p>
                   </a:txBody>
-                  <a:tcPr marL="50800" marR="50800" marT="25400" marB="25400" anchor="ctr">
+                  <a:tcPr marL="50800" marR="50800" marT="12700" marB="12700" anchor="ctr">
                     <a:lnL w="12700" cap="flat" cmpd="sng" algn="ctr">
                       <a:solidFill>
                         <a:schemeClr val="accent5"/>
@@ -8358,17 +8354,17 @@
                         <a:buNone/>
                       </a:pPr>
                       <a:r>
-                        <a:rPr lang="en-US" sz="1300" b="1" dirty="0">
+                        <a:rPr lang="en-US" sz="1200" b="1" dirty="0">
                           <a:solidFill>
                             <a:schemeClr val="bg1"/>
                           </a:solidFill>
                         </a:rPr>
-                        <a:t>Разрывов</a:t>
+                        <a:t>Уже в минусе</a:t>
                       </a:r>
-                      <a:endParaRPr lang="en-US" sz="1300" dirty="0"/>
+                      <a:endParaRPr lang="en-US" sz="1200" dirty="0"/>
                     </a:p>
                   </a:txBody>
-                  <a:tcPr marL="50800" marR="50800" marT="25400" marB="25400" anchor="ctr">
+                  <a:tcPr marL="50800" marR="50800" marT="12700" marB="12700" anchor="ctr">
                     <a:lnL w="12700" cap="flat" cmpd="sng" algn="ctr">
                       <a:solidFill>
                         <a:schemeClr val="accent5"/>
@@ -8419,17 +8415,17 @@
                         <a:buNone/>
                       </a:pPr>
                       <a:r>
-                        <a:rPr lang="en-US" sz="1300" b="1" dirty="0">
+                        <a:rPr lang="en-US" sz="1200" b="1" dirty="0">
                           <a:solidFill>
                             <a:schemeClr val="bg1"/>
                           </a:solidFill>
                         </a:rPr>
-                        <a:t>Recall</a:t>
+                        <a:t>Новых разрывов</a:t>
                       </a:r>
-                      <a:endParaRPr lang="en-US" sz="1300" dirty="0"/>
+                      <a:endParaRPr lang="en-US" sz="1200" dirty="0"/>
                     </a:p>
                   </a:txBody>
-                  <a:tcPr marL="50800" marR="50800" marT="25400" marB="25400" anchor="ctr">
+                  <a:tcPr marL="50800" marR="50800" marT="12700" marB="12700" anchor="ctr">
                     <a:lnL w="12700" cap="flat" cmpd="sng" algn="ctr">
                       <a:solidFill>
                         <a:schemeClr val="accent5"/>
@@ -8480,17 +8476,17 @@
                         <a:buNone/>
                       </a:pPr>
                       <a:r>
-                        <a:rPr lang="en-US" sz="1300" b="1" dirty="0">
+                        <a:rPr lang="en-US" sz="1200" b="1" dirty="0">
                           <a:solidFill>
                             <a:schemeClr val="bg1"/>
                           </a:solidFill>
                         </a:rPr>
-                        <a:t>Precision</a:t>
+                        <a:t>Сигналов «Повышенный риск»</a:t>
                       </a:r>
-                      <a:endParaRPr lang="en-US" sz="1300" dirty="0"/>
+                      <a:endParaRPr lang="en-US" sz="1200" dirty="0"/>
                     </a:p>
                   </a:txBody>
-                  <a:tcPr marL="50800" marR="50800" marT="25400" marB="25400" anchor="ctr">
+                  <a:tcPr marL="50800" marR="50800" marT="12700" marB="12700" anchor="ctr">
                     <a:lnL w="12700" cap="flat" cmpd="sng" algn="ctr">
                       <a:solidFill>
                         <a:schemeClr val="accent5"/>
@@ -8541,17 +8537,17 @@
                         <a:buNone/>
                       </a:pPr>
                       <a:r>
-                        <a:rPr lang="en-US" sz="1300" b="1" dirty="0">
+                        <a:rPr lang="en-US" sz="1200" b="1" dirty="0">
                           <a:solidFill>
                             <a:schemeClr val="bg1"/>
                           </a:solidFill>
                         </a:rPr>
-                        <a:t>F1</a:t>
+                        <a:t>Из них разрыв</a:t>
                       </a:r>
-                      <a:endParaRPr lang="en-US" sz="1300" dirty="0"/>
+                      <a:endParaRPr lang="en-US" sz="1200" dirty="0"/>
                     </a:p>
                   </a:txBody>
-                  <a:tcPr marL="50800" marR="50800" marT="25400" marB="25400" anchor="ctr">
+                  <a:tcPr marL="50800" marR="50800" marT="12700" marB="12700" anchor="ctr">
                     <a:lnL w="12700" cap="flat" cmpd="sng" algn="ctr">
                       <a:solidFill>
                         <a:schemeClr val="accent5"/>
@@ -8602,17 +8598,17 @@
                         <a:buNone/>
                       </a:pPr>
                       <a:r>
-                        <a:rPr lang="en-US" sz="1300" b="1" dirty="0">
+                        <a:rPr lang="en-US" sz="1200" b="1" dirty="0">
                           <a:solidFill>
                             <a:schemeClr val="bg1"/>
                           </a:solidFill>
                         </a:rPr>
-                        <a:t>ROC-AUC</a:t>
+                        <a:t>MAE P50</a:t>
                       </a:r>
-                      <a:endParaRPr lang="en-US" sz="1300" dirty="0"/>
+                      <a:endParaRPr lang="en-US" sz="1200" dirty="0"/>
                     </a:p>
                   </a:txBody>
-                  <a:tcPr marL="50800" marR="50800" marT="25400" marB="25400" anchor="ctr">
+                  <a:tcPr marL="50800" marR="50800" marT="12700" marB="12700" anchor="ctr">
                     <a:lnL w="12700" cap="flat" cmpd="sng" algn="ctr">
                       <a:solidFill>
                         <a:schemeClr val="accent5"/>
@@ -8654,6 +8650,8 @@
                     </a:solidFill>
                   </a:tcPr>
                 </a:tc>
+              </a:tr>
+              <a:tr h="224028">
                 <a:tc>
                   <a:txBody>
                     <a:bodyPr/>
@@ -8663,263 +8661,17 @@
                         <a:buNone/>
                       </a:pPr>
                       <a:r>
-                        <a:rPr lang="en-US" sz="1300" b="1" dirty="0">
-                          <a:solidFill>
-                            <a:schemeClr val="bg1"/>
-                          </a:solidFill>
-                        </a:rPr>
-                        <a:t>Brier</a:t>
-                      </a:r>
-                      <a:endParaRPr lang="en-US" sz="1300" dirty="0"/>
-                    </a:p>
-                  </a:txBody>
-                  <a:tcPr marL="50800" marR="50800" marT="25400" marB="25400" anchor="ctr">
-                    <a:lnL w="12700" cap="flat" cmpd="sng" algn="ctr">
-                      <a:solidFill>
-                        <a:schemeClr val="accent5"/>
-                      </a:solidFill>
-                      <a:prstDash val="solid"/>
-                      <a:round/>
-                      <a:headEnd type="none" w="med" len="med"/>
-                      <a:tailEnd type="none" w="med" len="med"/>
-                    </a:lnL>
-                    <a:lnR w="12700" cap="flat" cmpd="sng" algn="ctr">
-                      <a:solidFill>
-                        <a:schemeClr val="accent5"/>
-                      </a:solidFill>
-                      <a:prstDash val="solid"/>
-                      <a:round/>
-                      <a:headEnd type="none" w="med" len="med"/>
-                      <a:tailEnd type="none" w="med" len="med"/>
-                    </a:lnR>
-                    <a:lnT w="12700" cap="flat" cmpd="sng" algn="ctr">
-                      <a:solidFill>
-                        <a:schemeClr val="accent5"/>
-                      </a:solidFill>
-                      <a:prstDash val="solid"/>
-                      <a:round/>
-                      <a:headEnd type="none" w="med" len="med"/>
-                      <a:tailEnd type="none" w="med" len="med"/>
-                    </a:lnT>
-                    <a:lnB w="12700" cap="flat" cmpd="sng" algn="ctr">
-                      <a:solidFill>
-                        <a:schemeClr val="accent5"/>
-                      </a:solidFill>
-                      <a:prstDash val="solid"/>
-                      <a:round/>
-                      <a:headEnd type="none" w="med" len="med"/>
-                      <a:tailEnd type="none" w="med" len="med"/>
-                    </a:lnB>
-                    <a:solidFill>
-                      <a:schemeClr val="accent1"/>
-                    </a:solidFill>
-                  </a:tcPr>
-                </a:tc>
-                <a:tc>
-                  <a:txBody>
-                    <a:bodyPr/>
-                    <a:lstStyle/>
-                    <a:p>
-                      <a:pPr algn="ctr" indent="0" marL="0">
-                        <a:buNone/>
-                      </a:pPr>
-                      <a:r>
-                        <a:rPr lang="en-US" sz="1300" b="1" dirty="0">
-                          <a:solidFill>
-                            <a:schemeClr val="bg1"/>
-                          </a:solidFill>
-                        </a:rPr>
-                        <a:t>MAE</a:t>
-                      </a:r>
-                      <a:endParaRPr lang="en-US" sz="1300" dirty="0"/>
-                    </a:p>
-                  </a:txBody>
-                  <a:tcPr marL="50800" marR="50800" marT="25400" marB="25400" anchor="ctr">
-                    <a:lnL w="12700" cap="flat" cmpd="sng" algn="ctr">
-                      <a:solidFill>
-                        <a:schemeClr val="accent5"/>
-                      </a:solidFill>
-                      <a:prstDash val="solid"/>
-                      <a:round/>
-                      <a:headEnd type="none" w="med" len="med"/>
-                      <a:tailEnd type="none" w="med" len="med"/>
-                    </a:lnL>
-                    <a:lnR w="12700" cap="flat" cmpd="sng" algn="ctr">
-                      <a:solidFill>
-                        <a:schemeClr val="accent5"/>
-                      </a:solidFill>
-                      <a:prstDash val="solid"/>
-                      <a:round/>
-                      <a:headEnd type="none" w="med" len="med"/>
-                      <a:tailEnd type="none" w="med" len="med"/>
-                    </a:lnR>
-                    <a:lnT w="12700" cap="flat" cmpd="sng" algn="ctr">
-                      <a:solidFill>
-                        <a:schemeClr val="accent5"/>
-                      </a:solidFill>
-                      <a:prstDash val="solid"/>
-                      <a:round/>
-                      <a:headEnd type="none" w="med" len="med"/>
-                      <a:tailEnd type="none" w="med" len="med"/>
-                    </a:lnT>
-                    <a:lnB w="12700" cap="flat" cmpd="sng" algn="ctr">
-                      <a:solidFill>
-                        <a:schemeClr val="accent5"/>
-                      </a:solidFill>
-                      <a:prstDash val="solid"/>
-                      <a:round/>
-                      <a:headEnd type="none" w="med" len="med"/>
-                      <a:tailEnd type="none" w="med" len="med"/>
-                    </a:lnB>
-                    <a:solidFill>
-                      <a:schemeClr val="accent1"/>
-                    </a:solidFill>
-                  </a:tcPr>
-                </a:tc>
-                <a:tc>
-                  <a:txBody>
-                    <a:bodyPr/>
-                    <a:lstStyle/>
-                    <a:p>
-                      <a:pPr algn="ctr" indent="0" marL="0">
-                        <a:buNone/>
-                      </a:pPr>
-                      <a:r>
-                        <a:rPr lang="en-US" sz="1300" b="1" dirty="0">
-                          <a:solidFill>
-                            <a:schemeClr val="bg1"/>
-                          </a:solidFill>
-                        </a:rPr>
-                        <a:t>WAPE</a:t>
-                      </a:r>
-                      <a:endParaRPr lang="en-US" sz="1300" dirty="0"/>
-                    </a:p>
-                  </a:txBody>
-                  <a:tcPr marL="50800" marR="50800" marT="25400" marB="25400" anchor="ctr">
-                    <a:lnL w="12700" cap="flat" cmpd="sng" algn="ctr">
-                      <a:solidFill>
-                        <a:schemeClr val="accent5"/>
-                      </a:solidFill>
-                      <a:prstDash val="solid"/>
-                      <a:round/>
-                      <a:headEnd type="none" w="med" len="med"/>
-                      <a:tailEnd type="none" w="med" len="med"/>
-                    </a:lnL>
-                    <a:lnR w="12700" cap="flat" cmpd="sng" algn="ctr">
-                      <a:solidFill>
-                        <a:schemeClr val="accent5"/>
-                      </a:solidFill>
-                      <a:prstDash val="solid"/>
-                      <a:round/>
-                      <a:headEnd type="none" w="med" len="med"/>
-                      <a:tailEnd type="none" w="med" len="med"/>
-                    </a:lnR>
-                    <a:lnT w="12700" cap="flat" cmpd="sng" algn="ctr">
-                      <a:solidFill>
-                        <a:schemeClr val="accent5"/>
-                      </a:solidFill>
-                      <a:prstDash val="solid"/>
-                      <a:round/>
-                      <a:headEnd type="none" w="med" len="med"/>
-                      <a:tailEnd type="none" w="med" len="med"/>
-                    </a:lnT>
-                    <a:lnB w="12700" cap="flat" cmpd="sng" algn="ctr">
-                      <a:solidFill>
-                        <a:schemeClr val="accent5"/>
-                      </a:solidFill>
-                      <a:prstDash val="solid"/>
-                      <a:round/>
-                      <a:headEnd type="none" w="med" len="med"/>
-                      <a:tailEnd type="none" w="med" len="med"/>
-                    </a:lnB>
-                    <a:solidFill>
-                      <a:schemeClr val="accent1"/>
-                    </a:solidFill>
-                  </a:tcPr>
-                </a:tc>
-                <a:tc>
-                  <a:txBody>
-                    <a:bodyPr/>
-                    <a:lstStyle/>
-                    <a:p>
-                      <a:pPr algn="ctr" indent="0" marL="0">
-                        <a:buNone/>
-                      </a:pPr>
-                      <a:r>
-                        <a:rPr lang="en-US" sz="1300" b="1" dirty="0">
-                          <a:solidFill>
-                            <a:schemeClr val="bg1"/>
-                          </a:solidFill>
-                        </a:rPr>
-                        <a:t>P10–P90</a:t>
-                      </a:r>
-                      <a:endParaRPr lang="en-US" sz="1300" dirty="0"/>
-                    </a:p>
-                  </a:txBody>
-                  <a:tcPr marL="50800" marR="50800" marT="25400" marB="25400" anchor="ctr">
-                    <a:lnL w="12700" cap="flat" cmpd="sng" algn="ctr">
-                      <a:solidFill>
-                        <a:schemeClr val="accent5"/>
-                      </a:solidFill>
-                      <a:prstDash val="solid"/>
-                      <a:round/>
-                      <a:headEnd type="none" w="med" len="med"/>
-                      <a:tailEnd type="none" w="med" len="med"/>
-                    </a:lnL>
-                    <a:lnR w="12700" cap="flat" cmpd="sng" algn="ctr">
-                      <a:solidFill>
-                        <a:schemeClr val="accent5"/>
-                      </a:solidFill>
-                      <a:prstDash val="solid"/>
-                      <a:round/>
-                      <a:headEnd type="none" w="med" len="med"/>
-                      <a:tailEnd type="none" w="med" len="med"/>
-                    </a:lnR>
-                    <a:lnT w="12700" cap="flat" cmpd="sng" algn="ctr">
-                      <a:solidFill>
-                        <a:schemeClr val="accent5"/>
-                      </a:solidFill>
-                      <a:prstDash val="solid"/>
-                      <a:round/>
-                      <a:headEnd type="none" w="med" len="med"/>
-                      <a:tailEnd type="none" w="med" len="med"/>
-                    </a:lnT>
-                    <a:lnB w="12700" cap="flat" cmpd="sng" algn="ctr">
-                      <a:solidFill>
-                        <a:schemeClr val="accent5"/>
-                      </a:solidFill>
-                      <a:prstDash val="solid"/>
-                      <a:round/>
-                      <a:headEnd type="none" w="med" len="med"/>
-                      <a:tailEnd type="none" w="med" len="med"/>
-                    </a:lnB>
-                    <a:solidFill>
-                      <a:schemeClr val="accent1"/>
-                    </a:solidFill>
-                  </a:tcPr>
-                </a:tc>
-              </a:tr>
-              <a:tr h="384048">
-                <a:tc>
-                  <a:txBody>
-                    <a:bodyPr/>
-                    <a:lstStyle/>
-                    <a:p>
-                      <a:pPr algn="ctr" indent="0" marL="0">
-                        <a:buNone/>
-                      </a:pPr>
-                      <a:r>
-                        <a:rPr lang="en-US" sz="1300" dirty="0">
+                        <a:rPr lang="en-US" sz="1200" dirty="0">
                           <a:solidFill>
                             <a:schemeClr val="tx1"/>
                           </a:solidFill>
                         </a:rPr>
-                        <a:t>train.csv (наши)</a:t>
+                        <a:t>31.03.2026</a:t>
                       </a:r>
-                      <a:endParaRPr lang="en-US" sz="1300" dirty="0"/>
+                      <a:endParaRPr lang="en-US" sz="1200" dirty="0"/>
                     </a:p>
                   </a:txBody>
-                  <a:tcPr marL="50800" marR="50800" marT="25400" marB="25400" anchor="ctr">
+                  <a:tcPr marL="50800" marR="50800" marT="12700" marB="12700" anchor="ctr">
                     <a:lnL w="12700" cap="flat" cmpd="sng" algn="ctr">
                       <a:solidFill>
                         <a:schemeClr val="accent5"/>
@@ -8967,17 +8719,17 @@
                         <a:buNone/>
                       </a:pPr>
                       <a:r>
-                        <a:rPr lang="en-US" sz="1300" dirty="0">
+                        <a:rPr lang="en-US" sz="1200" dirty="0">
                           <a:solidFill>
                             <a:schemeClr val="tx1"/>
                           </a:solidFill>
                         </a:rPr>
-                        <a:t>519</a:t>
+                        <a:t>129</a:t>
                       </a:r>
-                      <a:endParaRPr lang="en-US" sz="1300" dirty="0"/>
+                      <a:endParaRPr lang="en-US" sz="1200" dirty="0"/>
                     </a:p>
                   </a:txBody>
-                  <a:tcPr marL="50800" marR="50800" marT="25400" marB="25400" anchor="ctr">
+                  <a:tcPr marL="50800" marR="50800" marT="12700" marB="12700" anchor="ctr">
                     <a:lnL w="12700" cap="flat" cmpd="sng" algn="ctr">
                       <a:solidFill>
                         <a:schemeClr val="accent5"/>
@@ -9025,17 +8777,17 @@
                         <a:buNone/>
                       </a:pPr>
                       <a:r>
-                        <a:rPr lang="en-US" sz="1300" dirty="0">
+                        <a:rPr lang="en-US" sz="1200" dirty="0">
                           <a:solidFill>
                             <a:schemeClr val="tx1"/>
                           </a:solidFill>
                         </a:rPr>
-                        <a:t>7</a:t>
+                        <a:t>4</a:t>
                       </a:r>
-                      <a:endParaRPr lang="en-US" sz="1300" dirty="0"/>
+                      <a:endParaRPr lang="en-US" sz="1200" dirty="0"/>
                     </a:p>
                   </a:txBody>
-                  <a:tcPr marL="50800" marR="50800" marT="25400" marB="25400" anchor="ctr">
+                  <a:tcPr marL="50800" marR="50800" marT="12700" marB="12700" anchor="ctr">
                     <a:lnL w="12700" cap="flat" cmpd="sng" algn="ctr">
                       <a:solidFill>
                         <a:schemeClr val="accent5"/>
@@ -9083,17 +8835,17 @@
                         <a:buNone/>
                       </a:pPr>
                       <a:r>
-                        <a:rPr lang="en-US" sz="1300" dirty="0">
+                        <a:rPr lang="en-US" sz="1200" dirty="0">
                           <a:solidFill>
                             <a:schemeClr val="tx1"/>
                           </a:solidFill>
                         </a:rPr>
-                        <a:t>0,71</a:t>
+                        <a:t>2</a:t>
                       </a:r>
-                      <a:endParaRPr lang="en-US" sz="1300" dirty="0"/>
+                      <a:endParaRPr lang="en-US" sz="1200" dirty="0"/>
                     </a:p>
                   </a:txBody>
-                  <a:tcPr marL="50800" marR="50800" marT="25400" marB="25400" anchor="ctr">
+                  <a:tcPr marL="50800" marR="50800" marT="12700" marB="12700" anchor="ctr">
                     <a:lnL w="12700" cap="flat" cmpd="sng" algn="ctr">
                       <a:solidFill>
                         <a:schemeClr val="accent5"/>
@@ -9141,17 +8893,17 @@
                         <a:buNone/>
                       </a:pPr>
                       <a:r>
-                        <a:rPr lang="en-US" sz="1300" dirty="0">
+                        <a:rPr lang="en-US" sz="1200" dirty="0">
                           <a:solidFill>
                             <a:schemeClr val="tx1"/>
                           </a:solidFill>
                         </a:rPr>
-                        <a:t>0,093</a:t>
+                        <a:t>13</a:t>
                       </a:r>
-                      <a:endParaRPr lang="en-US" sz="1300" dirty="0"/>
+                      <a:endParaRPr lang="en-US" sz="1200" dirty="0"/>
                     </a:p>
                   </a:txBody>
-                  <a:tcPr marL="50800" marR="50800" marT="25400" marB="25400" anchor="ctr">
+                  <a:tcPr marL="50800" marR="50800" marT="12700" marB="12700" anchor="ctr">
                     <a:lnL w="12700" cap="flat" cmpd="sng" algn="ctr">
                       <a:solidFill>
                         <a:schemeClr val="accent5"/>
@@ -9199,17 +8951,17 @@
                         <a:buNone/>
                       </a:pPr>
                       <a:r>
-                        <a:rPr lang="en-US" sz="1300" dirty="0">
+                        <a:rPr lang="en-US" sz="1200" dirty="0">
                           <a:solidFill>
                             <a:schemeClr val="tx1"/>
                           </a:solidFill>
                         </a:rPr>
-                        <a:t>0,164</a:t>
+                        <a:t>2</a:t>
                       </a:r>
-                      <a:endParaRPr lang="en-US" sz="1300" dirty="0"/>
+                      <a:endParaRPr lang="en-US" sz="1200" dirty="0"/>
                     </a:p>
                   </a:txBody>
-                  <a:tcPr marL="50800" marR="50800" marT="25400" marB="25400" anchor="ctr">
+                  <a:tcPr marL="50800" marR="50800" marT="12700" marB="12700" anchor="ctr">
                     <a:lnL w="12700" cap="flat" cmpd="sng" algn="ctr">
                       <a:solidFill>
                         <a:schemeClr val="accent5"/>
@@ -9257,17 +9009,77 @@
                         <a:buNone/>
                       </a:pPr>
                       <a:r>
-                        <a:rPr lang="en-US" sz="1300" dirty="0">
+                        <a:rPr lang="en-US" sz="1200" dirty="0">
                           <a:solidFill>
                             <a:schemeClr val="tx1"/>
                           </a:solidFill>
                         </a:rPr>
-                        <a:t>0,77</a:t>
+                        <a:t>1,01 млн ₽</a:t>
                       </a:r>
-                      <a:endParaRPr lang="en-US" sz="1300" dirty="0"/>
+                      <a:endParaRPr lang="en-US" sz="1200" dirty="0"/>
                     </a:p>
                   </a:txBody>
-                  <a:tcPr marL="50800" marR="50800" marT="25400" marB="25400" anchor="ctr">
+                  <a:tcPr marL="50800" marR="50800" marT="12700" marB="12700" anchor="ctr">
+                    <a:lnL w="12700" cap="flat" cmpd="sng" algn="ctr">
+                      <a:solidFill>
+                        <a:schemeClr val="accent5"/>
+                      </a:solidFill>
+                      <a:prstDash val="solid"/>
+                      <a:round/>
+                      <a:headEnd type="none" w="med" len="med"/>
+                      <a:tailEnd type="none" w="med" len="med"/>
+                    </a:lnL>
+                    <a:lnR w="12700" cap="flat" cmpd="sng" algn="ctr">
+                      <a:solidFill>
+                        <a:schemeClr val="accent5"/>
+                      </a:solidFill>
+                      <a:prstDash val="solid"/>
+                      <a:round/>
+                      <a:headEnd type="none" w="med" len="med"/>
+                      <a:tailEnd type="none" w="med" len="med"/>
+                    </a:lnR>
+                    <a:lnT w="12700" cap="flat" cmpd="sng" algn="ctr">
+                      <a:solidFill>
+                        <a:schemeClr val="accent5"/>
+                      </a:solidFill>
+                      <a:prstDash val="solid"/>
+                      <a:round/>
+                      <a:headEnd type="none" w="med" len="med"/>
+                      <a:tailEnd type="none" w="med" len="med"/>
+                    </a:lnT>
+                    <a:lnB w="12700" cap="flat" cmpd="sng" algn="ctr">
+                      <a:solidFill>
+                        <a:schemeClr val="accent5"/>
+                      </a:solidFill>
+                      <a:prstDash val="solid"/>
+                      <a:round/>
+                      <a:headEnd type="none" w="med" len="med"/>
+                      <a:tailEnd type="none" w="med" len="med"/>
+                    </a:lnB>
+                  </a:tcPr>
+                </a:tc>
+              </a:tr>
+              <a:tr h="224028">
+                <a:tc>
+                  <a:txBody>
+                    <a:bodyPr/>
+                    <a:lstStyle/>
+                    <a:p>
+                      <a:pPr algn="ctr" indent="0" marL="0">
+                        <a:buNone/>
+                      </a:pPr>
+                      <a:r>
+                        <a:rPr lang="en-US" sz="1200" dirty="0">
+                          <a:solidFill>
+                            <a:schemeClr val="tx1"/>
+                          </a:solidFill>
+                        </a:rPr>
+                        <a:t>30.04.2026</a:t>
+                      </a:r>
+                      <a:endParaRPr lang="en-US" sz="1200" dirty="0"/>
+                    </a:p>
+                  </a:txBody>
+                  <a:tcPr marL="50800" marR="50800" marT="12700" marB="12700" anchor="ctr">
                     <a:lnL w="12700" cap="flat" cmpd="sng" algn="ctr">
                       <a:solidFill>
                         <a:schemeClr val="accent5"/>
@@ -9315,17 +9127,17 @@
                         <a:buNone/>
                       </a:pPr>
                       <a:r>
-                        <a:rPr lang="en-US" sz="1300" dirty="0">
+                        <a:rPr lang="en-US" sz="1200" dirty="0">
                           <a:solidFill>
                             <a:schemeClr val="tx1"/>
                           </a:solidFill>
                         </a:rPr>
-                        <a:t>0,091</a:t>
+                        <a:t>130</a:t>
                       </a:r>
-                      <a:endParaRPr lang="en-US" sz="1300" dirty="0"/>
+                      <a:endParaRPr lang="en-US" sz="1200" dirty="0"/>
                     </a:p>
                   </a:txBody>
-                  <a:tcPr marL="50800" marR="50800" marT="25400" marB="25400" anchor="ctr">
+                  <a:tcPr marL="50800" marR="50800" marT="12700" marB="12700" anchor="ctr">
                     <a:lnL w="12700" cap="flat" cmpd="sng" algn="ctr">
                       <a:solidFill>
                         <a:schemeClr val="accent5"/>
@@ -9373,17 +9185,17 @@
                         <a:buNone/>
                       </a:pPr>
                       <a:r>
-                        <a:rPr lang="en-US" sz="1300" dirty="0">
+                        <a:rPr lang="en-US" sz="1200" dirty="0">
                           <a:solidFill>
                             <a:schemeClr val="tx1"/>
                           </a:solidFill>
                         </a:rPr>
-                        <a:t>1,42 млн ₽</a:t>
+                        <a:t>6</a:t>
                       </a:r>
-                      <a:endParaRPr lang="en-US" sz="1300" dirty="0"/>
+                      <a:endParaRPr lang="en-US" sz="1200" dirty="0"/>
                     </a:p>
                   </a:txBody>
-                  <a:tcPr marL="50800" marR="50800" marT="25400" marB="25400" anchor="ctr">
+                  <a:tcPr marL="50800" marR="50800" marT="12700" marB="12700" anchor="ctr">
                     <a:lnL w="12700" cap="flat" cmpd="sng" algn="ctr">
                       <a:solidFill>
                         <a:schemeClr val="accent5"/>
@@ -9431,17 +9243,17 @@
                         <a:buNone/>
                       </a:pPr>
                       <a:r>
-                        <a:rPr lang="en-US" sz="1300" dirty="0">
+                        <a:rPr lang="en-US" sz="1200" dirty="0">
                           <a:solidFill>
                             <a:schemeClr val="tx1"/>
                           </a:solidFill>
                         </a:rPr>
-                        <a:t>26,7%</a:t>
+                        <a:t>0</a:t>
                       </a:r>
-                      <a:endParaRPr lang="en-US" sz="1300" dirty="0"/>
+                      <a:endParaRPr lang="en-US" sz="1200" dirty="0"/>
                     </a:p>
                   </a:txBody>
-                  <a:tcPr marL="50800" marR="50800" marT="25400" marB="25400" anchor="ctr">
+                  <a:tcPr marL="50800" marR="50800" marT="12700" marB="12700" anchor="ctr">
                     <a:lnL w="12700" cap="flat" cmpd="sng" algn="ctr">
                       <a:solidFill>
                         <a:schemeClr val="accent5"/>
@@ -9489,77 +9301,17 @@
                         <a:buNone/>
                       </a:pPr>
                       <a:r>
-                        <a:rPr lang="en-US" sz="1300" dirty="0">
+                        <a:rPr lang="en-US" sz="1200" dirty="0">
                           <a:solidFill>
                             <a:schemeClr val="tx1"/>
                           </a:solidFill>
                         </a:rPr>
-                        <a:t>76,4%</a:t>
+                        <a:t>18</a:t>
                       </a:r>
-                      <a:endParaRPr lang="en-US" sz="1300" dirty="0"/>
+                      <a:endParaRPr lang="en-US" sz="1200" dirty="0"/>
                     </a:p>
                   </a:txBody>
-                  <a:tcPr marL="50800" marR="50800" marT="25400" marB="25400" anchor="ctr">
-                    <a:lnL w="12700" cap="flat" cmpd="sng" algn="ctr">
-                      <a:solidFill>
-                        <a:schemeClr val="accent5"/>
-                      </a:solidFill>
-                      <a:prstDash val="solid"/>
-                      <a:round/>
-                      <a:headEnd type="none" w="med" len="med"/>
-                      <a:tailEnd type="none" w="med" len="med"/>
-                    </a:lnL>
-                    <a:lnR w="12700" cap="flat" cmpd="sng" algn="ctr">
-                      <a:solidFill>
-                        <a:schemeClr val="accent5"/>
-                      </a:solidFill>
-                      <a:prstDash val="solid"/>
-                      <a:round/>
-                      <a:headEnd type="none" w="med" len="med"/>
-                      <a:tailEnd type="none" w="med" len="med"/>
-                    </a:lnR>
-                    <a:lnT w="12700" cap="flat" cmpd="sng" algn="ctr">
-                      <a:solidFill>
-                        <a:schemeClr val="accent5"/>
-                      </a:solidFill>
-                      <a:prstDash val="solid"/>
-                      <a:round/>
-                      <a:headEnd type="none" w="med" len="med"/>
-                      <a:tailEnd type="none" w="med" len="med"/>
-                    </a:lnT>
-                    <a:lnB w="12700" cap="flat" cmpd="sng" algn="ctr">
-                      <a:solidFill>
-                        <a:schemeClr val="accent5"/>
-                      </a:solidFill>
-                      <a:prstDash val="solid"/>
-                      <a:round/>
-                      <a:headEnd type="none" w="med" len="med"/>
-                      <a:tailEnd type="none" w="med" len="med"/>
-                    </a:lnB>
-                  </a:tcPr>
-                </a:tc>
-              </a:tr>
-              <a:tr h="384048">
-                <a:tc>
-                  <a:txBody>
-                    <a:bodyPr/>
-                    <a:lstStyle/>
-                    <a:p>
-                      <a:pPr algn="ctr" indent="0" marL="0">
-                        <a:buNone/>
-                      </a:pPr>
-                      <a:r>
-                        <a:rPr lang="en-US" sz="1300" dirty="0">
-                          <a:solidFill>
-                            <a:schemeClr val="tx1"/>
-                          </a:solidFill>
-                        </a:rPr>
-                        <a:t>test.csv (тестовые)</a:t>
-                      </a:r>
-                      <a:endParaRPr lang="en-US" sz="1300" dirty="0"/>
-                    </a:p>
-                  </a:txBody>
-                  <a:tcPr marL="50800" marR="50800" marT="25400" marB="25400" anchor="ctr">
+                  <a:tcPr marL="50800" marR="50800" marT="12700" marB="12700" anchor="ctr">
                     <a:lnL w="12700" cap="flat" cmpd="sng" algn="ctr">
                       <a:solidFill>
                         <a:schemeClr val="accent5"/>
@@ -9607,17 +9359,17 @@
                         <a:buNone/>
                       </a:pPr>
                       <a:r>
-                        <a:rPr lang="en-US" sz="1300" dirty="0">
+                        <a:rPr lang="en-US" sz="1200" dirty="0">
                           <a:solidFill>
                             <a:schemeClr val="tx1"/>
                           </a:solidFill>
                         </a:rPr>
-                        <a:t>274</a:t>
+                        <a:t>0</a:t>
                       </a:r>
-                      <a:endParaRPr lang="en-US" sz="1300" dirty="0"/>
+                      <a:endParaRPr lang="en-US" sz="1200" dirty="0"/>
                     </a:p>
                   </a:txBody>
-                  <a:tcPr marL="50800" marR="50800" marT="25400" marB="25400" anchor="ctr">
+                  <a:tcPr marL="50800" marR="50800" marT="12700" marB="12700" anchor="ctr">
                     <a:lnL w="12700" cap="flat" cmpd="sng" algn="ctr">
                       <a:solidFill>
                         <a:schemeClr val="accent5"/>
@@ -9665,17 +9417,77 @@
                         <a:buNone/>
                       </a:pPr>
                       <a:r>
-                        <a:rPr lang="en-US" sz="1300" dirty="0">
+                        <a:rPr lang="en-US" sz="1200" dirty="0">
                           <a:solidFill>
                             <a:schemeClr val="tx1"/>
                           </a:solidFill>
                         </a:rPr>
-                        <a:t>3</a:t>
+                        <a:t>0,92 млн ₽</a:t>
                       </a:r>
-                      <a:endParaRPr lang="en-US" sz="1300" dirty="0"/>
+                      <a:endParaRPr lang="en-US" sz="1200" dirty="0"/>
                     </a:p>
                   </a:txBody>
-                  <a:tcPr marL="50800" marR="50800" marT="25400" marB="25400" anchor="ctr">
+                  <a:tcPr marL="50800" marR="50800" marT="12700" marB="12700" anchor="ctr">
+                    <a:lnL w="12700" cap="flat" cmpd="sng" algn="ctr">
+                      <a:solidFill>
+                        <a:schemeClr val="accent5"/>
+                      </a:solidFill>
+                      <a:prstDash val="solid"/>
+                      <a:round/>
+                      <a:headEnd type="none" w="med" len="med"/>
+                      <a:tailEnd type="none" w="med" len="med"/>
+                    </a:lnL>
+                    <a:lnR w="12700" cap="flat" cmpd="sng" algn="ctr">
+                      <a:solidFill>
+                        <a:schemeClr val="accent5"/>
+                      </a:solidFill>
+                      <a:prstDash val="solid"/>
+                      <a:round/>
+                      <a:headEnd type="none" w="med" len="med"/>
+                      <a:tailEnd type="none" w="med" len="med"/>
+                    </a:lnR>
+                    <a:lnT w="12700" cap="flat" cmpd="sng" algn="ctr">
+                      <a:solidFill>
+                        <a:schemeClr val="accent5"/>
+                      </a:solidFill>
+                      <a:prstDash val="solid"/>
+                      <a:round/>
+                      <a:headEnd type="none" w="med" len="med"/>
+                      <a:tailEnd type="none" w="med" len="med"/>
+                    </a:lnT>
+                    <a:lnB w="12700" cap="flat" cmpd="sng" algn="ctr">
+                      <a:solidFill>
+                        <a:schemeClr val="accent5"/>
+                      </a:solidFill>
+                      <a:prstDash val="solid"/>
+                      <a:round/>
+                      <a:headEnd type="none" w="med" len="med"/>
+                      <a:tailEnd type="none" w="med" len="med"/>
+                    </a:lnB>
+                  </a:tcPr>
+                </a:tc>
+              </a:tr>
+              <a:tr h="224028">
+                <a:tc>
+                  <a:txBody>
+                    <a:bodyPr/>
+                    <a:lstStyle/>
+                    <a:p>
+                      <a:pPr algn="ctr" indent="0" marL="0">
+                        <a:buNone/>
+                      </a:pPr>
+                      <a:r>
+                        <a:rPr lang="en-US" sz="1200" dirty="0">
+                          <a:solidFill>
+                            <a:schemeClr val="tx1"/>
+                          </a:solidFill>
+                        </a:rPr>
+                        <a:t>31.05.2026</a:t>
+                      </a:r>
+                      <a:endParaRPr lang="en-US" sz="1200" dirty="0"/>
+                    </a:p>
+                  </a:txBody>
+                  <a:tcPr marL="50800" marR="50800" marT="12700" marB="12700" anchor="ctr">
                     <a:lnL w="12700" cap="flat" cmpd="sng" algn="ctr">
                       <a:solidFill>
                         <a:schemeClr val="accent5"/>
@@ -9723,17 +9535,17 @@
                         <a:buNone/>
                       </a:pPr>
                       <a:r>
-                        <a:rPr lang="en-US" sz="1300" dirty="0">
+                        <a:rPr lang="en-US" sz="1200" dirty="0">
                           <a:solidFill>
                             <a:schemeClr val="tx1"/>
                           </a:solidFill>
                         </a:rPr>
-                        <a:t>1,00</a:t>
+                        <a:t>131</a:t>
                       </a:r>
-                      <a:endParaRPr lang="en-US" sz="1300" dirty="0"/>
+                      <a:endParaRPr lang="en-US" sz="1200" dirty="0"/>
                     </a:p>
                   </a:txBody>
-                  <a:tcPr marL="50800" marR="50800" marT="25400" marB="25400" anchor="ctr">
+                  <a:tcPr marL="50800" marR="50800" marT="12700" marB="12700" anchor="ctr">
                     <a:lnL w="12700" cap="flat" cmpd="sng" algn="ctr">
                       <a:solidFill>
                         <a:schemeClr val="accent5"/>
@@ -9781,17 +9593,17 @@
                         <a:buNone/>
                       </a:pPr>
                       <a:r>
-                        <a:rPr lang="en-US" sz="1300" dirty="0">
+                        <a:rPr lang="en-US" sz="1200" dirty="0">
                           <a:solidFill>
                             <a:schemeClr val="tx1"/>
                           </a:solidFill>
                         </a:rPr>
-                        <a:t>0,103</a:t>
+                        <a:t>5</a:t>
                       </a:r>
-                      <a:endParaRPr lang="en-US" sz="1300" dirty="0"/>
+                      <a:endParaRPr lang="en-US" sz="1200" dirty="0"/>
                     </a:p>
                   </a:txBody>
-                  <a:tcPr marL="50800" marR="50800" marT="25400" marB="25400" anchor="ctr">
+                  <a:tcPr marL="50800" marR="50800" marT="12700" marB="12700" anchor="ctr">
                     <a:lnL w="12700" cap="flat" cmpd="sng" algn="ctr">
                       <a:solidFill>
                         <a:schemeClr val="accent5"/>
@@ -9839,17 +9651,17 @@
                         <a:buNone/>
                       </a:pPr>
                       <a:r>
-                        <a:rPr lang="en-US" sz="1300" dirty="0">
+                        <a:rPr lang="en-US" sz="1200" dirty="0">
                           <a:solidFill>
                             <a:schemeClr val="tx1"/>
                           </a:solidFill>
                         </a:rPr>
-                        <a:t>0,188</a:t>
+                        <a:t>1</a:t>
                       </a:r>
-                      <a:endParaRPr lang="en-US" sz="1300" dirty="0"/>
+                      <a:endParaRPr lang="en-US" sz="1200" dirty="0"/>
                     </a:p>
                   </a:txBody>
-                  <a:tcPr marL="50800" marR="50800" marT="25400" marB="25400" anchor="ctr">
+                  <a:tcPr marL="50800" marR="50800" marT="12700" marB="12700" anchor="ctr">
                     <a:lnL w="12700" cap="flat" cmpd="sng" algn="ctr">
                       <a:solidFill>
                         <a:schemeClr val="accent5"/>
@@ -9897,17 +9709,17 @@
                         <a:buNone/>
                       </a:pPr>
                       <a:r>
-                        <a:rPr lang="en-US" sz="1300" dirty="0">
+                        <a:rPr lang="en-US" sz="1200" dirty="0">
                           <a:solidFill>
                             <a:schemeClr val="tx1"/>
                           </a:solidFill>
                         </a:rPr>
-                        <a:t>0,79</a:t>
+                        <a:t>12</a:t>
                       </a:r>
-                      <a:endParaRPr lang="en-US" sz="1300" dirty="0"/>
+                      <a:endParaRPr lang="en-US" sz="1200" dirty="0"/>
                     </a:p>
                   </a:txBody>
-                  <a:tcPr marL="50800" marR="50800" marT="25400" marB="25400" anchor="ctr">
+                  <a:tcPr marL="50800" marR="50800" marT="12700" marB="12700" anchor="ctr">
                     <a:lnL w="12700" cap="flat" cmpd="sng" algn="ctr">
                       <a:solidFill>
                         <a:schemeClr val="accent5"/>
@@ -9955,17 +9767,17 @@
                         <a:buNone/>
                       </a:pPr>
                       <a:r>
-                        <a:rPr lang="en-US" sz="1300" dirty="0">
+                        <a:rPr lang="en-US" sz="1200" dirty="0">
                           <a:solidFill>
                             <a:schemeClr val="tx1"/>
                           </a:solidFill>
                         </a:rPr>
-                        <a:t>0,098</a:t>
+                        <a:t>1</a:t>
                       </a:r>
-                      <a:endParaRPr lang="en-US" sz="1300" dirty="0"/>
+                      <a:endParaRPr lang="en-US" sz="1200" dirty="0"/>
                     </a:p>
                   </a:txBody>
-                  <a:tcPr marL="50800" marR="50800" marT="25400" marB="25400" anchor="ctr">
+                  <a:tcPr marL="50800" marR="50800" marT="12700" marB="12700" anchor="ctr">
                     <a:lnL w="12700" cap="flat" cmpd="sng" algn="ctr">
                       <a:solidFill>
                         <a:schemeClr val="accent5"/>
@@ -10013,17 +9825,77 @@
                         <a:buNone/>
                       </a:pPr>
                       <a:r>
-                        <a:rPr lang="en-US" sz="1300" dirty="0">
+                        <a:rPr lang="en-US" sz="1200" dirty="0">
                           <a:solidFill>
                             <a:schemeClr val="tx1"/>
                           </a:solidFill>
                         </a:rPr>
-                        <a:t>0,68 млн ₽</a:t>
+                        <a:t>1,04 млн ₽</a:t>
                       </a:r>
-                      <a:endParaRPr lang="en-US" sz="1300" dirty="0"/>
+                      <a:endParaRPr lang="en-US" sz="1200" dirty="0"/>
                     </a:p>
                   </a:txBody>
-                  <a:tcPr marL="50800" marR="50800" marT="25400" marB="25400" anchor="ctr">
+                  <a:tcPr marL="50800" marR="50800" marT="12700" marB="12700" anchor="ctr">
+                    <a:lnL w="12700" cap="flat" cmpd="sng" algn="ctr">
+                      <a:solidFill>
+                        <a:schemeClr val="accent5"/>
+                      </a:solidFill>
+                      <a:prstDash val="solid"/>
+                      <a:round/>
+                      <a:headEnd type="none" w="med" len="med"/>
+                      <a:tailEnd type="none" w="med" len="med"/>
+                    </a:lnL>
+                    <a:lnR w="12700" cap="flat" cmpd="sng" algn="ctr">
+                      <a:solidFill>
+                        <a:schemeClr val="accent5"/>
+                      </a:solidFill>
+                      <a:prstDash val="solid"/>
+                      <a:round/>
+                      <a:headEnd type="none" w="med" len="med"/>
+                      <a:tailEnd type="none" w="med" len="med"/>
+                    </a:lnR>
+                    <a:lnT w="12700" cap="flat" cmpd="sng" algn="ctr">
+                      <a:solidFill>
+                        <a:schemeClr val="accent5"/>
+                      </a:solidFill>
+                      <a:prstDash val="solid"/>
+                      <a:round/>
+                      <a:headEnd type="none" w="med" len="med"/>
+                      <a:tailEnd type="none" w="med" len="med"/>
+                    </a:lnT>
+                    <a:lnB w="12700" cap="flat" cmpd="sng" algn="ctr">
+                      <a:solidFill>
+                        <a:schemeClr val="accent5"/>
+                      </a:solidFill>
+                      <a:prstDash val="solid"/>
+                      <a:round/>
+                      <a:headEnd type="none" w="med" len="med"/>
+                      <a:tailEnd type="none" w="med" len="med"/>
+                    </a:lnB>
+                  </a:tcPr>
+                </a:tc>
+              </a:tr>
+              <a:tr h="224028">
+                <a:tc>
+                  <a:txBody>
+                    <a:bodyPr/>
+                    <a:lstStyle/>
+                    <a:p>
+                      <a:pPr algn="ctr" indent="0" marL="0">
+                        <a:buNone/>
+                      </a:pPr>
+                      <a:r>
+                        <a:rPr lang="en-US" sz="1200" dirty="0">
+                          <a:solidFill>
+                            <a:schemeClr val="tx1"/>
+                          </a:solidFill>
+                        </a:rPr>
+                        <a:t>30.06.2026</a:t>
+                      </a:r>
+                      <a:endParaRPr lang="en-US" sz="1200" dirty="0"/>
+                    </a:p>
+                  </a:txBody>
+                  <a:tcPr marL="50800" marR="50800" marT="12700" marB="12700" anchor="ctr">
                     <a:lnL w="12700" cap="flat" cmpd="sng" algn="ctr">
                       <a:solidFill>
                         <a:schemeClr val="accent5"/>
@@ -10071,17 +9943,17 @@
                         <a:buNone/>
                       </a:pPr>
                       <a:r>
-                        <a:rPr lang="en-US" sz="1300" dirty="0">
+                        <a:rPr lang="en-US" sz="1200" dirty="0">
                           <a:solidFill>
                             <a:schemeClr val="tx1"/>
                           </a:solidFill>
                         </a:rPr>
-                        <a:t>21,2%</a:t>
+                        <a:t>131</a:t>
                       </a:r>
-                      <a:endParaRPr lang="en-US" sz="1300" dirty="0"/>
+                      <a:endParaRPr lang="en-US" sz="1200" dirty="0"/>
                     </a:p>
                   </a:txBody>
-                  <a:tcPr marL="50800" marR="50800" marT="25400" marB="25400" anchor="ctr">
+                  <a:tcPr marL="50800" marR="50800" marT="12700" marB="12700" anchor="ctr">
                     <a:lnL w="12700" cap="flat" cmpd="sng" algn="ctr">
                       <a:solidFill>
                         <a:schemeClr val="accent5"/>
@@ -10129,77 +10001,17 @@
                         <a:buNone/>
                       </a:pPr>
                       <a:r>
-                        <a:rPr lang="en-US" sz="1300" dirty="0">
+                        <a:rPr lang="en-US" sz="1200" dirty="0">
                           <a:solidFill>
                             <a:schemeClr val="tx1"/>
                           </a:solidFill>
                         </a:rPr>
-                        <a:t>77,8%</a:t>
+                        <a:t>6</a:t>
                       </a:r>
-                      <a:endParaRPr lang="en-US" sz="1300" dirty="0"/>
+                      <a:endParaRPr lang="en-US" sz="1200" dirty="0"/>
                     </a:p>
                   </a:txBody>
-                  <a:tcPr marL="50800" marR="50800" marT="25400" marB="25400" anchor="ctr">
-                    <a:lnL w="12700" cap="flat" cmpd="sng" algn="ctr">
-                      <a:solidFill>
-                        <a:schemeClr val="accent5"/>
-                      </a:solidFill>
-                      <a:prstDash val="solid"/>
-                      <a:round/>
-                      <a:headEnd type="none" w="med" len="med"/>
-                      <a:tailEnd type="none" w="med" len="med"/>
-                    </a:lnL>
-                    <a:lnR w="12700" cap="flat" cmpd="sng" algn="ctr">
-                      <a:solidFill>
-                        <a:schemeClr val="accent5"/>
-                      </a:solidFill>
-                      <a:prstDash val="solid"/>
-                      <a:round/>
-                      <a:headEnd type="none" w="med" len="med"/>
-                      <a:tailEnd type="none" w="med" len="med"/>
-                    </a:lnR>
-                    <a:lnT w="12700" cap="flat" cmpd="sng" algn="ctr">
-                      <a:solidFill>
-                        <a:schemeClr val="accent5"/>
-                      </a:solidFill>
-                      <a:prstDash val="solid"/>
-                      <a:round/>
-                      <a:headEnd type="none" w="med" len="med"/>
-                      <a:tailEnd type="none" w="med" len="med"/>
-                    </a:lnT>
-                    <a:lnB w="12700" cap="flat" cmpd="sng" algn="ctr">
-                      <a:solidFill>
-                        <a:schemeClr val="accent5"/>
-                      </a:solidFill>
-                      <a:prstDash val="solid"/>
-                      <a:round/>
-                      <a:headEnd type="none" w="med" len="med"/>
-                      <a:tailEnd type="none" w="med" len="med"/>
-                    </a:lnB>
-                  </a:tcPr>
-                </a:tc>
-              </a:tr>
-              <a:tr h="384048">
-                <a:tc>
-                  <a:txBody>
-                    <a:bodyPr/>
-                    <a:lstStyle/>
-                    <a:p>
-                      <a:pPr algn="ctr" indent="0" marL="0">
-                        <a:buNone/>
-                      </a:pPr>
-                      <a:r>
-                        <a:rPr lang="en-US" sz="1300" b="1" dirty="0">
-                          <a:solidFill>
-                            <a:schemeClr val="tx1"/>
-                          </a:solidFill>
-                        </a:rPr>
-                        <a:t>Все вместе</a:t>
-                      </a:r>
-                      <a:endParaRPr lang="en-US" sz="1300" dirty="0"/>
-                    </a:p>
-                  </a:txBody>
-                  <a:tcPr marL="50800" marR="50800" marT="25400" marB="25400" anchor="ctr">
+                  <a:tcPr marL="50800" marR="50800" marT="12700" marB="12700" anchor="ctr">
                     <a:lnL w="12700" cap="flat" cmpd="sng" algn="ctr">
                       <a:solidFill>
                         <a:schemeClr val="accent5"/>
@@ -10247,17 +10059,17 @@
                         <a:buNone/>
                       </a:pPr>
                       <a:r>
-                        <a:rPr lang="en-US" sz="1300" b="1" dirty="0">
+                        <a:rPr lang="en-US" sz="1200" dirty="0">
                           <a:solidFill>
                             <a:schemeClr val="tx1"/>
                           </a:solidFill>
                         </a:rPr>
-                        <a:t>793</a:t>
+                        <a:t>2</a:t>
                       </a:r>
-                      <a:endParaRPr lang="en-US" sz="1300" dirty="0"/>
+                      <a:endParaRPr lang="en-US" sz="1200" dirty="0"/>
                     </a:p>
                   </a:txBody>
-                  <a:tcPr marL="50800" marR="50800" marT="25400" marB="25400" anchor="ctr">
+                  <a:tcPr marL="50800" marR="50800" marT="12700" marB="12700" anchor="ctr">
                     <a:lnL w="12700" cap="flat" cmpd="sng" algn="ctr">
                       <a:solidFill>
                         <a:schemeClr val="accent5"/>
@@ -10305,17 +10117,17 @@
                         <a:buNone/>
                       </a:pPr>
                       <a:r>
-                        <a:rPr lang="en-US" sz="1300" b="1" dirty="0">
+                        <a:rPr lang="en-US" sz="1200" dirty="0">
                           <a:solidFill>
                             <a:schemeClr val="tx1"/>
                           </a:solidFill>
                         </a:rPr>
-                        <a:t>10</a:t>
+                        <a:t>11</a:t>
                       </a:r>
-                      <a:endParaRPr lang="en-US" sz="1300" dirty="0"/>
+                      <a:endParaRPr lang="en-US" sz="1200" dirty="0"/>
                     </a:p>
                   </a:txBody>
-                  <a:tcPr marL="50800" marR="50800" marT="25400" marB="25400" anchor="ctr">
+                  <a:tcPr marL="50800" marR="50800" marT="12700" marB="12700" anchor="ctr">
                     <a:lnL w="12700" cap="flat" cmpd="sng" algn="ctr">
                       <a:solidFill>
                         <a:schemeClr val="accent5"/>
@@ -10363,17 +10175,17 @@
                         <a:buNone/>
                       </a:pPr>
                       <a:r>
-                        <a:rPr lang="en-US" sz="1300" b="1" dirty="0">
+                        <a:rPr lang="en-US" sz="1200" dirty="0">
                           <a:solidFill>
                             <a:schemeClr val="tx1"/>
                           </a:solidFill>
                         </a:rPr>
-                        <a:t>0,80</a:t>
+                        <a:t>1</a:t>
                       </a:r>
-                      <a:endParaRPr lang="en-US" sz="1300" dirty="0"/>
+                      <a:endParaRPr lang="en-US" sz="1200" dirty="0"/>
                     </a:p>
                   </a:txBody>
-                  <a:tcPr marL="50800" marR="50800" marT="25400" marB="25400" anchor="ctr">
+                  <a:tcPr marL="50800" marR="50800" marT="12700" marB="12700" anchor="ctr">
                     <a:lnL w="12700" cap="flat" cmpd="sng" algn="ctr">
                       <a:solidFill>
                         <a:schemeClr val="accent5"/>
@@ -10421,17 +10233,77 @@
                         <a:buNone/>
                       </a:pPr>
                       <a:r>
-                        <a:rPr lang="en-US" sz="1300" b="1" dirty="0">
+                        <a:rPr lang="en-US" sz="1200" dirty="0">
                           <a:solidFill>
                             <a:schemeClr val="tx1"/>
                           </a:solidFill>
                         </a:rPr>
-                        <a:t>0,096</a:t>
+                        <a:t>1,39 млн ₽</a:t>
                       </a:r>
-                      <a:endParaRPr lang="en-US" sz="1300" dirty="0"/>
+                      <a:endParaRPr lang="en-US" sz="1200" dirty="0"/>
                     </a:p>
                   </a:txBody>
-                  <a:tcPr marL="50800" marR="50800" marT="25400" marB="25400" anchor="ctr">
+                  <a:tcPr marL="50800" marR="50800" marT="12700" marB="12700" anchor="ctr">
+                    <a:lnL w="12700" cap="flat" cmpd="sng" algn="ctr">
+                      <a:solidFill>
+                        <a:schemeClr val="accent5"/>
+                      </a:solidFill>
+                      <a:prstDash val="solid"/>
+                      <a:round/>
+                      <a:headEnd type="none" w="med" len="med"/>
+                      <a:tailEnd type="none" w="med" len="med"/>
+                    </a:lnL>
+                    <a:lnR w="12700" cap="flat" cmpd="sng" algn="ctr">
+                      <a:solidFill>
+                        <a:schemeClr val="accent5"/>
+                      </a:solidFill>
+                      <a:prstDash val="solid"/>
+                      <a:round/>
+                      <a:headEnd type="none" w="med" len="med"/>
+                      <a:tailEnd type="none" w="med" len="med"/>
+                    </a:lnR>
+                    <a:lnT w="12700" cap="flat" cmpd="sng" algn="ctr">
+                      <a:solidFill>
+                        <a:schemeClr val="accent5"/>
+                      </a:solidFill>
+                      <a:prstDash val="solid"/>
+                      <a:round/>
+                      <a:headEnd type="none" w="med" len="med"/>
+                      <a:tailEnd type="none" w="med" len="med"/>
+                    </a:lnT>
+                    <a:lnB w="12700" cap="flat" cmpd="sng" algn="ctr">
+                      <a:solidFill>
+                        <a:schemeClr val="accent5"/>
+                      </a:solidFill>
+                      <a:prstDash val="solid"/>
+                      <a:round/>
+                      <a:headEnd type="none" w="med" len="med"/>
+                      <a:tailEnd type="none" w="med" len="med"/>
+                    </a:lnB>
+                  </a:tcPr>
+                </a:tc>
+              </a:tr>
+              <a:tr h="224028">
+                <a:tc>
+                  <a:txBody>
+                    <a:bodyPr/>
+                    <a:lstStyle/>
+                    <a:p>
+                      <a:pPr algn="ctr" indent="0" marL="0">
+                        <a:buNone/>
+                      </a:pPr>
+                      <a:r>
+                        <a:rPr lang="en-US" sz="1200" dirty="0">
+                          <a:solidFill>
+                            <a:schemeClr val="tx1"/>
+                          </a:solidFill>
+                        </a:rPr>
+                        <a:t>31.07.2026</a:t>
+                      </a:r>
+                      <a:endParaRPr lang="en-US" sz="1200" dirty="0"/>
+                    </a:p>
+                  </a:txBody>
+                  <a:tcPr marL="50800" marR="50800" marT="12700" marB="12700" anchor="ctr">
                     <a:lnL w="12700" cap="flat" cmpd="sng" algn="ctr">
                       <a:solidFill>
                         <a:schemeClr val="accent5"/>
@@ -10479,17 +10351,17 @@
                         <a:buNone/>
                       </a:pPr>
                       <a:r>
-                        <a:rPr lang="en-US" sz="1300" b="1" dirty="0">
+                        <a:rPr lang="en-US" sz="1200" dirty="0">
                           <a:solidFill>
                             <a:schemeClr val="tx1"/>
                           </a:solidFill>
                         </a:rPr>
-                        <a:t>0,172</a:t>
+                        <a:t>135</a:t>
                       </a:r>
-                      <a:endParaRPr lang="en-US" sz="1300" dirty="0"/>
+                      <a:endParaRPr lang="en-US" sz="1200" dirty="0"/>
                     </a:p>
                   </a:txBody>
-                  <a:tcPr marL="50800" marR="50800" marT="25400" marB="25400" anchor="ctr">
+                  <a:tcPr marL="50800" marR="50800" marT="12700" marB="12700" anchor="ctr">
                     <a:lnL w="12700" cap="flat" cmpd="sng" algn="ctr">
                       <a:solidFill>
                         <a:schemeClr val="accent5"/>
@@ -10537,17 +10409,17 @@
                         <a:buNone/>
                       </a:pPr>
                       <a:r>
-                        <a:rPr lang="en-US" sz="1300" b="1" dirty="0">
+                        <a:rPr lang="en-US" sz="1200" dirty="0">
                           <a:solidFill>
                             <a:schemeClr val="tx1"/>
                           </a:solidFill>
                         </a:rPr>
-                        <a:t>0,77</a:t>
+                        <a:t>6</a:t>
                       </a:r>
-                      <a:endParaRPr lang="en-US" sz="1300" dirty="0"/>
+                      <a:endParaRPr lang="en-US" sz="1200" dirty="0"/>
                     </a:p>
                   </a:txBody>
-                  <a:tcPr marL="50800" marR="50800" marT="25400" marB="25400" anchor="ctr">
+                  <a:tcPr marL="50800" marR="50800" marT="12700" marB="12700" anchor="ctr">
                     <a:lnL w="12700" cap="flat" cmpd="sng" algn="ctr">
                       <a:solidFill>
                         <a:schemeClr val="accent5"/>
@@ -10595,17 +10467,17 @@
                         <a:buNone/>
                       </a:pPr>
                       <a:r>
-                        <a:rPr lang="en-US" sz="1300" b="1" dirty="0">
+                        <a:rPr lang="en-US" sz="1200" dirty="0">
                           <a:solidFill>
                             <a:schemeClr val="tx1"/>
                           </a:solidFill>
                         </a:rPr>
-                        <a:t>0,093</a:t>
+                        <a:t>2</a:t>
                       </a:r>
-                      <a:endParaRPr lang="en-US" sz="1300" dirty="0"/>
+                      <a:endParaRPr lang="en-US" sz="1200" dirty="0"/>
                     </a:p>
                   </a:txBody>
-                  <a:tcPr marL="50800" marR="50800" marT="25400" marB="25400" anchor="ctr">
+                  <a:tcPr marL="50800" marR="50800" marT="12700" marB="12700" anchor="ctr">
                     <a:lnL w="12700" cap="flat" cmpd="sng" algn="ctr">
                       <a:solidFill>
                         <a:schemeClr val="accent5"/>
@@ -10653,17 +10525,17 @@
                         <a:buNone/>
                       </a:pPr>
                       <a:r>
-                        <a:rPr lang="en-US" sz="1300" b="1" dirty="0">
+                        <a:rPr lang="en-US" sz="1200" dirty="0">
                           <a:solidFill>
                             <a:schemeClr val="tx1"/>
                           </a:solidFill>
                         </a:rPr>
-                        <a:t>1,17 млн ₽</a:t>
+                        <a:t>20</a:t>
                       </a:r>
-                      <a:endParaRPr lang="en-US" sz="1300" dirty="0"/>
+                      <a:endParaRPr lang="en-US" sz="1200" dirty="0"/>
                     </a:p>
                   </a:txBody>
-                  <a:tcPr marL="50800" marR="50800" marT="25400" marB="25400" anchor="ctr">
+                  <a:tcPr marL="50800" marR="50800" marT="12700" marB="12700" anchor="ctr">
                     <a:lnL w="12700" cap="flat" cmpd="sng" algn="ctr">
                       <a:solidFill>
                         <a:schemeClr val="accent5"/>
@@ -10711,17 +10583,17 @@
                         <a:buNone/>
                       </a:pPr>
                       <a:r>
-                        <a:rPr lang="en-US" sz="1300" b="1" dirty="0">
+                        <a:rPr lang="en-US" sz="1200" dirty="0">
                           <a:solidFill>
                             <a:schemeClr val="tx1"/>
                           </a:solidFill>
                         </a:rPr>
-                        <a:t>25,3%</a:t>
+                        <a:t>2</a:t>
                       </a:r>
-                      <a:endParaRPr lang="en-US" sz="1300" dirty="0"/>
+                      <a:endParaRPr lang="en-US" sz="1200" dirty="0"/>
                     </a:p>
                   </a:txBody>
-                  <a:tcPr marL="50800" marR="50800" marT="25400" marB="25400" anchor="ctr">
+                  <a:tcPr marL="50800" marR="50800" marT="12700" marB="12700" anchor="ctr">
                     <a:lnL w="12700" cap="flat" cmpd="sng" algn="ctr">
                       <a:solidFill>
                         <a:schemeClr val="accent5"/>
@@ -10769,17 +10641,425 @@
                         <a:buNone/>
                       </a:pPr>
                       <a:r>
-                        <a:rPr lang="en-US" sz="1300" b="1" dirty="0">
+                        <a:rPr lang="en-US" sz="1200" dirty="0">
                           <a:solidFill>
                             <a:schemeClr val="tx1"/>
                           </a:solidFill>
                         </a:rPr>
-                        <a:t>76,9%</a:t>
+                        <a:t>1,44 млн ₽</a:t>
                       </a:r>
-                      <a:endParaRPr lang="en-US" sz="1300" dirty="0"/>
+                      <a:endParaRPr lang="en-US" sz="1200" dirty="0"/>
                     </a:p>
                   </a:txBody>
-                  <a:tcPr marL="50800" marR="50800" marT="25400" marB="25400" anchor="ctr">
+                  <a:tcPr marL="50800" marR="50800" marT="12700" marB="12700" anchor="ctr">
+                    <a:lnL w="12700" cap="flat" cmpd="sng" algn="ctr">
+                      <a:solidFill>
+                        <a:schemeClr val="accent5"/>
+                      </a:solidFill>
+                      <a:prstDash val="solid"/>
+                      <a:round/>
+                      <a:headEnd type="none" w="med" len="med"/>
+                      <a:tailEnd type="none" w="med" len="med"/>
+                    </a:lnL>
+                    <a:lnR w="12700" cap="flat" cmpd="sng" algn="ctr">
+                      <a:solidFill>
+                        <a:schemeClr val="accent5"/>
+                      </a:solidFill>
+                      <a:prstDash val="solid"/>
+                      <a:round/>
+                      <a:headEnd type="none" w="med" len="med"/>
+                      <a:tailEnd type="none" w="med" len="med"/>
+                    </a:lnR>
+                    <a:lnT w="12700" cap="flat" cmpd="sng" algn="ctr">
+                      <a:solidFill>
+                        <a:schemeClr val="accent5"/>
+                      </a:solidFill>
+                      <a:prstDash val="solid"/>
+                      <a:round/>
+                      <a:headEnd type="none" w="med" len="med"/>
+                      <a:tailEnd type="none" w="med" len="med"/>
+                    </a:lnT>
+                    <a:lnB w="12700" cap="flat" cmpd="sng" algn="ctr">
+                      <a:solidFill>
+                        <a:schemeClr val="accent5"/>
+                      </a:solidFill>
+                      <a:prstDash val="solid"/>
+                      <a:round/>
+                      <a:headEnd type="none" w="med" len="med"/>
+                      <a:tailEnd type="none" w="med" len="med"/>
+                    </a:lnB>
+                  </a:tcPr>
+                </a:tc>
+              </a:tr>
+              <a:tr h="224028">
+                <a:tc>
+                  <a:txBody>
+                    <a:bodyPr/>
+                    <a:lstStyle/>
+                    <a:p>
+                      <a:pPr algn="ctr" indent="0" marL="0">
+                        <a:buNone/>
+                      </a:pPr>
+                      <a:r>
+                        <a:rPr lang="en-US" sz="1200" dirty="0">
+                          <a:solidFill>
+                            <a:schemeClr val="tx1"/>
+                          </a:solidFill>
+                        </a:rPr>
+                        <a:t>31.08.2026</a:t>
+                      </a:r>
+                      <a:endParaRPr lang="en-US" sz="1200" dirty="0"/>
+                    </a:p>
+                  </a:txBody>
+                  <a:tcPr marL="50800" marR="50800" marT="12700" marB="12700" anchor="ctr">
+                    <a:lnL w="12700" cap="flat" cmpd="sng" algn="ctr">
+                      <a:solidFill>
+                        <a:schemeClr val="accent5"/>
+                      </a:solidFill>
+                      <a:prstDash val="solid"/>
+                      <a:round/>
+                      <a:headEnd type="none" w="med" len="med"/>
+                      <a:tailEnd type="none" w="med" len="med"/>
+                    </a:lnL>
+                    <a:lnR w="12700" cap="flat" cmpd="sng" algn="ctr">
+                      <a:solidFill>
+                        <a:schemeClr val="accent5"/>
+                      </a:solidFill>
+                      <a:prstDash val="solid"/>
+                      <a:round/>
+                      <a:headEnd type="none" w="med" len="med"/>
+                      <a:tailEnd type="none" w="med" len="med"/>
+                    </a:lnR>
+                    <a:lnT w="12700" cap="flat" cmpd="sng" algn="ctr">
+                      <a:solidFill>
+                        <a:schemeClr val="accent5"/>
+                      </a:solidFill>
+                      <a:prstDash val="solid"/>
+                      <a:round/>
+                      <a:headEnd type="none" w="med" len="med"/>
+                      <a:tailEnd type="none" w="med" len="med"/>
+                    </a:lnT>
+                    <a:lnB w="12700" cap="flat" cmpd="sng" algn="ctr">
+                      <a:solidFill>
+                        <a:schemeClr val="accent5"/>
+                      </a:solidFill>
+                      <a:prstDash val="solid"/>
+                      <a:round/>
+                      <a:headEnd type="none" w="med" len="med"/>
+                      <a:tailEnd type="none" w="med" len="med"/>
+                    </a:lnB>
+                  </a:tcPr>
+                </a:tc>
+                <a:tc>
+                  <a:txBody>
+                    <a:bodyPr/>
+                    <a:lstStyle/>
+                    <a:p>
+                      <a:pPr algn="ctr" indent="0" marL="0">
+                        <a:buNone/>
+                      </a:pPr>
+                      <a:r>
+                        <a:rPr lang="en-US" sz="1200" dirty="0">
+                          <a:solidFill>
+                            <a:schemeClr val="tx1"/>
+                          </a:solidFill>
+                        </a:rPr>
+                        <a:t>137</a:t>
+                      </a:r>
+                      <a:endParaRPr lang="en-US" sz="1200" dirty="0"/>
+                    </a:p>
+                  </a:txBody>
+                  <a:tcPr marL="50800" marR="50800" marT="12700" marB="12700" anchor="ctr">
+                    <a:lnL w="12700" cap="flat" cmpd="sng" algn="ctr">
+                      <a:solidFill>
+                        <a:schemeClr val="accent5"/>
+                      </a:solidFill>
+                      <a:prstDash val="solid"/>
+                      <a:round/>
+                      <a:headEnd type="none" w="med" len="med"/>
+                      <a:tailEnd type="none" w="med" len="med"/>
+                    </a:lnL>
+                    <a:lnR w="12700" cap="flat" cmpd="sng" algn="ctr">
+                      <a:solidFill>
+                        <a:schemeClr val="accent5"/>
+                      </a:solidFill>
+                      <a:prstDash val="solid"/>
+                      <a:round/>
+                      <a:headEnd type="none" w="med" len="med"/>
+                      <a:tailEnd type="none" w="med" len="med"/>
+                    </a:lnR>
+                    <a:lnT w="12700" cap="flat" cmpd="sng" algn="ctr">
+                      <a:solidFill>
+                        <a:schemeClr val="accent5"/>
+                      </a:solidFill>
+                      <a:prstDash val="solid"/>
+                      <a:round/>
+                      <a:headEnd type="none" w="med" len="med"/>
+                      <a:tailEnd type="none" w="med" len="med"/>
+                    </a:lnT>
+                    <a:lnB w="12700" cap="flat" cmpd="sng" algn="ctr">
+                      <a:solidFill>
+                        <a:schemeClr val="accent5"/>
+                      </a:solidFill>
+                      <a:prstDash val="solid"/>
+                      <a:round/>
+                      <a:headEnd type="none" w="med" len="med"/>
+                      <a:tailEnd type="none" w="med" len="med"/>
+                    </a:lnB>
+                  </a:tcPr>
+                </a:tc>
+                <a:tc>
+                  <a:txBody>
+                    <a:bodyPr/>
+                    <a:lstStyle/>
+                    <a:p>
+                      <a:pPr algn="ctr" indent="0" marL="0">
+                        <a:buNone/>
+                      </a:pPr>
+                      <a:r>
+                        <a:rPr lang="en-US" sz="1200" dirty="0">
+                          <a:solidFill>
+                            <a:schemeClr val="tx1"/>
+                          </a:solidFill>
+                        </a:rPr>
+                        <a:t>5</a:t>
+                      </a:r>
+                      <a:endParaRPr lang="en-US" sz="1200" dirty="0"/>
+                    </a:p>
+                  </a:txBody>
+                  <a:tcPr marL="50800" marR="50800" marT="12700" marB="12700" anchor="ctr">
+                    <a:lnL w="12700" cap="flat" cmpd="sng" algn="ctr">
+                      <a:solidFill>
+                        <a:schemeClr val="accent5"/>
+                      </a:solidFill>
+                      <a:prstDash val="solid"/>
+                      <a:round/>
+                      <a:headEnd type="none" w="med" len="med"/>
+                      <a:tailEnd type="none" w="med" len="med"/>
+                    </a:lnL>
+                    <a:lnR w="12700" cap="flat" cmpd="sng" algn="ctr">
+                      <a:solidFill>
+                        <a:schemeClr val="accent5"/>
+                      </a:solidFill>
+                      <a:prstDash val="solid"/>
+                      <a:round/>
+                      <a:headEnd type="none" w="med" len="med"/>
+                      <a:tailEnd type="none" w="med" len="med"/>
+                    </a:lnR>
+                    <a:lnT w="12700" cap="flat" cmpd="sng" algn="ctr">
+                      <a:solidFill>
+                        <a:schemeClr val="accent5"/>
+                      </a:solidFill>
+                      <a:prstDash val="solid"/>
+                      <a:round/>
+                      <a:headEnd type="none" w="med" len="med"/>
+                      <a:tailEnd type="none" w="med" len="med"/>
+                    </a:lnT>
+                    <a:lnB w="12700" cap="flat" cmpd="sng" algn="ctr">
+                      <a:solidFill>
+                        <a:schemeClr val="accent5"/>
+                      </a:solidFill>
+                      <a:prstDash val="solid"/>
+                      <a:round/>
+                      <a:headEnd type="none" w="med" len="med"/>
+                      <a:tailEnd type="none" w="med" len="med"/>
+                    </a:lnB>
+                  </a:tcPr>
+                </a:tc>
+                <a:tc>
+                  <a:txBody>
+                    <a:bodyPr/>
+                    <a:lstStyle/>
+                    <a:p>
+                      <a:pPr algn="ctr" indent="0" marL="0">
+                        <a:buNone/>
+                      </a:pPr>
+                      <a:r>
+                        <a:rPr lang="en-US" sz="1200" dirty="0">
+                          <a:solidFill>
+                            <a:schemeClr val="tx1"/>
+                          </a:solidFill>
+                        </a:rPr>
+                        <a:t>3</a:t>
+                      </a:r>
+                      <a:endParaRPr lang="en-US" sz="1200" dirty="0"/>
+                    </a:p>
+                  </a:txBody>
+                  <a:tcPr marL="50800" marR="50800" marT="12700" marB="12700" anchor="ctr">
+                    <a:lnL w="12700" cap="flat" cmpd="sng" algn="ctr">
+                      <a:solidFill>
+                        <a:schemeClr val="accent5"/>
+                      </a:solidFill>
+                      <a:prstDash val="solid"/>
+                      <a:round/>
+                      <a:headEnd type="none" w="med" len="med"/>
+                      <a:tailEnd type="none" w="med" len="med"/>
+                    </a:lnL>
+                    <a:lnR w="12700" cap="flat" cmpd="sng" algn="ctr">
+                      <a:solidFill>
+                        <a:schemeClr val="accent5"/>
+                      </a:solidFill>
+                      <a:prstDash val="solid"/>
+                      <a:round/>
+                      <a:headEnd type="none" w="med" len="med"/>
+                      <a:tailEnd type="none" w="med" len="med"/>
+                    </a:lnR>
+                    <a:lnT w="12700" cap="flat" cmpd="sng" algn="ctr">
+                      <a:solidFill>
+                        <a:schemeClr val="accent5"/>
+                      </a:solidFill>
+                      <a:prstDash val="solid"/>
+                      <a:round/>
+                      <a:headEnd type="none" w="med" len="med"/>
+                      <a:tailEnd type="none" w="med" len="med"/>
+                    </a:lnT>
+                    <a:lnB w="12700" cap="flat" cmpd="sng" algn="ctr">
+                      <a:solidFill>
+                        <a:schemeClr val="accent5"/>
+                      </a:solidFill>
+                      <a:prstDash val="solid"/>
+                      <a:round/>
+                      <a:headEnd type="none" w="med" len="med"/>
+                      <a:tailEnd type="none" w="med" len="med"/>
+                    </a:lnB>
+                  </a:tcPr>
+                </a:tc>
+                <a:tc>
+                  <a:txBody>
+                    <a:bodyPr/>
+                    <a:lstStyle/>
+                    <a:p>
+                      <a:pPr algn="ctr" indent="0" marL="0">
+                        <a:buNone/>
+                      </a:pPr>
+                      <a:r>
+                        <a:rPr lang="en-US" sz="1200" dirty="0">
+                          <a:solidFill>
+                            <a:schemeClr val="tx1"/>
+                          </a:solidFill>
+                        </a:rPr>
+                        <a:t>9</a:t>
+                      </a:r>
+                      <a:endParaRPr lang="en-US" sz="1200" dirty="0"/>
+                    </a:p>
+                  </a:txBody>
+                  <a:tcPr marL="50800" marR="50800" marT="12700" marB="12700" anchor="ctr">
+                    <a:lnL w="12700" cap="flat" cmpd="sng" algn="ctr">
+                      <a:solidFill>
+                        <a:schemeClr val="accent5"/>
+                      </a:solidFill>
+                      <a:prstDash val="solid"/>
+                      <a:round/>
+                      <a:headEnd type="none" w="med" len="med"/>
+                      <a:tailEnd type="none" w="med" len="med"/>
+                    </a:lnL>
+                    <a:lnR w="12700" cap="flat" cmpd="sng" algn="ctr">
+                      <a:solidFill>
+                        <a:schemeClr val="accent5"/>
+                      </a:solidFill>
+                      <a:prstDash val="solid"/>
+                      <a:round/>
+                      <a:headEnd type="none" w="med" len="med"/>
+                      <a:tailEnd type="none" w="med" len="med"/>
+                    </a:lnR>
+                    <a:lnT w="12700" cap="flat" cmpd="sng" algn="ctr">
+                      <a:solidFill>
+                        <a:schemeClr val="accent5"/>
+                      </a:solidFill>
+                      <a:prstDash val="solid"/>
+                      <a:round/>
+                      <a:headEnd type="none" w="med" len="med"/>
+                      <a:tailEnd type="none" w="med" len="med"/>
+                    </a:lnT>
+                    <a:lnB w="12700" cap="flat" cmpd="sng" algn="ctr">
+                      <a:solidFill>
+                        <a:schemeClr val="accent5"/>
+                      </a:solidFill>
+                      <a:prstDash val="solid"/>
+                      <a:round/>
+                      <a:headEnd type="none" w="med" len="med"/>
+                      <a:tailEnd type="none" w="med" len="med"/>
+                    </a:lnB>
+                  </a:tcPr>
+                </a:tc>
+                <a:tc>
+                  <a:txBody>
+                    <a:bodyPr/>
+                    <a:lstStyle/>
+                    <a:p>
+                      <a:pPr algn="ctr" indent="0" marL="0">
+                        <a:buNone/>
+                      </a:pPr>
+                      <a:r>
+                        <a:rPr lang="en-US" sz="1200" dirty="0">
+                          <a:solidFill>
+                            <a:schemeClr val="tx1"/>
+                          </a:solidFill>
+                        </a:rPr>
+                        <a:t>2</a:t>
+                      </a:r>
+                      <a:endParaRPr lang="en-US" sz="1200" dirty="0"/>
+                    </a:p>
+                  </a:txBody>
+                  <a:tcPr marL="50800" marR="50800" marT="12700" marB="12700" anchor="ctr">
+                    <a:lnL w="12700" cap="flat" cmpd="sng" algn="ctr">
+                      <a:solidFill>
+                        <a:schemeClr val="accent5"/>
+                      </a:solidFill>
+                      <a:prstDash val="solid"/>
+                      <a:round/>
+                      <a:headEnd type="none" w="med" len="med"/>
+                      <a:tailEnd type="none" w="med" len="med"/>
+                    </a:lnL>
+                    <a:lnR w="12700" cap="flat" cmpd="sng" algn="ctr">
+                      <a:solidFill>
+                        <a:schemeClr val="accent5"/>
+                      </a:solidFill>
+                      <a:prstDash val="solid"/>
+                      <a:round/>
+                      <a:headEnd type="none" w="med" len="med"/>
+                      <a:tailEnd type="none" w="med" len="med"/>
+                    </a:lnR>
+                    <a:lnT w="12700" cap="flat" cmpd="sng" algn="ctr">
+                      <a:solidFill>
+                        <a:schemeClr val="accent5"/>
+                      </a:solidFill>
+                      <a:prstDash val="solid"/>
+                      <a:round/>
+                      <a:headEnd type="none" w="med" len="med"/>
+                      <a:tailEnd type="none" w="med" len="med"/>
+                    </a:lnT>
+                    <a:lnB w="12700" cap="flat" cmpd="sng" algn="ctr">
+                      <a:solidFill>
+                        <a:schemeClr val="accent5"/>
+                      </a:solidFill>
+                      <a:prstDash val="solid"/>
+                      <a:round/>
+                      <a:headEnd type="none" w="med" len="med"/>
+                      <a:tailEnd type="none" w="med" len="med"/>
+                    </a:lnB>
+                  </a:tcPr>
+                </a:tc>
+                <a:tc>
+                  <a:txBody>
+                    <a:bodyPr/>
+                    <a:lstStyle/>
+                    <a:p>
+                      <a:pPr algn="ctr" indent="0" marL="0">
+                        <a:buNone/>
+                      </a:pPr>
+                      <a:r>
+                        <a:rPr lang="en-US" sz="1200" dirty="0">
+                          <a:solidFill>
+                            <a:schemeClr val="tx1"/>
+                          </a:solidFill>
+                        </a:rPr>
+                        <a:t>1,19 млн ₽</a:t>
+                      </a:r>
+                      <a:endParaRPr lang="en-US" sz="1200" dirty="0"/>
+                    </a:p>
+                  </a:txBody>
+                  <a:tcPr marL="50800" marR="50800" marT="12700" marB="12700" anchor="ctr">
                     <a:lnL w="12700" cap="flat" cmpd="sng" algn="ctr">
                       <a:solidFill>
                         <a:schemeClr val="accent5"/>
@@ -10831,8 +11111,8 @@
         </p:nvSpPr>
         <p:spPr>
           <a:xfrm>
-            <a:off x="548640" y="5943600"/>
-            <a:ext cx="11094415" cy="320040"/>
+            <a:off x="548640" y="6016752"/>
+            <a:ext cx="11094415" cy="274320"/>
           </a:xfrm>
           <a:prstGeom prst="rect">
             <a:avLst/>
@@ -10853,7 +11133,7 @@
                   <a:schemeClr val="tx2"/>
                 </a:solidFill>
               </a:rPr>
-              <a:t>Recall, Precision, F1 — для статуса «Повышенный риск»: вероятность ≥ 10%, у компаний без минуса за год — ≥ 60%</a:t>
+              <a:t>«Повышенный риск»: вероятность ≥ 10%, у компаний без минуса за год — ≥ 60%</a:t>
             </a:r>
             <a:endParaRPr lang="en-US" sz="1200" dirty="0"/>
           </a:p>
@@ -11549,7 +11829,7 @@
                   <a:schemeClr val="tx2"/>
                 </a:solidFill>
               </a:rPr>
-              <a:t>Отчёт по test.csv: 51 компания, около 5 секунд</a:t>
+              <a:t>Отчёт по all_operations.csv: 150 компаний, около 10 секунд</a:t>
             </a:r>
             <a:endParaRPr lang="en-US" sz="1300" dirty="0"/>
           </a:p>
@@ -11912,7 +12192,7 @@
                 <a:ea typeface="+mj-lt" pitchFamily="34" charset="-122"/>
                 <a:cs typeface="+mj-lt" pitchFamily="34" charset="-120"/>
               </a:rPr>
-              <a:t>51</a:t>
+              <a:t>150</a:t>
             </a:r>
             <a:endParaRPr lang="en-US" sz="3200" dirty="0"/>
           </a:p>
@@ -11948,7 +12228,7 @@
                   <a:schemeClr val="accent5"/>
                 </a:solidFill>
               </a:rPr>
-              <a:t>компания: прогноз и журнал из одного файла за ~5 секунд</a:t>
+              <a:t>компаний: прогноз и журнал из одного файла за ~10 секунд</a:t>
             </a:r>
             <a:endParaRPr lang="en-US" sz="1500" dirty="0"/>
           </a:p>

--- a/presentation/FinRadar.pptx
+++ b/presentation/FinRadar.pptx
@@ -120,7 +120,7 @@
   <p:extLst>
     <p:ext uri="{521415D9-36F7-43E2-AB2F-B90AF26B5E84}">
       <p14:sectionLst xmlns:p14="http://schemas.microsoft.com/office/powerpoint/2010/main">
-        <p14:section name="Выступление: 5 минут" id="{2d5893b3-0f6d-189b-5c36-e4ca0bf89d15}">
+        <p14:section name="Выступление: 5 минут" id="{15d1519f-b3da-3f8e-6241-9f821814cba5}">
           <p14:sldIdLst>
             <p14:sldId id="256"/>
             <p14:sldId id="257"/>
@@ -133,7 +133,7 @@
             <p14:sldId id="264"/>
           </p14:sldIdLst>
         </p14:section>
-        <p14:section name="Приложение: для вопросов" id="{066a2c18-c759-71ac-6a43-c77bd12a7c45}">
+        <p14:section name="Приложение: для вопросов" id="{acb0064b-4c0b-d67f-f919-5917d2f0de34}">
           <p14:sldIdLst>
             <p14:sldId id="265"/>
             <p14:sldId id="266"/>
@@ -722,7 +722,7 @@
           <a:p>
             <a:r>
               <a:rPr lang="en-US" dirty="0"/>
-              <a:t>ROC-AUC 0,773. Калибровка: в группе с вероятностью от 50% в среднем обещано 72%, разрыв случился в 5,1%. Отсюда Brier 0,0932 против 0,0130 у константы.</a:t>
+              <a:t>TP / FP / FN / TN: «Повышенный риск» 8 / 75 / 2 / 676, «Критический» 4 / 35 / 6 / 716. Accuracy 0,899 и 0,946, F1 0,172 и 0,163.</a:t>
             </a:r>
             <a:endParaRPr lang="en-US" dirty="0"/>
           </a:p>
@@ -810,7 +810,7 @@
           <a:p>
             <a:r>
               <a:rPr lang="en-US" dirty="0"/>
-              <a:t>Порог 10% — статус «Повышенный риск», 50% — «Критический». Precision выше случайного угадывания на всех порогах, но остаётся низким: разрывы редкие.</a:t>
+              <a:t>MAE в первый день 0,18 млн ₽, на 30-й — 1,62 млн ₽. Наивная модель: MAE 1,23 млн ₽, тренд — 1,36 млн ₽.</a:t>
             </a:r>
             <a:endParaRPr lang="en-US" dirty="0"/>
           </a:p>
@@ -898,7 +898,7 @@
           <a:p>
             <a:r>
               <a:rPr lang="en-US" dirty="0"/>
-              <a:t>MAE в первый день 0,18 млн ₽, на 30-й — 1,62 млн ₽.</a:t>
+              <a:t>Найденные статусом «Повышенный риск» разрывы: 1, 5, 15, 18, 25, 28, 28, 30 дней от прогноза.</a:t>
             </a:r>
             <a:endParaRPr lang="en-US" dirty="0"/>
           </a:p>
@@ -986,7 +986,7 @@
           <a:p>
             <a:r>
               <a:rPr lang="en-US" dirty="0"/>
-              <a:t>Найденные статусом «Повышенный риск» разрывы: 1, 5, 15, 18, 25, 28, 28, 30 дней от прогноза. Коридор P10–P90 держится около 75–80% на всём горизонте.</a:t>
+              <a:t>Ниже P10 — 8,4% точек, выше P90 — 14,7%. Коридор держится около 75–80% на всём горизонте.</a:t>
             </a:r>
             <a:endParaRPr lang="en-US" dirty="0"/>
           </a:p>
@@ -2920,7 +2920,7 @@
                 <a:ea typeface="+mj-lt" pitchFamily="34" charset="-122"/>
                 <a:cs typeface="+mj-lt" pitchFamily="34" charset="-120"/>
               </a:rPr>
-              <a:t>10</a:t>
+              <a:t>11</a:t>
             </a:r>
             <a:endParaRPr lang="en-US" sz="1600" dirty="0"/>
           </a:p>
@@ -2956,7 +2956,7 @@
                   <a:schemeClr val="bg1"/>
                 </a:solidFill>
               </a:rPr>
-              <a:t>ROC-кривая и калибровка вероятности</a:t>
+              <a:t>Матрица ошибок статусов</a:t>
             </a:r>
             <a:endParaRPr lang="en-US" sz="2000" dirty="0"/>
           </a:p>
@@ -2993,103 +2993,6 @@
         <p:spPr>
           <a:xfrm>
             <a:off x="548640" y="3383280"/>
-            <a:ext cx="548640" cy="548640"/>
-          </a:xfrm>
-          <a:prstGeom prst="rect">
-            <a:avLst/>
-          </a:prstGeom>
-          <a:noFill/>
-          <a:ln/>
-        </p:spPr>
-        <p:txBody>
-          <a:bodyPr wrap="square" lIns="0" tIns="0" rIns="0" bIns="0" rtlCol="0" anchor="ctr"/>
-          <a:lstStyle/>
-          <a:p>
-            <a:pPr algn="ctr" indent="0" marL="0">
-              <a:buNone/>
-            </a:pPr>
-            <a:r>
-              <a:rPr lang="en-US" sz="1600" b="1" dirty="0">
-                <a:solidFill>
-                  <a:schemeClr val="accent5"/>
-                </a:solidFill>
-                <a:latin typeface="+mj-lt" pitchFamily="34" charset="0"/>
-                <a:ea typeface="+mj-lt" pitchFamily="34" charset="-122"/>
-                <a:cs typeface="+mj-lt" pitchFamily="34" charset="-120"/>
-              </a:rPr>
-              <a:t>11</a:t>
-            </a:r>
-            <a:endParaRPr lang="en-US" sz="1600" dirty="0"/>
-          </a:p>
-        </p:txBody>
-      </p:sp>
-      <p:sp>
-        <p:nvSpPr>
-          <p:cNvPr id="9" name="Text 7"/>
-          <p:cNvSpPr txBox="1"/>
-          <p:nvPr/>
-        </p:nvSpPr>
-        <p:spPr>
-          <a:xfrm>
-            <a:off x="1325880" y="3383280"/>
-            <a:ext cx="10317175" cy="548640"/>
-          </a:xfrm>
-          <a:prstGeom prst="rect">
-            <a:avLst/>
-          </a:prstGeom>
-          <a:noFill/>
-          <a:ln/>
-        </p:spPr>
-        <p:txBody>
-          <a:bodyPr wrap="square" lIns="0" tIns="0" rIns="0" bIns="0" rtlCol="0" anchor="ctr"/>
-          <a:lstStyle/>
-          <a:p>
-            <a:pPr indent="0" marL="0">
-              <a:buNone/>
-            </a:pPr>
-            <a:r>
-              <a:rPr lang="en-US" sz="2000" dirty="0">
-                <a:solidFill>
-                  <a:schemeClr val="bg1"/>
-                </a:solidFill>
-              </a:rPr>
-              <a:t>Precision и Recall по порогу вероятности</a:t>
-            </a:r>
-            <a:endParaRPr lang="en-US" sz="2000" dirty="0"/>
-          </a:p>
-        </p:txBody>
-      </p:sp>
-      <p:sp>
-        <p:nvSpPr>
-          <p:cNvPr id="10" name="appendix-n-2"/>
-          <p:cNvSpPr/>
-          <p:nvPr/>
-        </p:nvSpPr>
-        <p:spPr>
-          <a:xfrm>
-            <a:off x="548640" y="4160520"/>
-            <a:ext cx="548640" cy="548640"/>
-          </a:xfrm>
-          <a:prstGeom prst="roundRect">
-            <a:avLst>
-              <a:gd name="adj" fmla="val 16667"/>
-            </a:avLst>
-          </a:prstGeom>
-          <a:solidFill>
-            <a:schemeClr val="accent6"/>
-          </a:solidFill>
-          <a:ln/>
-        </p:spPr>
-      </p:sp>
-      <p:sp>
-        <p:nvSpPr>
-          <p:cNvPr id="11" name="Text 9"/>
-          <p:cNvSpPr txBox="1"/>
-          <p:nvPr/>
-        </p:nvSpPr>
-        <p:spPr>
-          <a:xfrm>
-            <a:off x="548640" y="4160520"/>
             <a:ext cx="548640" cy="548640"/>
           </a:xfrm>
           <a:prstGeom prst="rect">
@@ -3122,13 +3025,13 @@
       </p:sp>
       <p:sp>
         <p:nvSpPr>
-          <p:cNvPr id="12" name="Text 10"/>
+          <p:cNvPr id="9" name="Text 7"/>
           <p:cNvSpPr txBox="1"/>
           <p:nvPr/>
         </p:nvSpPr>
         <p:spPr>
           <a:xfrm>
-            <a:off x="1325880" y="4160520"/>
+            <a:off x="1325880" y="3383280"/>
             <a:ext cx="10317175" cy="548640"/>
           </a:xfrm>
           <a:prstGeom prst="rect">
@@ -3158,13 +3061,13 @@
       </p:sp>
       <p:sp>
         <p:nvSpPr>
-          <p:cNvPr id="13" name="appendix-n-3"/>
+          <p:cNvPr id="10" name="appendix-n-2"/>
           <p:cNvSpPr/>
           <p:nvPr/>
         </p:nvSpPr>
         <p:spPr>
           <a:xfrm>
-            <a:off x="548640" y="4937760"/>
+            <a:off x="548640" y="4160520"/>
             <a:ext cx="548640" cy="548640"/>
           </a:xfrm>
           <a:prstGeom prst="roundRect">
@@ -3180,13 +3083,13 @@
       </p:sp>
       <p:sp>
         <p:nvSpPr>
-          <p:cNvPr id="14" name="Text 12"/>
+          <p:cNvPr id="11" name="Text 9"/>
           <p:cNvSpPr txBox="1"/>
           <p:nvPr/>
         </p:nvSpPr>
         <p:spPr>
           <a:xfrm>
-            <a:off x="548640" y="4937760"/>
+            <a:off x="548640" y="4160520"/>
             <a:ext cx="548640" cy="548640"/>
           </a:xfrm>
           <a:prstGeom prst="rect">
@@ -3219,6 +3122,103 @@
       </p:sp>
       <p:sp>
         <p:nvSpPr>
+          <p:cNvPr id="12" name="Text 10"/>
+          <p:cNvSpPr txBox="1"/>
+          <p:nvPr/>
+        </p:nvSpPr>
+        <p:spPr>
+          <a:xfrm>
+            <a:off x="1325880" y="4160520"/>
+            <a:ext cx="10317175" cy="548640"/>
+          </a:xfrm>
+          <a:prstGeom prst="rect">
+            <a:avLst/>
+          </a:prstGeom>
+          <a:noFill/>
+          <a:ln/>
+        </p:spPr>
+        <p:txBody>
+          <a:bodyPr wrap="square" lIns="0" tIns="0" rIns="0" bIns="0" rtlCol="0" anchor="ctr"/>
+          <a:lstStyle/>
+          <a:p>
+            <a:pPr indent="0" marL="0">
+              <a:buNone/>
+            </a:pPr>
+            <a:r>
+              <a:rPr lang="en-US" sz="2000" dirty="0">
+                <a:solidFill>
+                  <a:schemeClr val="bg1"/>
+                </a:solidFill>
+              </a:rPr>
+              <a:t>Заблаговременность предупреждения</a:t>
+            </a:r>
+            <a:endParaRPr lang="en-US" sz="2000" dirty="0"/>
+          </a:p>
+        </p:txBody>
+      </p:sp>
+      <p:sp>
+        <p:nvSpPr>
+          <p:cNvPr id="13" name="appendix-n-3"/>
+          <p:cNvSpPr/>
+          <p:nvPr/>
+        </p:nvSpPr>
+        <p:spPr>
+          <a:xfrm>
+            <a:off x="548640" y="4937760"/>
+            <a:ext cx="548640" cy="548640"/>
+          </a:xfrm>
+          <a:prstGeom prst="roundRect">
+            <a:avLst>
+              <a:gd name="adj" fmla="val 16667"/>
+            </a:avLst>
+          </a:prstGeom>
+          <a:solidFill>
+            <a:schemeClr val="accent6"/>
+          </a:solidFill>
+          <a:ln/>
+        </p:spPr>
+      </p:sp>
+      <p:sp>
+        <p:nvSpPr>
+          <p:cNvPr id="14" name="Text 12"/>
+          <p:cNvSpPr txBox="1"/>
+          <p:nvPr/>
+        </p:nvSpPr>
+        <p:spPr>
+          <a:xfrm>
+            <a:off x="548640" y="4937760"/>
+            <a:ext cx="548640" cy="548640"/>
+          </a:xfrm>
+          <a:prstGeom prst="rect">
+            <a:avLst/>
+          </a:prstGeom>
+          <a:noFill/>
+          <a:ln/>
+        </p:spPr>
+        <p:txBody>
+          <a:bodyPr wrap="square" lIns="0" tIns="0" rIns="0" bIns="0" rtlCol="0" anchor="ctr"/>
+          <a:lstStyle/>
+          <a:p>
+            <a:pPr algn="ctr" indent="0" marL="0">
+              <a:buNone/>
+            </a:pPr>
+            <a:r>
+              <a:rPr lang="en-US" sz="1600" b="1" dirty="0">
+                <a:solidFill>
+                  <a:schemeClr val="accent5"/>
+                </a:solidFill>
+                <a:latin typeface="+mj-lt" pitchFamily="34" charset="0"/>
+                <a:ea typeface="+mj-lt" pitchFamily="34" charset="-122"/>
+                <a:cs typeface="+mj-lt" pitchFamily="34" charset="-120"/>
+              </a:rPr>
+              <a:t>14</a:t>
+            </a:r>
+            <a:endParaRPr lang="en-US" sz="1600" dirty="0"/>
+          </a:p>
+        </p:txBody>
+      </p:sp>
+      <p:sp>
+        <p:nvSpPr>
           <p:cNvPr id="15" name="Text 13"/>
           <p:cNvSpPr txBox="1"/>
           <p:nvPr/>
@@ -3247,7 +3247,7 @@
                   <a:schemeClr val="bg1"/>
                 </a:solidFill>
               </a:rPr>
-              <a:t>Заблаговременность и честность коридора P10–P90</a:t>
+              <a:t>Коридор P10–P90: попадание факта</a:t>
             </a:r>
             <a:endParaRPr lang="en-US" sz="2000" dirty="0"/>
           </a:p>
@@ -3310,7 +3310,7 @@
                   <a:schemeClr val="tx1"/>
                 </a:solidFill>
               </a:rPr>
-              <a:t>ROC-кривая и калибровка вероятности</a:t>
+              <a:t>Матрица ошибок статусов</a:t>
             </a:r>
             <a:endParaRPr lang="en-US" sz="3400" dirty="0"/>
           </a:p>
@@ -3348,7 +3348,7 @@
                   <a:schemeClr val="tx2"/>
                 </a:solidFill>
               </a:rPr>
-              <a:t>Риск упорядочен верно, но обещанная вероятность выше случившейся частоты</a:t>
+              <a:t>«Повышенный риск» нашёл 8 из 10 разрывов при 75 ложных тревогах</a:t>
             </a:r>
             <a:endParaRPr lang="en-US" sz="1800" dirty="0"/>
           </a:p>
@@ -3390,7 +3390,7 @@
       </p:sp>
       <p:pic>
         <p:nvPicPr>
-          <p:cNvPr id="5" name="Image 0" descr="ROC-кривая с порогами 10% и 50% и калибровка: обещано против случившегося">    </p:cNvPr>
+          <p:cNvPr id="5" name="Image 0" descr="Матрицы ошибок статусов «Повышенный риск» и «Критический» против факта">    </p:cNvPr>
           <p:cNvPicPr>
             <a:picLocks noChangeAspect="1"/>
           </p:cNvPicPr>
@@ -3514,7 +3514,7 @@
                   <a:schemeClr val="tx1"/>
                 </a:solidFill>
               </a:rPr>
-              <a:t>Precision и Recall по порогу вероятности</a:t>
+              <a:t>MAE и RMSE по горизонту прогноза</a:t>
             </a:r>
             <a:endParaRPr lang="en-US" sz="3400" dirty="0"/>
           </a:p>
@@ -3552,7 +3552,7 @@
                   <a:schemeClr val="tx2"/>
                 </a:solidFill>
               </a:rPr>
-              <a:t>Чем выше порог, тем меньше тревог, но и найденных разрывов</a:t>
+              <a:t>Ошибка растёт с горизонтом; в среднем MAE 1,17 млн ₽, RMSE 3,25 млн ₽</a:t>
             </a:r>
             <a:endParaRPr lang="en-US" sz="1800" dirty="0"/>
           </a:p>
@@ -3566,12 +3566,12 @@
         </p:nvSpPr>
         <p:spPr>
           <a:xfrm>
-            <a:off x="1926184" y="1545336"/>
-            <a:ext cx="8339328" cy="4748230"/>
+            <a:off x="493776" y="1865376"/>
+            <a:ext cx="5519776" cy="3159028"/>
           </a:xfrm>
           <a:prstGeom prst="roundRect">
             <a:avLst>
-              <a:gd name="adj" fmla="val 1541"/>
+              <a:gd name="adj" fmla="val 2316"/>
             </a:avLst>
           </a:prstGeom>
           <a:solidFill>
@@ -3594,7 +3594,7 @@
       </p:sp>
       <p:pic>
         <p:nvPicPr>
-          <p:cNvPr id="5" name="Image 0" descr="Precision с 95% интервалом и recall по порогу вероятности от 5 до 95%">    </p:cNvPr>
+          <p:cNvPr id="5" name="Image 0" descr="MAE по дням горизонта для трёх подходов">    </p:cNvPr>
           <p:cNvPicPr>
             <a:picLocks noChangeAspect="1"/>
           </p:cNvPicPr>
@@ -3608,8 +3608,66 @@
         </p:blipFill>
         <p:spPr>
           <a:xfrm>
-            <a:off x="1981048" y="1600200"/>
-            <a:ext cx="8229600" cy="4638502"/>
+            <a:off x="548640" y="1920240"/>
+            <a:ext cx="5410048" cy="3049300"/>
+          </a:xfrm>
+          <a:prstGeom prst="rect">
+            <a:avLst/>
+          </a:prstGeom>
+        </p:spPr>
+      </p:pic>
+      <p:sp>
+        <p:nvSpPr>
+          <p:cNvPr id="6" name="Shape 3"/>
+          <p:cNvSpPr/>
+          <p:nvPr/>
+        </p:nvSpPr>
+        <p:spPr>
+          <a:xfrm>
+            <a:off x="6178144" y="1865376"/>
+            <a:ext cx="5519776" cy="3159028"/>
+          </a:xfrm>
+          <a:prstGeom prst="roundRect">
+            <a:avLst>
+              <a:gd name="adj" fmla="val 2316"/>
+            </a:avLst>
+          </a:prstGeom>
+          <a:solidFill>
+            <a:schemeClr val="bg1"/>
+          </a:solidFill>
+          <a:ln w="12700">
+            <a:solidFill>
+              <a:schemeClr val="bg2"/>
+            </a:solidFill>
+            <a:prstDash val="solid"/>
+          </a:ln>
+          <a:effectLst>
+            <a:outerShdw sx="100000" sy="100000" kx="0" ky="0" algn="bl" rotWithShape="0" blurRad="127000" dist="38100" dir="5400000">
+              <a:srgbClr val="0F172A">
+                <a:alpha val="16000"/>
+              </a:srgbClr>
+            </a:outerShdw>
+          </a:effectLst>
+        </p:spPr>
+      </p:sp>
+      <p:pic>
+        <p:nvPicPr>
+          <p:cNvPr id="7" name="Image 1" descr="RMSE по дням горизонта для трёх подходов">    </p:cNvPr>
+          <p:cNvPicPr>
+            <a:picLocks noChangeAspect="1"/>
+          </p:cNvPicPr>
+          <p:nvPr/>
+        </p:nvPicPr>
+        <p:blipFill>
+          <a:blip r:embed="rId2"/>
+          <a:stretch>
+            <a:fillRect/>
+          </a:stretch>
+        </p:blipFill>
+        <p:spPr>
+          <a:xfrm>
+            <a:off x="6233008" y="1920240"/>
+            <a:ext cx="5410048" cy="3049300"/>
           </a:xfrm>
           <a:prstGeom prst="rect">
             <a:avLst/>
@@ -3718,7 +3776,7 @@
                   <a:schemeClr val="tx1"/>
                 </a:solidFill>
               </a:rPr>
-              <a:t>MAE и RMSE по горизонту прогноза</a:t>
+              <a:t>Заблаговременность предупреждения</a:t>
             </a:r>
             <a:endParaRPr lang="en-US" sz="3400" dirty="0"/>
           </a:p>
@@ -3756,7 +3814,7 @@
                   <a:schemeClr val="tx2"/>
                 </a:solidFill>
               </a:rPr>
-              <a:t>Ошибка растёт с горизонтом; модель на уровне наивной и лучше линейного тренда</a:t>
+              <a:t>Найденные разрывы видны в среднем за 21,5 дня</a:t>
             </a:r>
             <a:endParaRPr lang="en-US" sz="1800" dirty="0"/>
           </a:p>
@@ -3798,7 +3856,7 @@
       </p:sp>
       <p:pic>
         <p:nvPicPr>
-          <p:cNvPr id="5" name="Image 0" descr="MAE по дням горизонта для трёх подходов">    </p:cNvPr>
+          <p:cNvPr id="5" name="Image 0" descr="Дни от прогноза до первого дня с минусом для найденных и пропущенных разрывов">    </p:cNvPr>
           <p:cNvPicPr>
             <a:picLocks noChangeAspect="1"/>
           </p:cNvPicPr>
@@ -3922,7 +3980,7 @@
                   <a:schemeClr val="tx1"/>
                 </a:solidFill>
               </a:rPr>
-              <a:t>Заблаговременность и честность коридора</a:t>
+              <a:t>Коридор P10–P90: попадание факта</a:t>
             </a:r>
             <a:endParaRPr lang="en-US" sz="3400" dirty="0"/>
           </a:p>
@@ -3960,7 +4018,7 @@
                   <a:schemeClr val="tx2"/>
                 </a:solidFill>
               </a:rPr>
-              <a:t>Предупреждение в среднем за 21,5 дня; факт внутри P10–P90 в 76,9% точек</a:t>
+              <a:t>Факт внутри коридора в 76,9% точек при ожидаемых 80%</a:t>
             </a:r>
             <a:endParaRPr lang="en-US" sz="1800" dirty="0"/>
           </a:p>
@@ -3974,12 +4032,12 @@
         </p:nvSpPr>
         <p:spPr>
           <a:xfrm>
-            <a:off x="493776" y="1865376"/>
-            <a:ext cx="5519776" cy="3159028"/>
+            <a:off x="1926184" y="1545336"/>
+            <a:ext cx="8339328" cy="4748230"/>
           </a:xfrm>
           <a:prstGeom prst="roundRect">
             <a:avLst>
-              <a:gd name="adj" fmla="val 2316"/>
+              <a:gd name="adj" fmla="val 1541"/>
             </a:avLst>
           </a:prstGeom>
           <a:solidFill>
@@ -4002,7 +4060,7 @@
       </p:sp>
       <p:pic>
         <p:nvPicPr>
-          <p:cNvPr id="5" name="Image 0" descr="Дни от прогноза до первого дня с минусом для найденных и пропущенных разрывов">    </p:cNvPr>
+          <p:cNvPr id="5" name="Image 0" descr="Доля фактов внутри коридора P10–P90 по дням горизонта">    </p:cNvPr>
           <p:cNvPicPr>
             <a:picLocks noChangeAspect="1"/>
           </p:cNvPicPr>
@@ -4016,66 +4074,8 @@
         </p:blipFill>
         <p:spPr>
           <a:xfrm>
-            <a:off x="548640" y="1920240"/>
-            <a:ext cx="5410048" cy="3049300"/>
-          </a:xfrm>
-          <a:prstGeom prst="rect">
-            <a:avLst/>
-          </a:prstGeom>
-        </p:spPr>
-      </p:pic>
-      <p:sp>
-        <p:nvSpPr>
-          <p:cNvPr id="6" name="Shape 3"/>
-          <p:cNvSpPr/>
-          <p:nvPr/>
-        </p:nvSpPr>
-        <p:spPr>
-          <a:xfrm>
-            <a:off x="6178144" y="1865376"/>
-            <a:ext cx="5519776" cy="3159028"/>
-          </a:xfrm>
-          <a:prstGeom prst="roundRect">
-            <a:avLst>
-              <a:gd name="adj" fmla="val 2316"/>
-            </a:avLst>
-          </a:prstGeom>
-          <a:solidFill>
-            <a:schemeClr val="bg1"/>
-          </a:solidFill>
-          <a:ln w="12700">
-            <a:solidFill>
-              <a:schemeClr val="bg2"/>
-            </a:solidFill>
-            <a:prstDash val="solid"/>
-          </a:ln>
-          <a:effectLst>
-            <a:outerShdw sx="100000" sy="100000" kx="0" ky="0" algn="bl" rotWithShape="0" blurRad="127000" dist="38100" dir="5400000">
-              <a:srgbClr val="0F172A">
-                <a:alpha val="16000"/>
-              </a:srgbClr>
-            </a:outerShdw>
-          </a:effectLst>
-        </p:spPr>
-      </p:sp>
-      <p:pic>
-        <p:nvPicPr>
-          <p:cNvPr id="7" name="Image 1" descr="Доля фактов внутри коридора P10–P90 по дням горизонта">    </p:cNvPr>
-          <p:cNvPicPr>
-            <a:picLocks noChangeAspect="1"/>
-          </p:cNvPicPr>
-          <p:nvPr/>
-        </p:nvPicPr>
-        <p:blipFill>
-          <a:blip r:embed="rId2"/>
-          <a:stretch>
-            <a:fillRect/>
-          </a:stretch>
-        </p:blipFill>
-        <p:spPr>
-          <a:xfrm>
-            <a:off x="6233008" y="1920240"/>
-            <a:ext cx="5410048" cy="3049300"/>
+            <a:off x="1981048" y="1600200"/>
+            <a:ext cx="8229600" cy="4638502"/>
           </a:xfrm>
           <a:prstGeom prst="rect">
             <a:avLst/>
